--- a/docs/CodeFab_발표자료_초안.pptx
+++ b/docs/CodeFab_발표자료_초안.pptx
@@ -5,18 +5,21 @@
     <p:sldMasterId id="2147483648" r:id="rId1"/>
   </p:sldMasterIdLst>
   <p:sldIdLst>
-    <p:sldId id="256" r:id="rId7"/>
-    <p:sldId id="257" r:id="rId8"/>
-    <p:sldId id="258" r:id="rId9"/>
-    <p:sldId id="259" r:id="rId10"/>
-    <p:sldId id="260" r:id="rId11"/>
-    <p:sldId id="261" r:id="rId12"/>
-    <p:sldId id="262" r:id="rId13"/>
-    <p:sldId id="263" r:id="rId14"/>
-    <p:sldId id="264" r:id="rId15"/>
-    <p:sldId id="265" r:id="rId16"/>
+    <p:sldId id="266" r:id="rId2"/>
+    <p:sldId id="267" r:id="rId3"/>
+    <p:sldId id="268" r:id="rId4"/>
+    <p:sldId id="269" r:id="rId5"/>
+    <p:sldId id="270" r:id="rId6"/>
+    <p:sldId id="271" r:id="rId7"/>
+    <p:sldId id="272" r:id="rId8"/>
+    <p:sldId id="273" r:id="rId9"/>
+    <p:sldId id="274" r:id="rId10"/>
+    <p:sldId id="262" r:id="rId11"/>
+    <p:sldId id="263" r:id="rId12"/>
+    <p:sldId id="275" r:id="rId13"/>
+    <p:sldId id="276" r:id="rId14"/>
   </p:sldIdLst>
-  <p:sldSz cx="12191695" cy="6858000" type="screen4x3"/>
+  <p:sldSz cx="12192000" cy="6858000"/>
   <p:notesSz cx="6858000" cy="9144000"/>
   <p:defaultTextStyle>
     <a:defPPr>
@@ -113,6 +116,22 @@
       </a:defRPr>
     </a:lvl9pPr>
   </p:defaultTextStyle>
+  <p:extLst>
+    <p:ext uri="{EFAFB233-063F-42B5-8137-9DF3F51BA10A}">
+      <p15:sldGuideLst xmlns:p15="http://schemas.microsoft.com/office/powerpoint/2012/main">
+        <p15:guide id="1" orient="horz" pos="2160">
+          <p15:clr>
+            <a:srgbClr val="A4A3A4"/>
+          </p15:clr>
+        </p15:guide>
+        <p15:guide id="2" pos="2880">
+          <p15:clr>
+            <a:srgbClr val="A4A3A4"/>
+          </p15:clr>
+        </p15:guide>
+      </p15:sldGuideLst>
+    </p:ext>
+  </p:extLst>
 </p:presentation>
 </file>
 
@@ -154,10 +173,9 @@
           <a:lstStyle/>
           <a:p>
             <a:r>
-              <a:rPr lang="en-US" smtClean="0"/>
+              <a:rPr lang="en-US"/>
               <a:t>Click to edit Master title style</a:t>
             </a:r>
-            <a:endParaRPr lang="en-US"/>
           </a:p>
         </p:txBody>
       </p:sp>
@@ -273,10 +291,9 @@
           </a:lstStyle>
           <a:p>
             <a:r>
-              <a:rPr lang="en-US" smtClean="0"/>
+              <a:rPr lang="en-US"/>
               <a:t>Click to edit Master subtitle style</a:t>
             </a:r>
-            <a:endParaRPr lang="en-US"/>
           </a:p>
         </p:txBody>
       </p:sp>
@@ -297,7 +314,7 @@
           <a:p>
             <a:fld id="{5BCAD085-E8A6-8845-BD4E-CB4CCA059FC4}" type="datetimeFigureOut">
               <a:rPr lang="en-US" smtClean="0"/>
-              <a:t>1/27/13</a:t>
+              <a:t>7/9/2026</a:t>
             </a:fld>
             <a:endParaRPr lang="en-US"/>
           </a:p>
@@ -391,10 +408,9 @@
           <a:lstStyle/>
           <a:p>
             <a:r>
-              <a:rPr lang="en-US" smtClean="0"/>
+              <a:rPr lang="en-US"/>
               <a:t>Click to edit Master title style</a:t>
             </a:r>
-            <a:endParaRPr lang="en-US"/>
           </a:p>
         </p:txBody>
       </p:sp>
@@ -415,38 +431,37 @@
           <a:p>
             <a:pPr lvl="0"/>
             <a:r>
-              <a:rPr lang="en-US" smtClean="0"/>
+              <a:rPr lang="en-US"/>
               <a:t>Click to edit Master text styles</a:t>
             </a:r>
           </a:p>
           <a:p>
             <a:pPr lvl="1"/>
             <a:r>
-              <a:rPr lang="en-US" smtClean="0"/>
+              <a:rPr lang="en-US"/>
               <a:t>Second level</a:t>
             </a:r>
           </a:p>
           <a:p>
             <a:pPr lvl="2"/>
             <a:r>
-              <a:rPr lang="en-US" smtClean="0"/>
+              <a:rPr lang="en-US"/>
               <a:t>Third level</a:t>
             </a:r>
           </a:p>
           <a:p>
             <a:pPr lvl="3"/>
             <a:r>
-              <a:rPr lang="en-US" smtClean="0"/>
+              <a:rPr lang="en-US"/>
               <a:t>Fourth level</a:t>
             </a:r>
           </a:p>
           <a:p>
             <a:pPr lvl="4"/>
             <a:r>
-              <a:rPr lang="en-US" smtClean="0"/>
+              <a:rPr lang="en-US"/>
               <a:t>Fifth level</a:t>
             </a:r>
-            <a:endParaRPr lang="en-US"/>
           </a:p>
         </p:txBody>
       </p:sp>
@@ -467,7 +482,7 @@
           <a:p>
             <a:fld id="{5BCAD085-E8A6-8845-BD4E-CB4CCA059FC4}" type="datetimeFigureOut">
               <a:rPr lang="en-US" smtClean="0"/>
-              <a:t>1/27/13</a:t>
+              <a:t>7/9/2026</a:t>
             </a:fld>
             <a:endParaRPr lang="en-US"/>
           </a:p>
@@ -566,10 +581,9 @@
           <a:lstStyle/>
           <a:p>
             <a:r>
-              <a:rPr lang="en-US" smtClean="0"/>
+              <a:rPr lang="en-US"/>
               <a:t>Click to edit Master title style</a:t>
             </a:r>
-            <a:endParaRPr lang="en-US"/>
           </a:p>
         </p:txBody>
       </p:sp>
@@ -595,38 +609,37 @@
           <a:p>
             <a:pPr lvl="0"/>
             <a:r>
-              <a:rPr lang="en-US" smtClean="0"/>
+              <a:rPr lang="en-US"/>
               <a:t>Click to edit Master text styles</a:t>
             </a:r>
           </a:p>
           <a:p>
             <a:pPr lvl="1"/>
             <a:r>
-              <a:rPr lang="en-US" smtClean="0"/>
+              <a:rPr lang="en-US"/>
               <a:t>Second level</a:t>
             </a:r>
           </a:p>
           <a:p>
             <a:pPr lvl="2"/>
             <a:r>
-              <a:rPr lang="en-US" smtClean="0"/>
+              <a:rPr lang="en-US"/>
               <a:t>Third level</a:t>
             </a:r>
           </a:p>
           <a:p>
             <a:pPr lvl="3"/>
             <a:r>
-              <a:rPr lang="en-US" smtClean="0"/>
+              <a:rPr lang="en-US"/>
               <a:t>Fourth level</a:t>
             </a:r>
           </a:p>
           <a:p>
             <a:pPr lvl="4"/>
             <a:r>
-              <a:rPr lang="en-US" smtClean="0"/>
+              <a:rPr lang="en-US"/>
               <a:t>Fifth level</a:t>
             </a:r>
-            <a:endParaRPr lang="en-US"/>
           </a:p>
         </p:txBody>
       </p:sp>
@@ -647,7 +660,7 @@
           <a:p>
             <a:fld id="{5BCAD085-E8A6-8845-BD4E-CB4CCA059FC4}" type="datetimeFigureOut">
               <a:rPr lang="en-US" smtClean="0"/>
-              <a:t>1/27/13</a:t>
+              <a:t>7/9/2026</a:t>
             </a:fld>
             <a:endParaRPr lang="en-US"/>
           </a:p>
@@ -741,10 +754,9 @@
           <a:lstStyle/>
           <a:p>
             <a:r>
-              <a:rPr lang="en-US" smtClean="0"/>
+              <a:rPr lang="en-US"/>
               <a:t>Click to edit Master title style</a:t>
             </a:r>
-            <a:endParaRPr lang="en-US"/>
           </a:p>
         </p:txBody>
       </p:sp>
@@ -765,38 +777,37 @@
           <a:p>
             <a:pPr lvl="0"/>
             <a:r>
-              <a:rPr lang="en-US" smtClean="0"/>
+              <a:rPr lang="en-US"/>
               <a:t>Click to edit Master text styles</a:t>
             </a:r>
           </a:p>
           <a:p>
             <a:pPr lvl="1"/>
             <a:r>
-              <a:rPr lang="en-US" smtClean="0"/>
+              <a:rPr lang="en-US"/>
               <a:t>Second level</a:t>
             </a:r>
           </a:p>
           <a:p>
             <a:pPr lvl="2"/>
             <a:r>
-              <a:rPr lang="en-US" smtClean="0"/>
+              <a:rPr lang="en-US"/>
               <a:t>Third level</a:t>
             </a:r>
           </a:p>
           <a:p>
             <a:pPr lvl="3"/>
             <a:r>
-              <a:rPr lang="en-US" smtClean="0"/>
+              <a:rPr lang="en-US"/>
               <a:t>Fourth level</a:t>
             </a:r>
           </a:p>
           <a:p>
             <a:pPr lvl="4"/>
             <a:r>
-              <a:rPr lang="en-US" smtClean="0"/>
+              <a:rPr lang="en-US"/>
               <a:t>Fifth level</a:t>
             </a:r>
-            <a:endParaRPr lang="en-US"/>
           </a:p>
         </p:txBody>
       </p:sp>
@@ -817,7 +828,7 @@
           <a:p>
             <a:fld id="{5BCAD085-E8A6-8845-BD4E-CB4CCA059FC4}" type="datetimeFigureOut">
               <a:rPr lang="en-US" smtClean="0"/>
-              <a:t>1/27/13</a:t>
+              <a:t>7/9/2026</a:t>
             </a:fld>
             <a:endParaRPr lang="en-US"/>
           </a:p>
@@ -920,10 +931,9 @@
           </a:lstStyle>
           <a:p>
             <a:r>
-              <a:rPr lang="en-US" smtClean="0"/>
+              <a:rPr lang="en-US"/>
               <a:t>Click to edit Master title style</a:t>
             </a:r>
-            <a:endParaRPr lang="en-US"/>
           </a:p>
         </p:txBody>
       </p:sp>
@@ -1040,7 +1050,7 @@
           <a:p>
             <a:pPr lvl="0"/>
             <a:r>
-              <a:rPr lang="en-US" smtClean="0"/>
+              <a:rPr lang="en-US"/>
               <a:t>Click to edit Master text styles</a:t>
             </a:r>
           </a:p>
@@ -1063,7 +1073,7 @@
           <a:p>
             <a:fld id="{5BCAD085-E8A6-8845-BD4E-CB4CCA059FC4}" type="datetimeFigureOut">
               <a:rPr lang="en-US" smtClean="0"/>
-              <a:t>1/27/13</a:t>
+              <a:t>7/9/2026</a:t>
             </a:fld>
             <a:endParaRPr lang="en-US"/>
           </a:p>
@@ -1157,10 +1167,9 @@
           <a:lstStyle/>
           <a:p>
             <a:r>
-              <a:rPr lang="en-US" smtClean="0"/>
+              <a:rPr lang="en-US"/>
               <a:t>Click to edit Master title style</a:t>
             </a:r>
-            <a:endParaRPr lang="en-US"/>
           </a:p>
         </p:txBody>
       </p:sp>
@@ -1214,38 +1223,37 @@
           <a:p>
             <a:pPr lvl="0"/>
             <a:r>
-              <a:rPr lang="en-US" smtClean="0"/>
+              <a:rPr lang="en-US"/>
               <a:t>Click to edit Master text styles</a:t>
             </a:r>
           </a:p>
           <a:p>
             <a:pPr lvl="1"/>
             <a:r>
-              <a:rPr lang="en-US" smtClean="0"/>
+              <a:rPr lang="en-US"/>
               <a:t>Second level</a:t>
             </a:r>
           </a:p>
           <a:p>
             <a:pPr lvl="2"/>
             <a:r>
-              <a:rPr lang="en-US" smtClean="0"/>
+              <a:rPr lang="en-US"/>
               <a:t>Third level</a:t>
             </a:r>
           </a:p>
           <a:p>
             <a:pPr lvl="3"/>
             <a:r>
-              <a:rPr lang="en-US" smtClean="0"/>
+              <a:rPr lang="en-US"/>
               <a:t>Fourth level</a:t>
             </a:r>
           </a:p>
           <a:p>
             <a:pPr lvl="4"/>
             <a:r>
-              <a:rPr lang="en-US" smtClean="0"/>
+              <a:rPr lang="en-US"/>
               <a:t>Fifth level</a:t>
             </a:r>
-            <a:endParaRPr lang="en-US"/>
           </a:p>
         </p:txBody>
       </p:sp>
@@ -1299,38 +1307,37 @@
           <a:p>
             <a:pPr lvl="0"/>
             <a:r>
-              <a:rPr lang="en-US" smtClean="0"/>
+              <a:rPr lang="en-US"/>
               <a:t>Click to edit Master text styles</a:t>
             </a:r>
           </a:p>
           <a:p>
             <a:pPr lvl="1"/>
             <a:r>
-              <a:rPr lang="en-US" smtClean="0"/>
+              <a:rPr lang="en-US"/>
               <a:t>Second level</a:t>
             </a:r>
           </a:p>
           <a:p>
             <a:pPr lvl="2"/>
             <a:r>
-              <a:rPr lang="en-US" smtClean="0"/>
+              <a:rPr lang="en-US"/>
               <a:t>Third level</a:t>
             </a:r>
           </a:p>
           <a:p>
             <a:pPr lvl="3"/>
             <a:r>
-              <a:rPr lang="en-US" smtClean="0"/>
+              <a:rPr lang="en-US"/>
               <a:t>Fourth level</a:t>
             </a:r>
           </a:p>
           <a:p>
             <a:pPr lvl="4"/>
             <a:r>
-              <a:rPr lang="en-US" smtClean="0"/>
+              <a:rPr lang="en-US"/>
               <a:t>Fifth level</a:t>
             </a:r>
-            <a:endParaRPr lang="en-US"/>
           </a:p>
         </p:txBody>
       </p:sp>
@@ -1351,7 +1358,7 @@
           <a:p>
             <a:fld id="{5BCAD085-E8A6-8845-BD4E-CB4CCA059FC4}" type="datetimeFigureOut">
               <a:rPr lang="en-US" smtClean="0"/>
-              <a:t>1/27/13</a:t>
+              <a:t>7/9/2026</a:t>
             </a:fld>
             <a:endParaRPr lang="en-US"/>
           </a:p>
@@ -1449,10 +1456,9 @@
           </a:lstStyle>
           <a:p>
             <a:r>
-              <a:rPr lang="en-US" smtClean="0"/>
+              <a:rPr lang="en-US"/>
               <a:t>Click to edit Master title style</a:t>
             </a:r>
-            <a:endParaRPr lang="en-US"/>
           </a:p>
         </p:txBody>
       </p:sp>
@@ -1515,7 +1521,7 @@
           <a:p>
             <a:pPr lvl="0"/>
             <a:r>
-              <a:rPr lang="en-US" smtClean="0"/>
+              <a:rPr lang="en-US"/>
               <a:t>Click to edit Master text styles</a:t>
             </a:r>
           </a:p>
@@ -1571,38 +1577,37 @@
           <a:p>
             <a:pPr lvl="0"/>
             <a:r>
-              <a:rPr lang="en-US" smtClean="0"/>
+              <a:rPr lang="en-US"/>
               <a:t>Click to edit Master text styles</a:t>
             </a:r>
           </a:p>
           <a:p>
             <a:pPr lvl="1"/>
             <a:r>
-              <a:rPr lang="en-US" smtClean="0"/>
+              <a:rPr lang="en-US"/>
               <a:t>Second level</a:t>
             </a:r>
           </a:p>
           <a:p>
             <a:pPr lvl="2"/>
             <a:r>
-              <a:rPr lang="en-US" smtClean="0"/>
+              <a:rPr lang="en-US"/>
               <a:t>Third level</a:t>
             </a:r>
           </a:p>
           <a:p>
             <a:pPr lvl="3"/>
             <a:r>
-              <a:rPr lang="en-US" smtClean="0"/>
+              <a:rPr lang="en-US"/>
               <a:t>Fourth level</a:t>
             </a:r>
           </a:p>
           <a:p>
             <a:pPr lvl="4"/>
             <a:r>
-              <a:rPr lang="en-US" smtClean="0"/>
+              <a:rPr lang="en-US"/>
               <a:t>Fifth level</a:t>
             </a:r>
-            <a:endParaRPr lang="en-US"/>
           </a:p>
         </p:txBody>
       </p:sp>
@@ -1665,7 +1670,7 @@
           <a:p>
             <a:pPr lvl="0"/>
             <a:r>
-              <a:rPr lang="en-US" smtClean="0"/>
+              <a:rPr lang="en-US"/>
               <a:t>Click to edit Master text styles</a:t>
             </a:r>
           </a:p>
@@ -1721,38 +1726,37 @@
           <a:p>
             <a:pPr lvl="0"/>
             <a:r>
-              <a:rPr lang="en-US" smtClean="0"/>
+              <a:rPr lang="en-US"/>
               <a:t>Click to edit Master text styles</a:t>
             </a:r>
           </a:p>
           <a:p>
             <a:pPr lvl="1"/>
             <a:r>
-              <a:rPr lang="en-US" smtClean="0"/>
+              <a:rPr lang="en-US"/>
               <a:t>Second level</a:t>
             </a:r>
           </a:p>
           <a:p>
             <a:pPr lvl="2"/>
             <a:r>
-              <a:rPr lang="en-US" smtClean="0"/>
+              <a:rPr lang="en-US"/>
               <a:t>Third level</a:t>
             </a:r>
           </a:p>
           <a:p>
             <a:pPr lvl="3"/>
             <a:r>
-              <a:rPr lang="en-US" smtClean="0"/>
+              <a:rPr lang="en-US"/>
               <a:t>Fourth level</a:t>
             </a:r>
           </a:p>
           <a:p>
             <a:pPr lvl="4"/>
             <a:r>
-              <a:rPr lang="en-US" smtClean="0"/>
+              <a:rPr lang="en-US"/>
               <a:t>Fifth level</a:t>
             </a:r>
-            <a:endParaRPr lang="en-US"/>
           </a:p>
         </p:txBody>
       </p:sp>
@@ -1773,7 +1777,7 @@
           <a:p>
             <a:fld id="{5BCAD085-E8A6-8845-BD4E-CB4CCA059FC4}" type="datetimeFigureOut">
               <a:rPr lang="en-US" smtClean="0"/>
-              <a:t>1/27/13</a:t>
+              <a:t>7/9/2026</a:t>
             </a:fld>
             <a:endParaRPr lang="en-US"/>
           </a:p>
@@ -1867,10 +1871,9 @@
           <a:lstStyle/>
           <a:p>
             <a:r>
-              <a:rPr lang="en-US" smtClean="0"/>
+              <a:rPr lang="en-US"/>
               <a:t>Click to edit Master title style</a:t>
             </a:r>
-            <a:endParaRPr lang="en-US"/>
           </a:p>
         </p:txBody>
       </p:sp>
@@ -1891,7 +1894,7 @@
           <a:p>
             <a:fld id="{5BCAD085-E8A6-8845-BD4E-CB4CCA059FC4}" type="datetimeFigureOut">
               <a:rPr lang="en-US" smtClean="0"/>
-              <a:t>1/27/13</a:t>
+              <a:t>7/9/2026</a:t>
             </a:fld>
             <a:endParaRPr lang="en-US"/>
           </a:p>
@@ -1986,7 +1989,7 @@
           <a:p>
             <a:fld id="{5BCAD085-E8A6-8845-BD4E-CB4CCA059FC4}" type="datetimeFigureOut">
               <a:rPr lang="en-US" smtClean="0"/>
-              <a:t>1/27/13</a:t>
+              <a:t>7/9/2026</a:t>
             </a:fld>
             <a:endParaRPr lang="en-US"/>
           </a:p>
@@ -2089,10 +2092,9 @@
           </a:lstStyle>
           <a:p>
             <a:r>
-              <a:rPr lang="en-US" smtClean="0"/>
+              <a:rPr lang="en-US"/>
               <a:t>Click to edit Master title style</a:t>
             </a:r>
-            <a:endParaRPr lang="en-US"/>
           </a:p>
         </p:txBody>
       </p:sp>
@@ -2146,38 +2148,37 @@
           <a:p>
             <a:pPr lvl="0"/>
             <a:r>
-              <a:rPr lang="en-US" smtClean="0"/>
+              <a:rPr lang="en-US"/>
               <a:t>Click to edit Master text styles</a:t>
             </a:r>
           </a:p>
           <a:p>
             <a:pPr lvl="1"/>
             <a:r>
-              <a:rPr lang="en-US" smtClean="0"/>
+              <a:rPr lang="en-US"/>
               <a:t>Second level</a:t>
             </a:r>
           </a:p>
           <a:p>
             <a:pPr lvl="2"/>
             <a:r>
-              <a:rPr lang="en-US" smtClean="0"/>
+              <a:rPr lang="en-US"/>
               <a:t>Third level</a:t>
             </a:r>
           </a:p>
           <a:p>
             <a:pPr lvl="3"/>
             <a:r>
-              <a:rPr lang="en-US" smtClean="0"/>
+              <a:rPr lang="en-US"/>
               <a:t>Fourth level</a:t>
             </a:r>
           </a:p>
           <a:p>
             <a:pPr lvl="4"/>
             <a:r>
-              <a:rPr lang="en-US" smtClean="0"/>
+              <a:rPr lang="en-US"/>
               <a:t>Fifth level</a:t>
             </a:r>
-            <a:endParaRPr lang="en-US"/>
           </a:p>
         </p:txBody>
       </p:sp>
@@ -2240,7 +2241,7 @@
           <a:p>
             <a:pPr lvl="0"/>
             <a:r>
-              <a:rPr lang="en-US" smtClean="0"/>
+              <a:rPr lang="en-US"/>
               <a:t>Click to edit Master text styles</a:t>
             </a:r>
           </a:p>
@@ -2263,7 +2264,7 @@
           <a:p>
             <a:fld id="{5BCAD085-E8A6-8845-BD4E-CB4CCA059FC4}" type="datetimeFigureOut">
               <a:rPr lang="en-US" smtClean="0"/>
-              <a:t>1/27/13</a:t>
+              <a:t>7/9/2026</a:t>
             </a:fld>
             <a:endParaRPr lang="en-US"/>
           </a:p>
@@ -2366,10 +2367,9 @@
           </a:lstStyle>
           <a:p>
             <a:r>
-              <a:rPr lang="en-US" smtClean="0"/>
+              <a:rPr lang="en-US"/>
               <a:t>Click to edit Master title style</a:t>
             </a:r>
-            <a:endParaRPr lang="en-US"/>
           </a:p>
         </p:txBody>
       </p:sp>
@@ -2493,7 +2493,7 @@
           <a:p>
             <a:pPr lvl="0"/>
             <a:r>
-              <a:rPr lang="en-US" smtClean="0"/>
+              <a:rPr lang="en-US"/>
               <a:t>Click to edit Master text styles</a:t>
             </a:r>
           </a:p>
@@ -2516,7 +2516,7 @@
           <a:p>
             <a:fld id="{5BCAD085-E8A6-8845-BD4E-CB4CCA059FC4}" type="datetimeFigureOut">
               <a:rPr lang="en-US" smtClean="0"/>
-              <a:t>1/27/13</a:t>
+              <a:t>7/9/2026</a:t>
             </a:fld>
             <a:endParaRPr lang="en-US"/>
           </a:p>
@@ -2625,10 +2625,9 @@
           <a:lstStyle/>
           <a:p>
             <a:r>
-              <a:rPr lang="en-US" smtClean="0"/>
+              <a:rPr lang="en-US"/>
               <a:t>Click to edit Master title style</a:t>
             </a:r>
-            <a:endParaRPr lang="en-US"/>
           </a:p>
         </p:txBody>
       </p:sp>
@@ -2659,38 +2658,37 @@
           <a:p>
             <a:pPr lvl="0"/>
             <a:r>
-              <a:rPr lang="en-US" smtClean="0"/>
+              <a:rPr lang="en-US"/>
               <a:t>Click to edit Master text styles</a:t>
             </a:r>
           </a:p>
           <a:p>
             <a:pPr lvl="1"/>
             <a:r>
-              <a:rPr lang="en-US" smtClean="0"/>
+              <a:rPr lang="en-US"/>
               <a:t>Second level</a:t>
             </a:r>
           </a:p>
           <a:p>
             <a:pPr lvl="2"/>
             <a:r>
-              <a:rPr lang="en-US" smtClean="0"/>
+              <a:rPr lang="en-US"/>
               <a:t>Third level</a:t>
             </a:r>
           </a:p>
           <a:p>
             <a:pPr lvl="3"/>
             <a:r>
-              <a:rPr lang="en-US" smtClean="0"/>
+              <a:rPr lang="en-US"/>
               <a:t>Fourth level</a:t>
             </a:r>
           </a:p>
           <a:p>
             <a:pPr lvl="4"/>
             <a:r>
-              <a:rPr lang="en-US" smtClean="0"/>
+              <a:rPr lang="en-US"/>
               <a:t>Fifth level</a:t>
             </a:r>
-            <a:endParaRPr lang="en-US"/>
           </a:p>
         </p:txBody>
       </p:sp>
@@ -2729,7 +2727,7 @@
           <a:p>
             <a:fld id="{5BCAD085-E8A6-8845-BD4E-CB4CCA059FC4}" type="datetimeFigureOut">
               <a:rPr lang="en-US" smtClean="0"/>
-              <a:t>1/27/13</a:t>
+              <a:t>7/9/2026</a:t>
             </a:fld>
             <a:endParaRPr lang="en-US"/>
           </a:p>
@@ -3088,7 +3086,7 @@
 </file>
 
 <file path=ppt/slides/slide1.xml><?xml version="1.0" encoding="utf-8"?>
-<p:sld xmlns:a="http://schemas.openxmlformats.org/drawingml/2006/main" xmlns:p="http://schemas.openxmlformats.org/presentationml/2006/main" xmlns:r="http://schemas.openxmlformats.org/officeDocument/2006/relationships">
+<p:sld xmlns:a="http://schemas.openxmlformats.org/drawingml/2006/main" xmlns:r="http://schemas.openxmlformats.org/officeDocument/2006/relationships" xmlns:p="http://schemas.openxmlformats.org/presentationml/2006/main">
   <p:cSld>
     <p:spTree>
       <p:nvGrpSpPr>
@@ -3096,7 +3094,14 @@
         <p:cNvGrpSpPr/>
         <p:nvPr/>
       </p:nvGrpSpPr>
-      <p:grpSpPr/>
+      <p:grpSpPr>
+        <a:xfrm>
+          <a:off x="0" y="0"/>
+          <a:ext cx="0" cy="0"/>
+          <a:chOff x="0" y="0"/>
+          <a:chExt cx="0" cy="0"/>
+        </a:xfrm>
+      </p:grpSpPr>
       <p:sp>
         <p:nvSpPr>
           <p:cNvPr id="2" name="Rectangle 1"/>
@@ -3138,6 +3143,7 @@
           <a:lstStyle/>
           <a:p>
             <a:pPr algn="ctr"/>
+            <a:endParaRPr/>
           </a:p>
         </p:txBody>
       </p:sp>
@@ -3182,6 +3188,7 @@
           <a:lstStyle/>
           <a:p>
             <a:pPr algn="ctr"/>
+            <a:endParaRPr/>
           </a:p>
         </p:txBody>
       </p:sp>
@@ -3226,6 +3233,7 @@
           <a:lstStyle/>
           <a:p>
             <a:pPr algn="ctr"/>
+            <a:endParaRPr/>
           </a:p>
         </p:txBody>
       </p:sp>
@@ -3268,7 +3276,7 @@
           </a:fontRef>
         </p:style>
         <p:txBody>
-          <a:bodyPr rtlCol="0" anchor="ctr" lIns="182880"/>
+          <a:bodyPr lIns="182880" rtlCol="0" anchor="ctr"/>
           <a:lstStyle/>
           <a:p>
             <a:pPr algn="ctr"/>
@@ -3301,7 +3309,7 @@
           <a:noFill/>
         </p:spPr>
         <p:txBody>
-          <a:bodyPr wrap="square" anchor="t" lIns="0" rIns="0" tIns="0" bIns="0">
+          <a:bodyPr wrap="square" lIns="0" tIns="0" rIns="0" bIns="0" anchor="t">
             <a:spAutoFit/>
           </a:bodyPr>
           <a:lstStyle/>
@@ -3356,7 +3364,7 @@
           <a:noFill/>
         </p:spPr>
         <p:txBody>
-          <a:bodyPr wrap="square" anchor="t" lIns="0" rIns="0" tIns="0" bIns="0">
+          <a:bodyPr wrap="square" lIns="0" tIns="0" rIns="0" bIns="0" anchor="t">
             <a:spAutoFit/>
           </a:bodyPr>
           <a:lstStyle/>
@@ -3435,7 +3443,7 @@
           </a:fontRef>
         </p:style>
         <p:txBody>
-          <a:bodyPr rtlCol="0" anchor="ctr" lIns="146304" rIns="146304"/>
+          <a:bodyPr lIns="146304" rIns="146304" rtlCol="0" anchor="ctr"/>
           <a:lstStyle/>
           <a:p>
             <a:pPr algn="ctr"/>
@@ -3492,7 +3500,7 @@
           </a:fontRef>
         </p:style>
         <p:txBody>
-          <a:bodyPr rtlCol="0" anchor="ctr" lIns="146304" rIns="146304"/>
+          <a:bodyPr lIns="146304" rIns="146304" rtlCol="0" anchor="ctr"/>
           <a:lstStyle/>
           <a:p>
             <a:pPr algn="ctr"/>
@@ -3549,19 +3557,34 @@
           </a:fontRef>
         </p:style>
         <p:txBody>
-          <a:bodyPr rtlCol="0" anchor="ctr" lIns="146304" rIns="146304"/>
+          <a:bodyPr lIns="146304" rIns="146304" rtlCol="0" anchor="ctr"/>
           <a:lstStyle/>
           <a:p>
             <a:pPr algn="ctr"/>
             <a:r>
-              <a:rPr sz="1200" b="1">
+              <a:rPr sz="1200" b="1" dirty="0">
                 <a:solidFill>
                   <a:srgbClr val="142A63"/>
                 </a:solidFill>
                 <a:latin typeface="맑은 고딕"/>
               </a:rPr>
-              <a:t>BP 3선</a:t>
-            </a:r>
+              <a:t>BP </a:t>
+            </a:r>
+            <a:r>
+              <a:rPr lang="ko-KR" altLang="en-US" sz="1200" b="1" dirty="0">
+                <a:solidFill>
+                  <a:srgbClr val="142A63"/>
+                </a:solidFill>
+                <a:latin typeface="맑은 고딕"/>
+              </a:rPr>
+              <a:t>사례</a:t>
+            </a:r>
+            <a:endParaRPr sz="1200" b="1" dirty="0">
+              <a:solidFill>
+                <a:srgbClr val="142A63"/>
+              </a:solidFill>
+              <a:latin typeface="맑은 고딕"/>
+            </a:endParaRPr>
           </a:p>
         </p:txBody>
       </p:sp>
@@ -3574,7 +3597,7 @@
         <p:spPr>
           <a:xfrm>
             <a:off x="4608576" y="4297680"/>
-            <a:ext cx="1353312" cy="402336"/>
+            <a:ext cx="1456946" cy="402336"/>
           </a:xfrm>
           <a:prstGeom prst="roundRect">
             <a:avLst>
@@ -3606,7 +3629,7 @@
           </a:fontRef>
         </p:style>
         <p:txBody>
-          <a:bodyPr rtlCol="0" anchor="ctr" lIns="146304" rIns="146304"/>
+          <a:bodyPr lIns="146304" rIns="146304" rtlCol="0" anchor="ctr"/>
           <a:lstStyle/>
           <a:p>
             <a:pPr algn="ctr"/>
@@ -3630,8 +3653,8 @@
         </p:nvSpPr>
         <p:spPr>
           <a:xfrm>
-            <a:off x="6126480" y="4297680"/>
-            <a:ext cx="713232" cy="402336"/>
+            <a:off x="6230114" y="4297680"/>
+            <a:ext cx="1112794" cy="402336"/>
           </a:xfrm>
           <a:prstGeom prst="roundRect">
             <a:avLst>
@@ -3663,7 +3686,7 @@
           </a:fontRef>
         </p:style>
         <p:txBody>
-          <a:bodyPr rtlCol="0" anchor="ctr" lIns="146304" rIns="146304"/>
+          <a:bodyPr lIns="146304" rIns="146304" rtlCol="0" anchor="ctr"/>
           <a:lstStyle/>
           <a:p>
             <a:pPr algn="ctr"/>
@@ -3688,7 +3711,7 @@
 </file>
 
 <file path=ppt/slides/slide10.xml><?xml version="1.0" encoding="utf-8"?>
-<p:sld xmlns:a="http://schemas.openxmlformats.org/drawingml/2006/main" xmlns:p="http://schemas.openxmlformats.org/presentationml/2006/main" xmlns:r="http://schemas.openxmlformats.org/officeDocument/2006/relationships">
+<p:sld xmlns:a="http://schemas.openxmlformats.org/drawingml/2006/main" xmlns:r="http://schemas.openxmlformats.org/officeDocument/2006/relationships" xmlns:p="http://schemas.openxmlformats.org/presentationml/2006/main">
   <p:cSld>
     <p:spTree>
       <p:nvGrpSpPr>
@@ -3696,7 +3719,14 @@
         <p:cNvGrpSpPr/>
         <p:nvPr/>
       </p:nvGrpSpPr>
-      <p:grpSpPr/>
+      <p:grpSpPr>
+        <a:xfrm>
+          <a:off x="0" y="0"/>
+          <a:ext cx="0" cy="0"/>
+          <a:chOff x="0" y="0"/>
+          <a:chExt cx="0" cy="0"/>
+        </a:xfrm>
+      </p:grpSpPr>
       <p:sp>
         <p:nvSpPr>
           <p:cNvPr id="2" name="Rectangle 1"/>
@@ -3738,6 +3768,7 @@
           <a:lstStyle/>
           <a:p>
             <a:pPr algn="ctr"/>
+            <a:endParaRPr/>
           </a:p>
         </p:txBody>
       </p:sp>
@@ -3782,6 +3813,7 @@
           <a:lstStyle/>
           <a:p>
             <a:pPr algn="ctr"/>
+            <a:endParaRPr/>
           </a:p>
         </p:txBody>
       </p:sp>
@@ -3829,14 +3861,29 @@
           <a:p>
             <a:pPr algn="ctr"/>
             <a:r>
-              <a:rPr sz="1300" b="1">
+              <a:rPr sz="1300" b="1" dirty="0">
                 <a:solidFill>
                   <a:srgbClr val="FFFFFF"/>
                 </a:solidFill>
                 <a:latin typeface="Consolas"/>
               </a:rPr>
-              <a:t>05</a:t>
-            </a:r>
+              <a:t>BP</a:t>
+            </a:r>
+            <a:r>
+              <a:rPr lang="en-US" sz="1300" b="1" dirty="0">
+                <a:solidFill>
+                  <a:srgbClr val="FFFFFF"/>
+                </a:solidFill>
+                <a:latin typeface="Consolas"/>
+              </a:rPr>
+              <a:t>5</a:t>
+            </a:r>
+            <a:endParaRPr sz="1300" b="1" dirty="0">
+              <a:solidFill>
+                <a:srgbClr val="FFFFFF"/>
+              </a:solidFill>
+              <a:latin typeface="Consolas"/>
+            </a:endParaRPr>
           </a:p>
         </p:txBody>
       </p:sp>
@@ -3857,7 +3904,7 @@
           <a:noFill/>
         </p:spPr>
         <p:txBody>
-          <a:bodyPr wrap="square" anchor="ctr" lIns="0" rIns="0" tIns="0" bIns="0">
+          <a:bodyPr wrap="square" lIns="0" tIns="0" rIns="0" bIns="0" anchor="ctr">
             <a:spAutoFit/>
           </a:bodyPr>
           <a:lstStyle/>
@@ -3874,7 +3921,7 @@
                 </a:solidFill>
                 <a:latin typeface="맑은 고딕"/>
               </a:rPr>
-              <a:t>소감</a:t>
+              <a:t>공통 로직은 그대로, 달라지는 지점만 훅으로 연다</a:t>
             </a:r>
           </a:p>
         </p:txBody>
@@ -3887,8 +3934,8 @@
         </p:nvSpPr>
         <p:spPr>
           <a:xfrm>
-            <a:off x="8595360" y="256032"/>
-            <a:ext cx="3108960" cy="548640"/>
+            <a:off x="8595360" y="433947"/>
+            <a:ext cx="3108960" cy="192810"/>
           </a:xfrm>
           <a:prstGeom prst="rect">
             <a:avLst/>
@@ -3896,7 +3943,7 @@
           <a:noFill/>
         </p:spPr>
         <p:txBody>
-          <a:bodyPr wrap="square" anchor="ctr" lIns="0" rIns="0" tIns="0" bIns="0">
+          <a:bodyPr wrap="square" lIns="0" tIns="0" rIns="0" bIns="0" anchor="ctr">
             <a:spAutoFit/>
           </a:bodyPr>
           <a:lstStyle/>
@@ -3907,14 +3954,65 @@
               </a:lnSpc>
             </a:pPr>
             <a:r>
-              <a:rPr sz="1200" b="1">
+              <a:rPr sz="1200" b="1" dirty="0">
                 <a:solidFill>
                   <a:srgbClr val="D8E1F7"/>
                 </a:solidFill>
                 <a:latin typeface="맑은 고딕"/>
               </a:rPr>
-              <a:t>Retrospective</a:t>
-            </a:r>
+              <a:t>BP </a:t>
+            </a:r>
+            <a:r>
+              <a:rPr lang="en-US" sz="1200" b="1" dirty="0">
+                <a:solidFill>
+                  <a:srgbClr val="D8E1F7"/>
+                </a:solidFill>
+                <a:latin typeface="맑은 고딕"/>
+              </a:rPr>
+              <a:t>5</a:t>
+            </a:r>
+            <a:r>
+              <a:rPr sz="1200" b="1" dirty="0">
+                <a:solidFill>
+                  <a:srgbClr val="D8E1F7"/>
+                </a:solidFill>
+                <a:latin typeface="맑은 고딕"/>
+              </a:rPr>
+              <a:t>/</a:t>
+            </a:r>
+            <a:r>
+              <a:rPr lang="en-US" sz="1200" b="1" dirty="0">
+                <a:solidFill>
+                  <a:srgbClr val="D8E1F7"/>
+                </a:solidFill>
+                <a:latin typeface="맑은 고딕"/>
+              </a:rPr>
+              <a:t>6</a:t>
+            </a:r>
+            <a:r>
+              <a:rPr sz="1200" b="1" dirty="0">
+                <a:solidFill>
+                  <a:srgbClr val="D8E1F7"/>
+                </a:solidFill>
+                <a:latin typeface="맑은 고딕"/>
+              </a:rPr>
+              <a:t> · </a:t>
+            </a:r>
+            <a:r>
+              <a:rPr sz="1200" b="1" dirty="0" err="1">
+                <a:solidFill>
+                  <a:srgbClr val="D8E1F7"/>
+                </a:solidFill>
+                <a:latin typeface="맑은 고딕"/>
+              </a:rPr>
+              <a:t>리팩토링</a:t>
+            </a:r>
+            <a:endParaRPr sz="1200" b="1" dirty="0">
+              <a:solidFill>
+                <a:srgbClr val="D8E1F7"/>
+              </a:solidFill>
+              <a:latin typeface="맑은 고딕"/>
+            </a:endParaRPr>
           </a:p>
         </p:txBody>
       </p:sp>
@@ -3970,7 +4068,7 @@
           <a:noFill/>
         </p:spPr>
         <p:txBody>
-          <a:bodyPr wrap="square" anchor="ctr" lIns="0" rIns="0" tIns="0" bIns="0">
+          <a:bodyPr wrap="square" lIns="0" tIns="0" rIns="0" bIns="0" anchor="ctr">
             <a:spAutoFit/>
           </a:bodyPr>
           <a:lstStyle/>
@@ -4009,7 +4107,7 @@
           <a:noFill/>
         </p:spPr>
         <p:txBody>
-          <a:bodyPr wrap="square" anchor="ctr" lIns="0" rIns="0" tIns="0" bIns="0">
+          <a:bodyPr wrap="square" lIns="0" tIns="0" rIns="0" bIns="0" anchor="ctr">
             <a:spAutoFit/>
           </a:bodyPr>
           <a:lstStyle/>
@@ -4026,37 +4124,417 @@
                 </a:solidFill>
                 <a:latin typeface="Consolas"/>
               </a:rPr>
-              <a:t>10 / 10</a:t>
+              <a:t>7 / 10</a:t>
+            </a:r>
+          </a:p>
+        </p:txBody>
+      </p:sp>
+      <p:sp>
+        <p:nvSpPr>
+          <p:cNvPr id="10" name="Rectangle 9"/>
+          <p:cNvSpPr/>
+          <p:nvPr/>
+        </p:nvSpPr>
+        <p:spPr>
+          <a:xfrm>
+            <a:off x="502920" y="1371600"/>
+            <a:ext cx="45720" cy="685800"/>
+          </a:xfrm>
+          <a:prstGeom prst="rect">
+            <a:avLst/>
+          </a:prstGeom>
+          <a:solidFill>
+            <a:srgbClr val="1F3C88"/>
+          </a:solidFill>
+          <a:ln>
+            <a:noFill/>
+          </a:ln>
+          <a:effectLst/>
+        </p:spPr>
+        <p:style>
+          <a:lnRef idx="1">
+            <a:schemeClr val="accent1"/>
+          </a:lnRef>
+          <a:fillRef idx="3">
+            <a:schemeClr val="accent1"/>
+          </a:fillRef>
+          <a:effectRef idx="2">
+            <a:schemeClr val="accent1"/>
+          </a:effectRef>
+          <a:fontRef idx="minor">
+            <a:schemeClr val="lt1"/>
+          </a:fontRef>
+        </p:style>
+        <p:txBody>
+          <a:bodyPr rtlCol="0" anchor="ctr"/>
+          <a:lstStyle/>
+          <a:p>
+            <a:pPr algn="ctr"/>
+            <a:endParaRPr/>
+          </a:p>
+        </p:txBody>
+      </p:sp>
+      <p:sp>
+        <p:nvSpPr>
+          <p:cNvPr id="11" name="TextBox 10"/>
+          <p:cNvSpPr txBox="1"/>
+          <p:nvPr/>
+        </p:nvSpPr>
+        <p:spPr>
+          <a:xfrm>
+            <a:off x="713232" y="1298448"/>
+            <a:ext cx="10789920" cy="822960"/>
+          </a:xfrm>
+          <a:prstGeom prst="rect">
+            <a:avLst/>
+          </a:prstGeom>
+          <a:noFill/>
+        </p:spPr>
+        <p:txBody>
+          <a:bodyPr wrap="square" lIns="0" tIns="0" rIns="0" bIns="0" anchor="ctr">
+            <a:spAutoFit/>
+          </a:bodyPr>
+          <a:lstStyle/>
+          <a:p>
+            <a:pPr algn="l">
+              <a:lnSpc>
+                <a:spcPct val="130000"/>
+              </a:lnSpc>
+            </a:pPr>
+            <a:r>
+              <a:rPr sz="1700" b="1">
+                <a:solidFill>
+                  <a:srgbClr val="16213A"/>
+                </a:solidFill>
+                <a:latin typeface="맑은 고딕"/>
+              </a:rPr>
+              <a:t>베이스 클래스를 고치지 않고, 딱 한 지점을 훅으로 뽑아 서브클래스가 오버라이드하게 만든다.</a:t>
+            </a:r>
+          </a:p>
+        </p:txBody>
+      </p:sp>
+      <p:sp>
+        <p:nvSpPr>
+          <p:cNvPr id="12" name="Rounded Rectangle 11"/>
+          <p:cNvSpPr/>
+          <p:nvPr/>
+        </p:nvSpPr>
+        <p:spPr>
+          <a:xfrm>
+            <a:off x="502920" y="2240280"/>
+            <a:ext cx="5486400" cy="3611880"/>
+          </a:xfrm>
+          <a:prstGeom prst="roundRect">
+            <a:avLst>
+              <a:gd name="adj" fmla="val 4500"/>
+            </a:avLst>
+          </a:prstGeom>
+          <a:solidFill>
+            <a:srgbClr val="0F1C3F"/>
+          </a:solidFill>
+          <a:ln>
+            <a:noFill/>
+          </a:ln>
+          <a:effectLst/>
+        </p:spPr>
+        <p:style>
+          <a:lnRef idx="1">
+            <a:schemeClr val="accent1"/>
+          </a:lnRef>
+          <a:fillRef idx="3">
+            <a:schemeClr val="accent1"/>
+          </a:fillRef>
+          <a:effectRef idx="2">
+            <a:schemeClr val="accent1"/>
+          </a:effectRef>
+          <a:fontRef idx="minor">
+            <a:schemeClr val="lt1"/>
+          </a:fontRef>
+        </p:style>
+        <p:txBody>
+          <a:bodyPr wrap="square" lIns="256032" tIns="182880" rIns="256032" bIns="182880" rtlCol="0" anchor="ctr"/>
+          <a:lstStyle/>
+          <a:p>
+            <a:pPr algn="ctr">
+              <a:lnSpc>
+                <a:spcPct val="105000"/>
+              </a:lnSpc>
+            </a:pPr>
+            <a:r>
+              <a:rPr sz="1050" b="1">
+                <a:solidFill>
+                  <a:srgbClr val="7FA8FF"/>
+                </a:solidFill>
+                <a:latin typeface="맑은 고딕"/>
+              </a:rPr>
+              <a:t>codefab/checker.py → codefab/function_checker.py</a:t>
+            </a:r>
+          </a:p>
+          <a:p>
+            <a:pPr>
+              <a:lnSpc>
+                <a:spcPct val="128000"/>
+              </a:lnSpc>
+              <a:spcBef>
+                <a:spcPts val="100"/>
+              </a:spcBef>
+            </a:pPr>
+            <a:r>
+              <a:rPr sz="1250">
+                <a:solidFill>
+                  <a:srgbClr val="7FA8FF"/>
+                </a:solidFill>
+                <a:latin typeface="Consolas"/>
+              </a:rPr>
+              <a:t># Checker: 메서드 순회 로직을 훅 하나로 분리</a:t>
+            </a:r>
+          </a:p>
+          <a:p>
+            <a:pPr>
+              <a:lnSpc>
+                <a:spcPct val="128000"/>
+              </a:lnSpc>
+              <a:spcBef>
+                <a:spcPts val="100"/>
+              </a:spcBef>
+            </a:pPr>
+            <a:r>
+              <a:rPr sz="1250">
+                <a:solidFill>
+                  <a:srgbClr val="DBE6FF"/>
+                </a:solidFill>
+                <a:latin typeface="Consolas"/>
+              </a:rPr>
+              <a:t>def _visit_method_body(self, method) -&gt; None:</a:t>
+            </a:r>
+          </a:p>
+          <a:p>
+            <a:pPr>
+              <a:lnSpc>
+                <a:spcPct val="128000"/>
+              </a:lnSpc>
+              <a:spcBef>
+                <a:spcPts val="100"/>
+              </a:spcBef>
+            </a:pPr>
+            <a:r>
+              <a:rPr sz="1250">
+                <a:solidFill>
+                  <a:srgbClr val="DBE6FF"/>
+                </a:solidFill>
+                <a:latin typeface="Consolas"/>
+              </a:rPr>
+              <a:t>    for statement in method.body:</a:t>
+            </a:r>
+          </a:p>
+          <a:p>
+            <a:pPr>
+              <a:lnSpc>
+                <a:spcPct val="128000"/>
+              </a:lnSpc>
+              <a:spcBef>
+                <a:spcPts val="100"/>
+              </a:spcBef>
+            </a:pPr>
+            <a:r>
+              <a:rPr sz="1250">
+                <a:solidFill>
+                  <a:srgbClr val="DBE6FF"/>
+                </a:solidFill>
+                <a:latin typeface="Consolas"/>
+              </a:rPr>
+              <a:t>        statement.accept(self)</a:t>
+            </a:r>
+          </a:p>
+          <a:p>
+            <a:pPr>
+              <a:lnSpc>
+                <a:spcPct val="128000"/>
+              </a:lnSpc>
+              <a:spcBef>
+                <a:spcPts val="100"/>
+              </a:spcBef>
+            </a:pPr>
+            <a:endParaRPr sz="1250">
+              <a:solidFill>
+                <a:srgbClr val="DBE6FF"/>
+              </a:solidFill>
+              <a:latin typeface="Consolas"/>
+            </a:endParaRPr>
+          </a:p>
+          <a:p>
+            <a:pPr>
+              <a:lnSpc>
+                <a:spcPct val="128000"/>
+              </a:lnSpc>
+              <a:spcBef>
+                <a:spcPts val="100"/>
+              </a:spcBef>
+            </a:pPr>
+            <a:r>
+              <a:rPr sz="1250">
+                <a:solidFill>
+                  <a:srgbClr val="7FA8FF"/>
+                </a:solidFill>
+                <a:latin typeface="Consolas"/>
+              </a:rPr>
+              <a:t># FunctionChecker: 이 훅 하나만 오버라이드해서 확장</a:t>
+            </a:r>
+          </a:p>
+          <a:p>
+            <a:pPr>
+              <a:lnSpc>
+                <a:spcPct val="128000"/>
+              </a:lnSpc>
+              <a:spcBef>
+                <a:spcPts val="100"/>
+              </a:spcBef>
+            </a:pPr>
+            <a:r>
+              <a:rPr sz="1250">
+                <a:solidFill>
+                  <a:srgbClr val="DBE6FF"/>
+                </a:solidFill>
+                <a:latin typeface="Consolas"/>
+              </a:rPr>
+              <a:t>def _visit_method_body(self, method) -&gt; None:</a:t>
+            </a:r>
+          </a:p>
+          <a:p>
+            <a:pPr>
+              <a:lnSpc>
+                <a:spcPct val="128000"/>
+              </a:lnSpc>
+              <a:spcBef>
+                <a:spcPts val="100"/>
+              </a:spcBef>
+            </a:pPr>
+            <a:r>
+              <a:rPr sz="1250">
+                <a:solidFill>
+                  <a:srgbClr val="DBE6FF"/>
+                </a:solidFill>
+                <a:latin typeface="Consolas"/>
+              </a:rPr>
+              <a:t>    self.function_depth += 1</a:t>
+            </a:r>
+          </a:p>
+          <a:p>
+            <a:pPr>
+              <a:lnSpc>
+                <a:spcPct val="128000"/>
+              </a:lnSpc>
+              <a:spcBef>
+                <a:spcPts val="100"/>
+              </a:spcBef>
+            </a:pPr>
+            <a:r>
+              <a:rPr sz="1250">
+                <a:solidFill>
+                  <a:srgbClr val="DBE6FF"/>
+                </a:solidFill>
+                <a:latin typeface="Consolas"/>
+              </a:rPr>
+              <a:t>    try:</a:t>
+            </a:r>
+          </a:p>
+          <a:p>
+            <a:pPr>
+              <a:lnSpc>
+                <a:spcPct val="128000"/>
+              </a:lnSpc>
+              <a:spcBef>
+                <a:spcPts val="100"/>
+              </a:spcBef>
+            </a:pPr>
+            <a:r>
+              <a:rPr sz="1250">
+                <a:solidFill>
+                  <a:srgbClr val="DBE6FF"/>
+                </a:solidFill>
+                <a:latin typeface="Consolas"/>
+              </a:rPr>
+              <a:t>        super()._visit_method_body(method)</a:t>
+            </a:r>
+          </a:p>
+          <a:p>
+            <a:pPr>
+              <a:lnSpc>
+                <a:spcPct val="128000"/>
+              </a:lnSpc>
+              <a:spcBef>
+                <a:spcPts val="100"/>
+              </a:spcBef>
+            </a:pPr>
+            <a:r>
+              <a:rPr sz="1250">
+                <a:solidFill>
+                  <a:srgbClr val="DBE6FF"/>
+                </a:solidFill>
+                <a:latin typeface="Consolas"/>
+              </a:rPr>
+              <a:t>    finally:</a:t>
+            </a:r>
+          </a:p>
+          <a:p>
+            <a:pPr>
+              <a:lnSpc>
+                <a:spcPct val="128000"/>
+              </a:lnSpc>
+              <a:spcBef>
+                <a:spcPts val="100"/>
+              </a:spcBef>
+            </a:pPr>
+            <a:r>
+              <a:rPr sz="1250">
+                <a:solidFill>
+                  <a:srgbClr val="DBE6FF"/>
+                </a:solidFill>
+                <a:latin typeface="Consolas"/>
+              </a:rPr>
+              <a:t>        self.function_depth -= 1</a:t>
             </a:r>
           </a:p>
         </p:txBody>
       </p:sp>
       <p:graphicFrame>
         <p:nvGraphicFramePr>
-          <p:cNvPr id="10" name="Table 9"/>
+          <p:cNvPr id="13" name="Table 12"/>
           <p:cNvGraphicFramePr>
             <a:graphicFrameLocks noGrp="1"/>
           </p:cNvGraphicFramePr>
           <p:nvPr/>
         </p:nvGraphicFramePr>
         <p:xfrm>
-          <a:off x="502920" y="1417320"/>
-          <a:ext cx="11183111" cy="4297680"/>
+          <a:off x="6263640" y="2240280"/>
+          <a:ext cx="5440679" cy="3611880"/>
         </p:xfrm>
         <a:graphic>
           <a:graphicData uri="http://schemas.openxmlformats.org/drawingml/2006/table">
             <a:tbl>
-              <a:tblPr firstRow="0" bandRow="0">
+              <a:tblPr>
                 <a:tableStyleId>{5C22544A-7EE6-4342-B048-85BDC9FD1C3A}</a:tableStyleId>
               </a:tblPr>
               <a:tblGrid>
-                <a:gridCol w="1565635"/>
-                <a:gridCol w="9617476"/>
+                <a:gridCol w="1523390">
+                  <a:extLst>
+                    <a:ext uri="{9D8B030D-6E8A-4147-A177-3AD203B41FA5}">
+                      <a16:colId xmlns:a16="http://schemas.microsoft.com/office/drawing/2014/main" val="20000"/>
+                    </a:ext>
+                  </a:extLst>
+                </a:gridCol>
+                <a:gridCol w="3917289">
+                  <a:extLst>
+                    <a:ext uri="{9D8B030D-6E8A-4147-A177-3AD203B41FA5}">
+                      <a16:colId xmlns:a16="http://schemas.microsoft.com/office/drawing/2014/main" val="20001"/>
+                    </a:ext>
+                  </a:extLst>
+                </a:gridCol>
               </a:tblGrid>
-              <a:tr h="716280">
+              <a:tr h="902970">
                 <a:tc>
                   <a:txBody>
-                    <a:bodyPr wrap="square"/>
+                    <a:bodyPr/>
                     <a:lstStyle/>
                     <a:p>
                       <a:r>
@@ -4066,7 +4544,7 @@
                           </a:solidFill>
                           <a:latin typeface="맑은 고딕"/>
                         </a:rPr>
-                        <a:t>이름</a:t>
+                        <a:t>원칙</a:t>
                       </a:r>
                     </a:p>
                   </a:txBody>
@@ -4078,7 +4556,7 @@
                 </a:tc>
                 <a:tc>
                   <a:txBody>
-                    <a:bodyPr wrap="square"/>
+                    <a:bodyPr/>
                     <a:lstStyle/>
                     <a:p>
                       <a:r>
@@ -4088,7 +4566,7 @@
                           </a:solidFill>
                           <a:latin typeface="맑은 고딕"/>
                         </a:rPr>
-                        <a:t>소감 (초안 — 발표 전 자유롭게 수정)</a:t>
+                        <a:t>적용</a:t>
                       </a:r>
                     </a:p>
                   </a:txBody>
@@ -4098,25 +4576,30 @@
                     </a:solidFill>
                   </a:tcPr>
                 </a:tc>
+                <a:extLst>
+                  <a:ext uri="{0D108BD9-81ED-4DB2-BD59-A6C34878D82A}">
+                    <a16:rowId xmlns:a16="http://schemas.microsoft.com/office/drawing/2014/main" val="10000"/>
+                  </a:ext>
+                </a:extLst>
               </a:tr>
-              <a:tr h="716280">
+              <a:tr h="902970">
                 <a:tc>
                   <a:txBody>
-                    <a:bodyPr wrap="square"/>
+                    <a:bodyPr/>
                     <a:lstStyle/>
                     <a:p>
                       <a:r>
-                        <a:rPr sz="1350" b="1">
+                        <a:rPr sz="1300" b="1">
                           <a:solidFill>
                             <a:srgbClr val="142A63"/>
                           </a:solidFill>
                           <a:latin typeface="맑은 고딕"/>
                         </a:rPr>
-                        <a:t>Name1</a:t>
+                        <a:t>개방-폐쇄 원칙</a:t>
                       </a:r>
                     </a:p>
                   </a:txBody>
-                  <a:tcPr anchor="t" marL="109728" marR="109728" marT="91440" marB="91440">
+                  <a:tcPr marL="109728" marR="109728" marT="91440" marB="91440">
                     <a:solidFill>
                       <a:srgbClr val="FFFFFF"/>
                     </a:solidFill>
@@ -4124,7 +4607,7 @@
                 </a:tc>
                 <a:tc>
                   <a:txBody>
-                    <a:bodyPr wrap="square"/>
+                    <a:bodyPr/>
                     <a:lstStyle/>
                     <a:p>
                       <a:pPr>
@@ -4133,41 +4616,46 @@
                         </a:lnSpc>
                       </a:pPr>
                       <a:r>
-                        <a:rPr sz="1350">
+                        <a:rPr sz="1300">
                           <a:solidFill>
                             <a:srgbClr val="16213A"/>
                           </a:solidFill>
                           <a:latin typeface="맑은 고딕"/>
                         </a:rPr>
-                        <a:t>여러 브랜치를 하나의 파이프라인으로 배선하면서, 통합 테스트가 왜 필요한지 몸으로 느꼈다.</a:t>
+                        <a:t>Checker의 기존 코드는 한 줄도 안 건드리고 FunctionChecker만 확장했다.</a:t>
                       </a:r>
                     </a:p>
                   </a:txBody>
-                  <a:tcPr anchor="t" marL="109728" marR="109728" marT="91440" marB="91440">
+                  <a:tcPr marL="109728" marR="109728" marT="91440" marB="91440">
                     <a:solidFill>
                       <a:srgbClr val="FFFFFF"/>
                     </a:solidFill>
                   </a:tcPr>
                 </a:tc>
+                <a:extLst>
+                  <a:ext uri="{0D108BD9-81ED-4DB2-BD59-A6C34878D82A}">
+                    <a16:rowId xmlns:a16="http://schemas.microsoft.com/office/drawing/2014/main" val="10001"/>
+                  </a:ext>
+                </a:extLst>
               </a:tr>
-              <a:tr h="716280">
+              <a:tr h="902970">
                 <a:tc>
                   <a:txBody>
-                    <a:bodyPr wrap="square"/>
+                    <a:bodyPr/>
                     <a:lstStyle/>
                     <a:p>
                       <a:r>
-                        <a:rPr sz="1350" b="1">
+                        <a:rPr sz="1300" b="1">
                           <a:solidFill>
                             <a:srgbClr val="142A63"/>
                           </a:solidFill>
                           <a:latin typeface="맑은 고딕"/>
                         </a:rPr>
-                        <a:t>Name2</a:t>
+                        <a:t>단일 진입점</a:t>
                       </a:r>
                     </a:p>
                   </a:txBody>
-                  <a:tcPr anchor="t" marL="109728" marR="109728" marT="91440" marB="91440">
+                  <a:tcPr marL="109728" marR="109728" marT="91440" marB="91440">
                     <a:solidFill>
                       <a:srgbClr val="FFFFFF"/>
                     </a:solidFill>
@@ -4175,7 +4663,7 @@
                 </a:tc>
                 <a:tc>
                   <a:txBody>
-                    <a:bodyPr wrap="square"/>
+                    <a:bodyPr/>
                     <a:lstStyle/>
                     <a:p>
                       <a:pPr>
@@ -4184,41 +4672,46 @@
                         </a:lnSpc>
                       </a:pPr>
                       <a:r>
-                        <a:rPr sz="1350">
+                        <a:rPr sz="1300">
                           <a:solidFill>
                             <a:srgbClr val="16213A"/>
                           </a:solidFill>
                           <a:latin typeface="맑은 고딕"/>
                         </a:rPr>
-                        <a:t>한글 키워드 하나 추가하는 것도 토크나이저 설계가 받쳐줘야 쉬워진다는 걸 알았다.</a:t>
+                        <a:t>“메서드 본문을 어떻게 순회하는가”가 코드베이스 전체에서 딱 한 곳에만 존재한다.</a:t>
                       </a:r>
                     </a:p>
                   </a:txBody>
-                  <a:tcPr anchor="t" marL="109728" marR="109728" marT="91440" marB="91440">
+                  <a:tcPr marL="109728" marR="109728" marT="91440" marB="91440">
                     <a:solidFill>
                       <a:srgbClr val="FFFFFF"/>
                     </a:solidFill>
                   </a:tcPr>
                 </a:tc>
+                <a:extLst>
+                  <a:ext uri="{0D108BD9-81ED-4DB2-BD59-A6C34878D82A}">
+                    <a16:rowId xmlns:a16="http://schemas.microsoft.com/office/drawing/2014/main" val="10002"/>
+                  </a:ext>
+                </a:extLst>
               </a:tr>
-              <a:tr h="716280">
+              <a:tr h="902970">
                 <a:tc>
                   <a:txBody>
-                    <a:bodyPr wrap="square"/>
+                    <a:bodyPr/>
                     <a:lstStyle/>
                     <a:p>
                       <a:r>
-                        <a:rPr sz="1350" b="1">
+                        <a:rPr sz="1300" b="1">
                           <a:solidFill>
                             <a:srgbClr val="142A63"/>
                           </a:solidFill>
                           <a:latin typeface="맑은 고딕"/>
                         </a:rPr>
-                        <a:t>Name3</a:t>
+                        <a:t>회귀 위험 최소화</a:t>
                       </a:r>
                     </a:p>
                   </a:txBody>
-                  <a:tcPr anchor="t" marL="109728" marR="109728" marT="91440" marB="91440">
+                  <a:tcPr marL="109728" marR="109728" marT="91440" marB="91440">
                     <a:solidFill>
                       <a:srgbClr val="FFFFFF"/>
                     </a:solidFill>
@@ -4226,7 +4719,7 @@
                 </a:tc>
                 <a:tc>
                   <a:txBody>
-                    <a:bodyPr wrap="square"/>
+                    <a:bodyPr/>
                     <a:lstStyle/>
                     <a:p>
                       <a:pPr>
@@ -4235,169 +4728,38 @@
                         </a:lnSpc>
                       </a:pPr>
                       <a:r>
-                        <a:rPr sz="1350">
+                        <a:rPr sz="1300">
                           <a:solidFill>
                             <a:srgbClr val="16213A"/>
                           </a:solidFill>
                           <a:latin typeface="맑은 고딕"/>
                         </a:rPr>
-                        <a:t>클래스 기능을 만들고 나서야 this/super 바인딩 같은 작은 디테일이 큰 버그로 이어진다는 걸 체감했다.</a:t>
+                        <a:t>기존 클래스 검사 동작은 그대로 보존된 채로 “메서드 내부 반환” 지원이 추가됐다.</a:t>
                       </a:r>
                     </a:p>
                   </a:txBody>
-                  <a:tcPr anchor="t" marL="109728" marR="109728" marT="91440" marB="91440">
+                  <a:tcPr marL="109728" marR="109728" marT="91440" marB="91440">
                     <a:solidFill>
                       <a:srgbClr val="FFFFFF"/>
                     </a:solidFill>
                   </a:tcPr>
                 </a:tc>
-              </a:tr>
-              <a:tr h="716280">
-                <a:tc>
-                  <a:txBody>
-                    <a:bodyPr wrap="square"/>
-                    <a:lstStyle/>
-                    <a:p>
-                      <a:r>
-                        <a:rPr sz="1350" b="1">
-                          <a:solidFill>
-                            <a:srgbClr val="142A63"/>
-                          </a:solidFill>
-                          <a:latin typeface="맑은 고딕"/>
-                        </a:rPr>
-                        <a:t>Name4</a:t>
-                      </a:r>
-                    </a:p>
-                  </a:txBody>
-                  <a:tcPr anchor="t" marL="109728" marR="109728" marT="91440" marB="91440">
-                    <a:solidFill>
-                      <a:srgbClr val="FFFFFF"/>
-                    </a:solidFill>
-                  </a:tcPr>
-                </a:tc>
-                <a:tc>
-                  <a:txBody>
-                    <a:bodyPr wrap="square"/>
-                    <a:lstStyle/>
-                    <a:p>
-                      <a:pPr>
-                        <a:lnSpc>
-                          <a:spcPct val="115000"/>
-                        </a:lnSpc>
-                      </a:pPr>
-                      <a:r>
-                        <a:rPr sz="1350">
-                          <a:solidFill>
-                            <a:srgbClr val="16213A"/>
-                          </a:solidFill>
-                          <a:latin typeface="맑은 고딕"/>
-                        </a:rPr>
-                        <a:t>최적화는 정답을 바꾸지 않는 선에서만 해야 한다는 원칙을 지키는 게 생각보다 까다로웠다.</a:t>
-                      </a:r>
-                    </a:p>
-                  </a:txBody>
-                  <a:tcPr anchor="t" marL="109728" marR="109728" marT="91440" marB="91440">
-                    <a:solidFill>
-                      <a:srgbClr val="FFFFFF"/>
-                    </a:solidFill>
-                  </a:tcPr>
-                </a:tc>
-              </a:tr>
-              <a:tr h="716280">
-                <a:tc>
-                  <a:txBody>
-                    <a:bodyPr wrap="square"/>
-                    <a:lstStyle/>
-                    <a:p>
-                      <a:r>
-                        <a:rPr sz="1350" b="1">
-                          <a:solidFill>
-                            <a:srgbClr val="142A63"/>
-                          </a:solidFill>
-                          <a:latin typeface="맑은 고딕"/>
-                        </a:rPr>
-                        <a:t>Name5</a:t>
-                      </a:r>
-                    </a:p>
-                  </a:txBody>
-                  <a:tcPr anchor="t" marL="109728" marR="109728" marT="91440" marB="91440">
-                    <a:solidFill>
-                      <a:srgbClr val="FFFFFF"/>
-                    </a:solidFill>
-                  </a:tcPr>
-                </a:tc>
-                <a:tc>
-                  <a:txBody>
-                    <a:bodyPr wrap="square"/>
-                    <a:lstStyle/>
-                    <a:p>
-                      <a:pPr>
-                        <a:lnSpc>
-                          <a:spcPct val="115000"/>
-                        </a:lnSpc>
-                      </a:pPr>
-                      <a:r>
-                        <a:rPr sz="1350">
-                          <a:solidFill>
-                            <a:srgbClr val="16213A"/>
-                          </a:solidFill>
-                          <a:latin typeface="맑은 고딕"/>
-                        </a:rPr>
-                        <a:t>Checker를 제일 먼저 설계해두니, 뒤에 오는 기능들이 그 위에 안전하게 쌓일 수 있었다.</a:t>
-                      </a:r>
-                    </a:p>
-                  </a:txBody>
-                  <a:tcPr anchor="t" marL="109728" marR="109728" marT="91440" marB="91440">
-                    <a:solidFill>
-                      <a:srgbClr val="FFFFFF"/>
-                    </a:solidFill>
-                  </a:tcPr>
-                </a:tc>
+                <a:extLst>
+                  <a:ext uri="{0D108BD9-81ED-4DB2-BD59-A6C34878D82A}">
+                    <a16:rowId xmlns:a16="http://schemas.microsoft.com/office/drawing/2014/main" val="10003"/>
+                  </a:ext>
+                </a:extLst>
               </a:tr>
             </a:tbl>
           </a:graphicData>
         </a:graphic>
       </p:graphicFrame>
-      <p:sp>
-        <p:nvSpPr>
-          <p:cNvPr id="11" name="TextBox 10"/>
-          <p:cNvSpPr txBox="1"/>
-          <p:nvPr/>
-        </p:nvSpPr>
-        <p:spPr>
-          <a:xfrm>
-            <a:off x="502920" y="5806440"/>
-            <a:ext cx="11183112" cy="365760"/>
-          </a:xfrm>
-          <a:prstGeom prst="rect">
-            <a:avLst/>
-          </a:prstGeom>
-          <a:noFill/>
-        </p:spPr>
-        <p:txBody>
-          <a:bodyPr wrap="square" anchor="t" lIns="0" rIns="0" tIns="0" bIns="0">
-            <a:spAutoFit/>
-          </a:bodyPr>
-          <a:lstStyle/>
-          <a:p>
-            <a:pPr algn="l">
-              <a:lnSpc>
-                <a:spcPct val="115000"/>
-              </a:lnSpc>
-            </a:pPr>
-            <a:r>
-              <a:rPr sz="1100" b="0">
-                <a:solidFill>
-                  <a:srgbClr val="5B6B8C"/>
-                </a:solidFill>
-                <a:latin typeface="맑은 고딕"/>
-              </a:rPr>
-              <a:t>* 자리표시자(Name1~5)와 소감 초안입니다 — 실제 이름과 각자의 생각으로 바꿔서 사용하세요.</a:t>
-            </a:r>
-          </a:p>
-        </p:txBody>
-      </p:sp>
     </p:spTree>
+    <p:extLst>
+      <p:ext uri="{BB962C8B-B14F-4D97-AF65-F5344CB8AC3E}">
+        <p14:creationId xmlns:p14="http://schemas.microsoft.com/office/powerpoint/2010/main" val="1131700472"/>
+      </p:ext>
+    </p:extLst>
   </p:cSld>
   <p:clrMapOvr>
     <a:masterClrMapping/>
@@ -4405,8 +4767,8 @@
 </p:sld>
 </file>
 
-<file path=ppt/slides/slide2.xml><?xml version="1.0" encoding="utf-8"?>
-<p:sld xmlns:a="http://schemas.openxmlformats.org/drawingml/2006/main" xmlns:p="http://schemas.openxmlformats.org/presentationml/2006/main" xmlns:r="http://schemas.openxmlformats.org/officeDocument/2006/relationships">
+<file path=ppt/slides/slide11.xml><?xml version="1.0" encoding="utf-8"?>
+<p:sld xmlns:a="http://schemas.openxmlformats.org/drawingml/2006/main" xmlns:r="http://schemas.openxmlformats.org/officeDocument/2006/relationships" xmlns:p="http://schemas.openxmlformats.org/presentationml/2006/main">
   <p:cSld>
     <p:spTree>
       <p:nvGrpSpPr>
@@ -4414,7 +4776,14 @@
         <p:cNvGrpSpPr/>
         <p:nvPr/>
       </p:nvGrpSpPr>
-      <p:grpSpPr/>
+      <p:grpSpPr>
+        <a:xfrm>
+          <a:off x="0" y="0"/>
+          <a:ext cx="0" cy="0"/>
+          <a:chOff x="0" y="0"/>
+          <a:chExt cx="0" cy="0"/>
+        </a:xfrm>
+      </p:grpSpPr>
       <p:sp>
         <p:nvSpPr>
           <p:cNvPr id="2" name="Rectangle 1"/>
@@ -4456,6 +4825,7 @@
           <a:lstStyle/>
           <a:p>
             <a:pPr algn="ctr"/>
+            <a:endParaRPr/>
           </a:p>
         </p:txBody>
       </p:sp>
@@ -4500,6 +4870,7 @@
           <a:lstStyle/>
           <a:p>
             <a:pPr algn="ctr"/>
+            <a:endParaRPr/>
           </a:p>
         </p:txBody>
       </p:sp>
@@ -4547,14 +4918,29 @@
           <a:p>
             <a:pPr algn="ctr"/>
             <a:r>
-              <a:rPr sz="1300" b="1">
+              <a:rPr sz="1300" b="1" dirty="0">
                 <a:solidFill>
                   <a:srgbClr val="FFFFFF"/>
                 </a:solidFill>
                 <a:latin typeface="Consolas"/>
               </a:rPr>
-              <a:t>00</a:t>
-            </a:r>
+              <a:t>BP</a:t>
+            </a:r>
+            <a:r>
+              <a:rPr lang="en-US" sz="1300" b="1" dirty="0">
+                <a:solidFill>
+                  <a:srgbClr val="FFFFFF"/>
+                </a:solidFill>
+                <a:latin typeface="Consolas"/>
+              </a:rPr>
+              <a:t>6</a:t>
+            </a:r>
+            <a:endParaRPr sz="1300" b="1" dirty="0">
+              <a:solidFill>
+                <a:srgbClr val="FFFFFF"/>
+              </a:solidFill>
+              <a:latin typeface="Consolas"/>
+            </a:endParaRPr>
           </a:p>
         </p:txBody>
       </p:sp>
@@ -4575,7 +4961,7 @@
           <a:noFill/>
         </p:spPr>
         <p:txBody>
-          <a:bodyPr wrap="square" anchor="ctr" lIns="0" rIns="0" tIns="0" bIns="0">
+          <a:bodyPr wrap="square" lIns="0" tIns="0" rIns="0" bIns="0" anchor="ctr">
             <a:spAutoFit/>
           </a:bodyPr>
           <a:lstStyle/>
@@ -4592,7 +4978,7 @@
                 </a:solidFill>
                 <a:latin typeface="맑은 고딕"/>
               </a:rPr>
-              <a:t>목차</a:t>
+              <a:t>다국어 표기는 렉서 한 층에서 끝낸다</a:t>
             </a:r>
           </a:p>
         </p:txBody>
@@ -4605,8 +4991,8 @@
         </p:nvSpPr>
         <p:spPr>
           <a:xfrm>
-            <a:off x="8595360" y="256032"/>
-            <a:ext cx="3108960" cy="548640"/>
+            <a:off x="8595360" y="433947"/>
+            <a:ext cx="3108960" cy="192810"/>
           </a:xfrm>
           <a:prstGeom prst="rect">
             <a:avLst/>
@@ -4614,7 +5000,7 @@
           <a:noFill/>
         </p:spPr>
         <p:txBody>
-          <a:bodyPr wrap="square" anchor="ctr" lIns="0" rIns="0" tIns="0" bIns="0">
+          <a:bodyPr wrap="square" lIns="0" tIns="0" rIns="0" bIns="0" anchor="ctr">
             <a:spAutoFit/>
           </a:bodyPr>
           <a:lstStyle/>
@@ -4625,14 +5011,83 @@
               </a:lnSpc>
             </a:pPr>
             <a:r>
-              <a:rPr sz="1200" b="1">
+              <a:rPr sz="1200" b="1" dirty="0">
                 <a:solidFill>
                   <a:srgbClr val="D8E1F7"/>
                 </a:solidFill>
                 <a:latin typeface="맑은 고딕"/>
               </a:rPr>
-              <a:t>Agenda</a:t>
-            </a:r>
+              <a:t>BP </a:t>
+            </a:r>
+            <a:r>
+              <a:rPr lang="en-US" sz="1200" b="1" dirty="0">
+                <a:solidFill>
+                  <a:srgbClr val="D8E1F7"/>
+                </a:solidFill>
+                <a:latin typeface="맑은 고딕"/>
+              </a:rPr>
+              <a:t>6</a:t>
+            </a:r>
+            <a:r>
+              <a:rPr sz="1200" b="1" dirty="0">
+                <a:solidFill>
+                  <a:srgbClr val="D8E1F7"/>
+                </a:solidFill>
+                <a:latin typeface="맑은 고딕"/>
+              </a:rPr>
+              <a:t>/</a:t>
+            </a:r>
+            <a:r>
+              <a:rPr lang="en-US" sz="1200" b="1" dirty="0">
+                <a:solidFill>
+                  <a:srgbClr val="D8E1F7"/>
+                </a:solidFill>
+                <a:latin typeface="맑은 고딕"/>
+              </a:rPr>
+              <a:t>6</a:t>
+            </a:r>
+            <a:r>
+              <a:rPr sz="1200" b="1" dirty="0">
+                <a:solidFill>
+                  <a:srgbClr val="D8E1F7"/>
+                </a:solidFill>
+                <a:latin typeface="맑은 고딕"/>
+              </a:rPr>
+              <a:t> · </a:t>
+            </a:r>
+            <a:r>
+              <a:rPr sz="1200" b="1" dirty="0" err="1">
+                <a:solidFill>
+                  <a:srgbClr val="D8E1F7"/>
+                </a:solidFill>
+                <a:latin typeface="맑은 고딕"/>
+              </a:rPr>
+              <a:t>언어</a:t>
+            </a:r>
+            <a:r>
+              <a:rPr sz="1200" b="1" dirty="0">
+                <a:solidFill>
+                  <a:srgbClr val="D8E1F7"/>
+                </a:solidFill>
+                <a:latin typeface="맑은 고딕"/>
+              </a:rPr>
+              <a:t> </a:t>
+            </a:r>
+            <a:r>
+              <a:rPr sz="1200" b="1" dirty="0" err="1">
+                <a:solidFill>
+                  <a:srgbClr val="D8E1F7"/>
+                </a:solidFill>
+                <a:latin typeface="맑은 고딕"/>
+              </a:rPr>
+              <a:t>설계</a:t>
+            </a:r>
+            <a:endParaRPr sz="1200" b="1" dirty="0">
+              <a:solidFill>
+                <a:srgbClr val="D8E1F7"/>
+              </a:solidFill>
+              <a:latin typeface="맑은 고딕"/>
+            </a:endParaRPr>
           </a:p>
         </p:txBody>
       </p:sp>
@@ -4688,7 +5143,7 @@
           <a:noFill/>
         </p:spPr>
         <p:txBody>
-          <a:bodyPr wrap="square" anchor="ctr" lIns="0" rIns="0" tIns="0" bIns="0">
+          <a:bodyPr wrap="square" lIns="0" tIns="0" rIns="0" bIns="0" anchor="ctr">
             <a:spAutoFit/>
           </a:bodyPr>
           <a:lstStyle/>
@@ -4727,7 +5182,7 @@
           <a:noFill/>
         </p:spPr>
         <p:txBody>
-          <a:bodyPr wrap="square" anchor="ctr" lIns="0" rIns="0" tIns="0" bIns="0">
+          <a:bodyPr wrap="square" lIns="0" tIns="0" rIns="0" bIns="0" anchor="ctr">
             <a:spAutoFit/>
           </a:bodyPr>
           <a:lstStyle/>
@@ -4744,37 +5199,325 @@
                 </a:solidFill>
                 <a:latin typeface="Consolas"/>
               </a:rPr>
-              <a:t>2 / 10</a:t>
+              <a:t>8 / 10</a:t>
+            </a:r>
+          </a:p>
+        </p:txBody>
+      </p:sp>
+      <p:sp>
+        <p:nvSpPr>
+          <p:cNvPr id="10" name="Rectangle 9"/>
+          <p:cNvSpPr/>
+          <p:nvPr/>
+        </p:nvSpPr>
+        <p:spPr>
+          <a:xfrm>
+            <a:off x="502920" y="1371600"/>
+            <a:ext cx="45720" cy="685800"/>
+          </a:xfrm>
+          <a:prstGeom prst="rect">
+            <a:avLst/>
+          </a:prstGeom>
+          <a:solidFill>
+            <a:srgbClr val="1F3C88"/>
+          </a:solidFill>
+          <a:ln>
+            <a:noFill/>
+          </a:ln>
+          <a:effectLst/>
+        </p:spPr>
+        <p:style>
+          <a:lnRef idx="1">
+            <a:schemeClr val="accent1"/>
+          </a:lnRef>
+          <a:fillRef idx="3">
+            <a:schemeClr val="accent1"/>
+          </a:fillRef>
+          <a:effectRef idx="2">
+            <a:schemeClr val="accent1"/>
+          </a:effectRef>
+          <a:fontRef idx="minor">
+            <a:schemeClr val="lt1"/>
+          </a:fontRef>
+        </p:style>
+        <p:txBody>
+          <a:bodyPr rtlCol="0" anchor="ctr"/>
+          <a:lstStyle/>
+          <a:p>
+            <a:pPr algn="ctr"/>
+            <a:endParaRPr/>
+          </a:p>
+        </p:txBody>
+      </p:sp>
+      <p:sp>
+        <p:nvSpPr>
+          <p:cNvPr id="11" name="TextBox 10"/>
+          <p:cNvSpPr txBox="1"/>
+          <p:nvPr/>
+        </p:nvSpPr>
+        <p:spPr>
+          <a:xfrm>
+            <a:off x="713232" y="1298448"/>
+            <a:ext cx="10789920" cy="822960"/>
+          </a:xfrm>
+          <a:prstGeom prst="rect">
+            <a:avLst/>
+          </a:prstGeom>
+          <a:noFill/>
+        </p:spPr>
+        <p:txBody>
+          <a:bodyPr wrap="square" lIns="0" tIns="0" rIns="0" bIns="0" anchor="ctr">
+            <a:spAutoFit/>
+          </a:bodyPr>
+          <a:lstStyle/>
+          <a:p>
+            <a:pPr algn="l">
+              <a:lnSpc>
+                <a:spcPct val="130000"/>
+              </a:lnSpc>
+            </a:pPr>
+            <a:r>
+              <a:rPr sz="1700" b="1">
+                <a:solidFill>
+                  <a:srgbClr val="16213A"/>
+                </a:solidFill>
+                <a:latin typeface="맑은 고딕"/>
+              </a:rPr>
+              <a:t>한글·영어 표기는 토크나이저에서만 구분하고, 그 아래 계층은 표기 언어를 몰라도 되게 만든다.</a:t>
+            </a:r>
+          </a:p>
+        </p:txBody>
+      </p:sp>
+      <p:sp>
+        <p:nvSpPr>
+          <p:cNvPr id="12" name="Rounded Rectangle 11"/>
+          <p:cNvSpPr/>
+          <p:nvPr/>
+        </p:nvSpPr>
+        <p:spPr>
+          <a:xfrm>
+            <a:off x="502920" y="2240280"/>
+            <a:ext cx="5486400" cy="3611880"/>
+          </a:xfrm>
+          <a:prstGeom prst="roundRect">
+            <a:avLst>
+              <a:gd name="adj" fmla="val 4500"/>
+            </a:avLst>
+          </a:prstGeom>
+          <a:solidFill>
+            <a:srgbClr val="0F1C3F"/>
+          </a:solidFill>
+          <a:ln>
+            <a:noFill/>
+          </a:ln>
+          <a:effectLst/>
+        </p:spPr>
+        <p:style>
+          <a:lnRef idx="1">
+            <a:schemeClr val="accent1"/>
+          </a:lnRef>
+          <a:fillRef idx="3">
+            <a:schemeClr val="accent1"/>
+          </a:fillRef>
+          <a:effectRef idx="2">
+            <a:schemeClr val="accent1"/>
+          </a:effectRef>
+          <a:fontRef idx="minor">
+            <a:schemeClr val="lt1"/>
+          </a:fontRef>
+        </p:style>
+        <p:txBody>
+          <a:bodyPr wrap="square" lIns="256032" tIns="182880" rIns="256032" bIns="182880" rtlCol="0" anchor="ctr"/>
+          <a:lstStyle/>
+          <a:p>
+            <a:pPr algn="ctr">
+              <a:lnSpc>
+                <a:spcPct val="105000"/>
+              </a:lnSpc>
+            </a:pPr>
+            <a:r>
+              <a:rPr sz="1050" b="1">
+                <a:solidFill>
+                  <a:srgbClr val="7FA8FF"/>
+                </a:solidFill>
+                <a:latin typeface="맑은 고딕"/>
+              </a:rPr>
+              <a:t>codefab/tokens.py</a:t>
+            </a:r>
+          </a:p>
+          <a:p>
+            <a:pPr>
+              <a:lnSpc>
+                <a:spcPct val="128000"/>
+              </a:lnSpc>
+              <a:spcBef>
+                <a:spcPts val="100"/>
+              </a:spcBef>
+            </a:pPr>
+            <a:r>
+              <a:rPr sz="1250">
+                <a:solidFill>
+                  <a:srgbClr val="DBE6FF"/>
+                </a:solidFill>
+                <a:latin typeface="Consolas"/>
+              </a:rPr>
+              <a:t>KEYWORDS = {</a:t>
+            </a:r>
+          </a:p>
+          <a:p>
+            <a:pPr>
+              <a:lnSpc>
+                <a:spcPct val="128000"/>
+              </a:lnSpc>
+              <a:spcBef>
+                <a:spcPts val="100"/>
+              </a:spcBef>
+            </a:pPr>
+            <a:r>
+              <a:rPr sz="1250">
+                <a:solidFill>
+                  <a:srgbClr val="DBE6FF"/>
+                </a:solidFill>
+                <a:latin typeface="Consolas"/>
+              </a:rPr>
+              <a:t>    "var": TokenType.VAR,       "변수": TokenType.VAR,</a:t>
+            </a:r>
+          </a:p>
+          <a:p>
+            <a:pPr>
+              <a:lnSpc>
+                <a:spcPct val="128000"/>
+              </a:lnSpc>
+              <a:spcBef>
+                <a:spcPts val="100"/>
+              </a:spcBef>
+            </a:pPr>
+            <a:r>
+              <a:rPr sz="1250">
+                <a:solidFill>
+                  <a:srgbClr val="DBE6FF"/>
+                </a:solidFill>
+                <a:latin typeface="Consolas"/>
+              </a:rPr>
+              <a:t>    "class": TokenType.CLASS,   "클래스": TokenType.CLASS,</a:t>
+            </a:r>
+          </a:p>
+          <a:p>
+            <a:pPr>
+              <a:lnSpc>
+                <a:spcPct val="128000"/>
+              </a:lnSpc>
+              <a:spcBef>
+                <a:spcPts val="100"/>
+              </a:spcBef>
+            </a:pPr>
+            <a:r>
+              <a:rPr sz="1250">
+                <a:solidFill>
+                  <a:srgbClr val="DBE6FF"/>
+                </a:solidFill>
+                <a:latin typeface="Consolas"/>
+              </a:rPr>
+              <a:t>    "func": TokenType.FUN,      "함수": TokenType.FUN,</a:t>
+            </a:r>
+          </a:p>
+          <a:p>
+            <a:pPr>
+              <a:lnSpc>
+                <a:spcPct val="128000"/>
+              </a:lnSpc>
+              <a:spcBef>
+                <a:spcPts val="100"/>
+              </a:spcBef>
+            </a:pPr>
+            <a:r>
+              <a:rPr sz="1250">
+                <a:solidFill>
+                  <a:srgbClr val="DBE6FF"/>
+                </a:solidFill>
+                <a:latin typeface="Consolas"/>
+              </a:rPr>
+              <a:t>    "return": TokenType.RETURN, "반환": TokenType.RETURN,</a:t>
+            </a:r>
+          </a:p>
+          <a:p>
+            <a:pPr>
+              <a:lnSpc>
+                <a:spcPct val="128000"/>
+              </a:lnSpc>
+              <a:spcBef>
+                <a:spcPts val="100"/>
+              </a:spcBef>
+            </a:pPr>
+            <a:r>
+              <a:rPr sz="1250">
+                <a:solidFill>
+                  <a:srgbClr val="DBE6FF"/>
+                </a:solidFill>
+                <a:latin typeface="Consolas"/>
+              </a:rPr>
+              <a:t>}</a:t>
+            </a:r>
+          </a:p>
+          <a:p>
+            <a:pPr>
+              <a:lnSpc>
+                <a:spcPct val="128000"/>
+              </a:lnSpc>
+              <a:spcBef>
+                <a:spcPts val="100"/>
+              </a:spcBef>
+            </a:pPr>
+            <a:r>
+              <a:rPr sz="1250">
+                <a:solidFill>
+                  <a:srgbClr val="7FA8FF"/>
+                </a:solidFill>
+                <a:latin typeface="Consolas"/>
+              </a:rPr>
+              <a:t># AST / Checker / Executor는 TokenType만 보고, 표기는 신경 쓰지 않는다</a:t>
             </a:r>
           </a:p>
         </p:txBody>
       </p:sp>
       <p:graphicFrame>
         <p:nvGraphicFramePr>
-          <p:cNvPr id="10" name="Table 9"/>
+          <p:cNvPr id="13" name="Table 12"/>
           <p:cNvGraphicFramePr>
             <a:graphicFrameLocks noGrp="1"/>
           </p:cNvGraphicFramePr>
           <p:nvPr/>
         </p:nvGraphicFramePr>
         <p:xfrm>
-          <a:off x="502920" y="1417320"/>
-          <a:ext cx="11183111" cy="4480560"/>
+          <a:off x="6263640" y="2240280"/>
+          <a:ext cx="5440679" cy="3611880"/>
         </p:xfrm>
         <a:graphic>
           <a:graphicData uri="http://schemas.openxmlformats.org/drawingml/2006/table">
             <a:tbl>
-              <a:tblPr firstRow="0" bandRow="0">
+              <a:tblPr>
                 <a:tableStyleId>{5C22544A-7EE6-4342-B048-85BDC9FD1C3A}</a:tableStyleId>
               </a:tblPr>
               <a:tblGrid>
-                <a:gridCol w="3354933"/>
-                <a:gridCol w="7828178"/>
+                <a:gridCol w="1523390">
+                  <a:extLst>
+                    <a:ext uri="{9D8B030D-6E8A-4147-A177-3AD203B41FA5}">
+                      <a16:colId xmlns:a16="http://schemas.microsoft.com/office/drawing/2014/main" val="20000"/>
+                    </a:ext>
+                  </a:extLst>
+                </a:gridCol>
+                <a:gridCol w="3917289">
+                  <a:extLst>
+                    <a:ext uri="{9D8B030D-6E8A-4147-A177-3AD203B41FA5}">
+                      <a16:colId xmlns:a16="http://schemas.microsoft.com/office/drawing/2014/main" val="20001"/>
+                    </a:ext>
+                  </a:extLst>
+                </a:gridCol>
               </a:tblGrid>
-              <a:tr h="746760">
+              <a:tr h="902970">
                 <a:tc>
                   <a:txBody>
-                    <a:bodyPr wrap="square"/>
+                    <a:bodyPr/>
                     <a:lstStyle/>
                     <a:p>
                       <a:r>
@@ -4784,7 +5527,7 @@
                           </a:solidFill>
                           <a:latin typeface="맑은 고딕"/>
                         </a:rPr>
-                        <a:t>섹션</a:t>
+                        <a:t>계층</a:t>
                       </a:r>
                     </a:p>
                   </a:txBody>
@@ -4796,7 +5539,7 @@
                 </a:tc>
                 <a:tc>
                   <a:txBody>
-                    <a:bodyPr wrap="square"/>
+                    <a:bodyPr/>
                     <a:lstStyle/>
                     <a:p>
                       <a:r>
@@ -4806,7 +5549,7 @@
                           </a:solidFill>
                           <a:latin typeface="맑은 고딕"/>
                         </a:rPr>
-                        <a:t>내용</a:t>
+                        <a:t>언어 인식 여부</a:t>
                       </a:r>
                     </a:p>
                   </a:txBody>
@@ -4816,25 +5559,30 @@
                     </a:solidFill>
                   </a:tcPr>
                 </a:tc>
+                <a:extLst>
+                  <a:ext uri="{0D108BD9-81ED-4DB2-BD59-A6C34878D82A}">
+                    <a16:rowId xmlns:a16="http://schemas.microsoft.com/office/drawing/2014/main" val="10000"/>
+                  </a:ext>
+                </a:extLst>
               </a:tr>
-              <a:tr h="746760">
+              <a:tr h="902970">
                 <a:tc>
                   <a:txBody>
-                    <a:bodyPr wrap="square"/>
+                    <a:bodyPr/>
                     <a:lstStyle/>
                     <a:p>
                       <a:r>
-                        <a:rPr sz="1400" b="1">
+                        <a:rPr sz="1300" b="1">
                           <a:solidFill>
                             <a:srgbClr val="142A63"/>
                           </a:solidFill>
                           <a:latin typeface="맑은 고딕"/>
                         </a:rPr>
-                        <a:t>01 · 조원 소개 및 역할</a:t>
+                        <a:t>Tokenizer</a:t>
                       </a:r>
                     </a:p>
                   </a:txBody>
-                  <a:tcPr anchor="t" marL="109728" marR="109728" marT="91440" marB="91440">
+                  <a:tcPr marL="109728" marR="109728" marT="91440" marB="91440">
                     <a:solidFill>
                       <a:srgbClr val="FFFFFF"/>
                     </a:solidFill>
@@ -4842,7 +5590,7 @@
                 </a:tc>
                 <a:tc>
                   <a:txBody>
-                    <a:bodyPr wrap="square"/>
+                    <a:bodyPr/>
                     <a:lstStyle/>
                     <a:p>
                       <a:pPr>
@@ -4851,41 +5599,46 @@
                         </a:lnSpc>
                       </a:pPr>
                       <a:r>
-                        <a:rPr sz="1400">
+                        <a:rPr sz="1300">
                           <a:solidFill>
                             <a:srgbClr val="16213A"/>
                           </a:solidFill>
                           <a:latin typeface="맑은 고딕"/>
                         </a:rPr>
-                        <a:t>Name1~Name5, 커밋 이력 기준 실제 담당 기능으로 역할 정리</a:t>
+                        <a:t>한글·영어 표기를 모두 인식해 같은 TokenType으로 통일한다.</a:t>
                       </a:r>
                     </a:p>
                   </a:txBody>
-                  <a:tcPr anchor="t" marL="109728" marR="109728" marT="91440" marB="91440">
+                  <a:tcPr marL="109728" marR="109728" marT="91440" marB="91440">
                     <a:solidFill>
                       <a:srgbClr val="FFFFFF"/>
                     </a:solidFill>
                   </a:tcPr>
                 </a:tc>
+                <a:extLst>
+                  <a:ext uri="{0D108BD9-81ED-4DB2-BD59-A6C34878D82A}">
+                    <a16:rowId xmlns:a16="http://schemas.microsoft.com/office/drawing/2014/main" val="10001"/>
+                  </a:ext>
+                </a:extLst>
               </a:tr>
-              <a:tr h="746760">
+              <a:tr h="902970">
                 <a:tc>
                   <a:txBody>
-                    <a:bodyPr wrap="square"/>
+                    <a:bodyPr/>
                     <a:lstStyle/>
                     <a:p>
                       <a:r>
-                        <a:rPr sz="1400" b="1">
+                        <a:rPr sz="1300" b="1">
                           <a:solidFill>
                             <a:srgbClr val="142A63"/>
                           </a:solidFill>
                           <a:latin typeface="맑은 고딕"/>
                         </a:rPr>
-                        <a:t>02 · 기능 구현 소개</a:t>
+                        <a:t>AST / Checker / Executor</a:t>
                       </a:r>
                     </a:p>
                   </a:txBody>
-                  <a:tcPr anchor="t" marL="109728" marR="109728" marT="91440" marB="91440">
+                  <a:tcPr marL="109728" marR="109728" marT="91440" marB="91440">
                     <a:solidFill>
                       <a:srgbClr val="FFFFFF"/>
                     </a:solidFill>
@@ -4893,7 +5646,7 @@
                 </a:tc>
                 <a:tc>
                   <a:txBody>
-                    <a:bodyPr wrap="square"/>
+                    <a:bodyPr/>
                     <a:lstStyle/>
                     <a:p>
                       <a:pPr>
@@ -4902,41 +5655,46 @@
                         </a:lnSpc>
                       </a:pPr>
                       <a:r>
-                        <a:rPr sz="1400">
+                        <a:rPr sz="1300">
                           <a:solidFill>
                             <a:srgbClr val="16213A"/>
                           </a:solidFill>
                           <a:latin typeface="맑은 고딕"/>
                         </a:rPr>
-                        <a:t>Assembler·Checker·Executor 파이프라인 구조 + Chapter별 구현 기능 정리</a:t>
+                        <a:t>표기 언어와 완전히 무관 — TokenType enum 값만 보고 동작한다.</a:t>
                       </a:r>
                     </a:p>
                   </a:txBody>
-                  <a:tcPr anchor="t" marL="109728" marR="109728" marT="91440" marB="91440">
+                  <a:tcPr marL="109728" marR="109728" marT="91440" marB="91440">
                     <a:solidFill>
                       <a:srgbClr val="FFFFFF"/>
                     </a:solidFill>
                   </a:tcPr>
                 </a:tc>
+                <a:extLst>
+                  <a:ext uri="{0D108BD9-81ED-4DB2-BD59-A6C34878D82A}">
+                    <a16:rowId xmlns:a16="http://schemas.microsoft.com/office/drawing/2014/main" val="10002"/>
+                  </a:ext>
+                </a:extLst>
               </a:tr>
-              <a:tr h="746760">
+              <a:tr h="902970">
                 <a:tc>
                   <a:txBody>
-                    <a:bodyPr wrap="square"/>
+                    <a:bodyPr/>
                     <a:lstStyle/>
                     <a:p>
                       <a:r>
-                        <a:rPr sz="1400" b="1">
+                        <a:rPr sz="1300" b="1">
                           <a:solidFill>
                             <a:srgbClr val="142A63"/>
                           </a:solidFill>
                           <a:latin typeface="맑은 고딕"/>
                         </a:rPr>
-                        <a:t>03 · Best Practice 3선</a:t>
+                        <a:t>확장 비용</a:t>
                       </a:r>
                     </a:p>
                   </a:txBody>
-                  <a:tcPr anchor="t" marL="109728" marR="109728" marT="91440" marB="91440">
+                  <a:tcPr marL="109728" marR="109728" marT="91440" marB="91440">
                     <a:solidFill>
                       <a:srgbClr val="FFFFFF"/>
                     </a:solidFill>
@@ -4944,7 +5702,7 @@
                 </a:tc>
                 <a:tc>
                   <a:txBody>
-                    <a:bodyPr wrap="square"/>
+                    <a:bodyPr/>
                     <a:lstStyle/>
                     <a:p>
                       <a:pPr>
@@ -4953,130 +5711,38 @@
                         </a:lnSpc>
                       </a:pPr>
                       <a:r>
-                        <a:rPr sz="1400">
+                        <a:rPr sz="1300">
                           <a:solidFill>
                             <a:srgbClr val="16213A"/>
                           </a:solidFill>
                           <a:latin typeface="맑은 고딕"/>
                         </a:rPr>
-                        <a:t>TDD 전략, 리팩토링 원칙, 한글 키워드 언어 설계 — 코드 리뷰로 확인한 근거 있는 사례</a:t>
+                        <a:t>새 표기를 추가할 때 KEYWORDS 테이블 한 줄만 고치면 된다. 실제로 func/return이 함수/반환과 동일하게 동작함을 테스트로 검증했다.</a:t>
                       </a:r>
                     </a:p>
                   </a:txBody>
-                  <a:tcPr anchor="t" marL="109728" marR="109728" marT="91440" marB="91440">
+                  <a:tcPr marL="109728" marR="109728" marT="91440" marB="91440">
                     <a:solidFill>
                       <a:srgbClr val="FFFFFF"/>
                     </a:solidFill>
                   </a:tcPr>
                 </a:tc>
-              </a:tr>
-              <a:tr h="746760">
-                <a:tc>
-                  <a:txBody>
-                    <a:bodyPr wrap="square"/>
-                    <a:lstStyle/>
-                    <a:p>
-                      <a:r>
-                        <a:rPr sz="1400" b="1">
-                          <a:solidFill>
-                            <a:srgbClr val="142A63"/>
-                          </a:solidFill>
-                          <a:latin typeface="맑은 고딕"/>
-                        </a:rPr>
-                        <a:t>04 · 프로젝트 시연</a:t>
-                      </a:r>
-                    </a:p>
-                  </a:txBody>
-                  <a:tcPr anchor="t" marL="109728" marR="109728" marT="91440" marB="91440">
-                    <a:solidFill>
-                      <a:srgbClr val="FFFFFF"/>
-                    </a:solidFill>
-                  </a:tcPr>
-                </a:tc>
-                <a:tc>
-                  <a:txBody>
-                    <a:bodyPr wrap="square"/>
-                    <a:lstStyle/>
-                    <a:p>
-                      <a:pPr>
-                        <a:lnSpc>
-                          <a:spcPct val="115000"/>
-                        </a:lnSpc>
-                      </a:pPr>
-                      <a:r>
-                        <a:rPr sz="1400">
-                          <a:solidFill>
-                            <a:srgbClr val="16213A"/>
-                          </a:solidFill>
-                          <a:latin typeface="맑은 고딕"/>
-                        </a:rPr>
-                        <a:t>파일 · REPL · 디버그 모드 순서로 기능이 실제로 맞물려 동작하는 모습을 시연</a:t>
-                      </a:r>
-                    </a:p>
-                  </a:txBody>
-                  <a:tcPr anchor="t" marL="109728" marR="109728" marT="91440" marB="91440">
-                    <a:solidFill>
-                      <a:srgbClr val="FFFFFF"/>
-                    </a:solidFill>
-                  </a:tcPr>
-                </a:tc>
-              </a:tr>
-              <a:tr h="746760">
-                <a:tc>
-                  <a:txBody>
-                    <a:bodyPr wrap="square"/>
-                    <a:lstStyle/>
-                    <a:p>
-                      <a:r>
-                        <a:rPr sz="1400" b="1">
-                          <a:solidFill>
-                            <a:srgbClr val="142A63"/>
-                          </a:solidFill>
-                          <a:latin typeface="맑은 고딕"/>
-                        </a:rPr>
-                        <a:t>05 · 소감</a:t>
-                      </a:r>
-                    </a:p>
-                  </a:txBody>
-                  <a:tcPr anchor="t" marL="109728" marR="109728" marT="91440" marB="91440">
-                    <a:solidFill>
-                      <a:srgbClr val="FFFFFF"/>
-                    </a:solidFill>
-                  </a:tcPr>
-                </a:tc>
-                <a:tc>
-                  <a:txBody>
-                    <a:bodyPr wrap="square"/>
-                    <a:lstStyle/>
-                    <a:p>
-                      <a:pPr>
-                        <a:lnSpc>
-                          <a:spcPct val="115000"/>
-                        </a:lnSpc>
-                      </a:pPr>
-                      <a:r>
-                        <a:rPr sz="1400">
-                          <a:solidFill>
-                            <a:srgbClr val="16213A"/>
-                          </a:solidFill>
-                          <a:latin typeface="맑은 고딕"/>
-                        </a:rPr>
-                        <a:t>조원별 한 줄 회고</a:t>
-                      </a:r>
-                    </a:p>
-                  </a:txBody>
-                  <a:tcPr anchor="t" marL="109728" marR="109728" marT="91440" marB="91440">
-                    <a:solidFill>
-                      <a:srgbClr val="FFFFFF"/>
-                    </a:solidFill>
-                  </a:tcPr>
-                </a:tc>
+                <a:extLst>
+                  <a:ext uri="{0D108BD9-81ED-4DB2-BD59-A6C34878D82A}">
+                    <a16:rowId xmlns:a16="http://schemas.microsoft.com/office/drawing/2014/main" val="10003"/>
+                  </a:ext>
+                </a:extLst>
               </a:tr>
             </a:tbl>
           </a:graphicData>
         </a:graphic>
       </p:graphicFrame>
     </p:spTree>
+    <p:extLst>
+      <p:ext uri="{BB962C8B-B14F-4D97-AF65-F5344CB8AC3E}">
+        <p14:creationId xmlns:p14="http://schemas.microsoft.com/office/powerpoint/2010/main" val="1485471015"/>
+      </p:ext>
+    </p:extLst>
   </p:cSld>
   <p:clrMapOvr>
     <a:masterClrMapping/>
@@ -5084,8 +5750,8 @@
 </p:sld>
 </file>
 
-<file path=ppt/slides/slide3.xml><?xml version="1.0" encoding="utf-8"?>
-<p:sld xmlns:a="http://schemas.openxmlformats.org/drawingml/2006/main" xmlns:p="http://schemas.openxmlformats.org/presentationml/2006/main" xmlns:r="http://schemas.openxmlformats.org/officeDocument/2006/relationships">
+<file path=ppt/slides/slide12.xml><?xml version="1.0" encoding="utf-8"?>
+<p:sld xmlns:a="http://schemas.openxmlformats.org/drawingml/2006/main" xmlns:r="http://schemas.openxmlformats.org/officeDocument/2006/relationships" xmlns:p="http://schemas.openxmlformats.org/presentationml/2006/main">
   <p:cSld>
     <p:spTree>
       <p:nvGrpSpPr>
@@ -5093,7 +5759,14 @@
         <p:cNvGrpSpPr/>
         <p:nvPr/>
       </p:nvGrpSpPr>
-      <p:grpSpPr/>
+      <p:grpSpPr>
+        <a:xfrm>
+          <a:off x="0" y="0"/>
+          <a:ext cx="0" cy="0"/>
+          <a:chOff x="0" y="0"/>
+          <a:chExt cx="0" cy="0"/>
+        </a:xfrm>
+      </p:grpSpPr>
       <p:sp>
         <p:nvSpPr>
           <p:cNvPr id="2" name="Rectangle 1"/>
@@ -5135,6 +5808,7 @@
           <a:lstStyle/>
           <a:p>
             <a:pPr algn="ctr"/>
+            <a:endParaRPr/>
           </a:p>
         </p:txBody>
       </p:sp>
@@ -5179,6 +5853,7 @@
           <a:lstStyle/>
           <a:p>
             <a:pPr algn="ctr"/>
+            <a:endParaRPr/>
           </a:p>
         </p:txBody>
       </p:sp>
@@ -5232,7 +5907,7 @@
                 </a:solidFill>
                 <a:latin typeface="Consolas"/>
               </a:rPr>
-              <a:t>01</a:t>
+              <a:t>04</a:t>
             </a:r>
           </a:p>
         </p:txBody>
@@ -5254,7 +5929,7 @@
           <a:noFill/>
         </p:spPr>
         <p:txBody>
-          <a:bodyPr wrap="square" anchor="ctr" lIns="0" rIns="0" tIns="0" bIns="0">
+          <a:bodyPr wrap="square" lIns="0" tIns="0" rIns="0" bIns="0" anchor="ctr">
             <a:spAutoFit/>
           </a:bodyPr>
           <a:lstStyle/>
@@ -5271,7 +5946,7 @@
                 </a:solidFill>
                 <a:latin typeface="맑은 고딕"/>
               </a:rPr>
-              <a:t>조원 소개 및 역할</a:t>
+              <a:t>프로젝트 시연 시나리오</a:t>
             </a:r>
           </a:p>
         </p:txBody>
@@ -5293,7 +5968,7 @@
           <a:noFill/>
         </p:spPr>
         <p:txBody>
-          <a:bodyPr wrap="square" anchor="ctr" lIns="0" rIns="0" tIns="0" bIns="0">
+          <a:bodyPr wrap="square" lIns="0" tIns="0" rIns="0" bIns="0" anchor="ctr">
             <a:spAutoFit/>
           </a:bodyPr>
           <a:lstStyle/>
@@ -5310,7 +5985,7 @@
                 </a:solidFill>
                 <a:latin typeface="맑은 고딕"/>
               </a:rPr>
-              <a:t>Team &amp; Roles</a:t>
+              <a:t>Live Demo</a:t>
             </a:r>
           </a:p>
         </p:txBody>
@@ -5367,7 +6042,7 @@
           <a:noFill/>
         </p:spPr>
         <p:txBody>
-          <a:bodyPr wrap="square" anchor="ctr" lIns="0" rIns="0" tIns="0" bIns="0">
+          <a:bodyPr wrap="square" lIns="0" tIns="0" rIns="0" bIns="0" anchor="ctr">
             <a:spAutoFit/>
           </a:bodyPr>
           <a:lstStyle/>
@@ -5406,7 +6081,7 @@
           <a:noFill/>
         </p:spPr>
         <p:txBody>
-          <a:bodyPr wrap="square" anchor="ctr" lIns="0" rIns="0" tIns="0" bIns="0">
+          <a:bodyPr wrap="square" lIns="0" tIns="0" rIns="0" bIns="0" anchor="ctr">
             <a:spAutoFit/>
           </a:bodyPr>
           <a:lstStyle/>
@@ -5423,7 +6098,7 @@
                 </a:solidFill>
                 <a:latin typeface="Consolas"/>
               </a:rPr>
-              <a:t>3 / 10</a:t>
+              <a:t>10 / 11</a:t>
             </a:r>
           </a:p>
         </p:txBody>
@@ -5469,6 +6144,7 @@
           <a:lstStyle/>
           <a:p>
             <a:pPr algn="ctr"/>
+            <a:endParaRPr/>
           </a:p>
         </p:txBody>
       </p:sp>
@@ -5489,7 +6165,7 @@
           <a:noFill/>
         </p:spPr>
         <p:txBody>
-          <a:bodyPr wrap="square" anchor="ctr" lIns="0" rIns="0" tIns="0" bIns="0">
+          <a:bodyPr wrap="square" lIns="0" tIns="0" rIns="0" bIns="0" anchor="ctr">
             <a:spAutoFit/>
           </a:bodyPr>
           <a:lstStyle/>
@@ -5506,7 +6182,7 @@
                 </a:solidFill>
                 <a:latin typeface="맑은 고딕"/>
               </a:rPr>
-              <a:t>이름은 커밋 로그 기준 자리표시자(Name1~5)이며, 역할은 실제 커밋 이력에서 확인한 담당 기능을 정리했습니다.</a:t>
+              <a:t>파일 모드 → REPL → 디버그 모드 순서로, Chapter 1~7 기능이 실제로 맞물려 동작하는 모습을 보여줍니다.</a:t>
             </a:r>
           </a:p>
         </p:txBody>
@@ -5526,17 +6202,29 @@
         <a:graphic>
           <a:graphicData uri="http://schemas.openxmlformats.org/drawingml/2006/table">
             <a:tbl>
-              <a:tblPr firstRow="0" bandRow="0">
+              <a:tblPr>
                 <a:tableStyleId>{5C22544A-7EE6-4342-B048-85BDC9FD1C3A}</a:tableStyleId>
               </a:tblPr>
               <a:tblGrid>
-                <a:gridCol w="1789297"/>
-                <a:gridCol w="9393814"/>
+                <a:gridCol w="2236622">
+                  <a:extLst>
+                    <a:ext uri="{9D8B030D-6E8A-4147-A177-3AD203B41FA5}">
+                      <a16:colId xmlns:a16="http://schemas.microsoft.com/office/drawing/2014/main" val="20000"/>
+                    </a:ext>
+                  </a:extLst>
+                </a:gridCol>
+                <a:gridCol w="8946489">
+                  <a:extLst>
+                    <a:ext uri="{9D8B030D-6E8A-4147-A177-3AD203B41FA5}">
+                      <a16:colId xmlns:a16="http://schemas.microsoft.com/office/drawing/2014/main" val="20001"/>
+                    </a:ext>
+                  </a:extLst>
+                </a:gridCol>
               </a:tblGrid>
               <a:tr h="594360">
                 <a:tc>
                   <a:txBody>
-                    <a:bodyPr wrap="square"/>
+                    <a:bodyPr/>
                     <a:lstStyle/>
                     <a:p>
                       <a:r>
@@ -5546,7 +6234,7 @@
                           </a:solidFill>
                           <a:latin typeface="맑은 고딕"/>
                         </a:rPr>
-                        <a:t>이름</a:t>
+                        <a:t>순서</a:t>
                       </a:r>
                     </a:p>
                   </a:txBody>
@@ -5558,7 +6246,7 @@
                 </a:tc>
                 <a:tc>
                   <a:txBody>
-                    <a:bodyPr wrap="square"/>
+                    <a:bodyPr/>
                     <a:lstStyle/>
                     <a:p>
                       <a:r>
@@ -5568,7 +6256,7 @@
                           </a:solidFill>
                           <a:latin typeface="맑은 고딕"/>
                         </a:rPr>
-                        <a:t>담당 역할 (커밋 이력 기준)</a:t>
+                        <a:t>보여줄 내용</a:t>
                       </a:r>
                     </a:p>
                   </a:txBody>
@@ -5578,11 +6266,16 @@
                     </a:solidFill>
                   </a:tcPr>
                 </a:tc>
+                <a:extLst>
+                  <a:ext uri="{0D108BD9-81ED-4DB2-BD59-A6C34878D82A}">
+                    <a16:rowId xmlns:a16="http://schemas.microsoft.com/office/drawing/2014/main" val="10000"/>
+                  </a:ext>
+                </a:extLst>
               </a:tr>
               <a:tr h="594360">
                 <a:tc>
                   <a:txBody>
-                    <a:bodyPr wrap="square"/>
+                    <a:bodyPr/>
                     <a:lstStyle/>
                     <a:p>
                       <a:r>
@@ -5592,11 +6285,11 @@
                           </a:solidFill>
                           <a:latin typeface="맑은 고딕"/>
                         </a:rPr>
-                        <a:t>Name1</a:t>
+                        <a:t>1. 파일 모드</a:t>
                       </a:r>
                     </a:p>
                   </a:txBody>
-                  <a:tcPr anchor="t" marL="109728" marR="109728" marT="91440" marB="91440">
+                  <a:tcPr marL="109728" marR="109728" marT="91440" marB="91440">
                     <a:solidFill>
                       <a:srgbClr val="FFFFFF"/>
                     </a:solidFill>
@@ -5604,7 +6297,7 @@
                 </a:tc>
                 <a:tc>
                   <a:txBody>
-                    <a:bodyPr wrap="square"/>
+                    <a:bodyPr/>
                     <a:lstStyle/>
                     <a:p>
                       <a:pPr>
@@ -5619,21 +6312,26 @@
                           </a:solidFill>
                           <a:latin typeface="맑은 고딕"/>
                         </a:rPr>
-                        <a:t>파이프라인 통합 · CLI/REPL 진입점 · import(Ch.6) 기능 · 전체 통합 테스트(fixture) 총괄</a:t>
+                        <a:t>`codefab run`으로 클래스+함수+상속이 함께 있는 예제 실행 → 정상 출력 확인</a:t>
                       </a:r>
                     </a:p>
                   </a:txBody>
-                  <a:tcPr anchor="t" marL="109728" marR="109728" marT="91440" marB="91440">
+                  <a:tcPr marL="109728" marR="109728" marT="91440" marB="91440">
                     <a:solidFill>
                       <a:srgbClr val="FFFFFF"/>
                     </a:solidFill>
                   </a:tcPr>
                 </a:tc>
+                <a:extLst>
+                  <a:ext uri="{0D108BD9-81ED-4DB2-BD59-A6C34878D82A}">
+                    <a16:rowId xmlns:a16="http://schemas.microsoft.com/office/drawing/2014/main" val="10001"/>
+                  </a:ext>
+                </a:extLst>
               </a:tr>
               <a:tr h="594360">
                 <a:tc>
                   <a:txBody>
-                    <a:bodyPr wrap="square"/>
+                    <a:bodyPr/>
                     <a:lstStyle/>
                     <a:p>
                       <a:r>
@@ -5643,11 +6341,11 @@
                           </a:solidFill>
                           <a:latin typeface="맑은 고딕"/>
                         </a:rPr>
-                        <a:t>Name2</a:t>
+                        <a:t>2. REPL 모드</a:t>
                       </a:r>
                     </a:p>
                   </a:txBody>
-                  <a:tcPr anchor="t" marL="109728" marR="109728" marT="91440" marB="91440">
+                  <a:tcPr marL="109728" marR="109728" marT="91440" marB="91440">
                     <a:solidFill>
                       <a:srgbClr val="FFFFFF"/>
                     </a:solidFill>
@@ -5655,7 +6353,7 @@
                 </a:tc>
                 <a:tc>
                   <a:txBody>
-                    <a:bodyPr wrap="square"/>
+                    <a:bodyPr/>
                     <a:lstStyle/>
                     <a:p>
                       <a:pPr>
@@ -5670,21 +6368,26 @@
                           </a:solidFill>
                           <a:latin typeface="맑은 고딕"/>
                         </a:rPr>
-                        <a:t>토크나이저 &amp; 한글 키워드 매핑 · 디버그 모드(Ch.7 공장 제어 쉘) 구현</a:t>
+                        <a:t>변수 선언·조건문을 한 줄씩 입력해 대화형으로 실행하는 모습 시연</a:t>
                       </a:r>
                     </a:p>
                   </a:txBody>
-                  <a:tcPr anchor="t" marL="109728" marR="109728" marT="91440" marB="91440">
+                  <a:tcPr marL="109728" marR="109728" marT="91440" marB="91440">
                     <a:solidFill>
                       <a:srgbClr val="FFFFFF"/>
                     </a:solidFill>
                   </a:tcPr>
                 </a:tc>
+                <a:extLst>
+                  <a:ext uri="{0D108BD9-81ED-4DB2-BD59-A6C34878D82A}">
+                    <a16:rowId xmlns:a16="http://schemas.microsoft.com/office/drawing/2014/main" val="10002"/>
+                  </a:ext>
+                </a:extLst>
               </a:tr>
               <a:tr h="594360">
                 <a:tc>
                   <a:txBody>
-                    <a:bodyPr wrap="square"/>
+                    <a:bodyPr/>
                     <a:lstStyle/>
                     <a:p>
                       <a:r>
@@ -5694,11 +6397,11 @@
                           </a:solidFill>
                           <a:latin typeface="맑은 고딕"/>
                         </a:rPr>
-                        <a:t>Name3</a:t>
+                        <a:t>3. 디버그 모드</a:t>
                       </a:r>
                     </a:p>
                   </a:txBody>
-                  <a:tcPr anchor="t" marL="109728" marR="109728" marT="91440" marB="91440">
+                  <a:tcPr marL="109728" marR="109728" marT="91440" marB="91440">
                     <a:solidFill>
                       <a:srgbClr val="FFFFFF"/>
                     </a:solidFill>
@@ -5706,7 +6409,7 @@
                 </a:tc>
                 <a:tc>
                   <a:txBody>
-                    <a:bodyPr wrap="square"/>
+                    <a:bodyPr/>
                     <a:lstStyle/>
                     <a:p>
                       <a:pPr>
@@ -5721,21 +6424,26 @@
                           </a:solidFill>
                           <a:latin typeface="맑은 고딕"/>
                         </a:rPr>
-                        <a:t>클래스(Ch.3) 기능 전체 구현(선언·필드·메서드·상속·instanceof) · Executor Unit 리팩토링</a:t>
+                        <a:t>`codefab debug`에서 step/breakpoint/watch로 함수 호출과 변수 변화를 실시간 관찰</a:t>
                       </a:r>
                     </a:p>
                   </a:txBody>
-                  <a:tcPr anchor="t" marL="109728" marR="109728" marT="91440" marB="91440">
+                  <a:tcPr marL="109728" marR="109728" marT="91440" marB="91440">
                     <a:solidFill>
                       <a:srgbClr val="FFFFFF"/>
                     </a:solidFill>
                   </a:tcPr>
                 </a:tc>
+                <a:extLst>
+                  <a:ext uri="{0D108BD9-81ED-4DB2-BD59-A6C34878D82A}">
+                    <a16:rowId xmlns:a16="http://schemas.microsoft.com/office/drawing/2014/main" val="10003"/>
+                  </a:ext>
+                </a:extLst>
               </a:tr>
               <a:tr h="594360">
                 <a:tc>
                   <a:txBody>
-                    <a:bodyPr wrap="square"/>
+                    <a:bodyPr/>
                     <a:lstStyle/>
                     <a:p>
                       <a:r>
@@ -5745,11 +6453,11 @@
                           </a:solidFill>
                           <a:latin typeface="맑은 고딕"/>
                         </a:rPr>
-                        <a:t>Name4</a:t>
+                        <a:t>4. import</a:t>
                       </a:r>
                     </a:p>
                   </a:txBody>
-                  <a:tcPr anchor="t" marL="109728" marR="109728" marT="91440" marB="91440">
+                  <a:tcPr marL="109728" marR="109728" marT="91440" marB="91440">
                     <a:solidFill>
                       <a:srgbClr val="FFFFFF"/>
                     </a:solidFill>
@@ -5757,7 +6465,7 @@
                 </a:tc>
                 <a:tc>
                   <a:txBody>
-                    <a:bodyPr wrap="square"/>
+                    <a:bodyPr/>
                     <a:lstStyle/>
                     <a:p>
                       <a:pPr>
@@ -5772,21 +6480,26 @@
                           </a:solidFill>
                           <a:latin typeface="맑은 고딕"/>
                         </a:rPr>
-                        <a:t>정적 배열(Ch.4) 구현 · 실행 전 최적화(Ch.5, Resolver/Optimizer) · 문법·타입힌트 리팩토링</a:t>
+                        <a:t>분리된 모듈(.laugh) 파일을 불러와 변수·함수를 재사용하는 예제 실행</a:t>
                       </a:r>
                     </a:p>
                   </a:txBody>
-                  <a:tcPr anchor="t" marL="109728" marR="109728" marT="91440" marB="91440">
+                  <a:tcPr marL="109728" marR="109728" marT="91440" marB="91440">
                     <a:solidFill>
                       <a:srgbClr val="FFFFFF"/>
                     </a:solidFill>
                   </a:tcPr>
                 </a:tc>
+                <a:extLst>
+                  <a:ext uri="{0D108BD9-81ED-4DB2-BD59-A6C34878D82A}">
+                    <a16:rowId xmlns:a16="http://schemas.microsoft.com/office/drawing/2014/main" val="10004"/>
+                  </a:ext>
+                </a:extLst>
               </a:tr>
               <a:tr h="594360">
                 <a:tc>
                   <a:txBody>
-                    <a:bodyPr wrap="square"/>
+                    <a:bodyPr/>
                     <a:lstStyle/>
                     <a:p>
                       <a:r>
@@ -5796,11 +6509,11 @@
                           </a:solidFill>
                           <a:latin typeface="맑은 고딕"/>
                         </a:rPr>
-                        <a:t>Name5</a:t>
+                        <a:t>5. 에러 케이스</a:t>
                       </a:r>
                     </a:p>
                   </a:txBody>
-                  <a:tcPr anchor="t" marL="109728" marR="109728" marT="91440" marB="91440">
+                  <a:tcPr marL="109728" marR="109728" marT="91440" marB="91440">
                     <a:solidFill>
                       <a:srgbClr val="FFFFFF"/>
                     </a:solidFill>
@@ -5808,7 +6521,7 @@
                 </a:tc>
                 <a:tc>
                   <a:txBody>
-                    <a:bodyPr wrap="square"/>
+                    <a:bodyPr/>
                     <a:lstStyle/>
                     <a:p>
                       <a:pPr>
@@ -5823,16 +6536,2835 @@
                           </a:solidFill>
                           <a:latin typeface="맑은 고딕"/>
                         </a:rPr>
-                        <a:t>Checker Unit 초기 설계(변수 스코프·에러 검출) · 에러 모듈 통합 · 함수(Ch.2) 기능 초기 구현</a:t>
+                        <a:t>의도적으로 잘못된 스크립트 실행 → 정확한 한글 에러 메시지와 줄 번호 확인</a:t>
                       </a:r>
                     </a:p>
                   </a:txBody>
-                  <a:tcPr anchor="t" marL="109728" marR="109728" marT="91440" marB="91440">
+                  <a:tcPr marL="109728" marR="109728" marT="91440" marB="91440">
                     <a:solidFill>
                       <a:srgbClr val="FFFFFF"/>
                     </a:solidFill>
                   </a:tcPr>
                 </a:tc>
+                <a:extLst>
+                  <a:ext uri="{0D108BD9-81ED-4DB2-BD59-A6C34878D82A}">
+                    <a16:rowId xmlns:a16="http://schemas.microsoft.com/office/drawing/2014/main" val="10005"/>
+                  </a:ext>
+                </a:extLst>
+              </a:tr>
+            </a:tbl>
+          </a:graphicData>
+        </a:graphic>
+      </p:graphicFrame>
+    </p:spTree>
+  </p:cSld>
+  <p:clrMapOvr>
+    <a:masterClrMapping/>
+  </p:clrMapOvr>
+</p:sld>
+</file>
+
+<file path=ppt/slides/slide13.xml><?xml version="1.0" encoding="utf-8"?>
+<p:sld xmlns:a="http://schemas.openxmlformats.org/drawingml/2006/main" xmlns:r="http://schemas.openxmlformats.org/officeDocument/2006/relationships" xmlns:p="http://schemas.openxmlformats.org/presentationml/2006/main">
+  <p:cSld>
+    <p:spTree>
+      <p:nvGrpSpPr>
+        <p:cNvPr id="1" name=""/>
+        <p:cNvGrpSpPr/>
+        <p:nvPr/>
+      </p:nvGrpSpPr>
+      <p:grpSpPr>
+        <a:xfrm>
+          <a:off x="0" y="0"/>
+          <a:ext cx="0" cy="0"/>
+          <a:chOff x="0" y="0"/>
+          <a:chExt cx="0" cy="0"/>
+        </a:xfrm>
+      </p:grpSpPr>
+      <p:sp>
+        <p:nvSpPr>
+          <p:cNvPr id="2" name="Rectangle 1"/>
+          <p:cNvSpPr/>
+          <p:nvPr/>
+        </p:nvSpPr>
+        <p:spPr>
+          <a:xfrm>
+            <a:off x="0" y="0"/>
+            <a:ext cx="12191695" cy="6858000"/>
+          </a:xfrm>
+          <a:prstGeom prst="rect">
+            <a:avLst/>
+          </a:prstGeom>
+          <a:solidFill>
+            <a:srgbClr val="FFFFFF"/>
+          </a:solidFill>
+          <a:ln>
+            <a:noFill/>
+          </a:ln>
+          <a:effectLst/>
+        </p:spPr>
+        <p:style>
+          <a:lnRef idx="1">
+            <a:schemeClr val="accent1"/>
+          </a:lnRef>
+          <a:fillRef idx="3">
+            <a:schemeClr val="accent1"/>
+          </a:fillRef>
+          <a:effectRef idx="2">
+            <a:schemeClr val="accent1"/>
+          </a:effectRef>
+          <a:fontRef idx="minor">
+            <a:schemeClr val="lt1"/>
+          </a:fontRef>
+        </p:style>
+        <p:txBody>
+          <a:bodyPr rtlCol="0" anchor="ctr"/>
+          <a:lstStyle/>
+          <a:p>
+            <a:pPr algn="ctr"/>
+            <a:endParaRPr/>
+          </a:p>
+        </p:txBody>
+      </p:sp>
+      <p:sp>
+        <p:nvSpPr>
+          <p:cNvPr id="3" name="Rectangle 2"/>
+          <p:cNvSpPr/>
+          <p:nvPr/>
+        </p:nvSpPr>
+        <p:spPr>
+          <a:xfrm>
+            <a:off x="0" y="0"/>
+            <a:ext cx="12191695" cy="1051560"/>
+          </a:xfrm>
+          <a:prstGeom prst="rect">
+            <a:avLst/>
+          </a:prstGeom>
+          <a:solidFill>
+            <a:srgbClr val="1F3C88"/>
+          </a:solidFill>
+          <a:ln>
+            <a:noFill/>
+          </a:ln>
+          <a:effectLst/>
+        </p:spPr>
+        <p:style>
+          <a:lnRef idx="1">
+            <a:schemeClr val="accent1"/>
+          </a:lnRef>
+          <a:fillRef idx="3">
+            <a:schemeClr val="accent1"/>
+          </a:fillRef>
+          <a:effectRef idx="2">
+            <a:schemeClr val="accent1"/>
+          </a:effectRef>
+          <a:fontRef idx="minor">
+            <a:schemeClr val="lt1"/>
+          </a:fontRef>
+        </p:style>
+        <p:txBody>
+          <a:bodyPr rtlCol="0" anchor="ctr"/>
+          <a:lstStyle/>
+          <a:p>
+            <a:pPr algn="ctr"/>
+            <a:endParaRPr/>
+          </a:p>
+        </p:txBody>
+      </p:sp>
+      <p:sp>
+        <p:nvSpPr>
+          <p:cNvPr id="4" name="Rounded Rectangle 3"/>
+          <p:cNvSpPr/>
+          <p:nvPr/>
+        </p:nvSpPr>
+        <p:spPr>
+          <a:xfrm>
+            <a:off x="502920" y="329184"/>
+            <a:ext cx="566928" cy="384048"/>
+          </a:xfrm>
+          <a:prstGeom prst="roundRect">
+            <a:avLst>
+              <a:gd name="adj" fmla="val 30000"/>
+            </a:avLst>
+          </a:prstGeom>
+          <a:solidFill>
+            <a:srgbClr val="142A63"/>
+          </a:solidFill>
+          <a:ln>
+            <a:noFill/>
+          </a:ln>
+          <a:effectLst/>
+        </p:spPr>
+        <p:style>
+          <a:lnRef idx="1">
+            <a:schemeClr val="accent1"/>
+          </a:lnRef>
+          <a:fillRef idx="3">
+            <a:schemeClr val="accent1"/>
+          </a:fillRef>
+          <a:effectRef idx="2">
+            <a:schemeClr val="accent1"/>
+          </a:effectRef>
+          <a:fontRef idx="minor">
+            <a:schemeClr val="lt1"/>
+          </a:fontRef>
+        </p:style>
+        <p:txBody>
+          <a:bodyPr rtlCol="0" anchor="ctr"/>
+          <a:lstStyle/>
+          <a:p>
+            <a:pPr algn="ctr"/>
+            <a:r>
+              <a:rPr sz="1300" b="1">
+                <a:solidFill>
+                  <a:srgbClr val="FFFFFF"/>
+                </a:solidFill>
+                <a:latin typeface="Consolas"/>
+              </a:rPr>
+              <a:t>05</a:t>
+            </a:r>
+          </a:p>
+        </p:txBody>
+      </p:sp>
+      <p:sp>
+        <p:nvSpPr>
+          <p:cNvPr id="5" name="TextBox 4"/>
+          <p:cNvSpPr txBox="1"/>
+          <p:nvPr/>
+        </p:nvSpPr>
+        <p:spPr>
+          <a:xfrm>
+            <a:off x="1234440" y="256032"/>
+            <a:ext cx="7863840" cy="548640"/>
+          </a:xfrm>
+          <a:prstGeom prst="rect">
+            <a:avLst/>
+          </a:prstGeom>
+          <a:noFill/>
+        </p:spPr>
+        <p:txBody>
+          <a:bodyPr wrap="square" lIns="0" tIns="0" rIns="0" bIns="0" anchor="ctr">
+            <a:spAutoFit/>
+          </a:bodyPr>
+          <a:lstStyle/>
+          <a:p>
+            <a:pPr algn="l">
+              <a:lnSpc>
+                <a:spcPct val="115000"/>
+              </a:lnSpc>
+            </a:pPr>
+            <a:r>
+              <a:rPr sz="2200" b="1">
+                <a:solidFill>
+                  <a:srgbClr val="FFFFFF"/>
+                </a:solidFill>
+                <a:latin typeface="맑은 고딕"/>
+              </a:rPr>
+              <a:t>소감</a:t>
+            </a:r>
+          </a:p>
+        </p:txBody>
+      </p:sp>
+      <p:sp>
+        <p:nvSpPr>
+          <p:cNvPr id="6" name="TextBox 5"/>
+          <p:cNvSpPr txBox="1"/>
+          <p:nvPr/>
+        </p:nvSpPr>
+        <p:spPr>
+          <a:xfrm>
+            <a:off x="8595360" y="256032"/>
+            <a:ext cx="3108960" cy="548640"/>
+          </a:xfrm>
+          <a:prstGeom prst="rect">
+            <a:avLst/>
+          </a:prstGeom>
+          <a:noFill/>
+        </p:spPr>
+        <p:txBody>
+          <a:bodyPr wrap="square" lIns="0" tIns="0" rIns="0" bIns="0" anchor="ctr">
+            <a:spAutoFit/>
+          </a:bodyPr>
+          <a:lstStyle/>
+          <a:p>
+            <a:pPr algn="r">
+              <a:lnSpc>
+                <a:spcPct val="115000"/>
+              </a:lnSpc>
+            </a:pPr>
+            <a:r>
+              <a:rPr sz="1200" b="1">
+                <a:solidFill>
+                  <a:srgbClr val="D8E1F7"/>
+                </a:solidFill>
+                <a:latin typeface="맑은 고딕"/>
+              </a:rPr>
+              <a:t>Retrospective</a:t>
+            </a:r>
+          </a:p>
+        </p:txBody>
+      </p:sp>
+      <p:cxnSp>
+        <p:nvCxnSpPr>
+          <p:cNvPr id="7" name="Connector 6"/>
+          <p:cNvCxnSpPr/>
+          <p:nvPr/>
+        </p:nvCxnSpPr>
+        <p:spPr>
+          <a:xfrm>
+            <a:off x="502920" y="6355080"/>
+            <a:ext cx="11183112" cy="0"/>
+          </a:xfrm>
+          <a:prstGeom prst="line">
+            <a:avLst/>
+          </a:prstGeom>
+          <a:ln w="12700">
+            <a:solidFill>
+              <a:srgbClr val="CFD9EE"/>
+            </a:solidFill>
+          </a:ln>
+        </p:spPr>
+        <p:style>
+          <a:lnRef idx="2">
+            <a:schemeClr val="accent1"/>
+          </a:lnRef>
+          <a:fillRef idx="0">
+            <a:schemeClr val="accent1"/>
+          </a:fillRef>
+          <a:effectRef idx="1">
+            <a:schemeClr val="accent1"/>
+          </a:effectRef>
+          <a:fontRef idx="minor">
+            <a:schemeClr val="tx1"/>
+          </a:fontRef>
+        </p:style>
+      </p:cxnSp>
+      <p:sp>
+        <p:nvSpPr>
+          <p:cNvPr id="8" name="TextBox 7"/>
+          <p:cNvSpPr txBox="1"/>
+          <p:nvPr/>
+        </p:nvSpPr>
+        <p:spPr>
+          <a:xfrm>
+            <a:off x="502920" y="6446520"/>
+            <a:ext cx="5486400" cy="320040"/>
+          </a:xfrm>
+          <a:prstGeom prst="rect">
+            <a:avLst/>
+          </a:prstGeom>
+          <a:noFill/>
+        </p:spPr>
+        <p:txBody>
+          <a:bodyPr wrap="square" lIns="0" tIns="0" rIns="0" bIns="0" anchor="ctr">
+            <a:spAutoFit/>
+          </a:bodyPr>
+          <a:lstStyle/>
+          <a:p>
+            <a:pPr algn="l">
+              <a:lnSpc>
+                <a:spcPct val="115000"/>
+              </a:lnSpc>
+            </a:pPr>
+            <a:r>
+              <a:rPr sz="1050" b="0">
+                <a:solidFill>
+                  <a:srgbClr val="5B6B8C"/>
+                </a:solidFill>
+                <a:latin typeface="Consolas"/>
+              </a:rPr>
+              <a:t>CodeFab Interpreter · 5일차 발표</a:t>
+            </a:r>
+          </a:p>
+        </p:txBody>
+      </p:sp>
+      <p:sp>
+        <p:nvSpPr>
+          <p:cNvPr id="9" name="TextBox 8"/>
+          <p:cNvSpPr txBox="1"/>
+          <p:nvPr/>
+        </p:nvSpPr>
+        <p:spPr>
+          <a:xfrm>
+            <a:off x="10424160" y="6446520"/>
+            <a:ext cx="1261872" cy="320040"/>
+          </a:xfrm>
+          <a:prstGeom prst="rect">
+            <a:avLst/>
+          </a:prstGeom>
+          <a:noFill/>
+        </p:spPr>
+        <p:txBody>
+          <a:bodyPr wrap="square" lIns="0" tIns="0" rIns="0" bIns="0" anchor="ctr">
+            <a:spAutoFit/>
+          </a:bodyPr>
+          <a:lstStyle/>
+          <a:p>
+            <a:pPr algn="r">
+              <a:lnSpc>
+                <a:spcPct val="115000"/>
+              </a:lnSpc>
+            </a:pPr>
+            <a:r>
+              <a:rPr sz="1050" b="0">
+                <a:solidFill>
+                  <a:srgbClr val="5B6B8C"/>
+                </a:solidFill>
+                <a:latin typeface="Consolas"/>
+              </a:rPr>
+              <a:t>11 / 11</a:t>
+            </a:r>
+          </a:p>
+        </p:txBody>
+      </p:sp>
+      <p:graphicFrame>
+        <p:nvGraphicFramePr>
+          <p:cNvPr id="10" name="Table 9"/>
+          <p:cNvGraphicFramePr>
+            <a:graphicFrameLocks noGrp="1"/>
+          </p:cNvGraphicFramePr>
+          <p:nvPr>
+            <p:extLst>
+              <p:ext uri="{D42A27DB-BD31-4B8C-83A1-F6EECF244321}">
+                <p14:modId xmlns:p14="http://schemas.microsoft.com/office/powerpoint/2010/main" val="526973472"/>
+              </p:ext>
+            </p:extLst>
+          </p:nvPr>
+        </p:nvGraphicFramePr>
+        <p:xfrm>
+          <a:off x="502920" y="1417320"/>
+          <a:ext cx="11183111" cy="4297680"/>
+        </p:xfrm>
+        <a:graphic>
+          <a:graphicData uri="http://schemas.openxmlformats.org/drawingml/2006/table">
+            <a:tbl>
+              <a:tblPr>
+                <a:tableStyleId>{5C22544A-7EE6-4342-B048-85BDC9FD1C3A}</a:tableStyleId>
+              </a:tblPr>
+              <a:tblGrid>
+                <a:gridCol w="1565635">
+                  <a:extLst>
+                    <a:ext uri="{9D8B030D-6E8A-4147-A177-3AD203B41FA5}">
+                      <a16:colId xmlns:a16="http://schemas.microsoft.com/office/drawing/2014/main" val="20000"/>
+                    </a:ext>
+                  </a:extLst>
+                </a:gridCol>
+                <a:gridCol w="9617476">
+                  <a:extLst>
+                    <a:ext uri="{9D8B030D-6E8A-4147-A177-3AD203B41FA5}">
+                      <a16:colId xmlns:a16="http://schemas.microsoft.com/office/drawing/2014/main" val="20001"/>
+                    </a:ext>
+                  </a:extLst>
+                </a:gridCol>
+              </a:tblGrid>
+              <a:tr h="716280">
+                <a:tc>
+                  <a:txBody>
+                    <a:bodyPr/>
+                    <a:lstStyle/>
+                    <a:p>
+                      <a:r>
+                        <a:rPr sz="1100" b="1">
+                          <a:solidFill>
+                            <a:srgbClr val="5B6B8C"/>
+                          </a:solidFill>
+                          <a:latin typeface="맑은 고딕"/>
+                        </a:rPr>
+                        <a:t>이름</a:t>
+                      </a:r>
+                    </a:p>
+                  </a:txBody>
+                  <a:tcPr marL="109728" marR="109728" marT="54864" marB="54864" anchor="b">
+                    <a:solidFill>
+                      <a:srgbClr val="FFFFFF"/>
+                    </a:solidFill>
+                  </a:tcPr>
+                </a:tc>
+                <a:tc>
+                  <a:txBody>
+                    <a:bodyPr/>
+                    <a:lstStyle/>
+                    <a:p>
+                      <a:r>
+                        <a:rPr sz="1100" b="1" dirty="0" err="1">
+                          <a:solidFill>
+                            <a:srgbClr val="5B6B8C"/>
+                          </a:solidFill>
+                          <a:latin typeface="맑은 고딕"/>
+                        </a:rPr>
+                        <a:t>소감</a:t>
+                      </a:r>
+                      <a:endParaRPr sz="1100" b="1" dirty="0">
+                        <a:solidFill>
+                          <a:srgbClr val="5B6B8C"/>
+                        </a:solidFill>
+                        <a:latin typeface="맑은 고딕"/>
+                      </a:endParaRPr>
+                    </a:p>
+                  </a:txBody>
+                  <a:tcPr marL="109728" marR="109728" marT="54864" marB="54864" anchor="b">
+                    <a:solidFill>
+                      <a:srgbClr val="FFFFFF"/>
+                    </a:solidFill>
+                  </a:tcPr>
+                </a:tc>
+                <a:extLst>
+                  <a:ext uri="{0D108BD9-81ED-4DB2-BD59-A6C34878D82A}">
+                    <a16:rowId xmlns:a16="http://schemas.microsoft.com/office/drawing/2014/main" val="10000"/>
+                  </a:ext>
+                </a:extLst>
+              </a:tr>
+              <a:tr h="716280">
+                <a:tc>
+                  <a:txBody>
+                    <a:bodyPr/>
+                    <a:lstStyle/>
+                    <a:p>
+                      <a:r>
+                        <a:rPr lang="ko-KR" altLang="en-US" sz="1350" b="1" dirty="0" err="1">
+                          <a:solidFill>
+                            <a:srgbClr val="142A63"/>
+                          </a:solidFill>
+                          <a:latin typeface="맑은 고딕"/>
+                        </a:rPr>
+                        <a:t>김병남</a:t>
+                      </a:r>
+                      <a:endParaRPr sz="1350" b="1" dirty="0">
+                        <a:solidFill>
+                          <a:srgbClr val="142A63"/>
+                        </a:solidFill>
+                        <a:latin typeface="맑은 고딕"/>
+                      </a:endParaRPr>
+                    </a:p>
+                  </a:txBody>
+                  <a:tcPr marL="109728" marR="109728" marT="91440" marB="91440">
+                    <a:solidFill>
+                      <a:srgbClr val="FFFFFF"/>
+                    </a:solidFill>
+                  </a:tcPr>
+                </a:tc>
+                <a:tc>
+                  <a:txBody>
+                    <a:bodyPr/>
+                    <a:lstStyle/>
+                    <a:p>
+                      <a:pPr>
+                        <a:lnSpc>
+                          <a:spcPct val="115000"/>
+                        </a:lnSpc>
+                      </a:pPr>
+                      <a:r>
+                        <a:rPr sz="1350">
+                          <a:solidFill>
+                            <a:srgbClr val="16213A"/>
+                          </a:solidFill>
+                          <a:latin typeface="맑은 고딕"/>
+                        </a:rPr>
+                        <a:t>여러 브랜치를 하나의 파이프라인으로 배선하면서, 통합 테스트가 왜 필요한지 몸으로 느꼈다.</a:t>
+                      </a:r>
+                    </a:p>
+                  </a:txBody>
+                  <a:tcPr marL="109728" marR="109728" marT="91440" marB="91440">
+                    <a:solidFill>
+                      <a:srgbClr val="FFFFFF"/>
+                    </a:solidFill>
+                  </a:tcPr>
+                </a:tc>
+                <a:extLst>
+                  <a:ext uri="{0D108BD9-81ED-4DB2-BD59-A6C34878D82A}">
+                    <a16:rowId xmlns:a16="http://schemas.microsoft.com/office/drawing/2014/main" val="10001"/>
+                  </a:ext>
+                </a:extLst>
+              </a:tr>
+              <a:tr h="716280">
+                <a:tc>
+                  <a:txBody>
+                    <a:bodyPr/>
+                    <a:lstStyle/>
+                    <a:p>
+                      <a:r>
+                        <a:rPr lang="ko-KR" altLang="en-US" sz="1350" b="1" dirty="0" err="1">
+                          <a:solidFill>
+                            <a:srgbClr val="142A63"/>
+                          </a:solidFill>
+                          <a:latin typeface="맑은 고딕"/>
+                        </a:rPr>
+                        <a:t>조승주</a:t>
+                      </a:r>
+                      <a:endParaRPr sz="1350" b="1" dirty="0">
+                        <a:solidFill>
+                          <a:srgbClr val="142A63"/>
+                        </a:solidFill>
+                        <a:latin typeface="맑은 고딕"/>
+                      </a:endParaRPr>
+                    </a:p>
+                  </a:txBody>
+                  <a:tcPr marL="109728" marR="109728" marT="91440" marB="91440">
+                    <a:solidFill>
+                      <a:srgbClr val="FFFFFF"/>
+                    </a:solidFill>
+                  </a:tcPr>
+                </a:tc>
+                <a:tc>
+                  <a:txBody>
+                    <a:bodyPr/>
+                    <a:lstStyle/>
+                    <a:p>
+                      <a:pPr>
+                        <a:lnSpc>
+                          <a:spcPct val="115000"/>
+                        </a:lnSpc>
+                      </a:pPr>
+                      <a:r>
+                        <a:rPr sz="1350">
+                          <a:solidFill>
+                            <a:srgbClr val="16213A"/>
+                          </a:solidFill>
+                          <a:latin typeface="맑은 고딕"/>
+                        </a:rPr>
+                        <a:t>한글 키워드 하나 추가하는 것도 토크나이저 설계가 받쳐줘야 쉬워진다는 걸 알았다.</a:t>
+                      </a:r>
+                    </a:p>
+                  </a:txBody>
+                  <a:tcPr marL="109728" marR="109728" marT="91440" marB="91440">
+                    <a:solidFill>
+                      <a:srgbClr val="FFFFFF"/>
+                    </a:solidFill>
+                  </a:tcPr>
+                </a:tc>
+                <a:extLst>
+                  <a:ext uri="{0D108BD9-81ED-4DB2-BD59-A6C34878D82A}">
+                    <a16:rowId xmlns:a16="http://schemas.microsoft.com/office/drawing/2014/main" val="10002"/>
+                  </a:ext>
+                </a:extLst>
+              </a:tr>
+              <a:tr h="716280">
+                <a:tc>
+                  <a:txBody>
+                    <a:bodyPr/>
+                    <a:lstStyle/>
+                    <a:p>
+                      <a:r>
+                        <a:rPr lang="ko-KR" altLang="en-US" sz="1350" b="1" dirty="0" err="1">
+                          <a:solidFill>
+                            <a:srgbClr val="142A63"/>
+                          </a:solidFill>
+                          <a:latin typeface="맑은 고딕"/>
+                        </a:rPr>
+                        <a:t>이하섭</a:t>
+                      </a:r>
+                      <a:endParaRPr sz="1350" b="1" dirty="0">
+                        <a:solidFill>
+                          <a:srgbClr val="142A63"/>
+                        </a:solidFill>
+                        <a:latin typeface="맑은 고딕"/>
+                      </a:endParaRPr>
+                    </a:p>
+                  </a:txBody>
+                  <a:tcPr marL="109728" marR="109728" marT="91440" marB="91440">
+                    <a:solidFill>
+                      <a:srgbClr val="FFFFFF"/>
+                    </a:solidFill>
+                  </a:tcPr>
+                </a:tc>
+                <a:tc>
+                  <a:txBody>
+                    <a:bodyPr/>
+                    <a:lstStyle/>
+                    <a:p>
+                      <a:pPr>
+                        <a:lnSpc>
+                          <a:spcPct val="115000"/>
+                        </a:lnSpc>
+                      </a:pPr>
+                      <a:r>
+                        <a:rPr sz="1350">
+                          <a:solidFill>
+                            <a:srgbClr val="16213A"/>
+                          </a:solidFill>
+                          <a:latin typeface="맑은 고딕"/>
+                        </a:rPr>
+                        <a:t>클래스 기능을 만들고 나서야 this/super 바인딩 같은 작은 디테일이 큰 버그로 이어진다는 걸 체감했다.</a:t>
+                      </a:r>
+                    </a:p>
+                  </a:txBody>
+                  <a:tcPr marL="109728" marR="109728" marT="91440" marB="91440">
+                    <a:solidFill>
+                      <a:srgbClr val="FFFFFF"/>
+                    </a:solidFill>
+                  </a:tcPr>
+                </a:tc>
+                <a:extLst>
+                  <a:ext uri="{0D108BD9-81ED-4DB2-BD59-A6C34878D82A}">
+                    <a16:rowId xmlns:a16="http://schemas.microsoft.com/office/drawing/2014/main" val="10003"/>
+                  </a:ext>
+                </a:extLst>
+              </a:tr>
+              <a:tr h="716280">
+                <a:tc>
+                  <a:txBody>
+                    <a:bodyPr/>
+                    <a:lstStyle/>
+                    <a:p>
+                      <a:r>
+                        <a:rPr lang="ko-KR" altLang="en-US" sz="1350" b="1" dirty="0">
+                          <a:solidFill>
+                            <a:srgbClr val="142A63"/>
+                          </a:solidFill>
+                          <a:latin typeface="맑은 고딕"/>
+                        </a:rPr>
+                        <a:t>최현준</a:t>
+                      </a:r>
+                      <a:endParaRPr sz="1350" b="1" dirty="0">
+                        <a:solidFill>
+                          <a:srgbClr val="142A63"/>
+                        </a:solidFill>
+                        <a:latin typeface="맑은 고딕"/>
+                      </a:endParaRPr>
+                    </a:p>
+                  </a:txBody>
+                  <a:tcPr marL="109728" marR="109728" marT="91440" marB="91440">
+                    <a:solidFill>
+                      <a:srgbClr val="FFFFFF"/>
+                    </a:solidFill>
+                  </a:tcPr>
+                </a:tc>
+                <a:tc>
+                  <a:txBody>
+                    <a:bodyPr/>
+                    <a:lstStyle/>
+                    <a:p>
+                      <a:pPr>
+                        <a:lnSpc>
+                          <a:spcPct val="115000"/>
+                        </a:lnSpc>
+                      </a:pPr>
+                      <a:r>
+                        <a:rPr sz="1350">
+                          <a:solidFill>
+                            <a:srgbClr val="16213A"/>
+                          </a:solidFill>
+                          <a:latin typeface="맑은 고딕"/>
+                        </a:rPr>
+                        <a:t>최적화는 정답을 바꾸지 않는 선에서만 해야 한다는 원칙을 지키는 게 생각보다 까다로웠다.</a:t>
+                      </a:r>
+                    </a:p>
+                  </a:txBody>
+                  <a:tcPr marL="109728" marR="109728" marT="91440" marB="91440">
+                    <a:solidFill>
+                      <a:srgbClr val="FFFFFF"/>
+                    </a:solidFill>
+                  </a:tcPr>
+                </a:tc>
+                <a:extLst>
+                  <a:ext uri="{0D108BD9-81ED-4DB2-BD59-A6C34878D82A}">
+                    <a16:rowId xmlns:a16="http://schemas.microsoft.com/office/drawing/2014/main" val="10004"/>
+                  </a:ext>
+                </a:extLst>
+              </a:tr>
+              <a:tr h="716280">
+                <a:tc>
+                  <a:txBody>
+                    <a:bodyPr/>
+                    <a:lstStyle/>
+                    <a:p>
+                      <a:r>
+                        <a:rPr lang="ko-KR" altLang="en-US" sz="1350" b="1" dirty="0">
+                          <a:solidFill>
+                            <a:srgbClr val="142A63"/>
+                          </a:solidFill>
+                          <a:latin typeface="맑은 고딕"/>
+                        </a:rPr>
+                        <a:t>이준원</a:t>
+                      </a:r>
+                      <a:endParaRPr sz="1350" b="1" dirty="0">
+                        <a:solidFill>
+                          <a:srgbClr val="142A63"/>
+                        </a:solidFill>
+                        <a:latin typeface="맑은 고딕"/>
+                      </a:endParaRPr>
+                    </a:p>
+                  </a:txBody>
+                  <a:tcPr marL="109728" marR="109728" marT="91440" marB="91440">
+                    <a:solidFill>
+                      <a:srgbClr val="FFFFFF"/>
+                    </a:solidFill>
+                  </a:tcPr>
+                </a:tc>
+                <a:tc>
+                  <a:txBody>
+                    <a:bodyPr/>
+                    <a:lstStyle/>
+                    <a:p>
+                      <a:pPr>
+                        <a:lnSpc>
+                          <a:spcPct val="115000"/>
+                        </a:lnSpc>
+                      </a:pPr>
+                      <a:r>
+                        <a:rPr sz="1350" dirty="0" err="1">
+                          <a:solidFill>
+                            <a:srgbClr val="16213A"/>
+                          </a:solidFill>
+                          <a:latin typeface="맑은 고딕"/>
+                        </a:rPr>
+                        <a:t>Checker를</a:t>
+                      </a:r>
+                      <a:r>
+                        <a:rPr sz="1350" dirty="0">
+                          <a:solidFill>
+                            <a:srgbClr val="16213A"/>
+                          </a:solidFill>
+                          <a:latin typeface="맑은 고딕"/>
+                        </a:rPr>
+                        <a:t> </a:t>
+                      </a:r>
+                      <a:r>
+                        <a:rPr sz="1350" dirty="0" err="1">
+                          <a:solidFill>
+                            <a:srgbClr val="16213A"/>
+                          </a:solidFill>
+                          <a:latin typeface="맑은 고딕"/>
+                        </a:rPr>
+                        <a:t>제일</a:t>
+                      </a:r>
+                      <a:r>
+                        <a:rPr sz="1350" dirty="0">
+                          <a:solidFill>
+                            <a:srgbClr val="16213A"/>
+                          </a:solidFill>
+                          <a:latin typeface="맑은 고딕"/>
+                        </a:rPr>
+                        <a:t> </a:t>
+                      </a:r>
+                      <a:r>
+                        <a:rPr sz="1350" dirty="0" err="1">
+                          <a:solidFill>
+                            <a:srgbClr val="16213A"/>
+                          </a:solidFill>
+                          <a:latin typeface="맑은 고딕"/>
+                        </a:rPr>
+                        <a:t>먼저</a:t>
+                      </a:r>
+                      <a:r>
+                        <a:rPr sz="1350" dirty="0">
+                          <a:solidFill>
+                            <a:srgbClr val="16213A"/>
+                          </a:solidFill>
+                          <a:latin typeface="맑은 고딕"/>
+                        </a:rPr>
+                        <a:t> </a:t>
+                      </a:r>
+                      <a:r>
+                        <a:rPr sz="1350" dirty="0" err="1">
+                          <a:solidFill>
+                            <a:srgbClr val="16213A"/>
+                          </a:solidFill>
+                          <a:latin typeface="맑은 고딕"/>
+                        </a:rPr>
+                        <a:t>설계해두니</a:t>
+                      </a:r>
+                      <a:r>
+                        <a:rPr sz="1350" dirty="0">
+                          <a:solidFill>
+                            <a:srgbClr val="16213A"/>
+                          </a:solidFill>
+                          <a:latin typeface="맑은 고딕"/>
+                        </a:rPr>
+                        <a:t>, </a:t>
+                      </a:r>
+                      <a:r>
+                        <a:rPr sz="1350" dirty="0" err="1">
+                          <a:solidFill>
+                            <a:srgbClr val="16213A"/>
+                          </a:solidFill>
+                          <a:latin typeface="맑은 고딕"/>
+                        </a:rPr>
+                        <a:t>뒤에</a:t>
+                      </a:r>
+                      <a:r>
+                        <a:rPr sz="1350" dirty="0">
+                          <a:solidFill>
+                            <a:srgbClr val="16213A"/>
+                          </a:solidFill>
+                          <a:latin typeface="맑은 고딕"/>
+                        </a:rPr>
+                        <a:t> </a:t>
+                      </a:r>
+                      <a:r>
+                        <a:rPr sz="1350" dirty="0" err="1">
+                          <a:solidFill>
+                            <a:srgbClr val="16213A"/>
+                          </a:solidFill>
+                          <a:latin typeface="맑은 고딕"/>
+                        </a:rPr>
+                        <a:t>오는</a:t>
+                      </a:r>
+                      <a:r>
+                        <a:rPr sz="1350" dirty="0">
+                          <a:solidFill>
+                            <a:srgbClr val="16213A"/>
+                          </a:solidFill>
+                          <a:latin typeface="맑은 고딕"/>
+                        </a:rPr>
+                        <a:t> </a:t>
+                      </a:r>
+                      <a:r>
+                        <a:rPr sz="1350" dirty="0" err="1">
+                          <a:solidFill>
+                            <a:srgbClr val="16213A"/>
+                          </a:solidFill>
+                          <a:latin typeface="맑은 고딕"/>
+                        </a:rPr>
+                        <a:t>기능들이</a:t>
+                      </a:r>
+                      <a:r>
+                        <a:rPr sz="1350" dirty="0">
+                          <a:solidFill>
+                            <a:srgbClr val="16213A"/>
+                          </a:solidFill>
+                          <a:latin typeface="맑은 고딕"/>
+                        </a:rPr>
+                        <a:t> 그 </a:t>
+                      </a:r>
+                      <a:r>
+                        <a:rPr sz="1350" dirty="0" err="1">
+                          <a:solidFill>
+                            <a:srgbClr val="16213A"/>
+                          </a:solidFill>
+                          <a:latin typeface="맑은 고딕"/>
+                        </a:rPr>
+                        <a:t>위에</a:t>
+                      </a:r>
+                      <a:r>
+                        <a:rPr sz="1350" dirty="0">
+                          <a:solidFill>
+                            <a:srgbClr val="16213A"/>
+                          </a:solidFill>
+                          <a:latin typeface="맑은 고딕"/>
+                        </a:rPr>
+                        <a:t> </a:t>
+                      </a:r>
+                      <a:r>
+                        <a:rPr sz="1350" dirty="0" err="1">
+                          <a:solidFill>
+                            <a:srgbClr val="16213A"/>
+                          </a:solidFill>
+                          <a:latin typeface="맑은 고딕"/>
+                        </a:rPr>
+                        <a:t>안전하게</a:t>
+                      </a:r>
+                      <a:r>
+                        <a:rPr sz="1350" dirty="0">
+                          <a:solidFill>
+                            <a:srgbClr val="16213A"/>
+                          </a:solidFill>
+                          <a:latin typeface="맑은 고딕"/>
+                        </a:rPr>
+                        <a:t> </a:t>
+                      </a:r>
+                      <a:r>
+                        <a:rPr sz="1350" dirty="0" err="1">
+                          <a:solidFill>
+                            <a:srgbClr val="16213A"/>
+                          </a:solidFill>
+                          <a:latin typeface="맑은 고딕"/>
+                        </a:rPr>
+                        <a:t>쌓일</a:t>
+                      </a:r>
+                      <a:r>
+                        <a:rPr sz="1350" dirty="0">
+                          <a:solidFill>
+                            <a:srgbClr val="16213A"/>
+                          </a:solidFill>
+                          <a:latin typeface="맑은 고딕"/>
+                        </a:rPr>
+                        <a:t> 수 </a:t>
+                      </a:r>
+                      <a:r>
+                        <a:rPr sz="1350" dirty="0" err="1">
+                          <a:solidFill>
+                            <a:srgbClr val="16213A"/>
+                          </a:solidFill>
+                          <a:latin typeface="맑은 고딕"/>
+                        </a:rPr>
+                        <a:t>있었다</a:t>
+                      </a:r>
+                      <a:r>
+                        <a:rPr sz="1350" dirty="0">
+                          <a:solidFill>
+                            <a:srgbClr val="16213A"/>
+                          </a:solidFill>
+                          <a:latin typeface="맑은 고딕"/>
+                        </a:rPr>
+                        <a:t>.</a:t>
+                      </a:r>
+                    </a:p>
+                  </a:txBody>
+                  <a:tcPr marL="109728" marR="109728" marT="91440" marB="91440">
+                    <a:solidFill>
+                      <a:srgbClr val="FFFFFF"/>
+                    </a:solidFill>
+                  </a:tcPr>
+                </a:tc>
+                <a:extLst>
+                  <a:ext uri="{0D108BD9-81ED-4DB2-BD59-A6C34878D82A}">
+                    <a16:rowId xmlns:a16="http://schemas.microsoft.com/office/drawing/2014/main" val="10005"/>
+                  </a:ext>
+                </a:extLst>
+              </a:tr>
+            </a:tbl>
+          </a:graphicData>
+        </a:graphic>
+      </p:graphicFrame>
+    </p:spTree>
+  </p:cSld>
+  <p:clrMapOvr>
+    <a:masterClrMapping/>
+  </p:clrMapOvr>
+</p:sld>
+</file>
+
+<file path=ppt/slides/slide2.xml><?xml version="1.0" encoding="utf-8"?>
+<p:sld xmlns:a="http://schemas.openxmlformats.org/drawingml/2006/main" xmlns:r="http://schemas.openxmlformats.org/officeDocument/2006/relationships" xmlns:p="http://schemas.openxmlformats.org/presentationml/2006/main">
+  <p:cSld>
+    <p:spTree>
+      <p:nvGrpSpPr>
+        <p:cNvPr id="1" name=""/>
+        <p:cNvGrpSpPr/>
+        <p:nvPr/>
+      </p:nvGrpSpPr>
+      <p:grpSpPr>
+        <a:xfrm>
+          <a:off x="0" y="0"/>
+          <a:ext cx="0" cy="0"/>
+          <a:chOff x="0" y="0"/>
+          <a:chExt cx="0" cy="0"/>
+        </a:xfrm>
+      </p:grpSpPr>
+      <p:sp>
+        <p:nvSpPr>
+          <p:cNvPr id="2" name="Rectangle 1"/>
+          <p:cNvSpPr/>
+          <p:nvPr/>
+        </p:nvSpPr>
+        <p:spPr>
+          <a:xfrm>
+            <a:off x="0" y="0"/>
+            <a:ext cx="12191695" cy="6858000"/>
+          </a:xfrm>
+          <a:prstGeom prst="rect">
+            <a:avLst/>
+          </a:prstGeom>
+          <a:solidFill>
+            <a:srgbClr val="FFFFFF"/>
+          </a:solidFill>
+          <a:ln>
+            <a:noFill/>
+          </a:ln>
+          <a:effectLst/>
+        </p:spPr>
+        <p:style>
+          <a:lnRef idx="1">
+            <a:schemeClr val="accent1"/>
+          </a:lnRef>
+          <a:fillRef idx="3">
+            <a:schemeClr val="accent1"/>
+          </a:fillRef>
+          <a:effectRef idx="2">
+            <a:schemeClr val="accent1"/>
+          </a:effectRef>
+          <a:fontRef idx="minor">
+            <a:schemeClr val="lt1"/>
+          </a:fontRef>
+        </p:style>
+        <p:txBody>
+          <a:bodyPr rtlCol="0" anchor="ctr"/>
+          <a:lstStyle/>
+          <a:p>
+            <a:pPr algn="ctr"/>
+            <a:endParaRPr/>
+          </a:p>
+        </p:txBody>
+      </p:sp>
+      <p:sp>
+        <p:nvSpPr>
+          <p:cNvPr id="3" name="Rectangle 2"/>
+          <p:cNvSpPr/>
+          <p:nvPr/>
+        </p:nvSpPr>
+        <p:spPr>
+          <a:xfrm>
+            <a:off x="0" y="0"/>
+            <a:ext cx="12191695" cy="1051560"/>
+          </a:xfrm>
+          <a:prstGeom prst="rect">
+            <a:avLst/>
+          </a:prstGeom>
+          <a:solidFill>
+            <a:srgbClr val="1F3C88"/>
+          </a:solidFill>
+          <a:ln>
+            <a:noFill/>
+          </a:ln>
+          <a:effectLst/>
+        </p:spPr>
+        <p:style>
+          <a:lnRef idx="1">
+            <a:schemeClr val="accent1"/>
+          </a:lnRef>
+          <a:fillRef idx="3">
+            <a:schemeClr val="accent1"/>
+          </a:fillRef>
+          <a:effectRef idx="2">
+            <a:schemeClr val="accent1"/>
+          </a:effectRef>
+          <a:fontRef idx="minor">
+            <a:schemeClr val="lt1"/>
+          </a:fontRef>
+        </p:style>
+        <p:txBody>
+          <a:bodyPr rtlCol="0" anchor="ctr"/>
+          <a:lstStyle/>
+          <a:p>
+            <a:pPr algn="ctr"/>
+            <a:endParaRPr/>
+          </a:p>
+        </p:txBody>
+      </p:sp>
+      <p:sp>
+        <p:nvSpPr>
+          <p:cNvPr id="4" name="Rounded Rectangle 3"/>
+          <p:cNvSpPr/>
+          <p:nvPr/>
+        </p:nvSpPr>
+        <p:spPr>
+          <a:xfrm>
+            <a:off x="502920" y="329184"/>
+            <a:ext cx="566928" cy="384048"/>
+          </a:xfrm>
+          <a:prstGeom prst="roundRect">
+            <a:avLst>
+              <a:gd name="adj" fmla="val 30000"/>
+            </a:avLst>
+          </a:prstGeom>
+          <a:solidFill>
+            <a:srgbClr val="142A63"/>
+          </a:solidFill>
+          <a:ln>
+            <a:noFill/>
+          </a:ln>
+          <a:effectLst/>
+        </p:spPr>
+        <p:style>
+          <a:lnRef idx="1">
+            <a:schemeClr val="accent1"/>
+          </a:lnRef>
+          <a:fillRef idx="3">
+            <a:schemeClr val="accent1"/>
+          </a:fillRef>
+          <a:effectRef idx="2">
+            <a:schemeClr val="accent1"/>
+          </a:effectRef>
+          <a:fontRef idx="minor">
+            <a:schemeClr val="lt1"/>
+          </a:fontRef>
+        </p:style>
+        <p:txBody>
+          <a:bodyPr rtlCol="0" anchor="ctr"/>
+          <a:lstStyle/>
+          <a:p>
+            <a:pPr algn="ctr"/>
+            <a:r>
+              <a:rPr sz="1300" b="1">
+                <a:solidFill>
+                  <a:srgbClr val="FFFFFF"/>
+                </a:solidFill>
+                <a:latin typeface="Consolas"/>
+              </a:rPr>
+              <a:t>00</a:t>
+            </a:r>
+          </a:p>
+        </p:txBody>
+      </p:sp>
+      <p:sp>
+        <p:nvSpPr>
+          <p:cNvPr id="5" name="TextBox 4"/>
+          <p:cNvSpPr txBox="1"/>
+          <p:nvPr/>
+        </p:nvSpPr>
+        <p:spPr>
+          <a:xfrm>
+            <a:off x="1234440" y="256032"/>
+            <a:ext cx="7863840" cy="548640"/>
+          </a:xfrm>
+          <a:prstGeom prst="rect">
+            <a:avLst/>
+          </a:prstGeom>
+          <a:noFill/>
+        </p:spPr>
+        <p:txBody>
+          <a:bodyPr wrap="square" lIns="0" tIns="0" rIns="0" bIns="0" anchor="ctr">
+            <a:spAutoFit/>
+          </a:bodyPr>
+          <a:lstStyle/>
+          <a:p>
+            <a:pPr algn="l">
+              <a:lnSpc>
+                <a:spcPct val="115000"/>
+              </a:lnSpc>
+            </a:pPr>
+            <a:r>
+              <a:rPr sz="2200" b="1">
+                <a:solidFill>
+                  <a:srgbClr val="FFFFFF"/>
+                </a:solidFill>
+                <a:latin typeface="맑은 고딕"/>
+              </a:rPr>
+              <a:t>목차</a:t>
+            </a:r>
+          </a:p>
+        </p:txBody>
+      </p:sp>
+      <p:sp>
+        <p:nvSpPr>
+          <p:cNvPr id="6" name="TextBox 5"/>
+          <p:cNvSpPr txBox="1"/>
+          <p:nvPr/>
+        </p:nvSpPr>
+        <p:spPr>
+          <a:xfrm>
+            <a:off x="8595360" y="256032"/>
+            <a:ext cx="3108960" cy="548640"/>
+          </a:xfrm>
+          <a:prstGeom prst="rect">
+            <a:avLst/>
+          </a:prstGeom>
+          <a:noFill/>
+        </p:spPr>
+        <p:txBody>
+          <a:bodyPr wrap="square" lIns="0" tIns="0" rIns="0" bIns="0" anchor="ctr">
+            <a:spAutoFit/>
+          </a:bodyPr>
+          <a:lstStyle/>
+          <a:p>
+            <a:pPr algn="r">
+              <a:lnSpc>
+                <a:spcPct val="115000"/>
+              </a:lnSpc>
+            </a:pPr>
+            <a:r>
+              <a:rPr sz="1200" b="1">
+                <a:solidFill>
+                  <a:srgbClr val="D8E1F7"/>
+                </a:solidFill>
+                <a:latin typeface="맑은 고딕"/>
+              </a:rPr>
+              <a:t>Agenda</a:t>
+            </a:r>
+          </a:p>
+        </p:txBody>
+      </p:sp>
+      <p:cxnSp>
+        <p:nvCxnSpPr>
+          <p:cNvPr id="7" name="Connector 6"/>
+          <p:cNvCxnSpPr/>
+          <p:nvPr/>
+        </p:nvCxnSpPr>
+        <p:spPr>
+          <a:xfrm>
+            <a:off x="502920" y="6355080"/>
+            <a:ext cx="11183112" cy="0"/>
+          </a:xfrm>
+          <a:prstGeom prst="line">
+            <a:avLst/>
+          </a:prstGeom>
+          <a:ln w="12700">
+            <a:solidFill>
+              <a:srgbClr val="CFD9EE"/>
+            </a:solidFill>
+          </a:ln>
+        </p:spPr>
+        <p:style>
+          <a:lnRef idx="2">
+            <a:schemeClr val="accent1"/>
+          </a:lnRef>
+          <a:fillRef idx="0">
+            <a:schemeClr val="accent1"/>
+          </a:fillRef>
+          <a:effectRef idx="1">
+            <a:schemeClr val="accent1"/>
+          </a:effectRef>
+          <a:fontRef idx="minor">
+            <a:schemeClr val="tx1"/>
+          </a:fontRef>
+        </p:style>
+      </p:cxnSp>
+      <p:sp>
+        <p:nvSpPr>
+          <p:cNvPr id="8" name="TextBox 7"/>
+          <p:cNvSpPr txBox="1"/>
+          <p:nvPr/>
+        </p:nvSpPr>
+        <p:spPr>
+          <a:xfrm>
+            <a:off x="502920" y="6446520"/>
+            <a:ext cx="5486400" cy="320040"/>
+          </a:xfrm>
+          <a:prstGeom prst="rect">
+            <a:avLst/>
+          </a:prstGeom>
+          <a:noFill/>
+        </p:spPr>
+        <p:txBody>
+          <a:bodyPr wrap="square" lIns="0" tIns="0" rIns="0" bIns="0" anchor="ctr">
+            <a:spAutoFit/>
+          </a:bodyPr>
+          <a:lstStyle/>
+          <a:p>
+            <a:pPr algn="l">
+              <a:lnSpc>
+                <a:spcPct val="115000"/>
+              </a:lnSpc>
+            </a:pPr>
+            <a:r>
+              <a:rPr sz="1050" b="0">
+                <a:solidFill>
+                  <a:srgbClr val="5B6B8C"/>
+                </a:solidFill>
+                <a:latin typeface="Consolas"/>
+              </a:rPr>
+              <a:t>CodeFab Interpreter · 5일차 발표</a:t>
+            </a:r>
+          </a:p>
+        </p:txBody>
+      </p:sp>
+      <p:sp>
+        <p:nvSpPr>
+          <p:cNvPr id="9" name="TextBox 8"/>
+          <p:cNvSpPr txBox="1"/>
+          <p:nvPr/>
+        </p:nvSpPr>
+        <p:spPr>
+          <a:xfrm>
+            <a:off x="10424160" y="6446520"/>
+            <a:ext cx="1261872" cy="320040"/>
+          </a:xfrm>
+          <a:prstGeom prst="rect">
+            <a:avLst/>
+          </a:prstGeom>
+          <a:noFill/>
+        </p:spPr>
+        <p:txBody>
+          <a:bodyPr wrap="square" lIns="0" tIns="0" rIns="0" bIns="0" anchor="ctr">
+            <a:spAutoFit/>
+          </a:bodyPr>
+          <a:lstStyle/>
+          <a:p>
+            <a:pPr algn="r">
+              <a:lnSpc>
+                <a:spcPct val="115000"/>
+              </a:lnSpc>
+            </a:pPr>
+            <a:r>
+              <a:rPr sz="1050" b="0">
+                <a:solidFill>
+                  <a:srgbClr val="5B6B8C"/>
+                </a:solidFill>
+                <a:latin typeface="Consolas"/>
+              </a:rPr>
+              <a:t>2 / 11</a:t>
+            </a:r>
+          </a:p>
+        </p:txBody>
+      </p:sp>
+      <p:graphicFrame>
+        <p:nvGraphicFramePr>
+          <p:cNvPr id="10" name="Table 9"/>
+          <p:cNvGraphicFramePr>
+            <a:graphicFrameLocks noGrp="1"/>
+          </p:cNvGraphicFramePr>
+          <p:nvPr>
+            <p:extLst>
+              <p:ext uri="{D42A27DB-BD31-4B8C-83A1-F6EECF244321}">
+                <p14:modId xmlns:p14="http://schemas.microsoft.com/office/powerpoint/2010/main" val="2063800734"/>
+              </p:ext>
+            </p:extLst>
+          </p:nvPr>
+        </p:nvGraphicFramePr>
+        <p:xfrm>
+          <a:off x="502920" y="1417320"/>
+          <a:ext cx="11183111" cy="4480560"/>
+        </p:xfrm>
+        <a:graphic>
+          <a:graphicData uri="http://schemas.openxmlformats.org/drawingml/2006/table">
+            <a:tbl>
+              <a:tblPr>
+                <a:tableStyleId>{5C22544A-7EE6-4342-B048-85BDC9FD1C3A}</a:tableStyleId>
+              </a:tblPr>
+              <a:tblGrid>
+                <a:gridCol w="3354933">
+                  <a:extLst>
+                    <a:ext uri="{9D8B030D-6E8A-4147-A177-3AD203B41FA5}">
+                      <a16:colId xmlns:a16="http://schemas.microsoft.com/office/drawing/2014/main" val="20000"/>
+                    </a:ext>
+                  </a:extLst>
+                </a:gridCol>
+                <a:gridCol w="7828178">
+                  <a:extLst>
+                    <a:ext uri="{9D8B030D-6E8A-4147-A177-3AD203B41FA5}">
+                      <a16:colId xmlns:a16="http://schemas.microsoft.com/office/drawing/2014/main" val="20001"/>
+                    </a:ext>
+                  </a:extLst>
+                </a:gridCol>
+              </a:tblGrid>
+              <a:tr h="746760">
+                <a:tc>
+                  <a:txBody>
+                    <a:bodyPr/>
+                    <a:lstStyle/>
+                    <a:p>
+                      <a:r>
+                        <a:rPr sz="1100" b="1">
+                          <a:solidFill>
+                            <a:srgbClr val="5B6B8C"/>
+                          </a:solidFill>
+                          <a:latin typeface="맑은 고딕"/>
+                        </a:rPr>
+                        <a:t>섹션</a:t>
+                      </a:r>
+                    </a:p>
+                  </a:txBody>
+                  <a:tcPr marL="109728" marR="109728" marT="54864" marB="54864" anchor="b">
+                    <a:solidFill>
+                      <a:srgbClr val="FFFFFF"/>
+                    </a:solidFill>
+                  </a:tcPr>
+                </a:tc>
+                <a:tc>
+                  <a:txBody>
+                    <a:bodyPr/>
+                    <a:lstStyle/>
+                    <a:p>
+                      <a:r>
+                        <a:rPr sz="1100" b="1">
+                          <a:solidFill>
+                            <a:srgbClr val="5B6B8C"/>
+                          </a:solidFill>
+                          <a:latin typeface="맑은 고딕"/>
+                        </a:rPr>
+                        <a:t>내용</a:t>
+                      </a:r>
+                    </a:p>
+                  </a:txBody>
+                  <a:tcPr marL="109728" marR="109728" marT="54864" marB="54864" anchor="b">
+                    <a:solidFill>
+                      <a:srgbClr val="FFFFFF"/>
+                    </a:solidFill>
+                  </a:tcPr>
+                </a:tc>
+                <a:extLst>
+                  <a:ext uri="{0D108BD9-81ED-4DB2-BD59-A6C34878D82A}">
+                    <a16:rowId xmlns:a16="http://schemas.microsoft.com/office/drawing/2014/main" val="10000"/>
+                  </a:ext>
+                </a:extLst>
+              </a:tr>
+              <a:tr h="746760">
+                <a:tc>
+                  <a:txBody>
+                    <a:bodyPr/>
+                    <a:lstStyle/>
+                    <a:p>
+                      <a:r>
+                        <a:rPr sz="1400" b="1">
+                          <a:solidFill>
+                            <a:srgbClr val="142A63"/>
+                          </a:solidFill>
+                          <a:latin typeface="맑은 고딕"/>
+                        </a:rPr>
+                        <a:t>01 · 조원 소개 및 역할</a:t>
+                      </a:r>
+                    </a:p>
+                  </a:txBody>
+                  <a:tcPr marL="109728" marR="109728" marT="91440" marB="91440">
+                    <a:solidFill>
+                      <a:srgbClr val="FFFFFF"/>
+                    </a:solidFill>
+                  </a:tcPr>
+                </a:tc>
+                <a:tc>
+                  <a:txBody>
+                    <a:bodyPr/>
+                    <a:lstStyle/>
+                    <a:p>
+                      <a:pPr>
+                        <a:lnSpc>
+                          <a:spcPct val="115000"/>
+                        </a:lnSpc>
+                      </a:pPr>
+                      <a:r>
+                        <a:rPr lang="ko-KR" altLang="en-US" sz="1400" dirty="0">
+                          <a:solidFill>
+                            <a:srgbClr val="16213A"/>
+                          </a:solidFill>
+                          <a:latin typeface="맑은 고딕"/>
+                        </a:rPr>
+                        <a:t>조원 소개 및 </a:t>
+                      </a:r>
+                      <a:r>
+                        <a:rPr sz="1400" dirty="0" err="1">
+                          <a:solidFill>
+                            <a:srgbClr val="16213A"/>
+                          </a:solidFill>
+                          <a:latin typeface="맑은 고딕"/>
+                        </a:rPr>
+                        <a:t>역할</a:t>
+                      </a:r>
+                      <a:endParaRPr sz="1400" dirty="0">
+                        <a:solidFill>
+                          <a:srgbClr val="16213A"/>
+                        </a:solidFill>
+                        <a:latin typeface="맑은 고딕"/>
+                      </a:endParaRPr>
+                    </a:p>
+                  </a:txBody>
+                  <a:tcPr marL="109728" marR="109728" marT="91440" marB="91440">
+                    <a:solidFill>
+                      <a:srgbClr val="FFFFFF"/>
+                    </a:solidFill>
+                  </a:tcPr>
+                </a:tc>
+                <a:extLst>
+                  <a:ext uri="{0D108BD9-81ED-4DB2-BD59-A6C34878D82A}">
+                    <a16:rowId xmlns:a16="http://schemas.microsoft.com/office/drawing/2014/main" val="10001"/>
+                  </a:ext>
+                </a:extLst>
+              </a:tr>
+              <a:tr h="746760">
+                <a:tc>
+                  <a:txBody>
+                    <a:bodyPr/>
+                    <a:lstStyle/>
+                    <a:p>
+                      <a:r>
+                        <a:rPr sz="1400" b="1">
+                          <a:solidFill>
+                            <a:srgbClr val="142A63"/>
+                          </a:solidFill>
+                          <a:latin typeface="맑은 고딕"/>
+                        </a:rPr>
+                        <a:t>02 · 기능 구현 소개</a:t>
+                      </a:r>
+                    </a:p>
+                  </a:txBody>
+                  <a:tcPr marL="109728" marR="109728" marT="91440" marB="91440">
+                    <a:solidFill>
+                      <a:srgbClr val="FFFFFF"/>
+                    </a:solidFill>
+                  </a:tcPr>
+                </a:tc>
+                <a:tc>
+                  <a:txBody>
+                    <a:bodyPr/>
+                    <a:lstStyle/>
+                    <a:p>
+                      <a:pPr>
+                        <a:lnSpc>
+                          <a:spcPct val="115000"/>
+                        </a:lnSpc>
+                      </a:pPr>
+                      <a:r>
+                        <a:rPr sz="1400">
+                          <a:solidFill>
+                            <a:srgbClr val="16213A"/>
+                          </a:solidFill>
+                          <a:latin typeface="맑은 고딕"/>
+                        </a:rPr>
+                        <a:t>Assembler·Checker·Executor 파이프라인 구조 + Chapter별 구현 기능 정리</a:t>
+                      </a:r>
+                    </a:p>
+                  </a:txBody>
+                  <a:tcPr marL="109728" marR="109728" marT="91440" marB="91440">
+                    <a:solidFill>
+                      <a:srgbClr val="FFFFFF"/>
+                    </a:solidFill>
+                  </a:tcPr>
+                </a:tc>
+                <a:extLst>
+                  <a:ext uri="{0D108BD9-81ED-4DB2-BD59-A6C34878D82A}">
+                    <a16:rowId xmlns:a16="http://schemas.microsoft.com/office/drawing/2014/main" val="10002"/>
+                  </a:ext>
+                </a:extLst>
+              </a:tr>
+              <a:tr h="746760">
+                <a:tc>
+                  <a:txBody>
+                    <a:bodyPr/>
+                    <a:lstStyle/>
+                    <a:p>
+                      <a:r>
+                        <a:rPr sz="1400" b="1">
+                          <a:solidFill>
+                            <a:srgbClr val="142A63"/>
+                          </a:solidFill>
+                          <a:latin typeface="맑은 고딕"/>
+                        </a:rPr>
+                        <a:t>03 · Best Practice 4선</a:t>
+                      </a:r>
+                    </a:p>
+                  </a:txBody>
+                  <a:tcPr marL="109728" marR="109728" marT="91440" marB="91440">
+                    <a:solidFill>
+                      <a:srgbClr val="FFFFFF"/>
+                    </a:solidFill>
+                  </a:tcPr>
+                </a:tc>
+                <a:tc>
+                  <a:txBody>
+                    <a:bodyPr/>
+                    <a:lstStyle/>
+                    <a:p>
+                      <a:pPr>
+                        <a:lnSpc>
+                          <a:spcPct val="115000"/>
+                        </a:lnSpc>
+                      </a:pPr>
+                      <a:r>
+                        <a:rPr sz="1400">
+                          <a:solidFill>
+                            <a:srgbClr val="16213A"/>
+                          </a:solidFill>
+                          <a:latin typeface="맑은 고딕"/>
+                        </a:rPr>
+                        <a:t>실제 GitHub 리뷰 이력(PR #91/#65/#69/#64) 기준 — 알려진 한계 문서화, 실행 검증, 재현 가능한 코멘트, 설계 이유 기록</a:t>
+                      </a:r>
+                    </a:p>
+                  </a:txBody>
+                  <a:tcPr marL="109728" marR="109728" marT="91440" marB="91440">
+                    <a:solidFill>
+                      <a:srgbClr val="FFFFFF"/>
+                    </a:solidFill>
+                  </a:tcPr>
+                </a:tc>
+                <a:extLst>
+                  <a:ext uri="{0D108BD9-81ED-4DB2-BD59-A6C34878D82A}">
+                    <a16:rowId xmlns:a16="http://schemas.microsoft.com/office/drawing/2014/main" val="10003"/>
+                  </a:ext>
+                </a:extLst>
+              </a:tr>
+              <a:tr h="746760">
+                <a:tc>
+                  <a:txBody>
+                    <a:bodyPr/>
+                    <a:lstStyle/>
+                    <a:p>
+                      <a:r>
+                        <a:rPr sz="1400" b="1">
+                          <a:solidFill>
+                            <a:srgbClr val="142A63"/>
+                          </a:solidFill>
+                          <a:latin typeface="맑은 고딕"/>
+                        </a:rPr>
+                        <a:t>04 · 프로젝트 시연</a:t>
+                      </a:r>
+                    </a:p>
+                  </a:txBody>
+                  <a:tcPr marL="109728" marR="109728" marT="91440" marB="91440">
+                    <a:solidFill>
+                      <a:srgbClr val="FFFFFF"/>
+                    </a:solidFill>
+                  </a:tcPr>
+                </a:tc>
+                <a:tc>
+                  <a:txBody>
+                    <a:bodyPr/>
+                    <a:lstStyle/>
+                    <a:p>
+                      <a:pPr>
+                        <a:lnSpc>
+                          <a:spcPct val="115000"/>
+                        </a:lnSpc>
+                      </a:pPr>
+                      <a:r>
+                        <a:rPr sz="1400">
+                          <a:solidFill>
+                            <a:srgbClr val="16213A"/>
+                          </a:solidFill>
+                          <a:latin typeface="맑은 고딕"/>
+                        </a:rPr>
+                        <a:t>파일 · REPL · 디버그 모드 순서로 기능이 실제로 맞물려 동작하는 모습을 시연</a:t>
+                      </a:r>
+                    </a:p>
+                  </a:txBody>
+                  <a:tcPr marL="109728" marR="109728" marT="91440" marB="91440">
+                    <a:solidFill>
+                      <a:srgbClr val="FFFFFF"/>
+                    </a:solidFill>
+                  </a:tcPr>
+                </a:tc>
+                <a:extLst>
+                  <a:ext uri="{0D108BD9-81ED-4DB2-BD59-A6C34878D82A}">
+                    <a16:rowId xmlns:a16="http://schemas.microsoft.com/office/drawing/2014/main" val="10004"/>
+                  </a:ext>
+                </a:extLst>
+              </a:tr>
+              <a:tr h="746760">
+                <a:tc>
+                  <a:txBody>
+                    <a:bodyPr/>
+                    <a:lstStyle/>
+                    <a:p>
+                      <a:r>
+                        <a:rPr sz="1400" b="1">
+                          <a:solidFill>
+                            <a:srgbClr val="142A63"/>
+                          </a:solidFill>
+                          <a:latin typeface="맑은 고딕"/>
+                        </a:rPr>
+                        <a:t>05 · 소감</a:t>
+                      </a:r>
+                    </a:p>
+                  </a:txBody>
+                  <a:tcPr marL="109728" marR="109728" marT="91440" marB="91440">
+                    <a:solidFill>
+                      <a:srgbClr val="FFFFFF"/>
+                    </a:solidFill>
+                  </a:tcPr>
+                </a:tc>
+                <a:tc>
+                  <a:txBody>
+                    <a:bodyPr/>
+                    <a:lstStyle/>
+                    <a:p>
+                      <a:pPr>
+                        <a:lnSpc>
+                          <a:spcPct val="115000"/>
+                        </a:lnSpc>
+                      </a:pPr>
+                      <a:r>
+                        <a:rPr sz="1400" dirty="0" err="1">
+                          <a:solidFill>
+                            <a:srgbClr val="16213A"/>
+                          </a:solidFill>
+                          <a:latin typeface="맑은 고딕"/>
+                        </a:rPr>
+                        <a:t>조원별</a:t>
+                      </a:r>
+                      <a:r>
+                        <a:rPr sz="1400" dirty="0">
+                          <a:solidFill>
+                            <a:srgbClr val="16213A"/>
+                          </a:solidFill>
+                          <a:latin typeface="맑은 고딕"/>
+                        </a:rPr>
+                        <a:t> 한 줄 </a:t>
+                      </a:r>
+                      <a:r>
+                        <a:rPr sz="1400" dirty="0" err="1">
+                          <a:solidFill>
+                            <a:srgbClr val="16213A"/>
+                          </a:solidFill>
+                          <a:latin typeface="맑은 고딕"/>
+                        </a:rPr>
+                        <a:t>회고</a:t>
+                      </a:r>
+                      <a:endParaRPr sz="1400" dirty="0">
+                        <a:solidFill>
+                          <a:srgbClr val="16213A"/>
+                        </a:solidFill>
+                        <a:latin typeface="맑은 고딕"/>
+                      </a:endParaRPr>
+                    </a:p>
+                  </a:txBody>
+                  <a:tcPr marL="109728" marR="109728" marT="91440" marB="91440">
+                    <a:solidFill>
+                      <a:srgbClr val="FFFFFF"/>
+                    </a:solidFill>
+                  </a:tcPr>
+                </a:tc>
+                <a:extLst>
+                  <a:ext uri="{0D108BD9-81ED-4DB2-BD59-A6C34878D82A}">
+                    <a16:rowId xmlns:a16="http://schemas.microsoft.com/office/drawing/2014/main" val="10005"/>
+                  </a:ext>
+                </a:extLst>
+              </a:tr>
+            </a:tbl>
+          </a:graphicData>
+        </a:graphic>
+      </p:graphicFrame>
+    </p:spTree>
+  </p:cSld>
+  <p:clrMapOvr>
+    <a:masterClrMapping/>
+  </p:clrMapOvr>
+</p:sld>
+</file>
+
+<file path=ppt/slides/slide3.xml><?xml version="1.0" encoding="utf-8"?>
+<p:sld xmlns:a="http://schemas.openxmlformats.org/drawingml/2006/main" xmlns:r="http://schemas.openxmlformats.org/officeDocument/2006/relationships" xmlns:p="http://schemas.openxmlformats.org/presentationml/2006/main">
+  <p:cSld>
+    <p:spTree>
+      <p:nvGrpSpPr>
+        <p:cNvPr id="1" name=""/>
+        <p:cNvGrpSpPr/>
+        <p:nvPr/>
+      </p:nvGrpSpPr>
+      <p:grpSpPr>
+        <a:xfrm>
+          <a:off x="0" y="0"/>
+          <a:ext cx="0" cy="0"/>
+          <a:chOff x="0" y="0"/>
+          <a:chExt cx="0" cy="0"/>
+        </a:xfrm>
+      </p:grpSpPr>
+      <p:sp>
+        <p:nvSpPr>
+          <p:cNvPr id="2" name="Rectangle 1"/>
+          <p:cNvSpPr/>
+          <p:nvPr/>
+        </p:nvSpPr>
+        <p:spPr>
+          <a:xfrm>
+            <a:off x="0" y="0"/>
+            <a:ext cx="12191695" cy="6858000"/>
+          </a:xfrm>
+          <a:prstGeom prst="rect">
+            <a:avLst/>
+          </a:prstGeom>
+          <a:solidFill>
+            <a:srgbClr val="FFFFFF"/>
+          </a:solidFill>
+          <a:ln>
+            <a:noFill/>
+          </a:ln>
+          <a:effectLst/>
+        </p:spPr>
+        <p:style>
+          <a:lnRef idx="1">
+            <a:schemeClr val="accent1"/>
+          </a:lnRef>
+          <a:fillRef idx="3">
+            <a:schemeClr val="accent1"/>
+          </a:fillRef>
+          <a:effectRef idx="2">
+            <a:schemeClr val="accent1"/>
+          </a:effectRef>
+          <a:fontRef idx="minor">
+            <a:schemeClr val="lt1"/>
+          </a:fontRef>
+        </p:style>
+        <p:txBody>
+          <a:bodyPr rtlCol="0" anchor="ctr"/>
+          <a:lstStyle/>
+          <a:p>
+            <a:pPr algn="ctr"/>
+            <a:endParaRPr/>
+          </a:p>
+        </p:txBody>
+      </p:sp>
+      <p:sp>
+        <p:nvSpPr>
+          <p:cNvPr id="3" name="Rectangle 2"/>
+          <p:cNvSpPr/>
+          <p:nvPr/>
+        </p:nvSpPr>
+        <p:spPr>
+          <a:xfrm>
+            <a:off x="0" y="0"/>
+            <a:ext cx="12191695" cy="1051560"/>
+          </a:xfrm>
+          <a:prstGeom prst="rect">
+            <a:avLst/>
+          </a:prstGeom>
+          <a:solidFill>
+            <a:srgbClr val="1F3C88"/>
+          </a:solidFill>
+          <a:ln>
+            <a:noFill/>
+          </a:ln>
+          <a:effectLst/>
+        </p:spPr>
+        <p:style>
+          <a:lnRef idx="1">
+            <a:schemeClr val="accent1"/>
+          </a:lnRef>
+          <a:fillRef idx="3">
+            <a:schemeClr val="accent1"/>
+          </a:fillRef>
+          <a:effectRef idx="2">
+            <a:schemeClr val="accent1"/>
+          </a:effectRef>
+          <a:fontRef idx="minor">
+            <a:schemeClr val="lt1"/>
+          </a:fontRef>
+        </p:style>
+        <p:txBody>
+          <a:bodyPr rtlCol="0" anchor="ctr"/>
+          <a:lstStyle/>
+          <a:p>
+            <a:pPr algn="ctr"/>
+            <a:endParaRPr/>
+          </a:p>
+        </p:txBody>
+      </p:sp>
+      <p:sp>
+        <p:nvSpPr>
+          <p:cNvPr id="4" name="Rounded Rectangle 3"/>
+          <p:cNvSpPr/>
+          <p:nvPr/>
+        </p:nvSpPr>
+        <p:spPr>
+          <a:xfrm>
+            <a:off x="502920" y="329184"/>
+            <a:ext cx="566928" cy="384048"/>
+          </a:xfrm>
+          <a:prstGeom prst="roundRect">
+            <a:avLst>
+              <a:gd name="adj" fmla="val 30000"/>
+            </a:avLst>
+          </a:prstGeom>
+          <a:solidFill>
+            <a:srgbClr val="142A63"/>
+          </a:solidFill>
+          <a:ln>
+            <a:noFill/>
+          </a:ln>
+          <a:effectLst/>
+        </p:spPr>
+        <p:style>
+          <a:lnRef idx="1">
+            <a:schemeClr val="accent1"/>
+          </a:lnRef>
+          <a:fillRef idx="3">
+            <a:schemeClr val="accent1"/>
+          </a:fillRef>
+          <a:effectRef idx="2">
+            <a:schemeClr val="accent1"/>
+          </a:effectRef>
+          <a:fontRef idx="minor">
+            <a:schemeClr val="lt1"/>
+          </a:fontRef>
+        </p:style>
+        <p:txBody>
+          <a:bodyPr rtlCol="0" anchor="ctr"/>
+          <a:lstStyle/>
+          <a:p>
+            <a:pPr algn="ctr"/>
+            <a:r>
+              <a:rPr sz="1300" b="1">
+                <a:solidFill>
+                  <a:srgbClr val="FFFFFF"/>
+                </a:solidFill>
+                <a:latin typeface="Consolas"/>
+              </a:rPr>
+              <a:t>01</a:t>
+            </a:r>
+          </a:p>
+        </p:txBody>
+      </p:sp>
+      <p:sp>
+        <p:nvSpPr>
+          <p:cNvPr id="5" name="TextBox 4"/>
+          <p:cNvSpPr txBox="1"/>
+          <p:nvPr/>
+        </p:nvSpPr>
+        <p:spPr>
+          <a:xfrm>
+            <a:off x="1234440" y="256032"/>
+            <a:ext cx="7863840" cy="548640"/>
+          </a:xfrm>
+          <a:prstGeom prst="rect">
+            <a:avLst/>
+          </a:prstGeom>
+          <a:noFill/>
+        </p:spPr>
+        <p:txBody>
+          <a:bodyPr wrap="square" lIns="0" tIns="0" rIns="0" bIns="0" anchor="ctr">
+            <a:spAutoFit/>
+          </a:bodyPr>
+          <a:lstStyle/>
+          <a:p>
+            <a:pPr algn="l">
+              <a:lnSpc>
+                <a:spcPct val="115000"/>
+              </a:lnSpc>
+            </a:pPr>
+            <a:r>
+              <a:rPr sz="2200" b="1">
+                <a:solidFill>
+                  <a:srgbClr val="FFFFFF"/>
+                </a:solidFill>
+                <a:latin typeface="맑은 고딕"/>
+              </a:rPr>
+              <a:t>조원 소개 및 역할</a:t>
+            </a:r>
+          </a:p>
+        </p:txBody>
+      </p:sp>
+      <p:sp>
+        <p:nvSpPr>
+          <p:cNvPr id="6" name="TextBox 5"/>
+          <p:cNvSpPr txBox="1"/>
+          <p:nvPr/>
+        </p:nvSpPr>
+        <p:spPr>
+          <a:xfrm>
+            <a:off x="8595360" y="256032"/>
+            <a:ext cx="3108960" cy="548640"/>
+          </a:xfrm>
+          <a:prstGeom prst="rect">
+            <a:avLst/>
+          </a:prstGeom>
+          <a:noFill/>
+        </p:spPr>
+        <p:txBody>
+          <a:bodyPr wrap="square" lIns="0" tIns="0" rIns="0" bIns="0" anchor="ctr">
+            <a:spAutoFit/>
+          </a:bodyPr>
+          <a:lstStyle/>
+          <a:p>
+            <a:pPr algn="r">
+              <a:lnSpc>
+                <a:spcPct val="115000"/>
+              </a:lnSpc>
+            </a:pPr>
+            <a:r>
+              <a:rPr sz="1200" b="1">
+                <a:solidFill>
+                  <a:srgbClr val="D8E1F7"/>
+                </a:solidFill>
+                <a:latin typeface="맑은 고딕"/>
+              </a:rPr>
+              <a:t>Team &amp; Roles</a:t>
+            </a:r>
+          </a:p>
+        </p:txBody>
+      </p:sp>
+      <p:cxnSp>
+        <p:nvCxnSpPr>
+          <p:cNvPr id="7" name="Connector 6"/>
+          <p:cNvCxnSpPr/>
+          <p:nvPr/>
+        </p:nvCxnSpPr>
+        <p:spPr>
+          <a:xfrm>
+            <a:off x="502920" y="6355080"/>
+            <a:ext cx="11183112" cy="0"/>
+          </a:xfrm>
+          <a:prstGeom prst="line">
+            <a:avLst/>
+          </a:prstGeom>
+          <a:ln w="12700">
+            <a:solidFill>
+              <a:srgbClr val="CFD9EE"/>
+            </a:solidFill>
+          </a:ln>
+        </p:spPr>
+        <p:style>
+          <a:lnRef idx="2">
+            <a:schemeClr val="accent1"/>
+          </a:lnRef>
+          <a:fillRef idx="0">
+            <a:schemeClr val="accent1"/>
+          </a:fillRef>
+          <a:effectRef idx="1">
+            <a:schemeClr val="accent1"/>
+          </a:effectRef>
+          <a:fontRef idx="minor">
+            <a:schemeClr val="tx1"/>
+          </a:fontRef>
+        </p:style>
+      </p:cxnSp>
+      <p:sp>
+        <p:nvSpPr>
+          <p:cNvPr id="8" name="TextBox 7"/>
+          <p:cNvSpPr txBox="1"/>
+          <p:nvPr/>
+        </p:nvSpPr>
+        <p:spPr>
+          <a:xfrm>
+            <a:off x="502920" y="6446520"/>
+            <a:ext cx="5486400" cy="320040"/>
+          </a:xfrm>
+          <a:prstGeom prst="rect">
+            <a:avLst/>
+          </a:prstGeom>
+          <a:noFill/>
+        </p:spPr>
+        <p:txBody>
+          <a:bodyPr wrap="square" lIns="0" tIns="0" rIns="0" bIns="0" anchor="ctr">
+            <a:spAutoFit/>
+          </a:bodyPr>
+          <a:lstStyle/>
+          <a:p>
+            <a:pPr algn="l">
+              <a:lnSpc>
+                <a:spcPct val="115000"/>
+              </a:lnSpc>
+            </a:pPr>
+            <a:r>
+              <a:rPr sz="1050" b="0">
+                <a:solidFill>
+                  <a:srgbClr val="5B6B8C"/>
+                </a:solidFill>
+                <a:latin typeface="Consolas"/>
+              </a:rPr>
+              <a:t>CodeFab Interpreter · 5일차 발표</a:t>
+            </a:r>
+          </a:p>
+        </p:txBody>
+      </p:sp>
+      <p:sp>
+        <p:nvSpPr>
+          <p:cNvPr id="9" name="TextBox 8"/>
+          <p:cNvSpPr txBox="1"/>
+          <p:nvPr/>
+        </p:nvSpPr>
+        <p:spPr>
+          <a:xfrm>
+            <a:off x="10424160" y="6446520"/>
+            <a:ext cx="1261872" cy="320040"/>
+          </a:xfrm>
+          <a:prstGeom prst="rect">
+            <a:avLst/>
+          </a:prstGeom>
+          <a:noFill/>
+        </p:spPr>
+        <p:txBody>
+          <a:bodyPr wrap="square" lIns="0" tIns="0" rIns="0" bIns="0" anchor="ctr">
+            <a:spAutoFit/>
+          </a:bodyPr>
+          <a:lstStyle/>
+          <a:p>
+            <a:pPr algn="r">
+              <a:lnSpc>
+                <a:spcPct val="115000"/>
+              </a:lnSpc>
+            </a:pPr>
+            <a:r>
+              <a:rPr sz="1050" b="0">
+                <a:solidFill>
+                  <a:srgbClr val="5B6B8C"/>
+                </a:solidFill>
+                <a:latin typeface="Consolas"/>
+              </a:rPr>
+              <a:t>3 / 11</a:t>
+            </a:r>
+          </a:p>
+        </p:txBody>
+      </p:sp>
+      <p:sp>
+        <p:nvSpPr>
+          <p:cNvPr id="10" name="Rectangle 9"/>
+          <p:cNvSpPr/>
+          <p:nvPr/>
+        </p:nvSpPr>
+        <p:spPr>
+          <a:xfrm>
+            <a:off x="502920" y="1371600"/>
+            <a:ext cx="45720" cy="685800"/>
+          </a:xfrm>
+          <a:prstGeom prst="rect">
+            <a:avLst/>
+          </a:prstGeom>
+          <a:solidFill>
+            <a:srgbClr val="1F3C88"/>
+          </a:solidFill>
+          <a:ln>
+            <a:noFill/>
+          </a:ln>
+          <a:effectLst/>
+        </p:spPr>
+        <p:style>
+          <a:lnRef idx="1">
+            <a:schemeClr val="accent1"/>
+          </a:lnRef>
+          <a:fillRef idx="3">
+            <a:schemeClr val="accent1"/>
+          </a:fillRef>
+          <a:effectRef idx="2">
+            <a:schemeClr val="accent1"/>
+          </a:effectRef>
+          <a:fontRef idx="minor">
+            <a:schemeClr val="lt1"/>
+          </a:fontRef>
+        </p:style>
+        <p:txBody>
+          <a:bodyPr rtlCol="0" anchor="ctr"/>
+          <a:lstStyle/>
+          <a:p>
+            <a:pPr algn="ctr"/>
+            <a:endParaRPr/>
+          </a:p>
+        </p:txBody>
+      </p:sp>
+      <p:sp>
+        <p:nvSpPr>
+          <p:cNvPr id="11" name="TextBox 10"/>
+          <p:cNvSpPr txBox="1"/>
+          <p:nvPr/>
+        </p:nvSpPr>
+        <p:spPr>
+          <a:xfrm>
+            <a:off x="713232" y="1558604"/>
+            <a:ext cx="10789920" cy="302647"/>
+          </a:xfrm>
+          <a:prstGeom prst="rect">
+            <a:avLst/>
+          </a:prstGeom>
+          <a:noFill/>
+        </p:spPr>
+        <p:txBody>
+          <a:bodyPr wrap="square" lIns="0" tIns="0" rIns="0" bIns="0" anchor="ctr">
+            <a:spAutoFit/>
+          </a:bodyPr>
+          <a:lstStyle/>
+          <a:p>
+            <a:pPr algn="l">
+              <a:lnSpc>
+                <a:spcPct val="130000"/>
+              </a:lnSpc>
+            </a:pPr>
+            <a:r>
+              <a:rPr lang="ko-KR" altLang="en-US" sz="1700" b="1" dirty="0" err="1">
+                <a:solidFill>
+                  <a:srgbClr val="16213A"/>
+                </a:solidFill>
+                <a:latin typeface="맑은 고딕"/>
+              </a:rPr>
+              <a:t>팀명</a:t>
+            </a:r>
+            <a:r>
+              <a:rPr lang="en-US" altLang="ko-KR" sz="1700" b="1" dirty="0">
+                <a:solidFill>
+                  <a:srgbClr val="16213A"/>
+                </a:solidFill>
+                <a:latin typeface="맑은 고딕"/>
+              </a:rPr>
+              <a:t>: Bug Hunters</a:t>
+            </a:r>
+            <a:endParaRPr sz="1700" b="1" dirty="0">
+              <a:solidFill>
+                <a:srgbClr val="16213A"/>
+              </a:solidFill>
+              <a:latin typeface="맑은 고딕"/>
+            </a:endParaRPr>
+          </a:p>
+        </p:txBody>
+      </p:sp>
+      <p:graphicFrame>
+        <p:nvGraphicFramePr>
+          <p:cNvPr id="12" name="Table 11"/>
+          <p:cNvGraphicFramePr>
+            <a:graphicFrameLocks noGrp="1"/>
+          </p:cNvGraphicFramePr>
+          <p:nvPr>
+            <p:extLst>
+              <p:ext uri="{D42A27DB-BD31-4B8C-83A1-F6EECF244321}">
+                <p14:modId xmlns:p14="http://schemas.microsoft.com/office/powerpoint/2010/main" val="11638094"/>
+              </p:ext>
+            </p:extLst>
+          </p:nvPr>
+        </p:nvGraphicFramePr>
+        <p:xfrm>
+          <a:off x="502920" y="2286000"/>
+          <a:ext cx="11183111" cy="3566160"/>
+        </p:xfrm>
+        <a:graphic>
+          <a:graphicData uri="http://schemas.openxmlformats.org/drawingml/2006/table">
+            <a:tbl>
+              <a:tblPr>
+                <a:tableStyleId>{5C22544A-7EE6-4342-B048-85BDC9FD1C3A}</a:tableStyleId>
+              </a:tblPr>
+              <a:tblGrid>
+                <a:gridCol w="1789297">
+                  <a:extLst>
+                    <a:ext uri="{9D8B030D-6E8A-4147-A177-3AD203B41FA5}">
+                      <a16:colId xmlns:a16="http://schemas.microsoft.com/office/drawing/2014/main" val="20000"/>
+                    </a:ext>
+                  </a:extLst>
+                </a:gridCol>
+                <a:gridCol w="9393814">
+                  <a:extLst>
+                    <a:ext uri="{9D8B030D-6E8A-4147-A177-3AD203B41FA5}">
+                      <a16:colId xmlns:a16="http://schemas.microsoft.com/office/drawing/2014/main" val="20001"/>
+                    </a:ext>
+                  </a:extLst>
+                </a:gridCol>
+              </a:tblGrid>
+              <a:tr h="594360">
+                <a:tc>
+                  <a:txBody>
+                    <a:bodyPr/>
+                    <a:lstStyle/>
+                    <a:p>
+                      <a:r>
+                        <a:rPr sz="1100" b="1">
+                          <a:solidFill>
+                            <a:srgbClr val="5B6B8C"/>
+                          </a:solidFill>
+                          <a:latin typeface="맑은 고딕"/>
+                        </a:rPr>
+                        <a:t>이름</a:t>
+                      </a:r>
+                    </a:p>
+                  </a:txBody>
+                  <a:tcPr marL="109728" marR="109728" marT="54864" marB="54864" anchor="b">
+                    <a:solidFill>
+                      <a:srgbClr val="FFFFFF"/>
+                    </a:solidFill>
+                  </a:tcPr>
+                </a:tc>
+                <a:tc>
+                  <a:txBody>
+                    <a:bodyPr/>
+                    <a:lstStyle/>
+                    <a:p>
+                      <a:r>
+                        <a:rPr sz="1100" b="1">
+                          <a:solidFill>
+                            <a:srgbClr val="5B6B8C"/>
+                          </a:solidFill>
+                          <a:latin typeface="맑은 고딕"/>
+                        </a:rPr>
+                        <a:t>담당 역할 (커밋 이력 기준)</a:t>
+                      </a:r>
+                    </a:p>
+                  </a:txBody>
+                  <a:tcPr marL="109728" marR="109728" marT="54864" marB="54864" anchor="b">
+                    <a:solidFill>
+                      <a:srgbClr val="FFFFFF"/>
+                    </a:solidFill>
+                  </a:tcPr>
+                </a:tc>
+                <a:extLst>
+                  <a:ext uri="{0D108BD9-81ED-4DB2-BD59-A6C34878D82A}">
+                    <a16:rowId xmlns:a16="http://schemas.microsoft.com/office/drawing/2014/main" val="10000"/>
+                  </a:ext>
+                </a:extLst>
+              </a:tr>
+              <a:tr h="594360">
+                <a:tc>
+                  <a:txBody>
+                    <a:bodyPr/>
+                    <a:lstStyle/>
+                    <a:p>
+                      <a:r>
+                        <a:rPr lang="ko-KR" altLang="en-US" sz="1350" b="1" dirty="0" err="1">
+                          <a:solidFill>
+                            <a:srgbClr val="142A63"/>
+                          </a:solidFill>
+                          <a:latin typeface="맑은 고딕"/>
+                        </a:rPr>
+                        <a:t>김병남</a:t>
+                      </a:r>
+                      <a:endParaRPr sz="1350" b="1" dirty="0">
+                        <a:solidFill>
+                          <a:srgbClr val="142A63"/>
+                        </a:solidFill>
+                        <a:latin typeface="맑은 고딕"/>
+                      </a:endParaRPr>
+                    </a:p>
+                  </a:txBody>
+                  <a:tcPr marL="109728" marR="109728" marT="91440" marB="91440">
+                    <a:solidFill>
+                      <a:srgbClr val="FFFFFF"/>
+                    </a:solidFill>
+                  </a:tcPr>
+                </a:tc>
+                <a:tc>
+                  <a:txBody>
+                    <a:bodyPr/>
+                    <a:lstStyle/>
+                    <a:p>
+                      <a:pPr>
+                        <a:lnSpc>
+                          <a:spcPct val="115000"/>
+                        </a:lnSpc>
+                      </a:pPr>
+                      <a:r>
+                        <a:rPr sz="1350">
+                          <a:solidFill>
+                            <a:srgbClr val="16213A"/>
+                          </a:solidFill>
+                          <a:latin typeface="맑은 고딕"/>
+                        </a:rPr>
+                        <a:t>파이프라인 통합 · CLI/REPL 진입점 · import(Ch.6) 기능 · 전체 통합 테스트(fixture) 총괄</a:t>
+                      </a:r>
+                    </a:p>
+                  </a:txBody>
+                  <a:tcPr marL="109728" marR="109728" marT="91440" marB="91440">
+                    <a:solidFill>
+                      <a:srgbClr val="FFFFFF"/>
+                    </a:solidFill>
+                  </a:tcPr>
+                </a:tc>
+                <a:extLst>
+                  <a:ext uri="{0D108BD9-81ED-4DB2-BD59-A6C34878D82A}">
+                    <a16:rowId xmlns:a16="http://schemas.microsoft.com/office/drawing/2014/main" val="10001"/>
+                  </a:ext>
+                </a:extLst>
+              </a:tr>
+              <a:tr h="594360">
+                <a:tc>
+                  <a:txBody>
+                    <a:bodyPr/>
+                    <a:lstStyle/>
+                    <a:p>
+                      <a:r>
+                        <a:rPr lang="ko-KR" altLang="en-US" sz="1350" b="1" dirty="0" err="1">
+                          <a:solidFill>
+                            <a:srgbClr val="142A63"/>
+                          </a:solidFill>
+                          <a:latin typeface="맑은 고딕"/>
+                        </a:rPr>
+                        <a:t>조승주</a:t>
+                      </a:r>
+                      <a:endParaRPr sz="1350" b="1" dirty="0">
+                        <a:solidFill>
+                          <a:srgbClr val="142A63"/>
+                        </a:solidFill>
+                        <a:latin typeface="맑은 고딕"/>
+                      </a:endParaRPr>
+                    </a:p>
+                  </a:txBody>
+                  <a:tcPr marL="109728" marR="109728" marT="91440" marB="91440">
+                    <a:solidFill>
+                      <a:srgbClr val="FFFFFF"/>
+                    </a:solidFill>
+                  </a:tcPr>
+                </a:tc>
+                <a:tc>
+                  <a:txBody>
+                    <a:bodyPr/>
+                    <a:lstStyle/>
+                    <a:p>
+                      <a:pPr>
+                        <a:lnSpc>
+                          <a:spcPct val="115000"/>
+                        </a:lnSpc>
+                      </a:pPr>
+                      <a:r>
+                        <a:rPr sz="1350">
+                          <a:solidFill>
+                            <a:srgbClr val="16213A"/>
+                          </a:solidFill>
+                          <a:latin typeface="맑은 고딕"/>
+                        </a:rPr>
+                        <a:t>토크나이저 &amp; 한글 키워드 매핑 · 디버그 모드(Ch.7 공장 제어 쉘) 구현</a:t>
+                      </a:r>
+                    </a:p>
+                  </a:txBody>
+                  <a:tcPr marL="109728" marR="109728" marT="91440" marB="91440">
+                    <a:solidFill>
+                      <a:srgbClr val="FFFFFF"/>
+                    </a:solidFill>
+                  </a:tcPr>
+                </a:tc>
+                <a:extLst>
+                  <a:ext uri="{0D108BD9-81ED-4DB2-BD59-A6C34878D82A}">
+                    <a16:rowId xmlns:a16="http://schemas.microsoft.com/office/drawing/2014/main" val="10002"/>
+                  </a:ext>
+                </a:extLst>
+              </a:tr>
+              <a:tr h="594360">
+                <a:tc>
+                  <a:txBody>
+                    <a:bodyPr/>
+                    <a:lstStyle/>
+                    <a:p>
+                      <a:r>
+                        <a:rPr lang="ko-KR" altLang="en-US" sz="1350" b="1" dirty="0" err="1">
+                          <a:solidFill>
+                            <a:srgbClr val="142A63"/>
+                          </a:solidFill>
+                          <a:latin typeface="맑은 고딕"/>
+                        </a:rPr>
+                        <a:t>이하섭</a:t>
+                      </a:r>
+                      <a:endParaRPr sz="1350" b="1" dirty="0">
+                        <a:solidFill>
+                          <a:srgbClr val="142A63"/>
+                        </a:solidFill>
+                        <a:latin typeface="맑은 고딕"/>
+                      </a:endParaRPr>
+                    </a:p>
+                  </a:txBody>
+                  <a:tcPr marL="109728" marR="109728" marT="91440" marB="91440">
+                    <a:solidFill>
+                      <a:srgbClr val="FFFFFF"/>
+                    </a:solidFill>
+                  </a:tcPr>
+                </a:tc>
+                <a:tc>
+                  <a:txBody>
+                    <a:bodyPr/>
+                    <a:lstStyle/>
+                    <a:p>
+                      <a:pPr>
+                        <a:lnSpc>
+                          <a:spcPct val="115000"/>
+                        </a:lnSpc>
+                      </a:pPr>
+                      <a:r>
+                        <a:rPr sz="1350">
+                          <a:solidFill>
+                            <a:srgbClr val="16213A"/>
+                          </a:solidFill>
+                          <a:latin typeface="맑은 고딕"/>
+                        </a:rPr>
+                        <a:t>클래스(Ch.3) 기능 전체 구현(선언·필드·메서드·상속·instanceof) · Executor Unit 리팩토링</a:t>
+                      </a:r>
+                    </a:p>
+                  </a:txBody>
+                  <a:tcPr marL="109728" marR="109728" marT="91440" marB="91440">
+                    <a:solidFill>
+                      <a:srgbClr val="FFFFFF"/>
+                    </a:solidFill>
+                  </a:tcPr>
+                </a:tc>
+                <a:extLst>
+                  <a:ext uri="{0D108BD9-81ED-4DB2-BD59-A6C34878D82A}">
+                    <a16:rowId xmlns:a16="http://schemas.microsoft.com/office/drawing/2014/main" val="10003"/>
+                  </a:ext>
+                </a:extLst>
+              </a:tr>
+              <a:tr h="594360">
+                <a:tc>
+                  <a:txBody>
+                    <a:bodyPr/>
+                    <a:lstStyle/>
+                    <a:p>
+                      <a:r>
+                        <a:rPr lang="ko-KR" altLang="en-US" sz="1350" b="1" dirty="0">
+                          <a:solidFill>
+                            <a:srgbClr val="142A63"/>
+                          </a:solidFill>
+                          <a:latin typeface="맑은 고딕"/>
+                        </a:rPr>
+                        <a:t>최현준</a:t>
+                      </a:r>
+                      <a:endParaRPr sz="1350" b="1" dirty="0">
+                        <a:solidFill>
+                          <a:srgbClr val="142A63"/>
+                        </a:solidFill>
+                        <a:latin typeface="맑은 고딕"/>
+                      </a:endParaRPr>
+                    </a:p>
+                  </a:txBody>
+                  <a:tcPr marL="109728" marR="109728" marT="91440" marB="91440">
+                    <a:solidFill>
+                      <a:srgbClr val="FFFFFF"/>
+                    </a:solidFill>
+                  </a:tcPr>
+                </a:tc>
+                <a:tc>
+                  <a:txBody>
+                    <a:bodyPr/>
+                    <a:lstStyle/>
+                    <a:p>
+                      <a:pPr>
+                        <a:lnSpc>
+                          <a:spcPct val="115000"/>
+                        </a:lnSpc>
+                      </a:pPr>
+                      <a:r>
+                        <a:rPr sz="1350">
+                          <a:solidFill>
+                            <a:srgbClr val="16213A"/>
+                          </a:solidFill>
+                          <a:latin typeface="맑은 고딕"/>
+                        </a:rPr>
+                        <a:t>정적 배열(Ch.4) 구현 · 실행 전 최적화(Ch.5, Resolver/Optimizer) · 문법·타입힌트 리팩토링</a:t>
+                      </a:r>
+                    </a:p>
+                  </a:txBody>
+                  <a:tcPr marL="109728" marR="109728" marT="91440" marB="91440">
+                    <a:solidFill>
+                      <a:srgbClr val="FFFFFF"/>
+                    </a:solidFill>
+                  </a:tcPr>
+                </a:tc>
+                <a:extLst>
+                  <a:ext uri="{0D108BD9-81ED-4DB2-BD59-A6C34878D82A}">
+                    <a16:rowId xmlns:a16="http://schemas.microsoft.com/office/drawing/2014/main" val="10004"/>
+                  </a:ext>
+                </a:extLst>
+              </a:tr>
+              <a:tr h="594360">
+                <a:tc>
+                  <a:txBody>
+                    <a:bodyPr/>
+                    <a:lstStyle/>
+                    <a:p>
+                      <a:r>
+                        <a:rPr lang="ko-KR" altLang="en-US" sz="1350" b="1" dirty="0">
+                          <a:solidFill>
+                            <a:srgbClr val="142A63"/>
+                          </a:solidFill>
+                          <a:latin typeface="맑은 고딕"/>
+                        </a:rPr>
+                        <a:t>이준원</a:t>
+                      </a:r>
+                      <a:endParaRPr sz="1350" b="1" dirty="0">
+                        <a:solidFill>
+                          <a:srgbClr val="142A63"/>
+                        </a:solidFill>
+                        <a:latin typeface="맑은 고딕"/>
+                      </a:endParaRPr>
+                    </a:p>
+                  </a:txBody>
+                  <a:tcPr marL="109728" marR="109728" marT="91440" marB="91440">
+                    <a:solidFill>
+                      <a:srgbClr val="FFFFFF"/>
+                    </a:solidFill>
+                  </a:tcPr>
+                </a:tc>
+                <a:tc>
+                  <a:txBody>
+                    <a:bodyPr/>
+                    <a:lstStyle/>
+                    <a:p>
+                      <a:pPr>
+                        <a:lnSpc>
+                          <a:spcPct val="115000"/>
+                        </a:lnSpc>
+                      </a:pPr>
+                      <a:r>
+                        <a:rPr sz="1350" dirty="0">
+                          <a:solidFill>
+                            <a:srgbClr val="16213A"/>
+                          </a:solidFill>
+                          <a:latin typeface="맑은 고딕"/>
+                        </a:rPr>
+                        <a:t>Checker Unit </a:t>
+                      </a:r>
+                      <a:r>
+                        <a:rPr sz="1350" dirty="0" err="1">
+                          <a:solidFill>
+                            <a:srgbClr val="16213A"/>
+                          </a:solidFill>
+                          <a:latin typeface="맑은 고딕"/>
+                        </a:rPr>
+                        <a:t>초기</a:t>
+                      </a:r>
+                      <a:r>
+                        <a:rPr sz="1350" dirty="0">
+                          <a:solidFill>
+                            <a:srgbClr val="16213A"/>
+                          </a:solidFill>
+                          <a:latin typeface="맑은 고딕"/>
+                        </a:rPr>
+                        <a:t> </a:t>
+                      </a:r>
+                      <a:r>
+                        <a:rPr sz="1350" dirty="0" err="1">
+                          <a:solidFill>
+                            <a:srgbClr val="16213A"/>
+                          </a:solidFill>
+                          <a:latin typeface="맑은 고딕"/>
+                        </a:rPr>
+                        <a:t>설계</a:t>
+                      </a:r>
+                      <a:r>
+                        <a:rPr sz="1350" dirty="0">
+                          <a:solidFill>
+                            <a:srgbClr val="16213A"/>
+                          </a:solidFill>
+                          <a:latin typeface="맑은 고딕"/>
+                        </a:rPr>
+                        <a:t>(</a:t>
+                      </a:r>
+                      <a:r>
+                        <a:rPr sz="1350" dirty="0" err="1">
+                          <a:solidFill>
+                            <a:srgbClr val="16213A"/>
+                          </a:solidFill>
+                          <a:latin typeface="맑은 고딕"/>
+                        </a:rPr>
+                        <a:t>변수</a:t>
+                      </a:r>
+                      <a:r>
+                        <a:rPr sz="1350" dirty="0">
+                          <a:solidFill>
+                            <a:srgbClr val="16213A"/>
+                          </a:solidFill>
+                          <a:latin typeface="맑은 고딕"/>
+                        </a:rPr>
+                        <a:t> </a:t>
+                      </a:r>
+                      <a:r>
+                        <a:rPr sz="1350" dirty="0" err="1">
+                          <a:solidFill>
+                            <a:srgbClr val="16213A"/>
+                          </a:solidFill>
+                          <a:latin typeface="맑은 고딕"/>
+                        </a:rPr>
+                        <a:t>스코프·에러</a:t>
+                      </a:r>
+                      <a:r>
+                        <a:rPr sz="1350" dirty="0">
+                          <a:solidFill>
+                            <a:srgbClr val="16213A"/>
+                          </a:solidFill>
+                          <a:latin typeface="맑은 고딕"/>
+                        </a:rPr>
+                        <a:t> </a:t>
+                      </a:r>
+                      <a:r>
+                        <a:rPr sz="1350" dirty="0" err="1">
+                          <a:solidFill>
+                            <a:srgbClr val="16213A"/>
+                          </a:solidFill>
+                          <a:latin typeface="맑은 고딕"/>
+                        </a:rPr>
+                        <a:t>검출</a:t>
+                      </a:r>
+                      <a:r>
+                        <a:rPr sz="1350" dirty="0">
+                          <a:solidFill>
+                            <a:srgbClr val="16213A"/>
+                          </a:solidFill>
+                          <a:latin typeface="맑은 고딕"/>
+                        </a:rPr>
+                        <a:t>) · </a:t>
+                      </a:r>
+                      <a:r>
+                        <a:rPr sz="1350" dirty="0" err="1">
+                          <a:solidFill>
+                            <a:srgbClr val="16213A"/>
+                          </a:solidFill>
+                          <a:latin typeface="맑은 고딕"/>
+                        </a:rPr>
+                        <a:t>에러</a:t>
+                      </a:r>
+                      <a:r>
+                        <a:rPr sz="1350" dirty="0">
+                          <a:solidFill>
+                            <a:srgbClr val="16213A"/>
+                          </a:solidFill>
+                          <a:latin typeface="맑은 고딕"/>
+                        </a:rPr>
+                        <a:t> </a:t>
+                      </a:r>
+                      <a:r>
+                        <a:rPr sz="1350" dirty="0" err="1">
+                          <a:solidFill>
+                            <a:srgbClr val="16213A"/>
+                          </a:solidFill>
+                          <a:latin typeface="맑은 고딕"/>
+                        </a:rPr>
+                        <a:t>모듈</a:t>
+                      </a:r>
+                      <a:r>
+                        <a:rPr sz="1350" dirty="0">
+                          <a:solidFill>
+                            <a:srgbClr val="16213A"/>
+                          </a:solidFill>
+                          <a:latin typeface="맑은 고딕"/>
+                        </a:rPr>
+                        <a:t> </a:t>
+                      </a:r>
+                      <a:r>
+                        <a:rPr sz="1350" dirty="0" err="1">
+                          <a:solidFill>
+                            <a:srgbClr val="16213A"/>
+                          </a:solidFill>
+                          <a:latin typeface="맑은 고딕"/>
+                        </a:rPr>
+                        <a:t>통합</a:t>
+                      </a:r>
+                      <a:r>
+                        <a:rPr sz="1350" dirty="0">
+                          <a:solidFill>
+                            <a:srgbClr val="16213A"/>
+                          </a:solidFill>
+                          <a:latin typeface="맑은 고딕"/>
+                        </a:rPr>
+                        <a:t> · </a:t>
+                      </a:r>
+                      <a:r>
+                        <a:rPr sz="1350" dirty="0" err="1">
+                          <a:solidFill>
+                            <a:srgbClr val="16213A"/>
+                          </a:solidFill>
+                          <a:latin typeface="맑은 고딕"/>
+                        </a:rPr>
+                        <a:t>함수</a:t>
+                      </a:r>
+                      <a:r>
+                        <a:rPr sz="1350" dirty="0">
+                          <a:solidFill>
+                            <a:srgbClr val="16213A"/>
+                          </a:solidFill>
+                          <a:latin typeface="맑은 고딕"/>
+                        </a:rPr>
+                        <a:t>(Ch.2) </a:t>
+                      </a:r>
+                      <a:r>
+                        <a:rPr sz="1350" dirty="0" err="1">
+                          <a:solidFill>
+                            <a:srgbClr val="16213A"/>
+                          </a:solidFill>
+                          <a:latin typeface="맑은 고딕"/>
+                        </a:rPr>
+                        <a:t>기능</a:t>
+                      </a:r>
+                      <a:r>
+                        <a:rPr sz="1350" dirty="0">
+                          <a:solidFill>
+                            <a:srgbClr val="16213A"/>
+                          </a:solidFill>
+                          <a:latin typeface="맑은 고딕"/>
+                        </a:rPr>
+                        <a:t> </a:t>
+                      </a:r>
+                      <a:r>
+                        <a:rPr sz="1350" dirty="0" err="1">
+                          <a:solidFill>
+                            <a:srgbClr val="16213A"/>
+                          </a:solidFill>
+                          <a:latin typeface="맑은 고딕"/>
+                        </a:rPr>
+                        <a:t>초기</a:t>
+                      </a:r>
+                      <a:r>
+                        <a:rPr sz="1350" dirty="0">
+                          <a:solidFill>
+                            <a:srgbClr val="16213A"/>
+                          </a:solidFill>
+                          <a:latin typeface="맑은 고딕"/>
+                        </a:rPr>
+                        <a:t> </a:t>
+                      </a:r>
+                      <a:r>
+                        <a:rPr sz="1350" dirty="0" err="1">
+                          <a:solidFill>
+                            <a:srgbClr val="16213A"/>
+                          </a:solidFill>
+                          <a:latin typeface="맑은 고딕"/>
+                        </a:rPr>
+                        <a:t>구현</a:t>
+                      </a:r>
+                      <a:endParaRPr sz="1350" dirty="0">
+                        <a:solidFill>
+                          <a:srgbClr val="16213A"/>
+                        </a:solidFill>
+                        <a:latin typeface="맑은 고딕"/>
+                      </a:endParaRPr>
+                    </a:p>
+                  </a:txBody>
+                  <a:tcPr marL="109728" marR="109728" marT="91440" marB="91440">
+                    <a:solidFill>
+                      <a:srgbClr val="FFFFFF"/>
+                    </a:solidFill>
+                  </a:tcPr>
+                </a:tc>
+                <a:extLst>
+                  <a:ext uri="{0D108BD9-81ED-4DB2-BD59-A6C34878D82A}">
+                    <a16:rowId xmlns:a16="http://schemas.microsoft.com/office/drawing/2014/main" val="10005"/>
+                  </a:ext>
+                </a:extLst>
               </a:tr>
             </a:tbl>
           </a:graphicData>
@@ -5847,7 +9379,7 @@
 </file>
 
 <file path=ppt/slides/slide4.xml><?xml version="1.0" encoding="utf-8"?>
-<p:sld xmlns:a="http://schemas.openxmlformats.org/drawingml/2006/main" xmlns:p="http://schemas.openxmlformats.org/presentationml/2006/main" xmlns:r="http://schemas.openxmlformats.org/officeDocument/2006/relationships">
+<p:sld xmlns:a="http://schemas.openxmlformats.org/drawingml/2006/main" xmlns:r="http://schemas.openxmlformats.org/officeDocument/2006/relationships" xmlns:p="http://schemas.openxmlformats.org/presentationml/2006/main">
   <p:cSld>
     <p:spTree>
       <p:nvGrpSpPr>
@@ -5855,7 +9387,14 @@
         <p:cNvGrpSpPr/>
         <p:nvPr/>
       </p:nvGrpSpPr>
-      <p:grpSpPr/>
+      <p:grpSpPr>
+        <a:xfrm>
+          <a:off x="0" y="0"/>
+          <a:ext cx="0" cy="0"/>
+          <a:chOff x="0" y="0"/>
+          <a:chExt cx="0" cy="0"/>
+        </a:xfrm>
+      </p:grpSpPr>
       <p:sp>
         <p:nvSpPr>
           <p:cNvPr id="2" name="Rectangle 1"/>
@@ -5897,6 +9436,7 @@
           <a:lstStyle/>
           <a:p>
             <a:pPr algn="ctr"/>
+            <a:endParaRPr/>
           </a:p>
         </p:txBody>
       </p:sp>
@@ -5941,6 +9481,7 @@
           <a:lstStyle/>
           <a:p>
             <a:pPr algn="ctr"/>
+            <a:endParaRPr/>
           </a:p>
         </p:txBody>
       </p:sp>
@@ -6016,7 +9557,7 @@
           <a:noFill/>
         </p:spPr>
         <p:txBody>
-          <a:bodyPr wrap="square" anchor="ctr" lIns="0" rIns="0" tIns="0" bIns="0">
+          <a:bodyPr wrap="square" lIns="0" tIns="0" rIns="0" bIns="0" anchor="ctr">
             <a:spAutoFit/>
           </a:bodyPr>
           <a:lstStyle/>
@@ -6055,7 +9596,7 @@
           <a:noFill/>
         </p:spPr>
         <p:txBody>
-          <a:bodyPr wrap="square" anchor="ctr" lIns="0" rIns="0" tIns="0" bIns="0">
+          <a:bodyPr wrap="square" lIns="0" tIns="0" rIns="0" bIns="0" anchor="ctr">
             <a:spAutoFit/>
           </a:bodyPr>
           <a:lstStyle/>
@@ -6129,7 +9670,7 @@
           <a:noFill/>
         </p:spPr>
         <p:txBody>
-          <a:bodyPr wrap="square" anchor="ctr" lIns="0" rIns="0" tIns="0" bIns="0">
+          <a:bodyPr wrap="square" lIns="0" tIns="0" rIns="0" bIns="0" anchor="ctr">
             <a:spAutoFit/>
           </a:bodyPr>
           <a:lstStyle/>
@@ -6168,7 +9709,7 @@
           <a:noFill/>
         </p:spPr>
         <p:txBody>
-          <a:bodyPr wrap="square" anchor="ctr" lIns="0" rIns="0" tIns="0" bIns="0">
+          <a:bodyPr wrap="square" lIns="0" tIns="0" rIns="0" bIns="0" anchor="ctr">
             <a:spAutoFit/>
           </a:bodyPr>
           <a:lstStyle/>
@@ -6185,7 +9726,7 @@
                 </a:solidFill>
                 <a:latin typeface="Consolas"/>
               </a:rPr>
-              <a:t>4 / 10</a:t>
+              <a:t>4 / 11</a:t>
             </a:r>
           </a:p>
         </p:txBody>
@@ -6231,6 +9772,7 @@
           <a:lstStyle/>
           <a:p>
             <a:pPr algn="ctr"/>
+            <a:endParaRPr/>
           </a:p>
         </p:txBody>
       </p:sp>
@@ -6251,7 +9793,7 @@
           <a:noFill/>
         </p:spPr>
         <p:txBody>
-          <a:bodyPr wrap="square" anchor="ctr" lIns="0" rIns="0" tIns="0" bIns="0">
+          <a:bodyPr wrap="square" lIns="0" tIns="0" rIns="0" bIns="0" anchor="ctr">
             <a:spAutoFit/>
           </a:bodyPr>
           <a:lstStyle/>
@@ -6312,7 +9854,7 @@
           </a:fontRef>
         </p:style>
         <p:txBody>
-          <a:bodyPr rtlCol="0" anchor="ctr" wrap="square"/>
+          <a:bodyPr wrap="square" rtlCol="0" anchor="ctr"/>
           <a:lstStyle/>
           <a:p>
             <a:pPr algn="ctr">
@@ -6419,7 +9961,7 @@
           </a:fontRef>
         </p:style>
         <p:txBody>
-          <a:bodyPr rtlCol="0" anchor="ctr" wrap="square"/>
+          <a:bodyPr wrap="square" rtlCol="0" anchor="ctr"/>
           <a:lstStyle/>
           <a:p>
             <a:pPr algn="ctr">
@@ -6514,7 +10056,7 @@
           </a:fontRef>
         </p:style>
         <p:txBody>
-          <a:bodyPr rtlCol="0" anchor="ctr" wrap="square"/>
+          <a:bodyPr wrap="square" rtlCol="0" anchor="ctr"/>
           <a:lstStyle/>
           <a:p>
             <a:pPr algn="ctr">
@@ -6621,7 +10163,7 @@
           </a:fontRef>
         </p:style>
         <p:txBody>
-          <a:bodyPr rtlCol="0" anchor="ctr" wrap="square"/>
+          <a:bodyPr wrap="square" rtlCol="0" anchor="ctr"/>
           <a:lstStyle/>
           <a:p>
             <a:pPr algn="ctr">
@@ -6716,7 +10258,7 @@
           </a:fontRef>
         </p:style>
         <p:txBody>
-          <a:bodyPr rtlCol="0" anchor="ctr" wrap="square"/>
+          <a:bodyPr wrap="square" rtlCol="0" anchor="ctr"/>
           <a:lstStyle/>
           <a:p>
             <a:pPr algn="ctr">
@@ -6811,7 +10353,7 @@
           </a:fontRef>
         </p:style>
         <p:txBody>
-          <a:bodyPr rtlCol="0" anchor="ctr" wrap="square"/>
+          <a:bodyPr wrap="square" rtlCol="0" anchor="ctr"/>
           <a:lstStyle/>
           <a:p>
             <a:pPr algn="ctr">
@@ -6846,17 +10388,29 @@
         <a:graphic>
           <a:graphicData uri="http://schemas.openxmlformats.org/drawingml/2006/table">
             <a:tbl>
-              <a:tblPr firstRow="0" bandRow="0">
+              <a:tblPr>
                 <a:tableStyleId>{5C22544A-7EE6-4342-B048-85BDC9FD1C3A}</a:tableStyleId>
               </a:tblPr>
               <a:tblGrid>
-                <a:gridCol w="3578595"/>
-                <a:gridCol w="7604516"/>
+                <a:gridCol w="3578595">
+                  <a:extLst>
+                    <a:ext uri="{9D8B030D-6E8A-4147-A177-3AD203B41FA5}">
+                      <a16:colId xmlns:a16="http://schemas.microsoft.com/office/drawing/2014/main" val="20000"/>
+                    </a:ext>
+                  </a:extLst>
+                </a:gridCol>
+                <a:gridCol w="7604516">
+                  <a:extLst>
+                    <a:ext uri="{9D8B030D-6E8A-4147-A177-3AD203B41FA5}">
+                      <a16:colId xmlns:a16="http://schemas.microsoft.com/office/drawing/2014/main" val="20001"/>
+                    </a:ext>
+                  </a:extLst>
+                </a:gridCol>
               </a:tblGrid>
               <a:tr h="762000">
                 <a:tc>
                   <a:txBody>
-                    <a:bodyPr wrap="square"/>
+                    <a:bodyPr/>
                     <a:lstStyle/>
                     <a:p>
                       <a:r>
@@ -6878,7 +10432,7 @@
                 </a:tc>
                 <a:tc>
                   <a:txBody>
-                    <a:bodyPr wrap="square"/>
+                    <a:bodyPr/>
                     <a:lstStyle/>
                     <a:p>
                       <a:r>
@@ -6898,11 +10452,16 @@
                     </a:solidFill>
                   </a:tcPr>
                 </a:tc>
+                <a:extLst>
+                  <a:ext uri="{0D108BD9-81ED-4DB2-BD59-A6C34878D82A}">
+                    <a16:rowId xmlns:a16="http://schemas.microsoft.com/office/drawing/2014/main" val="10000"/>
+                  </a:ext>
+                </a:extLst>
               </a:tr>
               <a:tr h="762000">
                 <a:tc>
                   <a:txBody>
-                    <a:bodyPr wrap="square"/>
+                    <a:bodyPr/>
                     <a:lstStyle/>
                     <a:p>
                       <a:r>
@@ -6916,7 +10475,7 @@
                       </a:r>
                     </a:p>
                   </a:txBody>
-                  <a:tcPr anchor="t" marL="109728" marR="109728" marT="91440" marB="91440">
+                  <a:tcPr marL="109728" marR="109728" marT="91440" marB="91440">
                     <a:solidFill>
                       <a:srgbClr val="FFFFFF"/>
                     </a:solidFill>
@@ -6924,7 +10483,7 @@
                 </a:tc>
                 <a:tc>
                   <a:txBody>
-                    <a:bodyPr wrap="square"/>
+                    <a:bodyPr/>
                     <a:lstStyle/>
                     <a:p>
                       <a:pPr>
@@ -6943,17 +10502,22 @@
                       </a:r>
                     </a:p>
                   </a:txBody>
-                  <a:tcPr anchor="t" marL="109728" marR="109728" marT="91440" marB="91440">
+                  <a:tcPr marL="109728" marR="109728" marT="91440" marB="91440">
                     <a:solidFill>
                       <a:srgbClr val="FFFFFF"/>
                     </a:solidFill>
                   </a:tcPr>
                 </a:tc>
+                <a:extLst>
+                  <a:ext uri="{0D108BD9-81ED-4DB2-BD59-A6C34878D82A}">
+                    <a16:rowId xmlns:a16="http://schemas.microsoft.com/office/drawing/2014/main" val="10001"/>
+                  </a:ext>
+                </a:extLst>
               </a:tr>
               <a:tr h="762000">
                 <a:tc>
                   <a:txBody>
-                    <a:bodyPr wrap="square"/>
+                    <a:bodyPr/>
                     <a:lstStyle/>
                     <a:p>
                       <a:r>
@@ -6967,7 +10531,7 @@
                       </a:r>
                     </a:p>
                   </a:txBody>
-                  <a:tcPr anchor="t" marL="109728" marR="109728" marT="91440" marB="91440">
+                  <a:tcPr marL="109728" marR="109728" marT="91440" marB="91440">
                     <a:solidFill>
                       <a:srgbClr val="FFFFFF"/>
                     </a:solidFill>
@@ -6975,7 +10539,7 @@
                 </a:tc>
                 <a:tc>
                   <a:txBody>
-                    <a:bodyPr wrap="square"/>
+                    <a:bodyPr/>
                     <a:lstStyle/>
                     <a:p>
                       <a:pPr>
@@ -6994,12 +10558,17 @@
                       </a:r>
                     </a:p>
                   </a:txBody>
-                  <a:tcPr anchor="t" marL="109728" marR="109728" marT="91440" marB="91440">
+                  <a:tcPr marL="109728" marR="109728" marT="91440" marB="91440">
                     <a:solidFill>
                       <a:srgbClr val="FFFFFF"/>
                     </a:solidFill>
                   </a:tcPr>
                 </a:tc>
+                <a:extLst>
+                  <a:ext uri="{0D108BD9-81ED-4DB2-BD59-A6C34878D82A}">
+                    <a16:rowId xmlns:a16="http://schemas.microsoft.com/office/drawing/2014/main" val="10002"/>
+                  </a:ext>
+                </a:extLst>
               </a:tr>
             </a:tbl>
           </a:graphicData>
@@ -7014,7 +10583,7 @@
 </file>
 
 <file path=ppt/slides/slide5.xml><?xml version="1.0" encoding="utf-8"?>
-<p:sld xmlns:a="http://schemas.openxmlformats.org/drawingml/2006/main" xmlns:p="http://schemas.openxmlformats.org/presentationml/2006/main" xmlns:r="http://schemas.openxmlformats.org/officeDocument/2006/relationships">
+<p:sld xmlns:a="http://schemas.openxmlformats.org/drawingml/2006/main" xmlns:r="http://schemas.openxmlformats.org/officeDocument/2006/relationships" xmlns:p="http://schemas.openxmlformats.org/presentationml/2006/main">
   <p:cSld>
     <p:spTree>
       <p:nvGrpSpPr>
@@ -7022,7 +10591,14 @@
         <p:cNvGrpSpPr/>
         <p:nvPr/>
       </p:nvGrpSpPr>
-      <p:grpSpPr/>
+      <p:grpSpPr>
+        <a:xfrm>
+          <a:off x="0" y="0"/>
+          <a:ext cx="0" cy="0"/>
+          <a:chOff x="0" y="0"/>
+          <a:chExt cx="0" cy="0"/>
+        </a:xfrm>
+      </p:grpSpPr>
       <p:sp>
         <p:nvSpPr>
           <p:cNvPr id="2" name="Rectangle 1"/>
@@ -7064,6 +10640,7 @@
           <a:lstStyle/>
           <a:p>
             <a:pPr algn="ctr"/>
+            <a:endParaRPr/>
           </a:p>
         </p:txBody>
       </p:sp>
@@ -7108,6 +10685,7 @@
           <a:lstStyle/>
           <a:p>
             <a:pPr algn="ctr"/>
+            <a:endParaRPr/>
           </a:p>
         </p:txBody>
       </p:sp>
@@ -7183,7 +10761,7 @@
           <a:noFill/>
         </p:spPr>
         <p:txBody>
-          <a:bodyPr wrap="square" anchor="ctr" lIns="0" rIns="0" tIns="0" bIns="0">
+          <a:bodyPr wrap="square" lIns="0" tIns="0" rIns="0" bIns="0" anchor="ctr">
             <a:spAutoFit/>
           </a:bodyPr>
           <a:lstStyle/>
@@ -7222,7 +10800,7 @@
           <a:noFill/>
         </p:spPr>
         <p:txBody>
-          <a:bodyPr wrap="square" anchor="ctr" lIns="0" rIns="0" tIns="0" bIns="0">
+          <a:bodyPr wrap="square" lIns="0" tIns="0" rIns="0" bIns="0" anchor="ctr">
             <a:spAutoFit/>
           </a:bodyPr>
           <a:lstStyle/>
@@ -7296,7 +10874,7 @@
           <a:noFill/>
         </p:spPr>
         <p:txBody>
-          <a:bodyPr wrap="square" anchor="ctr" lIns="0" rIns="0" tIns="0" bIns="0">
+          <a:bodyPr wrap="square" lIns="0" tIns="0" rIns="0" bIns="0" anchor="ctr">
             <a:spAutoFit/>
           </a:bodyPr>
           <a:lstStyle/>
@@ -7335,7 +10913,7 @@
           <a:noFill/>
         </p:spPr>
         <p:txBody>
-          <a:bodyPr wrap="square" anchor="ctr" lIns="0" rIns="0" tIns="0" bIns="0">
+          <a:bodyPr wrap="square" lIns="0" tIns="0" rIns="0" bIns="0" anchor="ctr">
             <a:spAutoFit/>
           </a:bodyPr>
           <a:lstStyle/>
@@ -7352,7 +10930,7 @@
                 </a:solidFill>
                 <a:latin typeface="Consolas"/>
               </a:rPr>
-              <a:t>5 / 10</a:t>
+              <a:t>5 / 11</a:t>
             </a:r>
           </a:p>
         </p:txBody>
@@ -7372,17 +10950,29 @@
         <a:graphic>
           <a:graphicData uri="http://schemas.openxmlformats.org/drawingml/2006/table">
             <a:tbl>
-              <a:tblPr firstRow="0" bandRow="0">
+              <a:tblPr>
                 <a:tableStyleId>{5C22544A-7EE6-4342-B048-85BDC9FD1C3A}</a:tableStyleId>
               </a:tblPr>
               <a:tblGrid>
-                <a:gridCol w="1789297"/>
-                <a:gridCol w="9393814"/>
+                <a:gridCol w="1789297">
+                  <a:extLst>
+                    <a:ext uri="{9D8B030D-6E8A-4147-A177-3AD203B41FA5}">
+                      <a16:colId xmlns:a16="http://schemas.microsoft.com/office/drawing/2014/main" val="20000"/>
+                    </a:ext>
+                  </a:extLst>
+                </a:gridCol>
+                <a:gridCol w="9393814">
+                  <a:extLst>
+                    <a:ext uri="{9D8B030D-6E8A-4147-A177-3AD203B41FA5}">
+                      <a16:colId xmlns:a16="http://schemas.microsoft.com/office/drawing/2014/main" val="20001"/>
+                    </a:ext>
+                  </a:extLst>
+                </a:gridCol>
               </a:tblGrid>
               <a:tr h="588645">
                 <a:tc>
                   <a:txBody>
-                    <a:bodyPr wrap="square"/>
+                    <a:bodyPr/>
                     <a:lstStyle/>
                     <a:p>
                       <a:r>
@@ -7404,7 +10994,7 @@
                 </a:tc>
                 <a:tc>
                   <a:txBody>
-                    <a:bodyPr wrap="square"/>
+                    <a:bodyPr/>
                     <a:lstStyle/>
                     <a:p>
                       <a:r>
@@ -7424,11 +11014,16 @@
                     </a:solidFill>
                   </a:tcPr>
                 </a:tc>
+                <a:extLst>
+                  <a:ext uri="{0D108BD9-81ED-4DB2-BD59-A6C34878D82A}">
+                    <a16:rowId xmlns:a16="http://schemas.microsoft.com/office/drawing/2014/main" val="10000"/>
+                  </a:ext>
+                </a:extLst>
               </a:tr>
               <a:tr h="588645">
                 <a:tc>
                   <a:txBody>
-                    <a:bodyPr wrap="square"/>
+                    <a:bodyPr/>
                     <a:lstStyle/>
                     <a:p>
                       <a:r>
@@ -7442,7 +11037,7 @@
                       </a:r>
                     </a:p>
                   </a:txBody>
-                  <a:tcPr anchor="t" marL="109728" marR="109728" marT="91440" marB="91440">
+                  <a:tcPr marL="109728" marR="109728" marT="91440" marB="91440">
                     <a:solidFill>
                       <a:srgbClr val="FFFFFF"/>
                     </a:solidFill>
@@ -7450,7 +11045,7 @@
                 </a:tc>
                 <a:tc>
                   <a:txBody>
-                    <a:bodyPr wrap="square"/>
+                    <a:bodyPr/>
                     <a:lstStyle/>
                     <a:p>
                       <a:pPr>
@@ -7469,17 +11064,22 @@
                       </a:r>
                     </a:p>
                   </a:txBody>
-                  <a:tcPr anchor="t" marL="109728" marR="109728" marT="91440" marB="91440">
+                  <a:tcPr marL="109728" marR="109728" marT="91440" marB="91440">
                     <a:solidFill>
                       <a:srgbClr val="FFFFFF"/>
                     </a:solidFill>
                   </a:tcPr>
                 </a:tc>
+                <a:extLst>
+                  <a:ext uri="{0D108BD9-81ED-4DB2-BD59-A6C34878D82A}">
+                    <a16:rowId xmlns:a16="http://schemas.microsoft.com/office/drawing/2014/main" val="10001"/>
+                  </a:ext>
+                </a:extLst>
               </a:tr>
               <a:tr h="588645">
                 <a:tc>
                   <a:txBody>
-                    <a:bodyPr wrap="square"/>
+                    <a:bodyPr/>
                     <a:lstStyle/>
                     <a:p>
                       <a:r>
@@ -7493,7 +11093,7 @@
                       </a:r>
                     </a:p>
                   </a:txBody>
-                  <a:tcPr anchor="t" marL="109728" marR="109728" marT="91440" marB="91440">
+                  <a:tcPr marL="109728" marR="109728" marT="91440" marB="91440">
                     <a:solidFill>
                       <a:srgbClr val="FFFFFF"/>
                     </a:solidFill>
@@ -7501,7 +11101,7 @@
                 </a:tc>
                 <a:tc>
                   <a:txBody>
-                    <a:bodyPr wrap="square"/>
+                    <a:bodyPr/>
                     <a:lstStyle/>
                     <a:p>
                       <a:pPr>
@@ -7520,17 +11120,22 @@
                       </a:r>
                     </a:p>
                   </a:txBody>
-                  <a:tcPr anchor="t" marL="109728" marR="109728" marT="91440" marB="91440">
+                  <a:tcPr marL="109728" marR="109728" marT="91440" marB="91440">
                     <a:solidFill>
                       <a:srgbClr val="FFFFFF"/>
                     </a:solidFill>
                   </a:tcPr>
                 </a:tc>
+                <a:extLst>
+                  <a:ext uri="{0D108BD9-81ED-4DB2-BD59-A6C34878D82A}">
+                    <a16:rowId xmlns:a16="http://schemas.microsoft.com/office/drawing/2014/main" val="10002"/>
+                  </a:ext>
+                </a:extLst>
               </a:tr>
               <a:tr h="588645">
                 <a:tc>
                   <a:txBody>
-                    <a:bodyPr wrap="square"/>
+                    <a:bodyPr/>
                     <a:lstStyle/>
                     <a:p>
                       <a:r>
@@ -7544,7 +11149,7 @@
                       </a:r>
                     </a:p>
                   </a:txBody>
-                  <a:tcPr anchor="t" marL="109728" marR="109728" marT="91440" marB="91440">
+                  <a:tcPr marL="109728" marR="109728" marT="91440" marB="91440">
                     <a:solidFill>
                       <a:srgbClr val="FFFFFF"/>
                     </a:solidFill>
@@ -7552,7 +11157,7 @@
                 </a:tc>
                 <a:tc>
                   <a:txBody>
-                    <a:bodyPr wrap="square"/>
+                    <a:bodyPr/>
                     <a:lstStyle/>
                     <a:p>
                       <a:pPr>
@@ -7571,17 +11176,22 @@
                       </a:r>
                     </a:p>
                   </a:txBody>
-                  <a:tcPr anchor="t" marL="109728" marR="109728" marT="91440" marB="91440">
+                  <a:tcPr marL="109728" marR="109728" marT="91440" marB="91440">
                     <a:solidFill>
                       <a:srgbClr val="FFFFFF"/>
                     </a:solidFill>
                   </a:tcPr>
                 </a:tc>
+                <a:extLst>
+                  <a:ext uri="{0D108BD9-81ED-4DB2-BD59-A6C34878D82A}">
+                    <a16:rowId xmlns:a16="http://schemas.microsoft.com/office/drawing/2014/main" val="10003"/>
+                  </a:ext>
+                </a:extLst>
               </a:tr>
               <a:tr h="588645">
                 <a:tc>
                   <a:txBody>
-                    <a:bodyPr wrap="square"/>
+                    <a:bodyPr/>
                     <a:lstStyle/>
                     <a:p>
                       <a:r>
@@ -7595,7 +11205,7 @@
                       </a:r>
                     </a:p>
                   </a:txBody>
-                  <a:tcPr anchor="t" marL="109728" marR="109728" marT="91440" marB="91440">
+                  <a:tcPr marL="109728" marR="109728" marT="91440" marB="91440">
                     <a:solidFill>
                       <a:srgbClr val="FFFFFF"/>
                     </a:solidFill>
@@ -7603,7 +11213,7 @@
                 </a:tc>
                 <a:tc>
                   <a:txBody>
-                    <a:bodyPr wrap="square"/>
+                    <a:bodyPr/>
                     <a:lstStyle/>
                     <a:p>
                       <a:pPr>
@@ -7622,17 +11232,22 @@
                       </a:r>
                     </a:p>
                   </a:txBody>
-                  <a:tcPr anchor="t" marL="109728" marR="109728" marT="91440" marB="91440">
+                  <a:tcPr marL="109728" marR="109728" marT="91440" marB="91440">
                     <a:solidFill>
                       <a:srgbClr val="FFFFFF"/>
                     </a:solidFill>
                   </a:tcPr>
                 </a:tc>
+                <a:extLst>
+                  <a:ext uri="{0D108BD9-81ED-4DB2-BD59-A6C34878D82A}">
+                    <a16:rowId xmlns:a16="http://schemas.microsoft.com/office/drawing/2014/main" val="10004"/>
+                  </a:ext>
+                </a:extLst>
               </a:tr>
               <a:tr h="588645">
                 <a:tc>
                   <a:txBody>
-                    <a:bodyPr wrap="square"/>
+                    <a:bodyPr/>
                     <a:lstStyle/>
                     <a:p>
                       <a:r>
@@ -7646,7 +11261,7 @@
                       </a:r>
                     </a:p>
                   </a:txBody>
-                  <a:tcPr anchor="t" marL="109728" marR="109728" marT="91440" marB="91440">
+                  <a:tcPr marL="109728" marR="109728" marT="91440" marB="91440">
                     <a:solidFill>
                       <a:srgbClr val="FFFFFF"/>
                     </a:solidFill>
@@ -7654,7 +11269,7 @@
                 </a:tc>
                 <a:tc>
                   <a:txBody>
-                    <a:bodyPr wrap="square"/>
+                    <a:bodyPr/>
                     <a:lstStyle/>
                     <a:p>
                       <a:pPr>
@@ -7673,17 +11288,22 @@
                       </a:r>
                     </a:p>
                   </a:txBody>
-                  <a:tcPr anchor="t" marL="109728" marR="109728" marT="91440" marB="91440">
+                  <a:tcPr marL="109728" marR="109728" marT="91440" marB="91440">
                     <a:solidFill>
                       <a:srgbClr val="FFFFFF"/>
                     </a:solidFill>
                   </a:tcPr>
                 </a:tc>
+                <a:extLst>
+                  <a:ext uri="{0D108BD9-81ED-4DB2-BD59-A6C34878D82A}">
+                    <a16:rowId xmlns:a16="http://schemas.microsoft.com/office/drawing/2014/main" val="10005"/>
+                  </a:ext>
+                </a:extLst>
               </a:tr>
               <a:tr h="588645">
                 <a:tc>
                   <a:txBody>
-                    <a:bodyPr wrap="square"/>
+                    <a:bodyPr/>
                     <a:lstStyle/>
                     <a:p>
                       <a:r>
@@ -7697,7 +11317,7 @@
                       </a:r>
                     </a:p>
                   </a:txBody>
-                  <a:tcPr anchor="t" marL="109728" marR="109728" marT="91440" marB="91440">
+                  <a:tcPr marL="109728" marR="109728" marT="91440" marB="91440">
                     <a:solidFill>
                       <a:srgbClr val="FFFFFF"/>
                     </a:solidFill>
@@ -7705,7 +11325,7 @@
                 </a:tc>
                 <a:tc>
                   <a:txBody>
-                    <a:bodyPr wrap="square"/>
+                    <a:bodyPr/>
                     <a:lstStyle/>
                     <a:p>
                       <a:pPr>
@@ -7724,17 +11344,22 @@
                       </a:r>
                     </a:p>
                   </a:txBody>
-                  <a:tcPr anchor="t" marL="109728" marR="109728" marT="91440" marB="91440">
+                  <a:tcPr marL="109728" marR="109728" marT="91440" marB="91440">
                     <a:solidFill>
                       <a:srgbClr val="FFFFFF"/>
                     </a:solidFill>
                   </a:tcPr>
                 </a:tc>
+                <a:extLst>
+                  <a:ext uri="{0D108BD9-81ED-4DB2-BD59-A6C34878D82A}">
+                    <a16:rowId xmlns:a16="http://schemas.microsoft.com/office/drawing/2014/main" val="10006"/>
+                  </a:ext>
+                </a:extLst>
               </a:tr>
               <a:tr h="588645">
                 <a:tc>
                   <a:txBody>
-                    <a:bodyPr wrap="square"/>
+                    <a:bodyPr/>
                     <a:lstStyle/>
                     <a:p>
                       <a:r>
@@ -7748,7 +11373,7 @@
                       </a:r>
                     </a:p>
                   </a:txBody>
-                  <a:tcPr anchor="t" marL="109728" marR="109728" marT="91440" marB="91440">
+                  <a:tcPr marL="109728" marR="109728" marT="91440" marB="91440">
                     <a:solidFill>
                       <a:srgbClr val="FFFFFF"/>
                     </a:solidFill>
@@ -7756,7 +11381,7 @@
                 </a:tc>
                 <a:tc>
                   <a:txBody>
-                    <a:bodyPr wrap="square"/>
+                    <a:bodyPr/>
                     <a:lstStyle/>
                     <a:p>
                       <a:pPr>
@@ -7775,12 +11400,17 @@
                       </a:r>
                     </a:p>
                   </a:txBody>
-                  <a:tcPr anchor="t" marL="109728" marR="109728" marT="91440" marB="91440">
+                  <a:tcPr marL="109728" marR="109728" marT="91440" marB="91440">
                     <a:solidFill>
                       <a:srgbClr val="FFFFFF"/>
                     </a:solidFill>
                   </a:tcPr>
                 </a:tc>
+                <a:extLst>
+                  <a:ext uri="{0D108BD9-81ED-4DB2-BD59-A6C34878D82A}">
+                    <a16:rowId xmlns:a16="http://schemas.microsoft.com/office/drawing/2014/main" val="10007"/>
+                  </a:ext>
+                </a:extLst>
               </a:tr>
             </a:tbl>
           </a:graphicData>
@@ -7795,7 +11425,7 @@
 </file>
 
 <file path=ppt/slides/slide6.xml><?xml version="1.0" encoding="utf-8"?>
-<p:sld xmlns:a="http://schemas.openxmlformats.org/drawingml/2006/main" xmlns:p="http://schemas.openxmlformats.org/presentationml/2006/main" xmlns:r="http://schemas.openxmlformats.org/officeDocument/2006/relationships">
+<p:sld xmlns:a="http://schemas.openxmlformats.org/drawingml/2006/main" xmlns:r="http://schemas.openxmlformats.org/officeDocument/2006/relationships" xmlns:p="http://schemas.openxmlformats.org/presentationml/2006/main">
   <p:cSld>
     <p:spTree>
       <p:nvGrpSpPr>
@@ -7803,7 +11433,14 @@
         <p:cNvGrpSpPr/>
         <p:nvPr/>
       </p:nvGrpSpPr>
-      <p:grpSpPr/>
+      <p:grpSpPr>
+        <a:xfrm>
+          <a:off x="0" y="0"/>
+          <a:ext cx="0" cy="0"/>
+          <a:chOff x="0" y="0"/>
+          <a:chExt cx="0" cy="0"/>
+        </a:xfrm>
+      </p:grpSpPr>
       <p:sp>
         <p:nvSpPr>
           <p:cNvPr id="2" name="Rectangle 1"/>
@@ -7845,6 +11482,7 @@
           <a:lstStyle/>
           <a:p>
             <a:pPr algn="ctr"/>
+            <a:endParaRPr/>
           </a:p>
         </p:txBody>
       </p:sp>
@@ -7889,6 +11527,7 @@
           <a:lstStyle/>
           <a:p>
             <a:pPr algn="ctr"/>
+            <a:endParaRPr/>
           </a:p>
         </p:txBody>
       </p:sp>
@@ -7964,7 +11603,7 @@
           <a:noFill/>
         </p:spPr>
         <p:txBody>
-          <a:bodyPr wrap="square" anchor="ctr" lIns="0" rIns="0" tIns="0" bIns="0">
+          <a:bodyPr wrap="square" lIns="0" tIns="0" rIns="0" bIns="0" anchor="ctr">
             <a:spAutoFit/>
           </a:bodyPr>
           <a:lstStyle/>
@@ -7994,8 +11633,8 @@
         </p:nvSpPr>
         <p:spPr>
           <a:xfrm>
-            <a:off x="8595360" y="256032"/>
-            <a:ext cx="3108960" cy="548640"/>
+            <a:off x="8595360" y="433947"/>
+            <a:ext cx="3108960" cy="192810"/>
           </a:xfrm>
           <a:prstGeom prst="rect">
             <a:avLst/>
@@ -8003,7 +11642,7 @@
           <a:noFill/>
         </p:spPr>
         <p:txBody>
-          <a:bodyPr wrap="square" anchor="ctr" lIns="0" rIns="0" tIns="0" bIns="0">
+          <a:bodyPr wrap="square" lIns="0" tIns="0" rIns="0" bIns="0" anchor="ctr">
             <a:spAutoFit/>
           </a:bodyPr>
           <a:lstStyle/>
@@ -8014,14 +11653,47 @@
               </a:lnSpc>
             </a:pPr>
             <a:r>
-              <a:rPr sz="1200" b="1">
+              <a:rPr sz="1200" b="1" dirty="0">
                 <a:solidFill>
                   <a:srgbClr val="D8E1F7"/>
                 </a:solidFill>
                 <a:latin typeface="맑은 고딕"/>
               </a:rPr>
-              <a:t>BP 1/3 · TDD 전략</a:t>
-            </a:r>
+              <a:t>BP 1/</a:t>
+            </a:r>
+            <a:r>
+              <a:rPr lang="en-US" sz="1200" b="1" dirty="0">
+                <a:solidFill>
+                  <a:srgbClr val="D8E1F7"/>
+                </a:solidFill>
+                <a:latin typeface="맑은 고딕"/>
+              </a:rPr>
+              <a:t>6</a:t>
+            </a:r>
+            <a:r>
+              <a:rPr sz="1200" b="1" dirty="0">
+                <a:solidFill>
+                  <a:srgbClr val="D8E1F7"/>
+                </a:solidFill>
+                <a:latin typeface="맑은 고딕"/>
+              </a:rPr>
+              <a:t> · TDD </a:t>
+            </a:r>
+            <a:r>
+              <a:rPr sz="1200" b="1" dirty="0" err="1">
+                <a:solidFill>
+                  <a:srgbClr val="D8E1F7"/>
+                </a:solidFill>
+                <a:latin typeface="맑은 고딕"/>
+              </a:rPr>
+              <a:t>전략</a:t>
+            </a:r>
+            <a:endParaRPr sz="1200" b="1" dirty="0">
+              <a:solidFill>
+                <a:srgbClr val="D8E1F7"/>
+              </a:solidFill>
+              <a:latin typeface="맑은 고딕"/>
+            </a:endParaRPr>
           </a:p>
         </p:txBody>
       </p:sp>
@@ -8077,7 +11749,7 @@
           <a:noFill/>
         </p:spPr>
         <p:txBody>
-          <a:bodyPr wrap="square" anchor="ctr" lIns="0" rIns="0" tIns="0" bIns="0">
+          <a:bodyPr wrap="square" lIns="0" tIns="0" rIns="0" bIns="0" anchor="ctr">
             <a:spAutoFit/>
           </a:bodyPr>
           <a:lstStyle/>
@@ -8116,7 +11788,7 @@
           <a:noFill/>
         </p:spPr>
         <p:txBody>
-          <a:bodyPr wrap="square" anchor="ctr" lIns="0" rIns="0" tIns="0" bIns="0">
+          <a:bodyPr wrap="square" lIns="0" tIns="0" rIns="0" bIns="0" anchor="ctr">
             <a:spAutoFit/>
           </a:bodyPr>
           <a:lstStyle/>
@@ -8133,7 +11805,7 @@
                 </a:solidFill>
                 <a:latin typeface="Consolas"/>
               </a:rPr>
-              <a:t>6 / 10</a:t>
+              <a:t>6 / 11</a:t>
             </a:r>
           </a:p>
         </p:txBody>
@@ -8179,6 +11851,7 @@
           <a:lstStyle/>
           <a:p>
             <a:pPr algn="ctr"/>
+            <a:endParaRPr/>
           </a:p>
         </p:txBody>
       </p:sp>
@@ -8199,7 +11872,7 @@
           <a:noFill/>
         </p:spPr>
         <p:txBody>
-          <a:bodyPr wrap="square" anchor="ctr" lIns="0" rIns="0" tIns="0" bIns="0">
+          <a:bodyPr wrap="square" lIns="0" tIns="0" rIns="0" bIns="0" anchor="ctr">
             <a:spAutoFit/>
           </a:bodyPr>
           <a:lstStyle/>
@@ -8216,7 +11889,7 @@
                 </a:solidFill>
                 <a:latin typeface="맑은 고딕"/>
               </a:rPr>
-              <a:t>TODO 주석 대신, 고쳐지지 않은 버그를 xfail(strict=True)로 실행 가능한 스펙으로 남긴다.</a:t>
+              <a:t>PR #91: 고치지 않은 버그를 방치하는 대신, xfail(strict=True)로 실패 자체를 스펙으로 남긴다.</a:t>
             </a:r>
           </a:p>
         </p:txBody>
@@ -8260,7 +11933,7 @@
           </a:fontRef>
         </p:style>
         <p:txBody>
-          <a:bodyPr rtlCol="0" anchor="ctr" wrap="square" lIns="256032" rIns="256032" tIns="182880" bIns="182880"/>
+          <a:bodyPr wrap="square" lIns="256032" tIns="182880" rIns="256032" bIns="182880" rtlCol="0" anchor="ctr"/>
           <a:lstStyle/>
           <a:p>
             <a:pPr algn="ctr">
@@ -8275,7 +11948,7 @@
                 </a:solidFill>
                 <a:latin typeface="맑은 고딕"/>
               </a:rPr>
-              <a:t>tests/integration/test_known_gaps_integration.py</a:t>
+              <a:t>PR #91 · tests/integration/test_known_gaps_integration.py</a:t>
             </a:r>
           </a:p>
           <a:p>
@@ -8409,17 +12082,29 @@
         <a:graphic>
           <a:graphicData uri="http://schemas.openxmlformats.org/drawingml/2006/table">
             <a:tbl>
-              <a:tblPr firstRow="0" bandRow="0">
+              <a:tblPr>
                 <a:tableStyleId>{5C22544A-7EE6-4342-B048-85BDC9FD1C3A}</a:tableStyleId>
               </a:tblPr>
               <a:tblGrid>
-                <a:gridCol w="1523390"/>
-                <a:gridCol w="3917289"/>
+                <a:gridCol w="1523390">
+                  <a:extLst>
+                    <a:ext uri="{9D8B030D-6E8A-4147-A177-3AD203B41FA5}">
+                      <a16:colId xmlns:a16="http://schemas.microsoft.com/office/drawing/2014/main" val="20000"/>
+                    </a:ext>
+                  </a:extLst>
+                </a:gridCol>
+                <a:gridCol w="3917289">
+                  <a:extLst>
+                    <a:ext uri="{9D8B030D-6E8A-4147-A177-3AD203B41FA5}">
+                      <a16:colId xmlns:a16="http://schemas.microsoft.com/office/drawing/2014/main" val="20001"/>
+                    </a:ext>
+                  </a:extLst>
+                </a:gridCol>
               </a:tblGrid>
               <a:tr h="902970">
                 <a:tc>
                   <a:txBody>
-                    <a:bodyPr wrap="square"/>
+                    <a:bodyPr/>
                     <a:lstStyle/>
                     <a:p>
                       <a:r>
@@ -8441,7 +12126,7 @@
                 </a:tc>
                 <a:tc>
                   <a:txBody>
-                    <a:bodyPr wrap="square"/>
+                    <a:bodyPr/>
                     <a:lstStyle/>
                     <a:p>
                       <a:r>
@@ -8461,11 +12146,16 @@
                     </a:solidFill>
                   </a:tcPr>
                 </a:tc>
+                <a:extLst>
+                  <a:ext uri="{0D108BD9-81ED-4DB2-BD59-A6C34878D82A}">
+                    <a16:rowId xmlns:a16="http://schemas.microsoft.com/office/drawing/2014/main" val="10000"/>
+                  </a:ext>
+                </a:extLst>
               </a:tr>
               <a:tr h="902970">
                 <a:tc>
                   <a:txBody>
-                    <a:bodyPr wrap="square"/>
+                    <a:bodyPr/>
                     <a:lstStyle/>
                     <a:p>
                       <a:r>
@@ -8479,7 +12169,7 @@
                       </a:r>
                     </a:p>
                   </a:txBody>
-                  <a:tcPr anchor="t" marL="109728" marR="109728" marT="91440" marB="91440">
+                  <a:tcPr marL="109728" marR="109728" marT="91440" marB="91440">
                     <a:solidFill>
                       <a:srgbClr val="FFFFFF"/>
                     </a:solidFill>
@@ -8487,7 +12177,7 @@
                 </a:tc>
                 <a:tc>
                   <a:txBody>
-                    <a:bodyPr wrap="square"/>
+                    <a:bodyPr/>
                     <a:lstStyle/>
                     <a:p>
                       <a:pPr>
@@ -8506,17 +12196,22 @@
                       </a:r>
                     </a:p>
                   </a:txBody>
-                  <a:tcPr anchor="t" marL="109728" marR="109728" marT="91440" marB="91440">
+                  <a:tcPr marL="109728" marR="109728" marT="91440" marB="91440">
                     <a:solidFill>
                       <a:srgbClr val="FFFFFF"/>
                     </a:solidFill>
                   </a:tcPr>
                 </a:tc>
+                <a:extLst>
+                  <a:ext uri="{0D108BD9-81ED-4DB2-BD59-A6C34878D82A}">
+                    <a16:rowId xmlns:a16="http://schemas.microsoft.com/office/drawing/2014/main" val="10001"/>
+                  </a:ext>
+                </a:extLst>
               </a:tr>
               <a:tr h="902970">
                 <a:tc>
                   <a:txBody>
-                    <a:bodyPr wrap="square"/>
+                    <a:bodyPr/>
                     <a:lstStyle/>
                     <a:p>
                       <a:r>
@@ -8530,7 +12225,7 @@
                       </a:r>
                     </a:p>
                   </a:txBody>
-                  <a:tcPr anchor="t" marL="109728" marR="109728" marT="91440" marB="91440">
+                  <a:tcPr marL="109728" marR="109728" marT="91440" marB="91440">
                     <a:solidFill>
                       <a:srgbClr val="FFFFFF"/>
                     </a:solidFill>
@@ -8538,7 +12233,7 @@
                 </a:tc>
                 <a:tc>
                   <a:txBody>
-                    <a:bodyPr wrap="square"/>
+                    <a:bodyPr/>
                     <a:lstStyle/>
                     <a:p>
                       <a:pPr>
@@ -8557,17 +12252,22 @@
                       </a:r>
                     </a:p>
                   </a:txBody>
-                  <a:tcPr anchor="t" marL="109728" marR="109728" marT="91440" marB="91440">
+                  <a:tcPr marL="109728" marR="109728" marT="91440" marB="91440">
                     <a:solidFill>
                       <a:srgbClr val="FFFFFF"/>
                     </a:solidFill>
                   </a:tcPr>
                 </a:tc>
+                <a:extLst>
+                  <a:ext uri="{0D108BD9-81ED-4DB2-BD59-A6C34878D82A}">
+                    <a16:rowId xmlns:a16="http://schemas.microsoft.com/office/drawing/2014/main" val="10002"/>
+                  </a:ext>
+                </a:extLst>
               </a:tr>
               <a:tr h="902970">
                 <a:tc>
                   <a:txBody>
-                    <a:bodyPr wrap="square"/>
+                    <a:bodyPr/>
                     <a:lstStyle/>
                     <a:p>
                       <a:r>
@@ -8577,11 +12277,11 @@
                           </a:solidFill>
                           <a:latin typeface="맑은 고딕"/>
                         </a:rPr>
-                        <a:t>근거까지 문서화</a:t>
+                        <a:t>추적성 연결</a:t>
                       </a:r>
                     </a:p>
                   </a:txBody>
-                  <a:tcPr anchor="t" marL="109728" marR="109728" marT="91440" marB="91440">
+                  <a:tcPr marL="109728" marR="109728" marT="91440" marB="91440">
                     <a:solidFill>
                       <a:srgbClr val="FFFFFF"/>
                     </a:solidFill>
@@ -8589,7 +12289,7 @@
                 </a:tc>
                 <a:tc>
                   <a:txBody>
-                    <a:bodyPr wrap="square"/>
+                    <a:bodyPr/>
                     <a:lstStyle/>
                     <a:p>
                       <a:pPr>
@@ -8604,16 +12304,21 @@
                           </a:solidFill>
                           <a:latin typeface="맑은 고딕"/>
                         </a:rPr>
-                        <a:t>docstring에 원인 파일:줄, 실제 에러 클래스명까지 남겨 재현 없이도 원인이 읽힌다.</a:t>
+                        <a:t>이후 Issue #93(print 다중값 미지원)처럼 실제 이슈로도 등록되어 별도로 추적된다.</a:t>
                       </a:r>
                     </a:p>
                   </a:txBody>
-                  <a:tcPr anchor="t" marL="109728" marR="109728" marT="91440" marB="91440">
+                  <a:tcPr marL="109728" marR="109728" marT="91440" marB="91440">
                     <a:solidFill>
                       <a:srgbClr val="FFFFFF"/>
                     </a:solidFill>
                   </a:tcPr>
                 </a:tc>
+                <a:extLst>
+                  <a:ext uri="{0D108BD9-81ED-4DB2-BD59-A6C34878D82A}">
+                    <a16:rowId xmlns:a16="http://schemas.microsoft.com/office/drawing/2014/main" val="10003"/>
+                  </a:ext>
+                </a:extLst>
               </a:tr>
             </a:tbl>
           </a:graphicData>
@@ -8628,7 +12333,7 @@
 </file>
 
 <file path=ppt/slides/slide7.xml><?xml version="1.0" encoding="utf-8"?>
-<p:sld xmlns:a="http://schemas.openxmlformats.org/drawingml/2006/main" xmlns:p="http://schemas.openxmlformats.org/presentationml/2006/main" xmlns:r="http://schemas.openxmlformats.org/officeDocument/2006/relationships">
+<p:sld xmlns:a="http://schemas.openxmlformats.org/drawingml/2006/main" xmlns:r="http://schemas.openxmlformats.org/officeDocument/2006/relationships" xmlns:p="http://schemas.openxmlformats.org/presentationml/2006/main">
   <p:cSld>
     <p:spTree>
       <p:nvGrpSpPr>
@@ -8636,7 +12341,14 @@
         <p:cNvGrpSpPr/>
         <p:nvPr/>
       </p:nvGrpSpPr>
-      <p:grpSpPr/>
+      <p:grpSpPr>
+        <a:xfrm>
+          <a:off x="0" y="0"/>
+          <a:ext cx="0" cy="0"/>
+          <a:chOff x="0" y="0"/>
+          <a:chExt cx="0" cy="0"/>
+        </a:xfrm>
+      </p:grpSpPr>
       <p:sp>
         <p:nvSpPr>
           <p:cNvPr id="2" name="Rectangle 1"/>
@@ -8678,6 +12390,7 @@
           <a:lstStyle/>
           <a:p>
             <a:pPr algn="ctr"/>
+            <a:endParaRPr/>
           </a:p>
         </p:txBody>
       </p:sp>
@@ -8722,6 +12435,7 @@
           <a:lstStyle/>
           <a:p>
             <a:pPr algn="ctr"/>
+            <a:endParaRPr/>
           </a:p>
         </p:txBody>
       </p:sp>
@@ -8797,7 +12511,7 @@
           <a:noFill/>
         </p:spPr>
         <p:txBody>
-          <a:bodyPr wrap="square" anchor="ctr" lIns="0" rIns="0" tIns="0" bIns="0">
+          <a:bodyPr wrap="square" lIns="0" tIns="0" rIns="0" bIns="0" anchor="ctr">
             <a:spAutoFit/>
           </a:bodyPr>
           <a:lstStyle/>
@@ -8814,7 +12528,7 @@
                 </a:solidFill>
                 <a:latin typeface="맑은 고딕"/>
               </a:rPr>
-              <a:t>공통 로직은 그대로, 달라지는 지점만 훅으로 연다</a:t>
+              <a:t>리뷰는 “읽기”가 아니라 “실행”으로 끝낸다</a:t>
             </a:r>
           </a:p>
         </p:txBody>
@@ -8827,8 +12541,8 @@
         </p:nvSpPr>
         <p:spPr>
           <a:xfrm>
-            <a:off x="8595360" y="256032"/>
-            <a:ext cx="3108960" cy="548640"/>
+            <a:off x="8595360" y="433947"/>
+            <a:ext cx="3108960" cy="192810"/>
           </a:xfrm>
           <a:prstGeom prst="rect">
             <a:avLst/>
@@ -8836,7 +12550,7 @@
           <a:noFill/>
         </p:spPr>
         <p:txBody>
-          <a:bodyPr wrap="square" anchor="ctr" lIns="0" rIns="0" tIns="0" bIns="0">
+          <a:bodyPr wrap="square" lIns="0" tIns="0" rIns="0" bIns="0" anchor="ctr">
             <a:spAutoFit/>
           </a:bodyPr>
           <a:lstStyle/>
@@ -8847,14 +12561,65 @@
               </a:lnSpc>
             </a:pPr>
             <a:r>
-              <a:rPr sz="1200" b="1">
+              <a:rPr sz="1200" b="1" dirty="0">
                 <a:solidFill>
                   <a:srgbClr val="D8E1F7"/>
                 </a:solidFill>
                 <a:latin typeface="맑은 고딕"/>
               </a:rPr>
-              <a:t>BP 2/3 · 리팩토링</a:t>
-            </a:r>
+              <a:t>BP 2/</a:t>
+            </a:r>
+            <a:r>
+              <a:rPr lang="en-US" sz="1200" b="1" dirty="0">
+                <a:solidFill>
+                  <a:srgbClr val="D8E1F7"/>
+                </a:solidFill>
+                <a:latin typeface="맑은 고딕"/>
+              </a:rPr>
+              <a:t>6</a:t>
+            </a:r>
+            <a:r>
+              <a:rPr sz="1200" b="1" dirty="0">
+                <a:solidFill>
+                  <a:srgbClr val="D8E1F7"/>
+                </a:solidFill>
+                <a:latin typeface="맑은 고딕"/>
+              </a:rPr>
+              <a:t> · </a:t>
+            </a:r>
+            <a:r>
+              <a:rPr sz="1200" b="1" dirty="0" err="1">
+                <a:solidFill>
+                  <a:srgbClr val="D8E1F7"/>
+                </a:solidFill>
+                <a:latin typeface="맑은 고딕"/>
+              </a:rPr>
+              <a:t>리뷰</a:t>
+            </a:r>
+            <a:r>
+              <a:rPr sz="1200" b="1" dirty="0">
+                <a:solidFill>
+                  <a:srgbClr val="D8E1F7"/>
+                </a:solidFill>
+                <a:latin typeface="맑은 고딕"/>
+              </a:rPr>
+              <a:t> </a:t>
+            </a:r>
+            <a:r>
+              <a:rPr sz="1200" b="1" dirty="0" err="1">
+                <a:solidFill>
+                  <a:srgbClr val="D8E1F7"/>
+                </a:solidFill>
+                <a:latin typeface="맑은 고딕"/>
+              </a:rPr>
+              <a:t>문화</a:t>
+            </a:r>
+            <a:endParaRPr sz="1200" b="1" dirty="0">
+              <a:solidFill>
+                <a:srgbClr val="D8E1F7"/>
+              </a:solidFill>
+              <a:latin typeface="맑은 고딕"/>
+            </a:endParaRPr>
           </a:p>
         </p:txBody>
       </p:sp>
@@ -8910,7 +12675,7 @@
           <a:noFill/>
         </p:spPr>
         <p:txBody>
-          <a:bodyPr wrap="square" anchor="ctr" lIns="0" rIns="0" tIns="0" bIns="0">
+          <a:bodyPr wrap="square" lIns="0" tIns="0" rIns="0" bIns="0" anchor="ctr">
             <a:spAutoFit/>
           </a:bodyPr>
           <a:lstStyle/>
@@ -8949,7 +12714,7 @@
           <a:noFill/>
         </p:spPr>
         <p:txBody>
-          <a:bodyPr wrap="square" anchor="ctr" lIns="0" rIns="0" tIns="0" bIns="0">
+          <a:bodyPr wrap="square" lIns="0" tIns="0" rIns="0" bIns="0" anchor="ctr">
             <a:spAutoFit/>
           </a:bodyPr>
           <a:lstStyle/>
@@ -8966,7 +12731,7 @@
                 </a:solidFill>
                 <a:latin typeface="Consolas"/>
               </a:rPr>
-              <a:t>7 / 10</a:t>
+              <a:t>7 / 11</a:t>
             </a:r>
           </a:p>
         </p:txBody>
@@ -9012,6 +12777,7 @@
           <a:lstStyle/>
           <a:p>
             <a:pPr algn="ctr"/>
+            <a:endParaRPr/>
           </a:p>
         </p:txBody>
       </p:sp>
@@ -9032,7 +12798,7 @@
           <a:noFill/>
         </p:spPr>
         <p:txBody>
-          <a:bodyPr wrap="square" anchor="ctr" lIns="0" rIns="0" tIns="0" bIns="0">
+          <a:bodyPr wrap="square" lIns="0" tIns="0" rIns="0" bIns="0" anchor="ctr">
             <a:spAutoFit/>
           </a:bodyPr>
           <a:lstStyle/>
@@ -9049,7 +12815,7 @@
                 </a:solidFill>
                 <a:latin typeface="맑은 고딕"/>
               </a:rPr>
-              <a:t>베이스 클래스를 고치지 않고, 딱 한 지점을 훅으로 뽑아 서브클래스가 오버라이드하게 만든다.</a:t>
+              <a:t>PR #65: 파서 결과만 보지 않고 실제로 인터프리터를 돌려봐야 파이프라인 전체가 동작하는지 알 수 있다.</a:t>
             </a:r>
           </a:p>
         </p:txBody>
@@ -9093,7 +12859,7 @@
           </a:fontRef>
         </p:style>
         <p:txBody>
-          <a:bodyPr rtlCol="0" anchor="ctr" wrap="square" lIns="256032" rIns="256032" tIns="182880" bIns="182880"/>
+          <a:bodyPr wrap="square" lIns="256032" tIns="182880" rIns="256032" bIns="182880" rtlCol="0" anchor="ctr"/>
           <a:lstStyle/>
           <a:p>
             <a:pPr algn="ctr">
@@ -9108,7 +12874,7 @@
                 </a:solidFill>
                 <a:latin typeface="맑은 고딕"/>
               </a:rPr>
-              <a:t>codefab/checker.py → codefab/function_checker.py</a:t>
+              <a:t>PR #65 · 가져오기(import) 통합 누락(wiring gap) 발견</a:t>
             </a:r>
           </a:p>
           <a:p>
@@ -9127,7 +12893,7 @@
                 </a:solidFill>
                 <a:latin typeface="Consolas"/>
               </a:rPr>
-              <a:t># Checker: 메서드 순회 로직을 훅 하나로 분리</a:t>
+              <a:t>리뷰어(kimbyungnam):</a:t>
             </a:r>
           </a:p>
           <a:p>
@@ -9146,7 +12912,7 @@
                 </a:solidFill>
                 <a:latin typeface="Consolas"/>
               </a:rPr>
-              <a:t>def _visit_method_body(self, method) -&gt; None:</a:t>
+              <a:t>Interpreter().interpret(</a:t>
             </a:r>
           </a:p>
           <a:p>
@@ -9165,7 +12931,7 @@
                 </a:solidFill>
                 <a:latin typeface="Consolas"/>
               </a:rPr>
-              <a:t>    for statement in method.body:</a:t>
+              <a:t>    '가져오기 "sum.txt" 별칭 sum;')</a:t>
             </a:r>
           </a:p>
           <a:p>
@@ -9184,7 +12950,7 @@
                 </a:solidFill>
                 <a:latin typeface="Consolas"/>
               </a:rPr>
-              <a:t>        statement.accept(self)</a:t>
+              <a:t>→ Checker에 visit_import_stmt가 없어 런타임 에러</a:t>
             </a:r>
           </a:p>
           <a:p>
@@ -9196,15 +12962,12 @@
                 <a:spcPts val="100"/>
               </a:spcBef>
             </a:pPr>
-            <a:r>
-              <a:rPr sz="1250">
-                <a:solidFill>
-                  <a:srgbClr val="DBE6FF"/>
-                </a:solidFill>
-                <a:latin typeface="Consolas"/>
-              </a:rPr>
-              <a:t/>
-            </a:r>
+            <a:endParaRPr sz="1250">
+              <a:solidFill>
+                <a:srgbClr val="DBE6FF"/>
+              </a:solidFill>
+              <a:latin typeface="Consolas"/>
+            </a:endParaRPr>
           </a:p>
           <a:p>
             <a:pPr>
@@ -9222,7 +12985,7 @@
                 </a:solidFill>
                 <a:latin typeface="Consolas"/>
               </a:rPr>
-              <a:t># FunctionChecker: 이 훅 하나만 오버라이드해서 확장</a:t>
+              <a:t>작성자:</a:t>
             </a:r>
           </a:p>
           <a:p>
@@ -9241,7 +13004,7 @@
                 </a:solidFill>
                 <a:latin typeface="Consolas"/>
               </a:rPr>
-              <a:t>def _visit_method_body(self, method) -&gt; None:</a:t>
+              <a:t>이번 PR은 파싱까지만, Checker/Executor는</a:t>
             </a:r>
           </a:p>
           <a:p>
@@ -9260,83 +13023,7 @@
                 </a:solidFill>
                 <a:latin typeface="Consolas"/>
               </a:rPr>
-              <a:t>    self.function_depth += 1</a:t>
-            </a:r>
-          </a:p>
-          <a:p>
-            <a:pPr>
-              <a:lnSpc>
-                <a:spcPct val="128000"/>
-              </a:lnSpc>
-              <a:spcBef>
-                <a:spcPts val="100"/>
-              </a:spcBef>
-            </a:pPr>
-            <a:r>
-              <a:rPr sz="1250">
-                <a:solidFill>
-                  <a:srgbClr val="DBE6FF"/>
-                </a:solidFill>
-                <a:latin typeface="Consolas"/>
-              </a:rPr>
-              <a:t>    try:</a:t>
-            </a:r>
-          </a:p>
-          <a:p>
-            <a:pPr>
-              <a:lnSpc>
-                <a:spcPct val="128000"/>
-              </a:lnSpc>
-              <a:spcBef>
-                <a:spcPts val="100"/>
-              </a:spcBef>
-            </a:pPr>
-            <a:r>
-              <a:rPr sz="1250">
-                <a:solidFill>
-                  <a:srgbClr val="DBE6FF"/>
-                </a:solidFill>
-                <a:latin typeface="Consolas"/>
-              </a:rPr>
-              <a:t>        super()._visit_method_body(method)</a:t>
-            </a:r>
-          </a:p>
-          <a:p>
-            <a:pPr>
-              <a:lnSpc>
-                <a:spcPct val="128000"/>
-              </a:lnSpc>
-              <a:spcBef>
-                <a:spcPts val="100"/>
-              </a:spcBef>
-            </a:pPr>
-            <a:r>
-              <a:rPr sz="1250">
-                <a:solidFill>
-                  <a:srgbClr val="DBE6FF"/>
-                </a:solidFill>
-                <a:latin typeface="Consolas"/>
-              </a:rPr>
-              <a:t>    finally:</a:t>
-            </a:r>
-          </a:p>
-          <a:p>
-            <a:pPr>
-              <a:lnSpc>
-                <a:spcPct val="128000"/>
-              </a:lnSpc>
-              <a:spcBef>
-                <a:spcPts val="100"/>
-              </a:spcBef>
-            </a:pPr>
-            <a:r>
-              <a:rPr sz="1250">
-                <a:solidFill>
-                  <a:srgbClr val="DBE6FF"/>
-                </a:solidFill>
-                <a:latin typeface="Consolas"/>
-              </a:rPr>
-              <a:t>        self.function_depth -= 1</a:t>
+              <a:t>다음 PR에서 순차 연결하겠습니다.</a:t>
             </a:r>
           </a:p>
         </p:txBody>
@@ -9356,17 +13043,29 @@
         <a:graphic>
           <a:graphicData uri="http://schemas.openxmlformats.org/drawingml/2006/table">
             <a:tbl>
-              <a:tblPr firstRow="0" bandRow="0">
+              <a:tblPr>
                 <a:tableStyleId>{5C22544A-7EE6-4342-B048-85BDC9FD1C3A}</a:tableStyleId>
               </a:tblPr>
               <a:tblGrid>
-                <a:gridCol w="1523390"/>
-                <a:gridCol w="3917289"/>
+                <a:gridCol w="1523390">
+                  <a:extLst>
+                    <a:ext uri="{9D8B030D-6E8A-4147-A177-3AD203B41FA5}">
+                      <a16:colId xmlns:a16="http://schemas.microsoft.com/office/drawing/2014/main" val="20000"/>
+                    </a:ext>
+                  </a:extLst>
+                </a:gridCol>
+                <a:gridCol w="3917289">
+                  <a:extLst>
+                    <a:ext uri="{9D8B030D-6E8A-4147-A177-3AD203B41FA5}">
+                      <a16:colId xmlns:a16="http://schemas.microsoft.com/office/drawing/2014/main" val="20001"/>
+                    </a:ext>
+                  </a:extLst>
+                </a:gridCol>
               </a:tblGrid>
               <a:tr h="902970">
                 <a:tc>
                   <a:txBody>
-                    <a:bodyPr wrap="square"/>
+                    <a:bodyPr/>
                     <a:lstStyle/>
                     <a:p>
                       <a:r>
@@ -9376,7 +13075,7 @@
                           </a:solidFill>
                           <a:latin typeface="맑은 고딕"/>
                         </a:rPr>
-                        <a:t>원칙</a:t>
+                        <a:t>확인 관점</a:t>
                       </a:r>
                     </a:p>
                   </a:txBody>
@@ -9388,7 +13087,7 @@
                 </a:tc>
                 <a:tc>
                   <a:txBody>
-                    <a:bodyPr wrap="square"/>
+                    <a:bodyPr/>
                     <a:lstStyle/>
                     <a:p>
                       <a:r>
@@ -9398,7 +13097,7 @@
                           </a:solidFill>
                           <a:latin typeface="맑은 고딕"/>
                         </a:rPr>
-                        <a:t>적용</a:t>
+                        <a:t>의미</a:t>
                       </a:r>
                     </a:p>
                   </a:txBody>
@@ -9408,11 +13107,16 @@
                     </a:solidFill>
                   </a:tcPr>
                 </a:tc>
+                <a:extLst>
+                  <a:ext uri="{0D108BD9-81ED-4DB2-BD59-A6C34878D82A}">
+                    <a16:rowId xmlns:a16="http://schemas.microsoft.com/office/drawing/2014/main" val="10000"/>
+                  </a:ext>
+                </a:extLst>
               </a:tr>
               <a:tr h="902970">
                 <a:tc>
                   <a:txBody>
-                    <a:bodyPr wrap="square"/>
+                    <a:bodyPr/>
                     <a:lstStyle/>
                     <a:p>
                       <a:r>
@@ -9422,11 +13126,11 @@
                           </a:solidFill>
                           <a:latin typeface="맑은 고딕"/>
                         </a:rPr>
-                        <a:t>개방-폐쇄 원칙</a:t>
+                        <a:t>실행 기반 검증</a:t>
                       </a:r>
                     </a:p>
                   </a:txBody>
-                  <a:tcPr anchor="t" marL="109728" marR="109728" marT="91440" marB="91440">
+                  <a:tcPr marL="109728" marR="109728" marT="91440" marB="91440">
                     <a:solidFill>
                       <a:srgbClr val="FFFFFF"/>
                     </a:solidFill>
@@ -9434,7 +13138,7 @@
                 </a:tc>
                 <a:tc>
                   <a:txBody>
-                    <a:bodyPr wrap="square"/>
+                    <a:bodyPr/>
                     <a:lstStyle/>
                     <a:p>
                       <a:pPr>
@@ -9449,21 +13153,26 @@
                           </a:solidFill>
                           <a:latin typeface="맑은 고딕"/>
                         </a:rPr>
-                        <a:t>Checker의 기존 코드는 한 줄도 안 건드리고 FunctionChecker만 확장했다.</a:t>
+                        <a:t>테스트가 파서 결과만 검증하면, 파이프라인 전체가 동작한다는 보장이 안 된다.</a:t>
                       </a:r>
                     </a:p>
                   </a:txBody>
-                  <a:tcPr anchor="t" marL="109728" marR="109728" marT="91440" marB="91440">
+                  <a:tcPr marL="109728" marR="109728" marT="91440" marB="91440">
                     <a:solidFill>
                       <a:srgbClr val="FFFFFF"/>
                     </a:solidFill>
                   </a:tcPr>
                 </a:tc>
+                <a:extLst>
+                  <a:ext uri="{0D108BD9-81ED-4DB2-BD59-A6C34878D82A}">
+                    <a16:rowId xmlns:a16="http://schemas.microsoft.com/office/drawing/2014/main" val="10001"/>
+                  </a:ext>
+                </a:extLst>
               </a:tr>
               <a:tr h="902970">
                 <a:tc>
                   <a:txBody>
-                    <a:bodyPr wrap="square"/>
+                    <a:bodyPr/>
                     <a:lstStyle/>
                     <a:p>
                       <a:r>
@@ -9473,11 +13182,11 @@
                           </a:solidFill>
                           <a:latin typeface="맑은 고딕"/>
                         </a:rPr>
-                        <a:t>단일 진입점</a:t>
+                        <a:t>스코프 명확화</a:t>
                       </a:r>
                     </a:p>
                   </a:txBody>
-                  <a:tcPr anchor="t" marL="109728" marR="109728" marT="91440" marB="91440">
+                  <a:tcPr marL="109728" marR="109728" marT="91440" marB="91440">
                     <a:solidFill>
                       <a:srgbClr val="FFFFFF"/>
                     </a:solidFill>
@@ -9485,7 +13194,7 @@
                 </a:tc>
                 <a:tc>
                   <a:txBody>
-                    <a:bodyPr wrap="square"/>
+                    <a:bodyPr/>
                     <a:lstStyle/>
                     <a:p>
                       <a:pPr>
@@ -9500,21 +13209,26 @@
                           </a:solidFill>
                           <a:latin typeface="맑은 고딕"/>
                         </a:rPr>
-                        <a:t>“메서드 본문을 어떻게 순회하는가”가 코드베이스 전체에서 딱 한 곳에만 존재한다.</a:t>
+                        <a:t>리뷰에서 발견된 갭엔 “이번 PR 범위 아님”을 명확히 답하고 다음 PR로 넘긴다.</a:t>
                       </a:r>
                     </a:p>
                   </a:txBody>
-                  <a:tcPr anchor="t" marL="109728" marR="109728" marT="91440" marB="91440">
+                  <a:tcPr marL="109728" marR="109728" marT="91440" marB="91440">
                     <a:solidFill>
                       <a:srgbClr val="FFFFFF"/>
                     </a:solidFill>
                   </a:tcPr>
                 </a:tc>
+                <a:extLst>
+                  <a:ext uri="{0D108BD9-81ED-4DB2-BD59-A6C34878D82A}">
+                    <a16:rowId xmlns:a16="http://schemas.microsoft.com/office/drawing/2014/main" val="10002"/>
+                  </a:ext>
+                </a:extLst>
               </a:tr>
               <a:tr h="902970">
                 <a:tc>
                   <a:txBody>
-                    <a:bodyPr wrap="square"/>
+                    <a:bodyPr/>
                     <a:lstStyle/>
                     <a:p>
                       <a:r>
@@ -9524,11 +13238,11 @@
                           </a:solidFill>
                           <a:latin typeface="맑은 고딕"/>
                         </a:rPr>
-                        <a:t>회귀 위험 최소화</a:t>
+                        <a:t>반복되는 패턴</a:t>
                       </a:r>
                     </a:p>
                   </a:txBody>
-                  <a:tcPr anchor="t" marL="109728" marR="109728" marT="91440" marB="91440">
+                  <a:tcPr marL="109728" marR="109728" marT="91440" marB="91440">
                     <a:solidFill>
                       <a:srgbClr val="FFFFFF"/>
                     </a:solidFill>
@@ -9536,7 +13250,7 @@
                 </a:tc>
                 <a:tc>
                   <a:txBody>
-                    <a:bodyPr wrap="square"/>
+                    <a:bodyPr/>
                     <a:lstStyle/>
                     <a:p>
                       <a:pPr>
@@ -9551,16 +13265,21 @@
                           </a:solidFill>
                           <a:latin typeface="맑은 고딕"/>
                         </a:rPr>
-                        <a:t>기존 클래스 검사 동작은 그대로 보존된 채로 “메서드 내부 반환” 지원이 추가됐다.</a:t>
+                        <a:t>CLAUDE.md의 “함수는 기본 파이프라인에 배선되지 않았다” 경고와 동일한 패턴.</a:t>
                       </a:r>
                     </a:p>
                   </a:txBody>
-                  <a:tcPr anchor="t" marL="109728" marR="109728" marT="91440" marB="91440">
+                  <a:tcPr marL="109728" marR="109728" marT="91440" marB="91440">
                     <a:solidFill>
                       <a:srgbClr val="FFFFFF"/>
                     </a:solidFill>
                   </a:tcPr>
                 </a:tc>
+                <a:extLst>
+                  <a:ext uri="{0D108BD9-81ED-4DB2-BD59-A6C34878D82A}">
+                    <a16:rowId xmlns:a16="http://schemas.microsoft.com/office/drawing/2014/main" val="10003"/>
+                  </a:ext>
+                </a:extLst>
               </a:tr>
             </a:tbl>
           </a:graphicData>
@@ -9575,7 +13294,7 @@
 </file>
 
 <file path=ppt/slides/slide8.xml><?xml version="1.0" encoding="utf-8"?>
-<p:sld xmlns:a="http://schemas.openxmlformats.org/drawingml/2006/main" xmlns:p="http://schemas.openxmlformats.org/presentationml/2006/main" xmlns:r="http://schemas.openxmlformats.org/officeDocument/2006/relationships">
+<p:sld xmlns:a="http://schemas.openxmlformats.org/drawingml/2006/main" xmlns:r="http://schemas.openxmlformats.org/officeDocument/2006/relationships" xmlns:p="http://schemas.openxmlformats.org/presentationml/2006/main">
   <p:cSld>
     <p:spTree>
       <p:nvGrpSpPr>
@@ -9583,7 +13302,14 @@
         <p:cNvGrpSpPr/>
         <p:nvPr/>
       </p:nvGrpSpPr>
-      <p:grpSpPr/>
+      <p:grpSpPr>
+        <a:xfrm>
+          <a:off x="0" y="0"/>
+          <a:ext cx="0" cy="0"/>
+          <a:chOff x="0" y="0"/>
+          <a:chExt cx="0" cy="0"/>
+        </a:xfrm>
+      </p:grpSpPr>
       <p:sp>
         <p:nvSpPr>
           <p:cNvPr id="2" name="Rectangle 1"/>
@@ -9625,6 +13351,7 @@
           <a:lstStyle/>
           <a:p>
             <a:pPr algn="ctr"/>
+            <a:endParaRPr/>
           </a:p>
         </p:txBody>
       </p:sp>
@@ -9669,6 +13396,7 @@
           <a:lstStyle/>
           <a:p>
             <a:pPr algn="ctr"/>
+            <a:endParaRPr/>
           </a:p>
         </p:txBody>
       </p:sp>
@@ -9744,7 +13472,7 @@
           <a:noFill/>
         </p:spPr>
         <p:txBody>
-          <a:bodyPr wrap="square" anchor="ctr" lIns="0" rIns="0" tIns="0" bIns="0">
+          <a:bodyPr wrap="square" lIns="0" tIns="0" rIns="0" bIns="0" anchor="ctr">
             <a:spAutoFit/>
           </a:bodyPr>
           <a:lstStyle/>
@@ -9761,7 +13489,7 @@
                 </a:solidFill>
                 <a:latin typeface="맑은 고딕"/>
               </a:rPr>
-              <a:t>다국어 표기는 렉서 한 층에서 끝낸다</a:t>
+              <a:t>무엇이 왜 틀렸는지, 재현 예시로 짚는다</a:t>
             </a:r>
           </a:p>
         </p:txBody>
@@ -9774,8 +13502,8 @@
         </p:nvSpPr>
         <p:spPr>
           <a:xfrm>
-            <a:off x="8595360" y="256032"/>
-            <a:ext cx="3108960" cy="548640"/>
+            <a:off x="8595360" y="433947"/>
+            <a:ext cx="3108960" cy="192810"/>
           </a:xfrm>
           <a:prstGeom prst="rect">
             <a:avLst/>
@@ -9783,7 +13511,7 @@
           <a:noFill/>
         </p:spPr>
         <p:txBody>
-          <a:bodyPr wrap="square" anchor="ctr" lIns="0" rIns="0" tIns="0" bIns="0">
+          <a:bodyPr wrap="square" lIns="0" tIns="0" rIns="0" bIns="0" anchor="ctr">
             <a:spAutoFit/>
           </a:bodyPr>
           <a:lstStyle/>
@@ -9794,14 +13522,65 @@
               </a:lnSpc>
             </a:pPr>
             <a:r>
-              <a:rPr sz="1200" b="1">
+              <a:rPr sz="1200" b="1" dirty="0">
                 <a:solidFill>
                   <a:srgbClr val="D8E1F7"/>
                 </a:solidFill>
                 <a:latin typeface="맑은 고딕"/>
               </a:rPr>
-              <a:t>BP 3/3 · 언어 설계</a:t>
-            </a:r>
+              <a:t>BP 3/</a:t>
+            </a:r>
+            <a:r>
+              <a:rPr lang="en-US" sz="1200" b="1" dirty="0">
+                <a:solidFill>
+                  <a:srgbClr val="D8E1F7"/>
+                </a:solidFill>
+                <a:latin typeface="맑은 고딕"/>
+              </a:rPr>
+              <a:t>6</a:t>
+            </a:r>
+            <a:r>
+              <a:rPr sz="1200" b="1" dirty="0">
+                <a:solidFill>
+                  <a:srgbClr val="D8E1F7"/>
+                </a:solidFill>
+                <a:latin typeface="맑은 고딕"/>
+              </a:rPr>
+              <a:t> · </a:t>
+            </a:r>
+            <a:r>
+              <a:rPr sz="1200" b="1" dirty="0" err="1">
+                <a:solidFill>
+                  <a:srgbClr val="D8E1F7"/>
+                </a:solidFill>
+                <a:latin typeface="맑은 고딕"/>
+              </a:rPr>
+              <a:t>리뷰</a:t>
+            </a:r>
+            <a:r>
+              <a:rPr sz="1200" b="1" dirty="0">
+                <a:solidFill>
+                  <a:srgbClr val="D8E1F7"/>
+                </a:solidFill>
+                <a:latin typeface="맑은 고딕"/>
+              </a:rPr>
+              <a:t> </a:t>
+            </a:r>
+            <a:r>
+              <a:rPr sz="1200" b="1" dirty="0" err="1">
+                <a:solidFill>
+                  <a:srgbClr val="D8E1F7"/>
+                </a:solidFill>
+                <a:latin typeface="맑은 고딕"/>
+              </a:rPr>
+              <a:t>코멘트</a:t>
+            </a:r>
+            <a:endParaRPr sz="1200" b="1" dirty="0">
+              <a:solidFill>
+                <a:srgbClr val="D8E1F7"/>
+              </a:solidFill>
+              <a:latin typeface="맑은 고딕"/>
+            </a:endParaRPr>
           </a:p>
         </p:txBody>
       </p:sp>
@@ -9857,7 +13636,7 @@
           <a:noFill/>
         </p:spPr>
         <p:txBody>
-          <a:bodyPr wrap="square" anchor="ctr" lIns="0" rIns="0" tIns="0" bIns="0">
+          <a:bodyPr wrap="square" lIns="0" tIns="0" rIns="0" bIns="0" anchor="ctr">
             <a:spAutoFit/>
           </a:bodyPr>
           <a:lstStyle/>
@@ -9896,7 +13675,7 @@
           <a:noFill/>
         </p:spPr>
         <p:txBody>
-          <a:bodyPr wrap="square" anchor="ctr" lIns="0" rIns="0" tIns="0" bIns="0">
+          <a:bodyPr wrap="square" lIns="0" tIns="0" rIns="0" bIns="0" anchor="ctr">
             <a:spAutoFit/>
           </a:bodyPr>
           <a:lstStyle/>
@@ -9913,7 +13692,7 @@
                 </a:solidFill>
                 <a:latin typeface="Consolas"/>
               </a:rPr>
-              <a:t>8 / 10</a:t>
+              <a:t>8 / 11</a:t>
             </a:r>
           </a:p>
         </p:txBody>
@@ -9959,6 +13738,7 @@
           <a:lstStyle/>
           <a:p>
             <a:pPr algn="ctr"/>
+            <a:endParaRPr/>
           </a:p>
         </p:txBody>
       </p:sp>
@@ -9979,7 +13759,7 @@
           <a:noFill/>
         </p:spPr>
         <p:txBody>
-          <a:bodyPr wrap="square" anchor="ctr" lIns="0" rIns="0" tIns="0" bIns="0">
+          <a:bodyPr wrap="square" lIns="0" tIns="0" rIns="0" bIns="0" anchor="ctr">
             <a:spAutoFit/>
           </a:bodyPr>
           <a:lstStyle/>
@@ -9996,7 +13776,7 @@
                 </a:solidFill>
                 <a:latin typeface="맑은 고딕"/>
               </a:rPr>
-              <a:t>한글·영어 표기는 토크나이저에서만 구분하고, 그 아래 계층은 표기 언어를 몰라도 되게 만든다.</a:t>
+              <a:t>PR #69: “무엇이 왜 틀렸는지 + 재현 예시”가 있는 코멘트는 왕복 없이 한 번에 수정으로 이어진다.</a:t>
             </a:r>
           </a:p>
         </p:txBody>
@@ -10040,7 +13820,7 @@
           </a:fontRef>
         </p:style>
         <p:txBody>
-          <a:bodyPr rtlCol="0" anchor="ctr" wrap="square" lIns="256032" rIns="256032" tIns="182880" bIns="182880"/>
+          <a:bodyPr wrap="square" lIns="256032" tIns="182880" rIns="256032" bIns="182880" rtlCol="0" anchor="ctr"/>
           <a:lstStyle/>
           <a:p>
             <a:pPr algn="ctr">
@@ -10055,7 +13835,7 @@
                 </a:solidFill>
                 <a:latin typeface="맑은 고딕"/>
               </a:rPr>
-              <a:t>codefab/tokens.py</a:t>
+              <a:t>PR #69 · 배열 인덱스 표현식 버그</a:t>
             </a:r>
           </a:p>
           <a:p>
@@ -10070,11 +13850,11 @@
             <a:r>
               <a:rPr sz="1250">
                 <a:solidFill>
-                  <a:srgbClr val="DBE6FF"/>
+                  <a:srgbClr val="7FA8FF"/>
                 </a:solidFill>
                 <a:latin typeface="Consolas"/>
               </a:rPr>
-              <a:t>KEYWORDS = {</a:t>
+              <a:t>리뷰어(hasuplee):</a:t>
             </a:r>
           </a:p>
           <a:p>
@@ -10093,7 +13873,7 @@
                 </a:solidFill>
                 <a:latin typeface="Consolas"/>
               </a:rPr>
-              <a:t>    "var": TokenType.VAR,       "변수": TokenType.VAR,</a:t>
+              <a:t>line_of_expr가 arr[0] = 10; 같은 배열</a:t>
             </a:r>
           </a:p>
           <a:p>
@@ -10112,7 +13892,7 @@
                 </a:solidFill>
                 <a:latin typeface="Consolas"/>
               </a:rPr>
-              <a:t>    "class": TokenType.CLASS,   "클래스": TokenType.CLASS,</a:t>
+              <a:t>인덱스 라인에서 실패합니다.</a:t>
             </a:r>
           </a:p>
           <a:p>
@@ -10131,7 +13911,7 @@
                 </a:solidFill>
                 <a:latin typeface="Consolas"/>
               </a:rPr>
-              <a:t>    "func": TokenType.FUN,      "함수": TokenType.FUN,</a:t>
+              <a:t>→ 재현 코드 스니펫 포함</a:t>
             </a:r>
           </a:p>
           <a:p>
@@ -10143,15 +13923,12 @@
                 <a:spcPts val="100"/>
               </a:spcBef>
             </a:pPr>
-            <a:r>
-              <a:rPr sz="1250">
-                <a:solidFill>
-                  <a:srgbClr val="DBE6FF"/>
-                </a:solidFill>
-                <a:latin typeface="Consolas"/>
-              </a:rPr>
-              <a:t>    "return": TokenType.RETURN, "반환": TokenType.RETURN,</a:t>
-            </a:r>
+            <a:endParaRPr sz="1250">
+              <a:solidFill>
+                <a:srgbClr val="DBE6FF"/>
+              </a:solidFill>
+              <a:latin typeface="Consolas"/>
+            </a:endParaRPr>
           </a:p>
           <a:p>
             <a:pPr>
@@ -10165,11 +13942,11 @@
             <a:r>
               <a:rPr sz="1250">
                 <a:solidFill>
-                  <a:srgbClr val="DBE6FF"/>
+                  <a:srgbClr val="7FA8FF"/>
                 </a:solidFill>
                 <a:latin typeface="Consolas"/>
               </a:rPr>
-              <a:t>}</a:t>
+              <a:t>작성자:</a:t>
             </a:r>
           </a:p>
           <a:p>
@@ -10184,11 +13961,11 @@
             <a:r>
               <a:rPr sz="1250">
                 <a:solidFill>
-                  <a:srgbClr val="7FA8FF"/>
+                  <a:srgbClr val="DBE6FF"/>
                 </a:solidFill>
                 <a:latin typeface="Consolas"/>
               </a:rPr>
-              <a:t># AST / Checker / Executor는 TokenType만 보고, 표기는 신경 쓰지 않는다</a:t>
+              <a:t>즉시 반영 → 왕복 없이 APPROVED</a:t>
             </a:r>
           </a:p>
         </p:txBody>
@@ -10208,17 +13985,29 @@
         <a:graphic>
           <a:graphicData uri="http://schemas.openxmlformats.org/drawingml/2006/table">
             <a:tbl>
-              <a:tblPr firstRow="0" bandRow="0">
+              <a:tblPr>
                 <a:tableStyleId>{5C22544A-7EE6-4342-B048-85BDC9FD1C3A}</a:tableStyleId>
               </a:tblPr>
               <a:tblGrid>
-                <a:gridCol w="1523390"/>
-                <a:gridCol w="3917289"/>
+                <a:gridCol w="1523390">
+                  <a:extLst>
+                    <a:ext uri="{9D8B030D-6E8A-4147-A177-3AD203B41FA5}">
+                      <a16:colId xmlns:a16="http://schemas.microsoft.com/office/drawing/2014/main" val="20000"/>
+                    </a:ext>
+                  </a:extLst>
+                </a:gridCol>
+                <a:gridCol w="3917289">
+                  <a:extLst>
+                    <a:ext uri="{9D8B030D-6E8A-4147-A177-3AD203B41FA5}">
+                      <a16:colId xmlns:a16="http://schemas.microsoft.com/office/drawing/2014/main" val="20001"/>
+                    </a:ext>
+                  </a:extLst>
+                </a:gridCol>
               </a:tblGrid>
               <a:tr h="902970">
                 <a:tc>
                   <a:txBody>
-                    <a:bodyPr wrap="square"/>
+                    <a:bodyPr/>
                     <a:lstStyle/>
                     <a:p>
                       <a:r>
@@ -10228,7 +14017,7 @@
                           </a:solidFill>
                           <a:latin typeface="맑은 고딕"/>
                         </a:rPr>
-                        <a:t>계층</a:t>
+                        <a:t>요소</a:t>
                       </a:r>
                     </a:p>
                   </a:txBody>
@@ -10240,7 +14029,7 @@
                 </a:tc>
                 <a:tc>
                   <a:txBody>
-                    <a:bodyPr wrap="square"/>
+                    <a:bodyPr/>
                     <a:lstStyle/>
                     <a:p>
                       <a:r>
@@ -10250,7 +14039,7 @@
                           </a:solidFill>
                           <a:latin typeface="맑은 고딕"/>
                         </a:rPr>
-                        <a:t>언어 인식 여부</a:t>
+                        <a:t>왜 효과적인가</a:t>
                       </a:r>
                     </a:p>
                   </a:txBody>
@@ -10260,11 +14049,16 @@
                     </a:solidFill>
                   </a:tcPr>
                 </a:tc>
+                <a:extLst>
+                  <a:ext uri="{0D108BD9-81ED-4DB2-BD59-A6C34878D82A}">
+                    <a16:rowId xmlns:a16="http://schemas.microsoft.com/office/drawing/2014/main" val="10000"/>
+                  </a:ext>
+                </a:extLst>
               </a:tr>
               <a:tr h="902970">
                 <a:tc>
                   <a:txBody>
-                    <a:bodyPr wrap="square"/>
+                    <a:bodyPr/>
                     <a:lstStyle/>
                     <a:p>
                       <a:r>
@@ -10274,11 +14068,11 @@
                           </a:solidFill>
                           <a:latin typeface="맑은 고딕"/>
                         </a:rPr>
-                        <a:t>Tokenizer</a:t>
+                        <a:t>무엇이 틀렸는지</a:t>
                       </a:r>
                     </a:p>
                   </a:txBody>
-                  <a:tcPr anchor="t" marL="109728" marR="109728" marT="91440" marB="91440">
+                  <a:tcPr marL="109728" marR="109728" marT="91440" marB="91440">
                     <a:solidFill>
                       <a:srgbClr val="FFFFFF"/>
                     </a:solidFill>
@@ -10286,7 +14080,7 @@
                 </a:tc>
                 <a:tc>
                   <a:txBody>
-                    <a:bodyPr wrap="square"/>
+                    <a:bodyPr/>
                     <a:lstStyle/>
                     <a:p>
                       <a:pPr>
@@ -10301,21 +14095,26 @@
                           </a:solidFill>
                           <a:latin typeface="맑은 고딕"/>
                         </a:rPr>
-                        <a:t>한글·영어 표기를 모두 인식해 같은 TokenType으로 통일한다.</a:t>
+                        <a:t>추상적 지적(“버그가 있어요”)이 아니라 정확한 실패 지점을 짚는다.</a:t>
                       </a:r>
                     </a:p>
                   </a:txBody>
-                  <a:tcPr anchor="t" marL="109728" marR="109728" marT="91440" marB="91440">
+                  <a:tcPr marL="109728" marR="109728" marT="91440" marB="91440">
                     <a:solidFill>
                       <a:srgbClr val="FFFFFF"/>
                     </a:solidFill>
                   </a:tcPr>
                 </a:tc>
+                <a:extLst>
+                  <a:ext uri="{0D108BD9-81ED-4DB2-BD59-A6C34878D82A}">
+                    <a16:rowId xmlns:a16="http://schemas.microsoft.com/office/drawing/2014/main" val="10001"/>
+                  </a:ext>
+                </a:extLst>
               </a:tr>
               <a:tr h="902970">
                 <a:tc>
                   <a:txBody>
-                    <a:bodyPr wrap="square"/>
+                    <a:bodyPr/>
                     <a:lstStyle/>
                     <a:p>
                       <a:r>
@@ -10325,11 +14124,11 @@
                           </a:solidFill>
                           <a:latin typeface="맑은 고딕"/>
                         </a:rPr>
-                        <a:t>AST / Checker / Executor</a:t>
+                        <a:t>재현 예시 포함</a:t>
                       </a:r>
                     </a:p>
                   </a:txBody>
-                  <a:tcPr anchor="t" marL="109728" marR="109728" marT="91440" marB="91440">
+                  <a:tcPr marL="109728" marR="109728" marT="91440" marB="91440">
                     <a:solidFill>
                       <a:srgbClr val="FFFFFF"/>
                     </a:solidFill>
@@ -10337,7 +14136,7 @@
                 </a:tc>
                 <a:tc>
                   <a:txBody>
-                    <a:bodyPr wrap="square"/>
+                    <a:bodyPr/>
                     <a:lstStyle/>
                     <a:p>
                       <a:pPr>
@@ -10352,21 +14151,26 @@
                           </a:solidFill>
                           <a:latin typeface="맑은 고딕"/>
                         </a:rPr>
-                        <a:t>표기 언어와 완전히 무관 — TokenType enum 값만 보고 동작한다.</a:t>
+                        <a:t>작성자가 직접 재현할 필요 없이 바로 원인을 확인할 수 있다.</a:t>
                       </a:r>
                     </a:p>
                   </a:txBody>
-                  <a:tcPr anchor="t" marL="109728" marR="109728" marT="91440" marB="91440">
+                  <a:tcPr marL="109728" marR="109728" marT="91440" marB="91440">
                     <a:solidFill>
                       <a:srgbClr val="FFFFFF"/>
                     </a:solidFill>
                   </a:tcPr>
                 </a:tc>
+                <a:extLst>
+                  <a:ext uri="{0D108BD9-81ED-4DB2-BD59-A6C34878D82A}">
+                    <a16:rowId xmlns:a16="http://schemas.microsoft.com/office/drawing/2014/main" val="10002"/>
+                  </a:ext>
+                </a:extLst>
               </a:tr>
               <a:tr h="902970">
                 <a:tc>
                   <a:txBody>
-                    <a:bodyPr wrap="square"/>
+                    <a:bodyPr/>
                     <a:lstStyle/>
                     <a:p>
                       <a:r>
@@ -10376,11 +14180,11 @@
                           </a:solidFill>
                           <a:latin typeface="맑은 고딕"/>
                         </a:rPr>
-                        <a:t>확장 비용</a:t>
+                        <a:t>왕복 최소화</a:t>
                       </a:r>
                     </a:p>
                   </a:txBody>
-                  <a:tcPr anchor="t" marL="109728" marR="109728" marT="91440" marB="91440">
+                  <a:tcPr marL="109728" marR="109728" marT="91440" marB="91440">
                     <a:solidFill>
                       <a:srgbClr val="FFFFFF"/>
                     </a:solidFill>
@@ -10388,7 +14192,7 @@
                 </a:tc>
                 <a:tc>
                   <a:txBody>
-                    <a:bodyPr wrap="square"/>
+                    <a:bodyPr/>
                     <a:lstStyle/>
                     <a:p>
                       <a:pPr>
@@ -10403,16 +14207,21 @@
                           </a:solidFill>
                           <a:latin typeface="맑은 고딕"/>
                         </a:rPr>
-                        <a:t>새 표기를 추가할 때 KEYWORDS 테이블 한 줄만 고치면 된다. 실제로 func/return이 함수/반환과 동일하게 동작함을 테스트로 검증했다.</a:t>
+                        <a:t>한 번의 코멘트 → 한 번의 수정 → 승인으로 리뷰 사이클이 끝난다.</a:t>
                       </a:r>
                     </a:p>
                   </a:txBody>
-                  <a:tcPr anchor="t" marL="109728" marR="109728" marT="91440" marB="91440">
+                  <a:tcPr marL="109728" marR="109728" marT="91440" marB="91440">
                     <a:solidFill>
                       <a:srgbClr val="FFFFFF"/>
                     </a:solidFill>
                   </a:tcPr>
                 </a:tc>
+                <a:extLst>
+                  <a:ext uri="{0D108BD9-81ED-4DB2-BD59-A6C34878D82A}">
+                    <a16:rowId xmlns:a16="http://schemas.microsoft.com/office/drawing/2014/main" val="10003"/>
+                  </a:ext>
+                </a:extLst>
               </a:tr>
             </a:tbl>
           </a:graphicData>
@@ -10427,7 +14236,7 @@
 </file>
 
 <file path=ppt/slides/slide9.xml><?xml version="1.0" encoding="utf-8"?>
-<p:sld xmlns:a="http://schemas.openxmlformats.org/drawingml/2006/main" xmlns:p="http://schemas.openxmlformats.org/presentationml/2006/main" xmlns:r="http://schemas.openxmlformats.org/officeDocument/2006/relationships">
+<p:sld xmlns:a="http://schemas.openxmlformats.org/drawingml/2006/main" xmlns:r="http://schemas.openxmlformats.org/officeDocument/2006/relationships" xmlns:p="http://schemas.openxmlformats.org/presentationml/2006/main">
   <p:cSld>
     <p:spTree>
       <p:nvGrpSpPr>
@@ -10435,7 +14244,14 @@
         <p:cNvGrpSpPr/>
         <p:nvPr/>
       </p:nvGrpSpPr>
-      <p:grpSpPr/>
+      <p:grpSpPr>
+        <a:xfrm>
+          <a:off x="0" y="0"/>
+          <a:ext cx="0" cy="0"/>
+          <a:chOff x="0" y="0"/>
+          <a:chExt cx="0" cy="0"/>
+        </a:xfrm>
+      </p:grpSpPr>
       <p:sp>
         <p:nvSpPr>
           <p:cNvPr id="2" name="Rectangle 1"/>
@@ -10477,6 +14293,7 @@
           <a:lstStyle/>
           <a:p>
             <a:pPr algn="ctr"/>
+            <a:endParaRPr/>
           </a:p>
         </p:txBody>
       </p:sp>
@@ -10521,6 +14338,7 @@
           <a:lstStyle/>
           <a:p>
             <a:pPr algn="ctr"/>
+            <a:endParaRPr/>
           </a:p>
         </p:txBody>
       </p:sp>
@@ -10574,7 +14392,7 @@
                 </a:solidFill>
                 <a:latin typeface="Consolas"/>
               </a:rPr>
-              <a:t>04</a:t>
+              <a:t>BP4</a:t>
             </a:r>
           </a:p>
         </p:txBody>
@@ -10596,7 +14414,7 @@
           <a:noFill/>
         </p:spPr>
         <p:txBody>
-          <a:bodyPr wrap="square" anchor="ctr" lIns="0" rIns="0" tIns="0" bIns="0">
+          <a:bodyPr wrap="square" lIns="0" tIns="0" rIns="0" bIns="0" anchor="ctr">
             <a:spAutoFit/>
           </a:bodyPr>
           <a:lstStyle/>
@@ -10613,7 +14431,7 @@
                 </a:solidFill>
                 <a:latin typeface="맑은 고딕"/>
               </a:rPr>
-              <a:t>프로젝트 시연 시나리오</a:t>
+              <a:t>설계 결정에는 “왜”를 코멘트로 남긴다</a:t>
             </a:r>
           </a:p>
         </p:txBody>
@@ -10626,8 +14444,8 @@
         </p:nvSpPr>
         <p:spPr>
           <a:xfrm>
-            <a:off x="8595360" y="256032"/>
-            <a:ext cx="3108960" cy="548640"/>
+            <a:off x="8595360" y="433947"/>
+            <a:ext cx="3108960" cy="192810"/>
           </a:xfrm>
           <a:prstGeom prst="rect">
             <a:avLst/>
@@ -10635,7 +14453,7 @@
           <a:noFill/>
         </p:spPr>
         <p:txBody>
-          <a:bodyPr wrap="square" anchor="ctr" lIns="0" rIns="0" tIns="0" bIns="0">
+          <a:bodyPr wrap="square" lIns="0" tIns="0" rIns="0" bIns="0" anchor="ctr">
             <a:spAutoFit/>
           </a:bodyPr>
           <a:lstStyle/>
@@ -10646,14 +14464,65 @@
               </a:lnSpc>
             </a:pPr>
             <a:r>
-              <a:rPr sz="1200" b="1">
+              <a:rPr sz="1200" b="1" dirty="0">
                 <a:solidFill>
                   <a:srgbClr val="D8E1F7"/>
                 </a:solidFill>
                 <a:latin typeface="맑은 고딕"/>
               </a:rPr>
-              <a:t>Live Demo</a:t>
-            </a:r>
+              <a:t>BP 4/</a:t>
+            </a:r>
+            <a:r>
+              <a:rPr lang="en-US" sz="1200" b="1" dirty="0">
+                <a:solidFill>
+                  <a:srgbClr val="D8E1F7"/>
+                </a:solidFill>
+                <a:latin typeface="맑은 고딕"/>
+              </a:rPr>
+              <a:t>6</a:t>
+            </a:r>
+            <a:r>
+              <a:rPr sz="1200" b="1" dirty="0">
+                <a:solidFill>
+                  <a:srgbClr val="D8E1F7"/>
+                </a:solidFill>
+                <a:latin typeface="맑은 고딕"/>
+              </a:rPr>
+              <a:t> · </a:t>
+            </a:r>
+            <a:r>
+              <a:rPr sz="1200" b="1" dirty="0" err="1">
+                <a:solidFill>
+                  <a:srgbClr val="D8E1F7"/>
+                </a:solidFill>
+                <a:latin typeface="맑은 고딕"/>
+              </a:rPr>
+              <a:t>설계</a:t>
+            </a:r>
+            <a:r>
+              <a:rPr sz="1200" b="1" dirty="0">
+                <a:solidFill>
+                  <a:srgbClr val="D8E1F7"/>
+                </a:solidFill>
+                <a:latin typeface="맑은 고딕"/>
+              </a:rPr>
+              <a:t> </a:t>
+            </a:r>
+            <a:r>
+              <a:rPr sz="1200" b="1" dirty="0" err="1">
+                <a:solidFill>
+                  <a:srgbClr val="D8E1F7"/>
+                </a:solidFill>
+                <a:latin typeface="맑은 고딕"/>
+              </a:rPr>
+              <a:t>문서화</a:t>
+            </a:r>
+            <a:endParaRPr sz="1200" b="1" dirty="0">
+              <a:solidFill>
+                <a:srgbClr val="D8E1F7"/>
+              </a:solidFill>
+              <a:latin typeface="맑은 고딕"/>
+            </a:endParaRPr>
           </a:p>
         </p:txBody>
       </p:sp>
@@ -10709,7 +14578,7 @@
           <a:noFill/>
         </p:spPr>
         <p:txBody>
-          <a:bodyPr wrap="square" anchor="ctr" lIns="0" rIns="0" tIns="0" bIns="0">
+          <a:bodyPr wrap="square" lIns="0" tIns="0" rIns="0" bIns="0" anchor="ctr">
             <a:spAutoFit/>
           </a:bodyPr>
           <a:lstStyle/>
@@ -10748,7 +14617,7 @@
           <a:noFill/>
         </p:spPr>
         <p:txBody>
-          <a:bodyPr wrap="square" anchor="ctr" lIns="0" rIns="0" tIns="0" bIns="0">
+          <a:bodyPr wrap="square" lIns="0" tIns="0" rIns="0" bIns="0" anchor="ctr">
             <a:spAutoFit/>
           </a:bodyPr>
           <a:lstStyle/>
@@ -10765,7 +14634,7 @@
                 </a:solidFill>
                 <a:latin typeface="Consolas"/>
               </a:rPr>
-              <a:t>9 / 10</a:t>
+              <a:t>9 / 11</a:t>
             </a:r>
           </a:p>
         </p:txBody>
@@ -10811,6 +14680,7 @@
           <a:lstStyle/>
           <a:p>
             <a:pPr algn="ctr"/>
+            <a:endParaRPr/>
           </a:p>
         </p:txBody>
       </p:sp>
@@ -10831,7 +14701,7 @@
           <a:noFill/>
         </p:spPr>
         <p:txBody>
-          <a:bodyPr wrap="square" anchor="ctr" lIns="0" rIns="0" tIns="0" bIns="0">
+          <a:bodyPr wrap="square" lIns="0" tIns="0" rIns="0" bIns="0" anchor="ctr">
             <a:spAutoFit/>
           </a:bodyPr>
           <a:lstStyle/>
@@ -10848,37 +14718,257 @@
                 </a:solidFill>
                 <a:latin typeface="맑은 고딕"/>
               </a:rPr>
-              <a:t>파일 모드 → REPL → 디버그 모드 순서로, Chapter 1~7 기능이 실제로 맞물려 동작하는 모습을 보여줍니다.</a:t>
+              <a:t>PR #64: 대안을 검토했지만 채택하지 않은 이유까지 남기면, 같은 질문이 반복되지 않는다.</a:t>
+            </a:r>
+          </a:p>
+        </p:txBody>
+      </p:sp>
+      <p:sp>
+        <p:nvSpPr>
+          <p:cNvPr id="12" name="Rounded Rectangle 11"/>
+          <p:cNvSpPr/>
+          <p:nvPr/>
+        </p:nvSpPr>
+        <p:spPr>
+          <a:xfrm>
+            <a:off x="502920" y="2240280"/>
+            <a:ext cx="5486400" cy="3611880"/>
+          </a:xfrm>
+          <a:prstGeom prst="roundRect">
+            <a:avLst>
+              <a:gd name="adj" fmla="val 4500"/>
+            </a:avLst>
+          </a:prstGeom>
+          <a:solidFill>
+            <a:srgbClr val="0F1C3F"/>
+          </a:solidFill>
+          <a:ln>
+            <a:noFill/>
+          </a:ln>
+          <a:effectLst/>
+        </p:spPr>
+        <p:style>
+          <a:lnRef idx="1">
+            <a:schemeClr val="accent1"/>
+          </a:lnRef>
+          <a:fillRef idx="3">
+            <a:schemeClr val="accent1"/>
+          </a:fillRef>
+          <a:effectRef idx="2">
+            <a:schemeClr val="accent1"/>
+          </a:effectRef>
+          <a:fontRef idx="minor">
+            <a:schemeClr val="lt1"/>
+          </a:fontRef>
+        </p:style>
+        <p:txBody>
+          <a:bodyPr wrap="square" lIns="256032" tIns="182880" rIns="256032" bIns="182880" rtlCol="0" anchor="ctr"/>
+          <a:lstStyle/>
+          <a:p>
+            <a:pPr algn="ctr">
+              <a:lnSpc>
+                <a:spcPct val="105000"/>
+              </a:lnSpc>
+            </a:pPr>
+            <a:r>
+              <a:rPr sz="1050" b="1">
+                <a:solidFill>
+                  <a:srgbClr val="7FA8FF"/>
+                </a:solidFill>
+                <a:latin typeface="맑은 고딕"/>
+              </a:rPr>
+              <a:t>PR #64 · CLI 진입점 통합</a:t>
+            </a:r>
+          </a:p>
+          <a:p>
+            <a:pPr>
+              <a:lnSpc>
+                <a:spcPct val="128000"/>
+              </a:lnSpc>
+              <a:spcBef>
+                <a:spcPts val="100"/>
+              </a:spcBef>
+            </a:pPr>
+            <a:r>
+              <a:rPr sz="1250">
+                <a:solidFill>
+                  <a:srgbClr val="7FA8FF"/>
+                </a:solidFill>
+                <a:latin typeface="Consolas"/>
+              </a:rPr>
+              <a:t>리뷰어:</a:t>
+            </a:r>
+          </a:p>
+          <a:p>
+            <a:pPr>
+              <a:lnSpc>
+                <a:spcPct val="128000"/>
+              </a:lnSpc>
+              <a:spcBef>
+                <a:spcPts val="100"/>
+              </a:spcBef>
+            </a:pPr>
+            <a:r>
+              <a:rPr sz="1250">
+                <a:solidFill>
+                  <a:srgbClr val="DBE6FF"/>
+                </a:solidFill>
+                <a:latin typeface="Consolas"/>
+              </a:rPr>
+              <a:t>codefab &lt;경로&gt;처럼 인자 유무로 파일 모드를</a:t>
+            </a:r>
+          </a:p>
+          <a:p>
+            <a:pPr>
+              <a:lnSpc>
+                <a:spcPct val="128000"/>
+              </a:lnSpc>
+              <a:spcBef>
+                <a:spcPts val="100"/>
+              </a:spcBef>
+            </a:pPr>
+            <a:r>
+              <a:rPr sz="1250">
+                <a:solidFill>
+                  <a:srgbClr val="DBE6FF"/>
+                </a:solidFill>
+                <a:latin typeface="Consolas"/>
+              </a:rPr>
+              <a:t>판단하면 어떨까요?</a:t>
+            </a:r>
+          </a:p>
+          <a:p>
+            <a:pPr>
+              <a:lnSpc>
+                <a:spcPct val="128000"/>
+              </a:lnSpc>
+              <a:spcBef>
+                <a:spcPts val="100"/>
+              </a:spcBef>
+            </a:pPr>
+            <a:endParaRPr sz="1250">
+              <a:solidFill>
+                <a:srgbClr val="DBE6FF"/>
+              </a:solidFill>
+              <a:latin typeface="Consolas"/>
+            </a:endParaRPr>
+          </a:p>
+          <a:p>
+            <a:pPr>
+              <a:lnSpc>
+                <a:spcPct val="128000"/>
+              </a:lnSpc>
+              <a:spcBef>
+                <a:spcPts val="100"/>
+              </a:spcBef>
+            </a:pPr>
+            <a:r>
+              <a:rPr sz="1250">
+                <a:solidFill>
+                  <a:srgbClr val="7FA8FF"/>
+                </a:solidFill>
+                <a:latin typeface="Consolas"/>
+              </a:rPr>
+              <a:t>작성자:</a:t>
+            </a:r>
+          </a:p>
+          <a:p>
+            <a:pPr>
+              <a:lnSpc>
+                <a:spcPct val="128000"/>
+              </a:lnSpc>
+              <a:spcBef>
+                <a:spcPts val="100"/>
+              </a:spcBef>
+            </a:pPr>
+            <a:r>
+              <a:rPr sz="1250">
+                <a:solidFill>
+                  <a:srgbClr val="DBE6FF"/>
+                </a:solidFill>
+                <a:latin typeface="Consolas"/>
+              </a:rPr>
+              <a:t>이후 debug &lt;경로&gt;가 추가되면 'debug'라는</a:t>
+            </a:r>
+          </a:p>
+          <a:p>
+            <a:pPr>
+              <a:lnSpc>
+                <a:spcPct val="128000"/>
+              </a:lnSpc>
+              <a:spcBef>
+                <a:spcPts val="100"/>
+              </a:spcBef>
+            </a:pPr>
+            <a:r>
+              <a:rPr sz="1250">
+                <a:solidFill>
+                  <a:srgbClr val="DBE6FF"/>
+                </a:solidFill>
+                <a:latin typeface="Consolas"/>
+              </a:rPr>
+              <a:t>단어가 파일 경로로 오인될 수 있어, 서브커맨드로</a:t>
+            </a:r>
+          </a:p>
+          <a:p>
+            <a:pPr>
+              <a:lnSpc>
+                <a:spcPct val="128000"/>
+              </a:lnSpc>
+              <a:spcBef>
+                <a:spcPts val="100"/>
+              </a:spcBef>
+            </a:pPr>
+            <a:r>
+              <a:rPr sz="1250">
+                <a:solidFill>
+                  <a:srgbClr val="DBE6FF"/>
+                </a:solidFill>
+                <a:latin typeface="Consolas"/>
+              </a:rPr>
+              <a:t>모드를 명시하는 구조를 유지했습니다.</a:t>
             </a:r>
           </a:p>
         </p:txBody>
       </p:sp>
       <p:graphicFrame>
         <p:nvGraphicFramePr>
-          <p:cNvPr id="12" name="Table 11"/>
+          <p:cNvPr id="13" name="Table 12"/>
           <p:cNvGraphicFramePr>
             <a:graphicFrameLocks noGrp="1"/>
           </p:cNvGraphicFramePr>
           <p:nvPr/>
         </p:nvGraphicFramePr>
         <p:xfrm>
-          <a:off x="502920" y="2286000"/>
-          <a:ext cx="11183111" cy="3566160"/>
+          <a:off x="6263640" y="2240280"/>
+          <a:ext cx="5440679" cy="3611880"/>
         </p:xfrm>
         <a:graphic>
           <a:graphicData uri="http://schemas.openxmlformats.org/drawingml/2006/table">
             <a:tbl>
-              <a:tblPr firstRow="0" bandRow="0">
+              <a:tblPr>
                 <a:tableStyleId>{5C22544A-7EE6-4342-B048-85BDC9FD1C3A}</a:tableStyleId>
               </a:tblPr>
               <a:tblGrid>
-                <a:gridCol w="2236622"/>
-                <a:gridCol w="8946489"/>
+                <a:gridCol w="1523390">
+                  <a:extLst>
+                    <a:ext uri="{9D8B030D-6E8A-4147-A177-3AD203B41FA5}">
+                      <a16:colId xmlns:a16="http://schemas.microsoft.com/office/drawing/2014/main" val="20000"/>
+                    </a:ext>
+                  </a:extLst>
+                </a:gridCol>
+                <a:gridCol w="3917289">
+                  <a:extLst>
+                    <a:ext uri="{9D8B030D-6E8A-4147-A177-3AD203B41FA5}">
+                      <a16:colId xmlns:a16="http://schemas.microsoft.com/office/drawing/2014/main" val="20001"/>
+                    </a:ext>
+                  </a:extLst>
+                </a:gridCol>
               </a:tblGrid>
-              <a:tr h="594360">
+              <a:tr h="902970">
                 <a:tc>
                   <a:txBody>
-                    <a:bodyPr wrap="square"/>
+                    <a:bodyPr/>
                     <a:lstStyle/>
                     <a:p>
                       <a:r>
@@ -10888,7 +14978,7 @@
                           </a:solidFill>
                           <a:latin typeface="맑은 고딕"/>
                         </a:rPr>
-                        <a:t>순서</a:t>
+                        <a:t>효과</a:t>
                       </a:r>
                     </a:p>
                   </a:txBody>
@@ -10900,7 +14990,7 @@
                 </a:tc>
                 <a:tc>
                   <a:txBody>
-                    <a:bodyPr wrap="square"/>
+                    <a:bodyPr/>
                     <a:lstStyle/>
                     <a:p>
                       <a:r>
@@ -10910,7 +15000,7 @@
                           </a:solidFill>
                           <a:latin typeface="맑은 고딕"/>
                         </a:rPr>
-                        <a:t>보여줄 내용</a:t>
+                        <a:t>설명</a:t>
                       </a:r>
                     </a:p>
                   </a:txBody>
@@ -10920,25 +15010,30 @@
                     </a:solidFill>
                   </a:tcPr>
                 </a:tc>
+                <a:extLst>
+                  <a:ext uri="{0D108BD9-81ED-4DB2-BD59-A6C34878D82A}">
+                    <a16:rowId xmlns:a16="http://schemas.microsoft.com/office/drawing/2014/main" val="10000"/>
+                  </a:ext>
+                </a:extLst>
               </a:tr>
-              <a:tr h="594360">
+              <a:tr h="902970">
                 <a:tc>
                   <a:txBody>
-                    <a:bodyPr wrap="square"/>
+                    <a:bodyPr/>
                     <a:lstStyle/>
                     <a:p>
                       <a:r>
-                        <a:rPr sz="1350" b="1">
+                        <a:rPr sz="1300" b="1">
                           <a:solidFill>
                             <a:srgbClr val="142A63"/>
                           </a:solidFill>
                           <a:latin typeface="맑은 고딕"/>
                         </a:rPr>
-                        <a:t>1. 파일 모드</a:t>
+                        <a:t>미래 확장 근거</a:t>
                       </a:r>
                     </a:p>
                   </a:txBody>
-                  <a:tcPr anchor="t" marL="109728" marR="109728" marT="91440" marB="91440">
+                  <a:tcPr marL="109728" marR="109728" marT="91440" marB="91440">
                     <a:solidFill>
                       <a:srgbClr val="FFFFFF"/>
                     </a:solidFill>
@@ -10946,7 +15041,7 @@
                 </a:tc>
                 <a:tc>
                   <a:txBody>
-                    <a:bodyPr wrap="square"/>
+                    <a:bodyPr/>
                     <a:lstStyle/>
                     <a:p>
                       <a:pPr>
@@ -10955,41 +15050,46 @@
                         </a:lnSpc>
                       </a:pPr>
                       <a:r>
-                        <a:rPr sz="1350">
+                        <a:rPr sz="1300">
                           <a:solidFill>
                             <a:srgbClr val="16213A"/>
                           </a:solidFill>
                           <a:latin typeface="맑은 고딕"/>
                         </a:rPr>
-                        <a:t>`codefab run`으로 클래스+함수+상속이 함께 있는 예제 실행 → 정상 출력 확인</a:t>
+                        <a:t>실제로 이후 PR #69에서 debug 서브커맨드가 추가되며 이 결정이 맞았음이 증명됐다.</a:t>
                       </a:r>
                     </a:p>
                   </a:txBody>
-                  <a:tcPr anchor="t" marL="109728" marR="109728" marT="91440" marB="91440">
+                  <a:tcPr marL="109728" marR="109728" marT="91440" marB="91440">
                     <a:solidFill>
                       <a:srgbClr val="FFFFFF"/>
                     </a:solidFill>
                   </a:tcPr>
                 </a:tc>
+                <a:extLst>
+                  <a:ext uri="{0D108BD9-81ED-4DB2-BD59-A6C34878D82A}">
+                    <a16:rowId xmlns:a16="http://schemas.microsoft.com/office/drawing/2014/main" val="10001"/>
+                  </a:ext>
+                </a:extLst>
               </a:tr>
-              <a:tr h="594360">
+              <a:tr h="902970">
                 <a:tc>
                   <a:txBody>
-                    <a:bodyPr wrap="square"/>
+                    <a:bodyPr/>
                     <a:lstStyle/>
                     <a:p>
                       <a:r>
-                        <a:rPr sz="1350" b="1">
+                        <a:rPr sz="1300" b="1">
                           <a:solidFill>
                             <a:srgbClr val="142A63"/>
                           </a:solidFill>
                           <a:latin typeface="맑은 고딕"/>
                         </a:rPr>
-                        <a:t>2. REPL 모드</a:t>
+                        <a:t>반복 질문 방지</a:t>
                       </a:r>
                     </a:p>
                   </a:txBody>
-                  <a:tcPr anchor="t" marL="109728" marR="109728" marT="91440" marB="91440">
+                  <a:tcPr marL="109728" marR="109728" marT="91440" marB="91440">
                     <a:solidFill>
                       <a:srgbClr val="FFFFFF"/>
                     </a:solidFill>
@@ -10997,7 +15097,7 @@
                 </a:tc>
                 <a:tc>
                   <a:txBody>
-                    <a:bodyPr wrap="square"/>
+                    <a:bodyPr/>
                     <a:lstStyle/>
                     <a:p>
                       <a:pPr>
@@ -11006,41 +15106,46 @@
                         </a:lnSpc>
                       </a:pPr>
                       <a:r>
-                        <a:rPr sz="1350">
+                        <a:rPr sz="1300">
                           <a:solidFill>
                             <a:srgbClr val="16213A"/>
                           </a:solidFill>
                           <a:latin typeface="맑은 고딕"/>
                         </a:rPr>
-                        <a:t>변수 선언·조건문을 한 줄씩 입력해 대화형으로 실행하는 모습 시연</a:t>
+                        <a:t>왜 이렇게 설계했는지 기록해두면 같은 질문이 나중에 또 나오지 않는다.</a:t>
                       </a:r>
                     </a:p>
                   </a:txBody>
-                  <a:tcPr anchor="t" marL="109728" marR="109728" marT="91440" marB="91440">
+                  <a:tcPr marL="109728" marR="109728" marT="91440" marB="91440">
                     <a:solidFill>
                       <a:srgbClr val="FFFFFF"/>
                     </a:solidFill>
                   </a:tcPr>
                 </a:tc>
+                <a:extLst>
+                  <a:ext uri="{0D108BD9-81ED-4DB2-BD59-A6C34878D82A}">
+                    <a16:rowId xmlns:a16="http://schemas.microsoft.com/office/drawing/2014/main" val="10002"/>
+                  </a:ext>
+                </a:extLst>
               </a:tr>
-              <a:tr h="594360">
+              <a:tr h="902970">
                 <a:tc>
                   <a:txBody>
-                    <a:bodyPr wrap="square"/>
+                    <a:bodyPr/>
                     <a:lstStyle/>
                     <a:p>
                       <a:r>
-                        <a:rPr sz="1350" b="1">
+                        <a:rPr sz="1300" b="1">
                           <a:solidFill>
                             <a:srgbClr val="142A63"/>
                           </a:solidFill>
                           <a:latin typeface="맑은 고딕"/>
                         </a:rPr>
-                        <a:t>3. 디버그 모드</a:t>
+                        <a:t>대안까지 기록</a:t>
                       </a:r>
                     </a:p>
                   </a:txBody>
-                  <a:tcPr anchor="t" marL="109728" marR="109728" marT="91440" marB="91440">
+                  <a:tcPr marL="109728" marR="109728" marT="91440" marB="91440">
                     <a:solidFill>
                       <a:srgbClr val="FFFFFF"/>
                     </a:solidFill>
@@ -11048,7 +15153,7 @@
                 </a:tc>
                 <a:tc>
                   <a:txBody>
-                    <a:bodyPr wrap="square"/>
+                    <a:bodyPr/>
                     <a:lstStyle/>
                     <a:p>
                       <a:pPr>
@@ -11057,124 +15162,27 @@
                         </a:lnSpc>
                       </a:pPr>
                       <a:r>
-                        <a:rPr sz="1350">
+                        <a:rPr sz="1300">
                           <a:solidFill>
                             <a:srgbClr val="16213A"/>
                           </a:solidFill>
                           <a:latin typeface="맑은 고딕"/>
                         </a:rPr>
-                        <a:t>`codefab debug`에서 step/breakpoint/watch로 함수 호출과 변수 변화를 실시간 관찰</a:t>
+                        <a:t>채택한 안뿐 아니라 검토했던 대안(인자 기반 판단)도 남아 맥락이 보존된다.</a:t>
                       </a:r>
                     </a:p>
                   </a:txBody>
-                  <a:tcPr anchor="t" marL="109728" marR="109728" marT="91440" marB="91440">
+                  <a:tcPr marL="109728" marR="109728" marT="91440" marB="91440">
                     <a:solidFill>
                       <a:srgbClr val="FFFFFF"/>
                     </a:solidFill>
                   </a:tcPr>
                 </a:tc>
-              </a:tr>
-              <a:tr h="594360">
-                <a:tc>
-                  <a:txBody>
-                    <a:bodyPr wrap="square"/>
-                    <a:lstStyle/>
-                    <a:p>
-                      <a:r>
-                        <a:rPr sz="1350" b="1">
-                          <a:solidFill>
-                            <a:srgbClr val="142A63"/>
-                          </a:solidFill>
-                          <a:latin typeface="맑은 고딕"/>
-                        </a:rPr>
-                        <a:t>4. import</a:t>
-                      </a:r>
-                    </a:p>
-                  </a:txBody>
-                  <a:tcPr anchor="t" marL="109728" marR="109728" marT="91440" marB="91440">
-                    <a:solidFill>
-                      <a:srgbClr val="FFFFFF"/>
-                    </a:solidFill>
-                  </a:tcPr>
-                </a:tc>
-                <a:tc>
-                  <a:txBody>
-                    <a:bodyPr wrap="square"/>
-                    <a:lstStyle/>
-                    <a:p>
-                      <a:pPr>
-                        <a:lnSpc>
-                          <a:spcPct val="115000"/>
-                        </a:lnSpc>
-                      </a:pPr>
-                      <a:r>
-                        <a:rPr sz="1350">
-                          <a:solidFill>
-                            <a:srgbClr val="16213A"/>
-                          </a:solidFill>
-                          <a:latin typeface="맑은 고딕"/>
-                        </a:rPr>
-                        <a:t>분리된 모듈(.laugh) 파일을 불러와 변수·함수를 재사용하는 예제 실행</a:t>
-                      </a:r>
-                    </a:p>
-                  </a:txBody>
-                  <a:tcPr anchor="t" marL="109728" marR="109728" marT="91440" marB="91440">
-                    <a:solidFill>
-                      <a:srgbClr val="FFFFFF"/>
-                    </a:solidFill>
-                  </a:tcPr>
-                </a:tc>
-              </a:tr>
-              <a:tr h="594360">
-                <a:tc>
-                  <a:txBody>
-                    <a:bodyPr wrap="square"/>
-                    <a:lstStyle/>
-                    <a:p>
-                      <a:r>
-                        <a:rPr sz="1350" b="1">
-                          <a:solidFill>
-                            <a:srgbClr val="142A63"/>
-                          </a:solidFill>
-                          <a:latin typeface="맑은 고딕"/>
-                        </a:rPr>
-                        <a:t>5. 에러 케이스</a:t>
-                      </a:r>
-                    </a:p>
-                  </a:txBody>
-                  <a:tcPr anchor="t" marL="109728" marR="109728" marT="91440" marB="91440">
-                    <a:solidFill>
-                      <a:srgbClr val="FFFFFF"/>
-                    </a:solidFill>
-                  </a:tcPr>
-                </a:tc>
-                <a:tc>
-                  <a:txBody>
-                    <a:bodyPr wrap="square"/>
-                    <a:lstStyle/>
-                    <a:p>
-                      <a:pPr>
-                        <a:lnSpc>
-                          <a:spcPct val="115000"/>
-                        </a:lnSpc>
-                      </a:pPr>
-                      <a:r>
-                        <a:rPr sz="1350">
-                          <a:solidFill>
-                            <a:srgbClr val="16213A"/>
-                          </a:solidFill>
-                          <a:latin typeface="맑은 고딕"/>
-                        </a:rPr>
-                        <a:t>의도적으로 잘못된 스크립트 실행 → 정확한 한글 에러 메시지와 줄 번호 확인</a:t>
-                      </a:r>
-                    </a:p>
-                  </a:txBody>
-                  <a:tcPr anchor="t" marL="109728" marR="109728" marT="91440" marB="91440">
-                    <a:solidFill>
-                      <a:srgbClr val="FFFFFF"/>
-                    </a:solidFill>
-                  </a:tcPr>
-                </a:tc>
+                <a:extLst>
+                  <a:ext uri="{0D108BD9-81ED-4DB2-BD59-A6C34878D82A}">
+                    <a16:rowId xmlns:a16="http://schemas.microsoft.com/office/drawing/2014/main" val="10003"/>
+                  </a:ext>
+                </a:extLst>
               </a:tr>
             </a:tbl>
           </a:graphicData>

--- a/docs/CodeFab_발표자료_초안.pptx
+++ b/docs/CodeFab_발표자료_초안.pptx
@@ -5,19 +5,20 @@
     <p:sldMasterId id="2147483648" r:id="rId1"/>
   </p:sldMasterIdLst>
   <p:sldIdLst>
-    <p:sldId id="266" r:id="rId2"/>
-    <p:sldId id="267" r:id="rId3"/>
-    <p:sldId id="268" r:id="rId4"/>
-    <p:sldId id="269" r:id="rId5"/>
-    <p:sldId id="270" r:id="rId6"/>
-    <p:sldId id="271" r:id="rId7"/>
-    <p:sldId id="272" r:id="rId8"/>
-    <p:sldId id="273" r:id="rId9"/>
-    <p:sldId id="274" r:id="rId10"/>
-    <p:sldId id="262" r:id="rId11"/>
-    <p:sldId id="263" r:id="rId12"/>
-    <p:sldId id="275" r:id="rId13"/>
-    <p:sldId id="276" r:id="rId14"/>
+    <p:sldId id="256" r:id="rId2"/>
+    <p:sldId id="257" r:id="rId3"/>
+    <p:sldId id="258" r:id="rId4"/>
+    <p:sldId id="259" r:id="rId5"/>
+    <p:sldId id="260" r:id="rId6"/>
+    <p:sldId id="261" r:id="rId7"/>
+    <p:sldId id="262" r:id="rId8"/>
+    <p:sldId id="263" r:id="rId9"/>
+    <p:sldId id="264" r:id="rId10"/>
+    <p:sldId id="265" r:id="rId11"/>
+    <p:sldId id="266" r:id="rId12"/>
+    <p:sldId id="267" r:id="rId13"/>
+    <p:sldId id="268" r:id="rId14"/>
+    <p:sldId id="269" r:id="rId15"/>
   </p:sldIdLst>
   <p:sldSz cx="12192000" cy="6858000"/>
   <p:notesSz cx="6858000" cy="9144000"/>
@@ -3356,7 +3357,7 @@
         <p:spPr>
           <a:xfrm>
             <a:off x="822960" y="3337560"/>
-            <a:ext cx="7863840" cy="914400"/>
+            <a:ext cx="8778240" cy="914400"/>
           </a:xfrm>
           <a:prstGeom prst="rect">
             <a:avLst/>
@@ -3381,7 +3382,7 @@
                 </a:solidFill>
                 <a:latin typeface="맑은 고딕"/>
               </a:rPr>
-              <a:t>변수·조건문부터 함수·클래스·배열·모듈까지 —</a:t>
+              <a:t>1일차 Assembler · Checker · Executor 3단 구조 설계부터,</a:t>
             </a:r>
           </a:p>
           <a:p>
@@ -3397,7 +3398,7 @@
                 </a:solidFill>
                 <a:latin typeface="맑은 고딕"/>
               </a:rPr>
-              <a:t>Assembler · Checker · Executor 3단 파이프라인으로 완성한 한글 인터프리터</a:t>
+              <a:t>3~4일차 함수·클래스·배열·모듈·최적화 기능 확장까지 — Bug Hunters</a:t>
             </a:r>
           </a:p>
         </p:txBody>
@@ -3410,7 +3411,7 @@
         </p:nvSpPr>
         <p:spPr>
           <a:xfrm>
-            <a:off x="822960" y="4297680"/>
+            <a:off x="822960" y="4343400"/>
             <a:ext cx="1097280" cy="402336"/>
           </a:xfrm>
           <a:prstGeom prst="roundRect">
@@ -3467,8 +3468,8 @@
         </p:nvSpPr>
         <p:spPr>
           <a:xfrm>
-            <a:off x="2084832" y="4297680"/>
-            <a:ext cx="1097280" cy="402336"/>
+            <a:off x="2066544" y="4343400"/>
+            <a:ext cx="1609344" cy="402336"/>
           </a:xfrm>
           <a:prstGeom prst="roundRect">
             <a:avLst>
@@ -3505,14 +3506,38 @@
           <a:p>
             <a:pPr algn="ctr"/>
             <a:r>
-              <a:rPr sz="1200" b="1">
+              <a:rPr sz="1200" b="1" dirty="0" err="1">
                 <a:solidFill>
                   <a:srgbClr val="142A63"/>
                 </a:solidFill>
                 <a:latin typeface="맑은 고딕"/>
               </a:rPr>
-              <a:t>구조 설계</a:t>
-            </a:r>
+              <a:t>구조</a:t>
+            </a:r>
+            <a:r>
+              <a:rPr sz="1200" b="1" dirty="0">
+                <a:solidFill>
+                  <a:srgbClr val="142A63"/>
+                </a:solidFill>
+                <a:latin typeface="맑은 고딕"/>
+              </a:rPr>
+              <a:t> </a:t>
+            </a:r>
+            <a:r>
+              <a:rPr sz="1200" b="1" dirty="0" err="1">
+                <a:solidFill>
+                  <a:srgbClr val="142A63"/>
+                </a:solidFill>
+                <a:latin typeface="맑은 고딕"/>
+              </a:rPr>
+              <a:t>설계</a:t>
+            </a:r>
+            <a:endParaRPr sz="1200" b="1" dirty="0">
+              <a:solidFill>
+                <a:srgbClr val="142A63"/>
+              </a:solidFill>
+              <a:latin typeface="맑은 고딕"/>
+            </a:endParaRPr>
           </a:p>
         </p:txBody>
       </p:sp>
@@ -3524,7 +3549,7 @@
         </p:nvSpPr>
         <p:spPr>
           <a:xfrm>
-            <a:off x="3346704" y="4297680"/>
+            <a:off x="3822192" y="4343400"/>
             <a:ext cx="1097280" cy="402336"/>
           </a:xfrm>
           <a:prstGeom prst="roundRect">
@@ -3562,29 +3587,14 @@
           <a:p>
             <a:pPr algn="ctr"/>
             <a:r>
-              <a:rPr sz="1200" b="1" dirty="0">
+              <a:rPr sz="1200" b="1">
                 <a:solidFill>
                   <a:srgbClr val="142A63"/>
                 </a:solidFill>
                 <a:latin typeface="맑은 고딕"/>
               </a:rPr>
-              <a:t>BP </a:t>
-            </a:r>
-            <a:r>
-              <a:rPr lang="ko-KR" altLang="en-US" sz="1200" b="1" dirty="0">
-                <a:solidFill>
-                  <a:srgbClr val="142A63"/>
-                </a:solidFill>
-                <a:latin typeface="맑은 고딕"/>
-              </a:rPr>
-              <a:t>사례</a:t>
-            </a:r>
-            <a:endParaRPr sz="1200" b="1" dirty="0">
-              <a:solidFill>
-                <a:srgbClr val="142A63"/>
-              </a:solidFill>
-              <a:latin typeface="맑은 고딕"/>
-            </a:endParaRPr>
+              <a:t>기능 확장</a:t>
+            </a:r>
           </a:p>
         </p:txBody>
       </p:sp>
@@ -3596,8 +3606,8 @@
         </p:nvSpPr>
         <p:spPr>
           <a:xfrm>
-            <a:off x="4608576" y="4297680"/>
-            <a:ext cx="1456946" cy="402336"/>
+            <a:off x="5065776" y="4343400"/>
+            <a:ext cx="1097280" cy="402336"/>
           </a:xfrm>
           <a:prstGeom prst="roundRect">
             <a:avLst>
@@ -3640,7 +3650,7 @@
                 </a:solidFill>
                 <a:latin typeface="맑은 고딕"/>
               </a:rPr>
-              <a:t>프로젝트 시연</a:t>
+              <a:t>BP 사례</a:t>
             </a:r>
           </a:p>
         </p:txBody>
@@ -3653,8 +3663,65 @@
         </p:nvSpPr>
         <p:spPr>
           <a:xfrm>
-            <a:off x="6230114" y="4297680"/>
-            <a:ext cx="1112794" cy="402336"/>
+            <a:off x="6309360" y="4343400"/>
+            <a:ext cx="1353312" cy="402336"/>
+          </a:xfrm>
+          <a:prstGeom prst="roundRect">
+            <a:avLst>
+              <a:gd name="adj" fmla="val 50000"/>
+            </a:avLst>
+          </a:prstGeom>
+          <a:solidFill>
+            <a:srgbClr val="EAF0FB"/>
+          </a:solidFill>
+          <a:ln w="9525">
+            <a:solidFill>
+              <a:srgbClr val="CFD9EE"/>
+            </a:solidFill>
+          </a:ln>
+          <a:effectLst/>
+        </p:spPr>
+        <p:style>
+          <a:lnRef idx="1">
+            <a:schemeClr val="accent1"/>
+          </a:lnRef>
+          <a:fillRef idx="3">
+            <a:schemeClr val="accent1"/>
+          </a:fillRef>
+          <a:effectRef idx="2">
+            <a:schemeClr val="accent1"/>
+          </a:effectRef>
+          <a:fontRef idx="minor">
+            <a:schemeClr val="lt1"/>
+          </a:fontRef>
+        </p:style>
+        <p:txBody>
+          <a:bodyPr lIns="146304" rIns="146304" rtlCol="0" anchor="ctr"/>
+          <a:lstStyle/>
+          <a:p>
+            <a:pPr algn="ctr"/>
+            <a:r>
+              <a:rPr sz="1200" b="1">
+                <a:solidFill>
+                  <a:srgbClr val="142A63"/>
+                </a:solidFill>
+                <a:latin typeface="맑은 고딕"/>
+              </a:rPr>
+              <a:t>프로젝트 시연</a:t>
+            </a:r>
+          </a:p>
+        </p:txBody>
+      </p:sp>
+      <p:sp>
+        <p:nvSpPr>
+          <p:cNvPr id="13" name="Rounded Rectangle 12"/>
+          <p:cNvSpPr/>
+          <p:nvPr/>
+        </p:nvSpPr>
+        <p:spPr>
+          <a:xfrm>
+            <a:off x="7808976" y="4343400"/>
+            <a:ext cx="713232" cy="402336"/>
           </a:xfrm>
           <a:prstGeom prst="roundRect">
             <a:avLst>
@@ -3861,29 +3928,14 @@
           <a:p>
             <a:pPr algn="ctr"/>
             <a:r>
-              <a:rPr sz="1300" b="1" dirty="0">
+              <a:rPr sz="1300" b="1">
                 <a:solidFill>
                   <a:srgbClr val="FFFFFF"/>
                 </a:solidFill>
                 <a:latin typeface="Consolas"/>
               </a:rPr>
-              <a:t>BP</a:t>
-            </a:r>
-            <a:r>
-              <a:rPr lang="en-US" sz="1300" b="1" dirty="0">
-                <a:solidFill>
-                  <a:srgbClr val="FFFFFF"/>
-                </a:solidFill>
-                <a:latin typeface="Consolas"/>
-              </a:rPr>
-              <a:t>5</a:t>
-            </a:r>
-            <a:endParaRPr sz="1300" b="1" dirty="0">
-              <a:solidFill>
-                <a:srgbClr val="FFFFFF"/>
-              </a:solidFill>
-              <a:latin typeface="Consolas"/>
-            </a:endParaRPr>
+              <a:t>BP4</a:t>
+            </a:r>
           </a:p>
         </p:txBody>
       </p:sp>
@@ -3921,7 +3973,7 @@
                 </a:solidFill>
                 <a:latin typeface="맑은 고딕"/>
               </a:rPr>
-              <a:t>공통 로직은 그대로, 달라지는 지점만 훅으로 연다</a:t>
+              <a:t>설계 결정에는 “왜”를 코멘트로 남긴다</a:t>
             </a:r>
           </a:p>
         </p:txBody>
@@ -3934,8 +3986,8 @@
         </p:nvSpPr>
         <p:spPr>
           <a:xfrm>
-            <a:off x="8595360" y="433947"/>
-            <a:ext cx="3108960" cy="192810"/>
+            <a:off x="8595360" y="256032"/>
+            <a:ext cx="3108960" cy="548640"/>
           </a:xfrm>
           <a:prstGeom prst="rect">
             <a:avLst/>
@@ -3954,65 +4006,14 @@
               </a:lnSpc>
             </a:pPr>
             <a:r>
-              <a:rPr sz="1200" b="1" dirty="0">
+              <a:rPr sz="1200" b="1">
                 <a:solidFill>
                   <a:srgbClr val="D8E1F7"/>
                 </a:solidFill>
                 <a:latin typeface="맑은 고딕"/>
               </a:rPr>
-              <a:t>BP </a:t>
-            </a:r>
-            <a:r>
-              <a:rPr lang="en-US" sz="1200" b="1" dirty="0">
-                <a:solidFill>
-                  <a:srgbClr val="D8E1F7"/>
-                </a:solidFill>
-                <a:latin typeface="맑은 고딕"/>
-              </a:rPr>
-              <a:t>5</a:t>
-            </a:r>
-            <a:r>
-              <a:rPr sz="1200" b="1" dirty="0">
-                <a:solidFill>
-                  <a:srgbClr val="D8E1F7"/>
-                </a:solidFill>
-                <a:latin typeface="맑은 고딕"/>
-              </a:rPr>
-              <a:t>/</a:t>
-            </a:r>
-            <a:r>
-              <a:rPr lang="en-US" sz="1200" b="1" dirty="0">
-                <a:solidFill>
-                  <a:srgbClr val="D8E1F7"/>
-                </a:solidFill>
-                <a:latin typeface="맑은 고딕"/>
-              </a:rPr>
-              <a:t>6</a:t>
-            </a:r>
-            <a:r>
-              <a:rPr sz="1200" b="1" dirty="0">
-                <a:solidFill>
-                  <a:srgbClr val="D8E1F7"/>
-                </a:solidFill>
-                <a:latin typeface="맑은 고딕"/>
-              </a:rPr>
-              <a:t> · </a:t>
-            </a:r>
-            <a:r>
-              <a:rPr sz="1200" b="1" dirty="0" err="1">
-                <a:solidFill>
-                  <a:srgbClr val="D8E1F7"/>
-                </a:solidFill>
-                <a:latin typeface="맑은 고딕"/>
-              </a:rPr>
-              <a:t>리팩토링</a:t>
-            </a:r>
-            <a:endParaRPr sz="1200" b="1" dirty="0">
-              <a:solidFill>
-                <a:srgbClr val="D8E1F7"/>
-              </a:solidFill>
-              <a:latin typeface="맑은 고딕"/>
-            </a:endParaRPr>
+              <a:t>BP 4/6 · 설계 문서화</a:t>
+            </a:r>
           </a:p>
         </p:txBody>
       </p:sp>
@@ -4124,7 +4125,7 @@
                 </a:solidFill>
                 <a:latin typeface="Consolas"/>
               </a:rPr>
-              <a:t>7 / 10</a:t>
+              <a:t>10 / 14</a:t>
             </a:r>
           </a:p>
         </p:txBody>
@@ -4208,7 +4209,7 @@
                 </a:solidFill>
                 <a:latin typeface="맑은 고딕"/>
               </a:rPr>
-              <a:t>베이스 클래스를 고치지 않고, 딱 한 지점을 훅으로 뽑아 서브클래스가 오버라이드하게 만든다.</a:t>
+              <a:t>PR #64: 대안을 검토했지만 채택하지 않은 이유까지 남기면, 같은 질문이 반복되지 않는다.</a:t>
             </a:r>
           </a:p>
         </p:txBody>
@@ -4267,7 +4268,7 @@
                 </a:solidFill>
                 <a:latin typeface="맑은 고딕"/>
               </a:rPr>
-              <a:t>codefab/checker.py → codefab/function_checker.py</a:t>
+              <a:t>PR #64 · CLI 진입점 통합</a:t>
             </a:r>
           </a:p>
           <a:p>
@@ -4286,7 +4287,7 @@
                 </a:solidFill>
                 <a:latin typeface="Consolas"/>
               </a:rPr>
-              <a:t># Checker: 메서드 순회 로직을 훅 하나로 분리</a:t>
+              <a:t>리뷰어:</a:t>
             </a:r>
           </a:p>
           <a:p>
@@ -4305,7 +4306,7 @@
                 </a:solidFill>
                 <a:latin typeface="Consolas"/>
               </a:rPr>
-              <a:t>def _visit_method_body(self, method) -&gt; None:</a:t>
+              <a:t>codefab &lt;경로&gt;처럼 인자 유무로 파일 모드를</a:t>
             </a:r>
           </a:p>
           <a:p>
@@ -4324,26 +4325,7 @@
                 </a:solidFill>
                 <a:latin typeface="Consolas"/>
               </a:rPr>
-              <a:t>    for statement in method.body:</a:t>
-            </a:r>
-          </a:p>
-          <a:p>
-            <a:pPr>
-              <a:lnSpc>
-                <a:spcPct val="128000"/>
-              </a:lnSpc>
-              <a:spcBef>
-                <a:spcPts val="100"/>
-              </a:spcBef>
-            </a:pPr>
-            <a:r>
-              <a:rPr sz="1250">
-                <a:solidFill>
-                  <a:srgbClr val="DBE6FF"/>
-                </a:solidFill>
-                <a:latin typeface="Consolas"/>
-              </a:rPr>
-              <a:t>        statement.accept(self)</a:t>
+              <a:t>판단하면 어떨까요?</a:t>
             </a:r>
           </a:p>
           <a:p>
@@ -4378,7 +4360,7 @@
                 </a:solidFill>
                 <a:latin typeface="Consolas"/>
               </a:rPr>
-              <a:t># FunctionChecker: 이 훅 하나만 오버라이드해서 확장</a:t>
+              <a:t>작성자:</a:t>
             </a:r>
           </a:p>
           <a:p>
@@ -4397,7 +4379,7 @@
                 </a:solidFill>
                 <a:latin typeface="Consolas"/>
               </a:rPr>
-              <a:t>def _visit_method_body(self, method) -&gt; None:</a:t>
+              <a:t>이후 debug &lt;경로&gt;가 추가되면 'debug'라는</a:t>
             </a:r>
           </a:p>
           <a:p>
@@ -4416,7 +4398,7 @@
                 </a:solidFill>
                 <a:latin typeface="Consolas"/>
               </a:rPr>
-              <a:t>    self.function_depth += 1</a:t>
+              <a:t>단어가 파일 경로로 오인될 수 있어, 서브커맨드로</a:t>
             </a:r>
           </a:p>
           <a:p>
@@ -4435,64 +4417,7 @@
                 </a:solidFill>
                 <a:latin typeface="Consolas"/>
               </a:rPr>
-              <a:t>    try:</a:t>
-            </a:r>
-          </a:p>
-          <a:p>
-            <a:pPr>
-              <a:lnSpc>
-                <a:spcPct val="128000"/>
-              </a:lnSpc>
-              <a:spcBef>
-                <a:spcPts val="100"/>
-              </a:spcBef>
-            </a:pPr>
-            <a:r>
-              <a:rPr sz="1250">
-                <a:solidFill>
-                  <a:srgbClr val="DBE6FF"/>
-                </a:solidFill>
-                <a:latin typeface="Consolas"/>
-              </a:rPr>
-              <a:t>        super()._visit_method_body(method)</a:t>
-            </a:r>
-          </a:p>
-          <a:p>
-            <a:pPr>
-              <a:lnSpc>
-                <a:spcPct val="128000"/>
-              </a:lnSpc>
-              <a:spcBef>
-                <a:spcPts val="100"/>
-              </a:spcBef>
-            </a:pPr>
-            <a:r>
-              <a:rPr sz="1250">
-                <a:solidFill>
-                  <a:srgbClr val="DBE6FF"/>
-                </a:solidFill>
-                <a:latin typeface="Consolas"/>
-              </a:rPr>
-              <a:t>    finally:</a:t>
-            </a:r>
-          </a:p>
-          <a:p>
-            <a:pPr>
-              <a:lnSpc>
-                <a:spcPct val="128000"/>
-              </a:lnSpc>
-              <a:spcBef>
-                <a:spcPts val="100"/>
-              </a:spcBef>
-            </a:pPr>
-            <a:r>
-              <a:rPr sz="1250">
-                <a:solidFill>
-                  <a:srgbClr val="DBE6FF"/>
-                </a:solidFill>
-                <a:latin typeface="Consolas"/>
-              </a:rPr>
-              <a:t>        self.function_depth -= 1</a:t>
+              <a:t>모드를 명시하는 구조를 유지했습니다.</a:t>
             </a:r>
           </a:p>
         </p:txBody>
@@ -4544,7 +4469,7 @@
                           </a:solidFill>
                           <a:latin typeface="맑은 고딕"/>
                         </a:rPr>
-                        <a:t>원칙</a:t>
+                        <a:t>효과</a:t>
                       </a:r>
                     </a:p>
                   </a:txBody>
@@ -4566,7 +4491,7 @@
                           </a:solidFill>
                           <a:latin typeface="맑은 고딕"/>
                         </a:rPr>
-                        <a:t>적용</a:t>
+                        <a:t>설명</a:t>
                       </a:r>
                     </a:p>
                   </a:txBody>
@@ -4595,7 +4520,7 @@
                           </a:solidFill>
                           <a:latin typeface="맑은 고딕"/>
                         </a:rPr>
-                        <a:t>개방-폐쇄 원칙</a:t>
+                        <a:t>미래 확장 근거</a:t>
                       </a:r>
                     </a:p>
                   </a:txBody>
@@ -4622,7 +4547,7 @@
                           </a:solidFill>
                           <a:latin typeface="맑은 고딕"/>
                         </a:rPr>
-                        <a:t>Checker의 기존 코드는 한 줄도 안 건드리고 FunctionChecker만 확장했다.</a:t>
+                        <a:t>실제로 이후 PR #69에서 debug 서브커맨드가 추가되며 이 결정이 맞았음이 증명됐다.</a:t>
                       </a:r>
                     </a:p>
                   </a:txBody>
@@ -4651,7 +4576,7 @@
                           </a:solidFill>
                           <a:latin typeface="맑은 고딕"/>
                         </a:rPr>
-                        <a:t>단일 진입점</a:t>
+                        <a:t>반복 질문 방지</a:t>
                       </a:r>
                     </a:p>
                   </a:txBody>
@@ -4678,7 +4603,7 @@
                           </a:solidFill>
                           <a:latin typeface="맑은 고딕"/>
                         </a:rPr>
-                        <a:t>“메서드 본문을 어떻게 순회하는가”가 코드베이스 전체에서 딱 한 곳에만 존재한다.</a:t>
+                        <a:t>왜 이렇게 설계했는지 기록해두면 같은 질문이 나중에 또 나오지 않는다.</a:t>
                       </a:r>
                     </a:p>
                   </a:txBody>
@@ -4707,7 +4632,7 @@
                           </a:solidFill>
                           <a:latin typeface="맑은 고딕"/>
                         </a:rPr>
-                        <a:t>회귀 위험 최소화</a:t>
+                        <a:t>대안까지 기록</a:t>
                       </a:r>
                     </a:p>
                   </a:txBody>
@@ -4734,7 +4659,7 @@
                           </a:solidFill>
                           <a:latin typeface="맑은 고딕"/>
                         </a:rPr>
-                        <a:t>기존 클래스 검사 동작은 그대로 보존된 채로 “메서드 내부 반환” 지원이 추가됐다.</a:t>
+                        <a:t>채택한 안뿐 아니라 검토했던 대안(인자 기반 판단)도 남아 맥락이 보존된다.</a:t>
                       </a:r>
                     </a:p>
                   </a:txBody>
@@ -4755,11 +4680,6 @@
         </a:graphic>
       </p:graphicFrame>
     </p:spTree>
-    <p:extLst>
-      <p:ext uri="{BB962C8B-B14F-4D97-AF65-F5344CB8AC3E}">
-        <p14:creationId xmlns:p14="http://schemas.microsoft.com/office/powerpoint/2010/main" val="1131700472"/>
-      </p:ext>
-    </p:extLst>
   </p:cSld>
   <p:clrMapOvr>
     <a:masterClrMapping/>
@@ -4918,29 +4838,14 @@
           <a:p>
             <a:pPr algn="ctr"/>
             <a:r>
-              <a:rPr sz="1300" b="1" dirty="0">
+              <a:rPr sz="1300" b="1">
                 <a:solidFill>
                   <a:srgbClr val="FFFFFF"/>
                 </a:solidFill>
                 <a:latin typeface="Consolas"/>
               </a:rPr>
-              <a:t>BP</a:t>
-            </a:r>
-            <a:r>
-              <a:rPr lang="en-US" sz="1300" b="1" dirty="0">
-                <a:solidFill>
-                  <a:srgbClr val="FFFFFF"/>
-                </a:solidFill>
-                <a:latin typeface="Consolas"/>
-              </a:rPr>
-              <a:t>6</a:t>
-            </a:r>
-            <a:endParaRPr sz="1300" b="1" dirty="0">
-              <a:solidFill>
-                <a:srgbClr val="FFFFFF"/>
-              </a:solidFill>
-              <a:latin typeface="Consolas"/>
-            </a:endParaRPr>
+              <a:t>BP5</a:t>
+            </a:r>
           </a:p>
         </p:txBody>
       </p:sp>
@@ -4978,7 +4883,7 @@
                 </a:solidFill>
                 <a:latin typeface="맑은 고딕"/>
               </a:rPr>
-              <a:t>다국어 표기는 렉서 한 층에서 끝낸다</a:t>
+              <a:t>공통 로직은 그대로, 달라지는 지점만 훅으로 연다</a:t>
             </a:r>
           </a:p>
         </p:txBody>
@@ -4991,8 +4896,8 @@
         </p:nvSpPr>
         <p:spPr>
           <a:xfrm>
-            <a:off x="8595360" y="433947"/>
-            <a:ext cx="3108960" cy="192810"/>
+            <a:off x="8595360" y="256032"/>
+            <a:ext cx="3108960" cy="548640"/>
           </a:xfrm>
           <a:prstGeom prst="rect">
             <a:avLst/>
@@ -5011,83 +4916,14 @@
               </a:lnSpc>
             </a:pPr>
             <a:r>
-              <a:rPr sz="1200" b="1" dirty="0">
+              <a:rPr sz="1200" b="1">
                 <a:solidFill>
                   <a:srgbClr val="D8E1F7"/>
                 </a:solidFill>
                 <a:latin typeface="맑은 고딕"/>
               </a:rPr>
-              <a:t>BP </a:t>
-            </a:r>
-            <a:r>
-              <a:rPr lang="en-US" sz="1200" b="1" dirty="0">
-                <a:solidFill>
-                  <a:srgbClr val="D8E1F7"/>
-                </a:solidFill>
-                <a:latin typeface="맑은 고딕"/>
-              </a:rPr>
-              <a:t>6</a:t>
-            </a:r>
-            <a:r>
-              <a:rPr sz="1200" b="1" dirty="0">
-                <a:solidFill>
-                  <a:srgbClr val="D8E1F7"/>
-                </a:solidFill>
-                <a:latin typeface="맑은 고딕"/>
-              </a:rPr>
-              <a:t>/</a:t>
-            </a:r>
-            <a:r>
-              <a:rPr lang="en-US" sz="1200" b="1" dirty="0">
-                <a:solidFill>
-                  <a:srgbClr val="D8E1F7"/>
-                </a:solidFill>
-                <a:latin typeface="맑은 고딕"/>
-              </a:rPr>
-              <a:t>6</a:t>
-            </a:r>
-            <a:r>
-              <a:rPr sz="1200" b="1" dirty="0">
-                <a:solidFill>
-                  <a:srgbClr val="D8E1F7"/>
-                </a:solidFill>
-                <a:latin typeface="맑은 고딕"/>
-              </a:rPr>
-              <a:t> · </a:t>
-            </a:r>
-            <a:r>
-              <a:rPr sz="1200" b="1" dirty="0" err="1">
-                <a:solidFill>
-                  <a:srgbClr val="D8E1F7"/>
-                </a:solidFill>
-                <a:latin typeface="맑은 고딕"/>
-              </a:rPr>
-              <a:t>언어</a:t>
-            </a:r>
-            <a:r>
-              <a:rPr sz="1200" b="1" dirty="0">
-                <a:solidFill>
-                  <a:srgbClr val="D8E1F7"/>
-                </a:solidFill>
-                <a:latin typeface="맑은 고딕"/>
-              </a:rPr>
-              <a:t> </a:t>
-            </a:r>
-            <a:r>
-              <a:rPr sz="1200" b="1" dirty="0" err="1">
-                <a:solidFill>
-                  <a:srgbClr val="D8E1F7"/>
-                </a:solidFill>
-                <a:latin typeface="맑은 고딕"/>
-              </a:rPr>
-              <a:t>설계</a:t>
-            </a:r>
-            <a:endParaRPr sz="1200" b="1" dirty="0">
-              <a:solidFill>
-                <a:srgbClr val="D8E1F7"/>
-              </a:solidFill>
-              <a:latin typeface="맑은 고딕"/>
-            </a:endParaRPr>
+              <a:t>BP 5/6 · 리팩토링</a:t>
+            </a:r>
           </a:p>
         </p:txBody>
       </p:sp>
@@ -5199,7 +5035,7 @@
                 </a:solidFill>
                 <a:latin typeface="Consolas"/>
               </a:rPr>
-              <a:t>8 / 10</a:t>
+              <a:t>11 / 14</a:t>
             </a:r>
           </a:p>
         </p:txBody>
@@ -5283,7 +5119,7 @@
                 </a:solidFill>
                 <a:latin typeface="맑은 고딕"/>
               </a:rPr>
-              <a:t>한글·영어 표기는 토크나이저에서만 구분하고, 그 아래 계층은 표기 언어를 몰라도 되게 만든다.</a:t>
+              <a:t>베이스 클래스를 고치지 않고, 딱 한 지점을 훅으로 뽑아 서브클래스가 오버라이드하게 만든다.</a:t>
             </a:r>
           </a:p>
         </p:txBody>
@@ -5342,7 +5178,7 @@
                 </a:solidFill>
                 <a:latin typeface="맑은 고딕"/>
               </a:rPr>
-              <a:t>codefab/tokens.py</a:t>
+              <a:t>codefab/checker.py → codefab/function_checker.py</a:t>
             </a:r>
           </a:p>
           <a:p>
@@ -5357,11 +5193,11 @@
             <a:r>
               <a:rPr sz="1250">
                 <a:solidFill>
-                  <a:srgbClr val="DBE6FF"/>
+                  <a:srgbClr val="7FA8FF"/>
                 </a:solidFill>
                 <a:latin typeface="Consolas"/>
               </a:rPr>
-              <a:t>KEYWORDS = {</a:t>
+              <a:t># Checker: 메서드 순회 로직을 훅 하나로 분리</a:t>
             </a:r>
           </a:p>
           <a:p>
@@ -5380,7 +5216,7 @@
                 </a:solidFill>
                 <a:latin typeface="Consolas"/>
               </a:rPr>
-              <a:t>    "var": TokenType.VAR,       "변수": TokenType.VAR,</a:t>
+              <a:t>def _visit_method_body(self, method) -&gt; None:</a:t>
             </a:r>
           </a:p>
           <a:p>
@@ -5399,7 +5235,7 @@
                 </a:solidFill>
                 <a:latin typeface="Consolas"/>
               </a:rPr>
-              <a:t>    "class": TokenType.CLASS,   "클래스": TokenType.CLASS,</a:t>
+              <a:t>    for statement in method.body:</a:t>
             </a:r>
           </a:p>
           <a:p>
@@ -5418,7 +5254,7 @@
                 </a:solidFill>
                 <a:latin typeface="Consolas"/>
               </a:rPr>
-              <a:t>    "func": TokenType.FUN,      "함수": TokenType.FUN,</a:t>
+              <a:t>        statement.accept(self)</a:t>
             </a:r>
           </a:p>
           <a:p>
@@ -5430,15 +5266,12 @@
                 <a:spcPts val="100"/>
               </a:spcBef>
             </a:pPr>
-            <a:r>
-              <a:rPr sz="1250">
-                <a:solidFill>
-                  <a:srgbClr val="DBE6FF"/>
-                </a:solidFill>
-                <a:latin typeface="Consolas"/>
-              </a:rPr>
-              <a:t>    "return": TokenType.RETURN, "반환": TokenType.RETURN,</a:t>
-            </a:r>
+            <a:endParaRPr sz="1250">
+              <a:solidFill>
+                <a:srgbClr val="DBE6FF"/>
+              </a:solidFill>
+              <a:latin typeface="Consolas"/>
+            </a:endParaRPr>
           </a:p>
           <a:p>
             <a:pPr>
@@ -5452,11 +5285,11 @@
             <a:r>
               <a:rPr sz="1250">
                 <a:solidFill>
-                  <a:srgbClr val="DBE6FF"/>
+                  <a:srgbClr val="7FA8FF"/>
                 </a:solidFill>
                 <a:latin typeface="Consolas"/>
               </a:rPr>
-              <a:t>}</a:t>
+              <a:t># FunctionChecker: 이 훅 하나만 오버라이드해서 확장</a:t>
             </a:r>
           </a:p>
           <a:p>
@@ -5471,11 +5304,106 @@
             <a:r>
               <a:rPr sz="1250">
                 <a:solidFill>
-                  <a:srgbClr val="7FA8FF"/>
+                  <a:srgbClr val="DBE6FF"/>
                 </a:solidFill>
                 <a:latin typeface="Consolas"/>
               </a:rPr>
-              <a:t># AST / Checker / Executor는 TokenType만 보고, 표기는 신경 쓰지 않는다</a:t>
+              <a:t>def _visit_method_body(self, method) -&gt; None:</a:t>
+            </a:r>
+          </a:p>
+          <a:p>
+            <a:pPr>
+              <a:lnSpc>
+                <a:spcPct val="128000"/>
+              </a:lnSpc>
+              <a:spcBef>
+                <a:spcPts val="100"/>
+              </a:spcBef>
+            </a:pPr>
+            <a:r>
+              <a:rPr sz="1250">
+                <a:solidFill>
+                  <a:srgbClr val="DBE6FF"/>
+                </a:solidFill>
+                <a:latin typeface="Consolas"/>
+              </a:rPr>
+              <a:t>    self.function_depth += 1</a:t>
+            </a:r>
+          </a:p>
+          <a:p>
+            <a:pPr>
+              <a:lnSpc>
+                <a:spcPct val="128000"/>
+              </a:lnSpc>
+              <a:spcBef>
+                <a:spcPts val="100"/>
+              </a:spcBef>
+            </a:pPr>
+            <a:r>
+              <a:rPr sz="1250">
+                <a:solidFill>
+                  <a:srgbClr val="DBE6FF"/>
+                </a:solidFill>
+                <a:latin typeface="Consolas"/>
+              </a:rPr>
+              <a:t>    try:</a:t>
+            </a:r>
+          </a:p>
+          <a:p>
+            <a:pPr>
+              <a:lnSpc>
+                <a:spcPct val="128000"/>
+              </a:lnSpc>
+              <a:spcBef>
+                <a:spcPts val="100"/>
+              </a:spcBef>
+            </a:pPr>
+            <a:r>
+              <a:rPr sz="1250">
+                <a:solidFill>
+                  <a:srgbClr val="DBE6FF"/>
+                </a:solidFill>
+                <a:latin typeface="Consolas"/>
+              </a:rPr>
+              <a:t>        super()._visit_method_body(method)</a:t>
+            </a:r>
+          </a:p>
+          <a:p>
+            <a:pPr>
+              <a:lnSpc>
+                <a:spcPct val="128000"/>
+              </a:lnSpc>
+              <a:spcBef>
+                <a:spcPts val="100"/>
+              </a:spcBef>
+            </a:pPr>
+            <a:r>
+              <a:rPr sz="1250">
+                <a:solidFill>
+                  <a:srgbClr val="DBE6FF"/>
+                </a:solidFill>
+                <a:latin typeface="Consolas"/>
+              </a:rPr>
+              <a:t>    finally:</a:t>
+            </a:r>
+          </a:p>
+          <a:p>
+            <a:pPr>
+              <a:lnSpc>
+                <a:spcPct val="128000"/>
+              </a:lnSpc>
+              <a:spcBef>
+                <a:spcPts val="100"/>
+              </a:spcBef>
+            </a:pPr>
+            <a:r>
+              <a:rPr sz="1250">
+                <a:solidFill>
+                  <a:srgbClr val="DBE6FF"/>
+                </a:solidFill>
+                <a:latin typeface="Consolas"/>
+              </a:rPr>
+              <a:t>        self.function_depth -= 1</a:t>
             </a:r>
           </a:p>
         </p:txBody>
@@ -5527,7 +5455,7 @@
                           </a:solidFill>
                           <a:latin typeface="맑은 고딕"/>
                         </a:rPr>
-                        <a:t>계층</a:t>
+                        <a:t>원칙</a:t>
                       </a:r>
                     </a:p>
                   </a:txBody>
@@ -5549,7 +5477,7 @@
                           </a:solidFill>
                           <a:latin typeface="맑은 고딕"/>
                         </a:rPr>
-                        <a:t>언어 인식 여부</a:t>
+                        <a:t>적용</a:t>
                       </a:r>
                     </a:p>
                   </a:txBody>
@@ -5578,7 +5506,7 @@
                           </a:solidFill>
                           <a:latin typeface="맑은 고딕"/>
                         </a:rPr>
-                        <a:t>Tokenizer</a:t>
+                        <a:t>개방-폐쇄 원칙</a:t>
                       </a:r>
                     </a:p>
                   </a:txBody>
@@ -5605,7 +5533,7 @@
                           </a:solidFill>
                           <a:latin typeface="맑은 고딕"/>
                         </a:rPr>
-                        <a:t>한글·영어 표기를 모두 인식해 같은 TokenType으로 통일한다.</a:t>
+                        <a:t>Checker의 기존 코드는 한 줄도 안 건드리고 FunctionChecker만 확장했다.</a:t>
                       </a:r>
                     </a:p>
                   </a:txBody>
@@ -5634,7 +5562,7 @@
                           </a:solidFill>
                           <a:latin typeface="맑은 고딕"/>
                         </a:rPr>
-                        <a:t>AST / Checker / Executor</a:t>
+                        <a:t>단일 진입점</a:t>
                       </a:r>
                     </a:p>
                   </a:txBody>
@@ -5661,7 +5589,7 @@
                           </a:solidFill>
                           <a:latin typeface="맑은 고딕"/>
                         </a:rPr>
-                        <a:t>표기 언어와 완전히 무관 — TokenType enum 값만 보고 동작한다.</a:t>
+                        <a:t>“메서드 본문을 어떻게 순회하는가”가 코드베이스 전체에서 딱 한 곳에만 존재한다.</a:t>
                       </a:r>
                     </a:p>
                   </a:txBody>
@@ -5690,7 +5618,7 @@
                           </a:solidFill>
                           <a:latin typeface="맑은 고딕"/>
                         </a:rPr>
-                        <a:t>확장 비용</a:t>
+                        <a:t>회귀 위험 최소화</a:t>
                       </a:r>
                     </a:p>
                   </a:txBody>
@@ -5717,7 +5645,7 @@
                           </a:solidFill>
                           <a:latin typeface="맑은 고딕"/>
                         </a:rPr>
-                        <a:t>새 표기를 추가할 때 KEYWORDS 테이블 한 줄만 고치면 된다. 실제로 func/return이 함수/반환과 동일하게 동작함을 테스트로 검증했다.</a:t>
+                        <a:t>기존 클래스 검사 동작은 그대로 보존된 채로 “메서드 내부 반환” 지원이 추가됐다.</a:t>
                       </a:r>
                     </a:p>
                   </a:txBody>
@@ -5738,11 +5666,6 @@
         </a:graphic>
       </p:graphicFrame>
     </p:spTree>
-    <p:extLst>
-      <p:ext uri="{BB962C8B-B14F-4D97-AF65-F5344CB8AC3E}">
-        <p14:creationId xmlns:p14="http://schemas.microsoft.com/office/powerpoint/2010/main" val="1485471015"/>
-      </p:ext>
-    </p:extLst>
   </p:cSld>
   <p:clrMapOvr>
     <a:masterClrMapping/>
@@ -5907,7 +5830,7 @@
                 </a:solidFill>
                 <a:latin typeface="Consolas"/>
               </a:rPr>
-              <a:t>04</a:t>
+              <a:t>BP6</a:t>
             </a:r>
           </a:p>
         </p:txBody>
@@ -5946,7 +5869,7 @@
                 </a:solidFill>
                 <a:latin typeface="맑은 고딕"/>
               </a:rPr>
-              <a:t>프로젝트 시연 시나리오</a:t>
+              <a:t>다국어 표기는 렉서 한 층에서 끝낸다</a:t>
             </a:r>
           </a:p>
         </p:txBody>
@@ -5985,7 +5908,7 @@
                 </a:solidFill>
                 <a:latin typeface="맑은 고딕"/>
               </a:rPr>
-              <a:t>Live Demo</a:t>
+              <a:t>BP 6/6 · 언어 설계</a:t>
             </a:r>
           </a:p>
         </p:txBody>
@@ -6098,7 +6021,901 @@
                 </a:solidFill>
                 <a:latin typeface="Consolas"/>
               </a:rPr>
-              <a:t>10 / 11</a:t>
+              <a:t>12 / 14</a:t>
+            </a:r>
+          </a:p>
+        </p:txBody>
+      </p:sp>
+      <p:sp>
+        <p:nvSpPr>
+          <p:cNvPr id="10" name="Rectangle 9"/>
+          <p:cNvSpPr/>
+          <p:nvPr/>
+        </p:nvSpPr>
+        <p:spPr>
+          <a:xfrm>
+            <a:off x="502920" y="1371600"/>
+            <a:ext cx="45720" cy="685800"/>
+          </a:xfrm>
+          <a:prstGeom prst="rect">
+            <a:avLst/>
+          </a:prstGeom>
+          <a:solidFill>
+            <a:srgbClr val="1F3C88"/>
+          </a:solidFill>
+          <a:ln>
+            <a:noFill/>
+          </a:ln>
+          <a:effectLst/>
+        </p:spPr>
+        <p:style>
+          <a:lnRef idx="1">
+            <a:schemeClr val="accent1"/>
+          </a:lnRef>
+          <a:fillRef idx="3">
+            <a:schemeClr val="accent1"/>
+          </a:fillRef>
+          <a:effectRef idx="2">
+            <a:schemeClr val="accent1"/>
+          </a:effectRef>
+          <a:fontRef idx="minor">
+            <a:schemeClr val="lt1"/>
+          </a:fontRef>
+        </p:style>
+        <p:txBody>
+          <a:bodyPr rtlCol="0" anchor="ctr"/>
+          <a:lstStyle/>
+          <a:p>
+            <a:pPr algn="ctr"/>
+            <a:endParaRPr/>
+          </a:p>
+        </p:txBody>
+      </p:sp>
+      <p:sp>
+        <p:nvSpPr>
+          <p:cNvPr id="11" name="TextBox 10"/>
+          <p:cNvSpPr txBox="1"/>
+          <p:nvPr/>
+        </p:nvSpPr>
+        <p:spPr>
+          <a:xfrm>
+            <a:off x="713232" y="1298448"/>
+            <a:ext cx="10789920" cy="822960"/>
+          </a:xfrm>
+          <a:prstGeom prst="rect">
+            <a:avLst/>
+          </a:prstGeom>
+          <a:noFill/>
+        </p:spPr>
+        <p:txBody>
+          <a:bodyPr wrap="square" lIns="0" tIns="0" rIns="0" bIns="0" anchor="ctr">
+            <a:spAutoFit/>
+          </a:bodyPr>
+          <a:lstStyle/>
+          <a:p>
+            <a:pPr algn="l">
+              <a:lnSpc>
+                <a:spcPct val="130000"/>
+              </a:lnSpc>
+            </a:pPr>
+            <a:r>
+              <a:rPr sz="1700" b="1">
+                <a:solidFill>
+                  <a:srgbClr val="16213A"/>
+                </a:solidFill>
+                <a:latin typeface="맑은 고딕"/>
+              </a:rPr>
+              <a:t>한글·영어 표기는 토크나이저에서만 구분하고, 그 아래 계층은 표기 언어를 몰라도 되게 만든다.</a:t>
+            </a:r>
+          </a:p>
+        </p:txBody>
+      </p:sp>
+      <p:sp>
+        <p:nvSpPr>
+          <p:cNvPr id="12" name="Rounded Rectangle 11"/>
+          <p:cNvSpPr/>
+          <p:nvPr/>
+        </p:nvSpPr>
+        <p:spPr>
+          <a:xfrm>
+            <a:off x="502920" y="2240280"/>
+            <a:ext cx="5486400" cy="3611880"/>
+          </a:xfrm>
+          <a:prstGeom prst="roundRect">
+            <a:avLst>
+              <a:gd name="adj" fmla="val 4500"/>
+            </a:avLst>
+          </a:prstGeom>
+          <a:solidFill>
+            <a:srgbClr val="0F1C3F"/>
+          </a:solidFill>
+          <a:ln>
+            <a:noFill/>
+          </a:ln>
+          <a:effectLst/>
+        </p:spPr>
+        <p:style>
+          <a:lnRef idx="1">
+            <a:schemeClr val="accent1"/>
+          </a:lnRef>
+          <a:fillRef idx="3">
+            <a:schemeClr val="accent1"/>
+          </a:fillRef>
+          <a:effectRef idx="2">
+            <a:schemeClr val="accent1"/>
+          </a:effectRef>
+          <a:fontRef idx="minor">
+            <a:schemeClr val="lt1"/>
+          </a:fontRef>
+        </p:style>
+        <p:txBody>
+          <a:bodyPr wrap="square" lIns="256032" tIns="182880" rIns="256032" bIns="182880" rtlCol="0" anchor="ctr"/>
+          <a:lstStyle/>
+          <a:p>
+            <a:pPr algn="ctr">
+              <a:lnSpc>
+                <a:spcPct val="105000"/>
+              </a:lnSpc>
+            </a:pPr>
+            <a:r>
+              <a:rPr sz="1050" b="1">
+                <a:solidFill>
+                  <a:srgbClr val="7FA8FF"/>
+                </a:solidFill>
+                <a:latin typeface="맑은 고딕"/>
+              </a:rPr>
+              <a:t>codefab/tokens.py</a:t>
+            </a:r>
+          </a:p>
+          <a:p>
+            <a:pPr>
+              <a:lnSpc>
+                <a:spcPct val="128000"/>
+              </a:lnSpc>
+              <a:spcBef>
+                <a:spcPts val="100"/>
+              </a:spcBef>
+            </a:pPr>
+            <a:r>
+              <a:rPr sz="1250">
+                <a:solidFill>
+                  <a:srgbClr val="DBE6FF"/>
+                </a:solidFill>
+                <a:latin typeface="Consolas"/>
+              </a:rPr>
+              <a:t>KEYWORDS = {</a:t>
+            </a:r>
+          </a:p>
+          <a:p>
+            <a:pPr>
+              <a:lnSpc>
+                <a:spcPct val="128000"/>
+              </a:lnSpc>
+              <a:spcBef>
+                <a:spcPts val="100"/>
+              </a:spcBef>
+            </a:pPr>
+            <a:r>
+              <a:rPr sz="1250">
+                <a:solidFill>
+                  <a:srgbClr val="DBE6FF"/>
+                </a:solidFill>
+                <a:latin typeface="Consolas"/>
+              </a:rPr>
+              <a:t>    "var": TokenType.VAR,       "변수": TokenType.VAR,</a:t>
+            </a:r>
+          </a:p>
+          <a:p>
+            <a:pPr>
+              <a:lnSpc>
+                <a:spcPct val="128000"/>
+              </a:lnSpc>
+              <a:spcBef>
+                <a:spcPts val="100"/>
+              </a:spcBef>
+            </a:pPr>
+            <a:r>
+              <a:rPr sz="1250">
+                <a:solidFill>
+                  <a:srgbClr val="DBE6FF"/>
+                </a:solidFill>
+                <a:latin typeface="Consolas"/>
+              </a:rPr>
+              <a:t>    "class": TokenType.CLASS,   "클래스": TokenType.CLASS,</a:t>
+            </a:r>
+          </a:p>
+          <a:p>
+            <a:pPr>
+              <a:lnSpc>
+                <a:spcPct val="128000"/>
+              </a:lnSpc>
+              <a:spcBef>
+                <a:spcPts val="100"/>
+              </a:spcBef>
+            </a:pPr>
+            <a:r>
+              <a:rPr sz="1250">
+                <a:solidFill>
+                  <a:srgbClr val="DBE6FF"/>
+                </a:solidFill>
+                <a:latin typeface="Consolas"/>
+              </a:rPr>
+              <a:t>    "func": TokenType.FUN,      "함수": TokenType.FUN,</a:t>
+            </a:r>
+          </a:p>
+          <a:p>
+            <a:pPr>
+              <a:lnSpc>
+                <a:spcPct val="128000"/>
+              </a:lnSpc>
+              <a:spcBef>
+                <a:spcPts val="100"/>
+              </a:spcBef>
+            </a:pPr>
+            <a:r>
+              <a:rPr sz="1250">
+                <a:solidFill>
+                  <a:srgbClr val="DBE6FF"/>
+                </a:solidFill>
+                <a:latin typeface="Consolas"/>
+              </a:rPr>
+              <a:t>    "return": TokenType.RETURN, "반환": TokenType.RETURN,</a:t>
+            </a:r>
+          </a:p>
+          <a:p>
+            <a:pPr>
+              <a:lnSpc>
+                <a:spcPct val="128000"/>
+              </a:lnSpc>
+              <a:spcBef>
+                <a:spcPts val="100"/>
+              </a:spcBef>
+            </a:pPr>
+            <a:r>
+              <a:rPr sz="1250">
+                <a:solidFill>
+                  <a:srgbClr val="DBE6FF"/>
+                </a:solidFill>
+                <a:latin typeface="Consolas"/>
+              </a:rPr>
+              <a:t>}</a:t>
+            </a:r>
+          </a:p>
+          <a:p>
+            <a:pPr>
+              <a:lnSpc>
+                <a:spcPct val="128000"/>
+              </a:lnSpc>
+              <a:spcBef>
+                <a:spcPts val="100"/>
+              </a:spcBef>
+            </a:pPr>
+            <a:r>
+              <a:rPr sz="1250">
+                <a:solidFill>
+                  <a:srgbClr val="7FA8FF"/>
+                </a:solidFill>
+                <a:latin typeface="Consolas"/>
+              </a:rPr>
+              <a:t># AST / Checker / Executor는 TokenType만 보고, 표기는 신경 쓰지 않는다</a:t>
+            </a:r>
+          </a:p>
+        </p:txBody>
+      </p:sp>
+      <p:graphicFrame>
+        <p:nvGraphicFramePr>
+          <p:cNvPr id="13" name="Table 12"/>
+          <p:cNvGraphicFramePr>
+            <a:graphicFrameLocks noGrp="1"/>
+          </p:cNvGraphicFramePr>
+          <p:nvPr/>
+        </p:nvGraphicFramePr>
+        <p:xfrm>
+          <a:off x="6263640" y="2240280"/>
+          <a:ext cx="5440679" cy="3611880"/>
+        </p:xfrm>
+        <a:graphic>
+          <a:graphicData uri="http://schemas.openxmlformats.org/drawingml/2006/table">
+            <a:tbl>
+              <a:tblPr>
+                <a:tableStyleId>{5C22544A-7EE6-4342-B048-85BDC9FD1C3A}</a:tableStyleId>
+              </a:tblPr>
+              <a:tblGrid>
+                <a:gridCol w="1523390">
+                  <a:extLst>
+                    <a:ext uri="{9D8B030D-6E8A-4147-A177-3AD203B41FA5}">
+                      <a16:colId xmlns:a16="http://schemas.microsoft.com/office/drawing/2014/main" val="20000"/>
+                    </a:ext>
+                  </a:extLst>
+                </a:gridCol>
+                <a:gridCol w="3917289">
+                  <a:extLst>
+                    <a:ext uri="{9D8B030D-6E8A-4147-A177-3AD203B41FA5}">
+                      <a16:colId xmlns:a16="http://schemas.microsoft.com/office/drawing/2014/main" val="20001"/>
+                    </a:ext>
+                  </a:extLst>
+                </a:gridCol>
+              </a:tblGrid>
+              <a:tr h="902970">
+                <a:tc>
+                  <a:txBody>
+                    <a:bodyPr/>
+                    <a:lstStyle/>
+                    <a:p>
+                      <a:r>
+                        <a:rPr sz="1100" b="1">
+                          <a:solidFill>
+                            <a:srgbClr val="5B6B8C"/>
+                          </a:solidFill>
+                          <a:latin typeface="맑은 고딕"/>
+                        </a:rPr>
+                        <a:t>계층</a:t>
+                      </a:r>
+                    </a:p>
+                  </a:txBody>
+                  <a:tcPr marL="109728" marR="109728" marT="54864" marB="54864" anchor="b">
+                    <a:solidFill>
+                      <a:srgbClr val="FFFFFF"/>
+                    </a:solidFill>
+                  </a:tcPr>
+                </a:tc>
+                <a:tc>
+                  <a:txBody>
+                    <a:bodyPr/>
+                    <a:lstStyle/>
+                    <a:p>
+                      <a:r>
+                        <a:rPr sz="1100" b="1">
+                          <a:solidFill>
+                            <a:srgbClr val="5B6B8C"/>
+                          </a:solidFill>
+                          <a:latin typeface="맑은 고딕"/>
+                        </a:rPr>
+                        <a:t>언어 인식 여부</a:t>
+                      </a:r>
+                    </a:p>
+                  </a:txBody>
+                  <a:tcPr marL="109728" marR="109728" marT="54864" marB="54864" anchor="b">
+                    <a:solidFill>
+                      <a:srgbClr val="FFFFFF"/>
+                    </a:solidFill>
+                  </a:tcPr>
+                </a:tc>
+                <a:extLst>
+                  <a:ext uri="{0D108BD9-81ED-4DB2-BD59-A6C34878D82A}">
+                    <a16:rowId xmlns:a16="http://schemas.microsoft.com/office/drawing/2014/main" val="10000"/>
+                  </a:ext>
+                </a:extLst>
+              </a:tr>
+              <a:tr h="902970">
+                <a:tc>
+                  <a:txBody>
+                    <a:bodyPr/>
+                    <a:lstStyle/>
+                    <a:p>
+                      <a:r>
+                        <a:rPr sz="1300" b="1">
+                          <a:solidFill>
+                            <a:srgbClr val="142A63"/>
+                          </a:solidFill>
+                          <a:latin typeface="맑은 고딕"/>
+                        </a:rPr>
+                        <a:t>Tokenizer</a:t>
+                      </a:r>
+                    </a:p>
+                  </a:txBody>
+                  <a:tcPr marL="109728" marR="109728" marT="91440" marB="91440">
+                    <a:solidFill>
+                      <a:srgbClr val="FFFFFF"/>
+                    </a:solidFill>
+                  </a:tcPr>
+                </a:tc>
+                <a:tc>
+                  <a:txBody>
+                    <a:bodyPr/>
+                    <a:lstStyle/>
+                    <a:p>
+                      <a:pPr>
+                        <a:lnSpc>
+                          <a:spcPct val="115000"/>
+                        </a:lnSpc>
+                      </a:pPr>
+                      <a:r>
+                        <a:rPr sz="1300">
+                          <a:solidFill>
+                            <a:srgbClr val="16213A"/>
+                          </a:solidFill>
+                          <a:latin typeface="맑은 고딕"/>
+                        </a:rPr>
+                        <a:t>한글·영어 표기를 모두 인식해 같은 TokenType으로 통일한다.</a:t>
+                      </a:r>
+                    </a:p>
+                  </a:txBody>
+                  <a:tcPr marL="109728" marR="109728" marT="91440" marB="91440">
+                    <a:solidFill>
+                      <a:srgbClr val="FFFFFF"/>
+                    </a:solidFill>
+                  </a:tcPr>
+                </a:tc>
+                <a:extLst>
+                  <a:ext uri="{0D108BD9-81ED-4DB2-BD59-A6C34878D82A}">
+                    <a16:rowId xmlns:a16="http://schemas.microsoft.com/office/drawing/2014/main" val="10001"/>
+                  </a:ext>
+                </a:extLst>
+              </a:tr>
+              <a:tr h="902970">
+                <a:tc>
+                  <a:txBody>
+                    <a:bodyPr/>
+                    <a:lstStyle/>
+                    <a:p>
+                      <a:r>
+                        <a:rPr sz="1300" b="1">
+                          <a:solidFill>
+                            <a:srgbClr val="142A63"/>
+                          </a:solidFill>
+                          <a:latin typeface="맑은 고딕"/>
+                        </a:rPr>
+                        <a:t>AST / Checker / Executor</a:t>
+                      </a:r>
+                    </a:p>
+                  </a:txBody>
+                  <a:tcPr marL="109728" marR="109728" marT="91440" marB="91440">
+                    <a:solidFill>
+                      <a:srgbClr val="FFFFFF"/>
+                    </a:solidFill>
+                  </a:tcPr>
+                </a:tc>
+                <a:tc>
+                  <a:txBody>
+                    <a:bodyPr/>
+                    <a:lstStyle/>
+                    <a:p>
+                      <a:pPr>
+                        <a:lnSpc>
+                          <a:spcPct val="115000"/>
+                        </a:lnSpc>
+                      </a:pPr>
+                      <a:r>
+                        <a:rPr sz="1300">
+                          <a:solidFill>
+                            <a:srgbClr val="16213A"/>
+                          </a:solidFill>
+                          <a:latin typeface="맑은 고딕"/>
+                        </a:rPr>
+                        <a:t>표기 언어와 완전히 무관 — TokenType enum 값만 보고 동작한다.</a:t>
+                      </a:r>
+                    </a:p>
+                  </a:txBody>
+                  <a:tcPr marL="109728" marR="109728" marT="91440" marB="91440">
+                    <a:solidFill>
+                      <a:srgbClr val="FFFFFF"/>
+                    </a:solidFill>
+                  </a:tcPr>
+                </a:tc>
+                <a:extLst>
+                  <a:ext uri="{0D108BD9-81ED-4DB2-BD59-A6C34878D82A}">
+                    <a16:rowId xmlns:a16="http://schemas.microsoft.com/office/drawing/2014/main" val="10002"/>
+                  </a:ext>
+                </a:extLst>
+              </a:tr>
+              <a:tr h="902970">
+                <a:tc>
+                  <a:txBody>
+                    <a:bodyPr/>
+                    <a:lstStyle/>
+                    <a:p>
+                      <a:r>
+                        <a:rPr sz="1300" b="1">
+                          <a:solidFill>
+                            <a:srgbClr val="142A63"/>
+                          </a:solidFill>
+                          <a:latin typeface="맑은 고딕"/>
+                        </a:rPr>
+                        <a:t>확장 비용</a:t>
+                      </a:r>
+                    </a:p>
+                  </a:txBody>
+                  <a:tcPr marL="109728" marR="109728" marT="91440" marB="91440">
+                    <a:solidFill>
+                      <a:srgbClr val="FFFFFF"/>
+                    </a:solidFill>
+                  </a:tcPr>
+                </a:tc>
+                <a:tc>
+                  <a:txBody>
+                    <a:bodyPr/>
+                    <a:lstStyle/>
+                    <a:p>
+                      <a:pPr>
+                        <a:lnSpc>
+                          <a:spcPct val="115000"/>
+                        </a:lnSpc>
+                      </a:pPr>
+                      <a:r>
+                        <a:rPr sz="1300">
+                          <a:solidFill>
+                            <a:srgbClr val="16213A"/>
+                          </a:solidFill>
+                          <a:latin typeface="맑은 고딕"/>
+                        </a:rPr>
+                        <a:t>새 표기를 추가할 때 KEYWORDS 테이블 한 줄만 고치면 된다. 실제로 func/return이 함수/반환과 동일하게 동작함을 테스트로 검증했다.</a:t>
+                      </a:r>
+                    </a:p>
+                  </a:txBody>
+                  <a:tcPr marL="109728" marR="109728" marT="91440" marB="91440">
+                    <a:solidFill>
+                      <a:srgbClr val="FFFFFF"/>
+                    </a:solidFill>
+                  </a:tcPr>
+                </a:tc>
+                <a:extLst>
+                  <a:ext uri="{0D108BD9-81ED-4DB2-BD59-A6C34878D82A}">
+                    <a16:rowId xmlns:a16="http://schemas.microsoft.com/office/drawing/2014/main" val="10003"/>
+                  </a:ext>
+                </a:extLst>
+              </a:tr>
+            </a:tbl>
+          </a:graphicData>
+        </a:graphic>
+      </p:graphicFrame>
+    </p:spTree>
+  </p:cSld>
+  <p:clrMapOvr>
+    <a:masterClrMapping/>
+  </p:clrMapOvr>
+</p:sld>
+</file>
+
+<file path=ppt/slides/slide13.xml><?xml version="1.0" encoding="utf-8"?>
+<p:sld xmlns:a="http://schemas.openxmlformats.org/drawingml/2006/main" xmlns:r="http://schemas.openxmlformats.org/officeDocument/2006/relationships" xmlns:p="http://schemas.openxmlformats.org/presentationml/2006/main">
+  <p:cSld>
+    <p:spTree>
+      <p:nvGrpSpPr>
+        <p:cNvPr id="1" name=""/>
+        <p:cNvGrpSpPr/>
+        <p:nvPr/>
+      </p:nvGrpSpPr>
+      <p:grpSpPr>
+        <a:xfrm>
+          <a:off x="0" y="0"/>
+          <a:ext cx="0" cy="0"/>
+          <a:chOff x="0" y="0"/>
+          <a:chExt cx="0" cy="0"/>
+        </a:xfrm>
+      </p:grpSpPr>
+      <p:sp>
+        <p:nvSpPr>
+          <p:cNvPr id="2" name="Rectangle 1"/>
+          <p:cNvSpPr/>
+          <p:nvPr/>
+        </p:nvSpPr>
+        <p:spPr>
+          <a:xfrm>
+            <a:off x="0" y="0"/>
+            <a:ext cx="12191695" cy="6858000"/>
+          </a:xfrm>
+          <a:prstGeom prst="rect">
+            <a:avLst/>
+          </a:prstGeom>
+          <a:solidFill>
+            <a:srgbClr val="FFFFFF"/>
+          </a:solidFill>
+          <a:ln>
+            <a:noFill/>
+          </a:ln>
+          <a:effectLst/>
+        </p:spPr>
+        <p:style>
+          <a:lnRef idx="1">
+            <a:schemeClr val="accent1"/>
+          </a:lnRef>
+          <a:fillRef idx="3">
+            <a:schemeClr val="accent1"/>
+          </a:fillRef>
+          <a:effectRef idx="2">
+            <a:schemeClr val="accent1"/>
+          </a:effectRef>
+          <a:fontRef idx="minor">
+            <a:schemeClr val="lt1"/>
+          </a:fontRef>
+        </p:style>
+        <p:txBody>
+          <a:bodyPr rtlCol="0" anchor="ctr"/>
+          <a:lstStyle/>
+          <a:p>
+            <a:pPr algn="ctr"/>
+            <a:endParaRPr/>
+          </a:p>
+        </p:txBody>
+      </p:sp>
+      <p:sp>
+        <p:nvSpPr>
+          <p:cNvPr id="3" name="Rectangle 2"/>
+          <p:cNvSpPr/>
+          <p:nvPr/>
+        </p:nvSpPr>
+        <p:spPr>
+          <a:xfrm>
+            <a:off x="0" y="0"/>
+            <a:ext cx="12191695" cy="1051560"/>
+          </a:xfrm>
+          <a:prstGeom prst="rect">
+            <a:avLst/>
+          </a:prstGeom>
+          <a:solidFill>
+            <a:srgbClr val="1F3C88"/>
+          </a:solidFill>
+          <a:ln>
+            <a:noFill/>
+          </a:ln>
+          <a:effectLst/>
+        </p:spPr>
+        <p:style>
+          <a:lnRef idx="1">
+            <a:schemeClr val="accent1"/>
+          </a:lnRef>
+          <a:fillRef idx="3">
+            <a:schemeClr val="accent1"/>
+          </a:fillRef>
+          <a:effectRef idx="2">
+            <a:schemeClr val="accent1"/>
+          </a:effectRef>
+          <a:fontRef idx="minor">
+            <a:schemeClr val="lt1"/>
+          </a:fontRef>
+        </p:style>
+        <p:txBody>
+          <a:bodyPr rtlCol="0" anchor="ctr"/>
+          <a:lstStyle/>
+          <a:p>
+            <a:pPr algn="ctr"/>
+            <a:endParaRPr/>
+          </a:p>
+        </p:txBody>
+      </p:sp>
+      <p:sp>
+        <p:nvSpPr>
+          <p:cNvPr id="4" name="Rounded Rectangle 3"/>
+          <p:cNvSpPr/>
+          <p:nvPr/>
+        </p:nvSpPr>
+        <p:spPr>
+          <a:xfrm>
+            <a:off x="502920" y="329184"/>
+            <a:ext cx="566928" cy="384048"/>
+          </a:xfrm>
+          <a:prstGeom prst="roundRect">
+            <a:avLst>
+              <a:gd name="adj" fmla="val 30000"/>
+            </a:avLst>
+          </a:prstGeom>
+          <a:solidFill>
+            <a:srgbClr val="142A63"/>
+          </a:solidFill>
+          <a:ln>
+            <a:noFill/>
+          </a:ln>
+          <a:effectLst/>
+        </p:spPr>
+        <p:style>
+          <a:lnRef idx="1">
+            <a:schemeClr val="accent1"/>
+          </a:lnRef>
+          <a:fillRef idx="3">
+            <a:schemeClr val="accent1"/>
+          </a:fillRef>
+          <a:effectRef idx="2">
+            <a:schemeClr val="accent1"/>
+          </a:effectRef>
+          <a:fontRef idx="minor">
+            <a:schemeClr val="lt1"/>
+          </a:fontRef>
+        </p:style>
+        <p:txBody>
+          <a:bodyPr rtlCol="0" anchor="ctr"/>
+          <a:lstStyle/>
+          <a:p>
+            <a:pPr algn="ctr"/>
+            <a:r>
+              <a:rPr sz="1300" b="1">
+                <a:solidFill>
+                  <a:srgbClr val="FFFFFF"/>
+                </a:solidFill>
+                <a:latin typeface="Consolas"/>
+              </a:rPr>
+              <a:t>05</a:t>
+            </a:r>
+          </a:p>
+        </p:txBody>
+      </p:sp>
+      <p:sp>
+        <p:nvSpPr>
+          <p:cNvPr id="5" name="TextBox 4"/>
+          <p:cNvSpPr txBox="1"/>
+          <p:nvPr/>
+        </p:nvSpPr>
+        <p:spPr>
+          <a:xfrm>
+            <a:off x="1234440" y="256032"/>
+            <a:ext cx="7863840" cy="548640"/>
+          </a:xfrm>
+          <a:prstGeom prst="rect">
+            <a:avLst/>
+          </a:prstGeom>
+          <a:noFill/>
+        </p:spPr>
+        <p:txBody>
+          <a:bodyPr wrap="square" lIns="0" tIns="0" rIns="0" bIns="0" anchor="ctr">
+            <a:spAutoFit/>
+          </a:bodyPr>
+          <a:lstStyle/>
+          <a:p>
+            <a:pPr algn="l">
+              <a:lnSpc>
+                <a:spcPct val="115000"/>
+              </a:lnSpc>
+            </a:pPr>
+            <a:r>
+              <a:rPr sz="2200" b="1">
+                <a:solidFill>
+                  <a:srgbClr val="FFFFFF"/>
+                </a:solidFill>
+                <a:latin typeface="맑은 고딕"/>
+              </a:rPr>
+              <a:t>프로젝트 시연 시나리오</a:t>
+            </a:r>
+          </a:p>
+        </p:txBody>
+      </p:sp>
+      <p:sp>
+        <p:nvSpPr>
+          <p:cNvPr id="6" name="TextBox 5"/>
+          <p:cNvSpPr txBox="1"/>
+          <p:nvPr/>
+        </p:nvSpPr>
+        <p:spPr>
+          <a:xfrm>
+            <a:off x="8595360" y="256032"/>
+            <a:ext cx="3108960" cy="548640"/>
+          </a:xfrm>
+          <a:prstGeom prst="rect">
+            <a:avLst/>
+          </a:prstGeom>
+          <a:noFill/>
+        </p:spPr>
+        <p:txBody>
+          <a:bodyPr wrap="square" lIns="0" tIns="0" rIns="0" bIns="0" anchor="ctr">
+            <a:spAutoFit/>
+          </a:bodyPr>
+          <a:lstStyle/>
+          <a:p>
+            <a:pPr algn="r">
+              <a:lnSpc>
+                <a:spcPct val="115000"/>
+              </a:lnSpc>
+            </a:pPr>
+            <a:r>
+              <a:rPr sz="1200" b="1">
+                <a:solidFill>
+                  <a:srgbClr val="D8E1F7"/>
+                </a:solidFill>
+                <a:latin typeface="맑은 고딕"/>
+              </a:rPr>
+              <a:t>Live Demo</a:t>
+            </a:r>
+          </a:p>
+        </p:txBody>
+      </p:sp>
+      <p:cxnSp>
+        <p:nvCxnSpPr>
+          <p:cNvPr id="7" name="Connector 6"/>
+          <p:cNvCxnSpPr/>
+          <p:nvPr/>
+        </p:nvCxnSpPr>
+        <p:spPr>
+          <a:xfrm>
+            <a:off x="502920" y="6355080"/>
+            <a:ext cx="11183112" cy="0"/>
+          </a:xfrm>
+          <a:prstGeom prst="line">
+            <a:avLst/>
+          </a:prstGeom>
+          <a:ln w="12700">
+            <a:solidFill>
+              <a:srgbClr val="CFD9EE"/>
+            </a:solidFill>
+          </a:ln>
+        </p:spPr>
+        <p:style>
+          <a:lnRef idx="2">
+            <a:schemeClr val="accent1"/>
+          </a:lnRef>
+          <a:fillRef idx="0">
+            <a:schemeClr val="accent1"/>
+          </a:fillRef>
+          <a:effectRef idx="1">
+            <a:schemeClr val="accent1"/>
+          </a:effectRef>
+          <a:fontRef idx="minor">
+            <a:schemeClr val="tx1"/>
+          </a:fontRef>
+        </p:style>
+      </p:cxnSp>
+      <p:sp>
+        <p:nvSpPr>
+          <p:cNvPr id="8" name="TextBox 7"/>
+          <p:cNvSpPr txBox="1"/>
+          <p:nvPr/>
+        </p:nvSpPr>
+        <p:spPr>
+          <a:xfrm>
+            <a:off x="502920" y="6446520"/>
+            <a:ext cx="5486400" cy="320040"/>
+          </a:xfrm>
+          <a:prstGeom prst="rect">
+            <a:avLst/>
+          </a:prstGeom>
+          <a:noFill/>
+        </p:spPr>
+        <p:txBody>
+          <a:bodyPr wrap="square" lIns="0" tIns="0" rIns="0" bIns="0" anchor="ctr">
+            <a:spAutoFit/>
+          </a:bodyPr>
+          <a:lstStyle/>
+          <a:p>
+            <a:pPr algn="l">
+              <a:lnSpc>
+                <a:spcPct val="115000"/>
+              </a:lnSpc>
+            </a:pPr>
+            <a:r>
+              <a:rPr sz="1050" b="0">
+                <a:solidFill>
+                  <a:srgbClr val="5B6B8C"/>
+                </a:solidFill>
+                <a:latin typeface="Consolas"/>
+              </a:rPr>
+              <a:t>CodeFab Interpreter · 5일차 발표</a:t>
+            </a:r>
+          </a:p>
+        </p:txBody>
+      </p:sp>
+      <p:sp>
+        <p:nvSpPr>
+          <p:cNvPr id="9" name="TextBox 8"/>
+          <p:cNvSpPr txBox="1"/>
+          <p:nvPr/>
+        </p:nvSpPr>
+        <p:spPr>
+          <a:xfrm>
+            <a:off x="10424160" y="6446520"/>
+            <a:ext cx="1261872" cy="320040"/>
+          </a:xfrm>
+          <a:prstGeom prst="rect">
+            <a:avLst/>
+          </a:prstGeom>
+          <a:noFill/>
+        </p:spPr>
+        <p:txBody>
+          <a:bodyPr wrap="square" lIns="0" tIns="0" rIns="0" bIns="0" anchor="ctr">
+            <a:spAutoFit/>
+          </a:bodyPr>
+          <a:lstStyle/>
+          <a:p>
+            <a:pPr algn="r">
+              <a:lnSpc>
+                <a:spcPct val="115000"/>
+              </a:lnSpc>
+            </a:pPr>
+            <a:r>
+              <a:rPr sz="1050" b="0">
+                <a:solidFill>
+                  <a:srgbClr val="5B6B8C"/>
+                </a:solidFill>
+                <a:latin typeface="Consolas"/>
+              </a:rPr>
+              <a:t>13 / 14</a:t>
             </a:r>
           </a:p>
         </p:txBody>
@@ -6564,7 +7381,7 @@
 </p:sld>
 </file>
 
-<file path=ppt/slides/slide13.xml><?xml version="1.0" encoding="utf-8"?>
+<file path=ppt/slides/slide14.xml><?xml version="1.0" encoding="utf-8"?>
 <p:sld xmlns:a="http://schemas.openxmlformats.org/drawingml/2006/main" xmlns:r="http://schemas.openxmlformats.org/officeDocument/2006/relationships" xmlns:p="http://schemas.openxmlformats.org/presentationml/2006/main">
   <p:cSld>
     <p:spTree>
@@ -6721,7 +7538,7 @@
                 </a:solidFill>
                 <a:latin typeface="Consolas"/>
               </a:rPr>
-              <a:t>05</a:t>
+              <a:t>06</a:t>
             </a:r>
           </a:p>
         </p:txBody>
@@ -6912,7 +7729,7 @@
                 </a:solidFill>
                 <a:latin typeface="Consolas"/>
               </a:rPr>
-              <a:t>11 / 11</a:t>
+              <a:t>14 / 14</a:t>
             </a:r>
           </a:p>
         </p:txBody>
@@ -6923,13 +7740,7 @@
           <p:cNvGraphicFramePr>
             <a:graphicFrameLocks noGrp="1"/>
           </p:cNvGraphicFramePr>
-          <p:nvPr>
-            <p:extLst>
-              <p:ext uri="{D42A27DB-BD31-4B8C-83A1-F6EECF244321}">
-                <p14:modId xmlns:p14="http://schemas.microsoft.com/office/powerpoint/2010/main" val="526973472"/>
-              </p:ext>
-            </p:extLst>
-          </p:nvPr>
+          <p:nvPr/>
         </p:nvGraphicFramePr>
         <p:xfrm>
           <a:off x="502920" y="1417320"/>
@@ -6986,20 +7797,14 @@
                     <a:lstStyle/>
                     <a:p>
                       <a:r>
-                        <a:rPr sz="1100" b="1" dirty="0" err="1">
+                        <a:rPr sz="1100" b="1">
                           <a:solidFill>
                             <a:srgbClr val="5B6B8C"/>
                           </a:solidFill>
                           <a:latin typeface="맑은 고딕"/>
                         </a:rPr>
-                        <a:t>소감</a:t>
-                      </a:r>
-                      <a:endParaRPr sz="1100" b="1" dirty="0">
-                        <a:solidFill>
-                          <a:srgbClr val="5B6B8C"/>
-                        </a:solidFill>
-                        <a:latin typeface="맑은 고딕"/>
-                      </a:endParaRPr>
+                        <a:t>소감 (초안 — 발표 전 자유롭게 수정)</a:t>
+                      </a:r>
                     </a:p>
                   </a:txBody>
                   <a:tcPr marL="109728" marR="109728" marT="54864" marB="54864" anchor="b">
@@ -7021,7 +7826,7 @@
                     <a:lstStyle/>
                     <a:p>
                       <a:r>
-                        <a:rPr lang="ko-KR" altLang="en-US" sz="1350" b="1" dirty="0" err="1">
+                        <a:rPr sz="1350" b="1">
                           <a:solidFill>
                             <a:srgbClr val="142A63"/>
                           </a:solidFill>
@@ -7029,12 +7834,6 @@
                         </a:rPr>
                         <a:t>김병남</a:t>
                       </a:r>
-                      <a:endParaRPr sz="1350" b="1" dirty="0">
-                        <a:solidFill>
-                          <a:srgbClr val="142A63"/>
-                        </a:solidFill>
-                        <a:latin typeface="맑은 고딕"/>
-                      </a:endParaRPr>
                     </a:p>
                   </a:txBody>
                   <a:tcPr marL="109728" marR="109728" marT="91440" marB="91440">
@@ -7060,7 +7859,7 @@
                           </a:solidFill>
                           <a:latin typeface="맑은 고딕"/>
                         </a:rPr>
-                        <a:t>여러 브랜치를 하나의 파이프라인으로 배선하면서, 통합 테스트가 왜 필요한지 몸으로 느꼈다.</a:t>
+                        <a:t>1일차에 세운 CI/브랜치 컨벤션이 있어서, 여러 브랜치를 하나의 파이프라인으로 배선할 때도 안심하고 통합할 수 있었다.</a:t>
                       </a:r>
                     </a:p>
                   </a:txBody>
@@ -7083,7 +7882,7 @@
                     <a:lstStyle/>
                     <a:p>
                       <a:r>
-                        <a:rPr lang="ko-KR" altLang="en-US" sz="1350" b="1" dirty="0" err="1">
+                        <a:rPr sz="1350" b="1">
                           <a:solidFill>
                             <a:srgbClr val="142A63"/>
                           </a:solidFill>
@@ -7091,12 +7890,6 @@
                         </a:rPr>
                         <a:t>조승주</a:t>
                       </a:r>
-                      <a:endParaRPr sz="1350" b="1" dirty="0">
-                        <a:solidFill>
-                          <a:srgbClr val="142A63"/>
-                        </a:solidFill>
-                        <a:latin typeface="맑은 고딕"/>
-                      </a:endParaRPr>
                     </a:p>
                   </a:txBody>
                   <a:tcPr marL="109728" marR="109728" marT="91440" marB="91440">
@@ -7122,7 +7915,7 @@
                           </a:solidFill>
                           <a:latin typeface="맑은 고딕"/>
                         </a:rPr>
-                        <a:t>한글 키워드 하나 추가하는 것도 토크나이저 설계가 받쳐줘야 쉬워진다는 걸 알았다.</a:t>
+                        <a:t>1일차에 만든 토크나이저가 끝까지 그대로 쓰였다 — 한글 키워드 하나 추가하는 것도 그 설계가 받쳐줘야 쉬워진다는 걸 알았다.</a:t>
                       </a:r>
                     </a:p>
                   </a:txBody>
@@ -7145,7 +7938,7 @@
                     <a:lstStyle/>
                     <a:p>
                       <a:r>
-                        <a:rPr lang="ko-KR" altLang="en-US" sz="1350" b="1" dirty="0" err="1">
+                        <a:rPr sz="1350" b="1">
                           <a:solidFill>
                             <a:srgbClr val="142A63"/>
                           </a:solidFill>
@@ -7153,12 +7946,6 @@
                         </a:rPr>
                         <a:t>이하섭</a:t>
                       </a:r>
-                      <a:endParaRPr sz="1350" b="1" dirty="0">
-                        <a:solidFill>
-                          <a:srgbClr val="142A63"/>
-                        </a:solidFill>
-                        <a:latin typeface="맑은 고딕"/>
-                      </a:endParaRPr>
                     </a:p>
                   </a:txBody>
                   <a:tcPr marL="109728" marR="109728" marT="91440" marB="91440">
@@ -7184,7 +7971,7 @@
                           </a:solidFill>
                           <a:latin typeface="맑은 고딕"/>
                         </a:rPr>
-                        <a:t>클래스 기능을 만들고 나서야 this/super 바인딩 같은 작은 디테일이 큰 버그로 이어진다는 걸 체감했다.</a:t>
+                        <a:t>1일차 Executor Unit을 클래스로 확장하면서, this/super 바인딩 같은 작은 디테일이 큰 버그로 이어진다는 걸 체감했다.</a:t>
                       </a:r>
                     </a:p>
                   </a:txBody>
@@ -7207,7 +7994,7 @@
                     <a:lstStyle/>
                     <a:p>
                       <a:r>
-                        <a:rPr lang="ko-KR" altLang="en-US" sz="1350" b="1" dirty="0">
+                        <a:rPr sz="1350" b="1">
                           <a:solidFill>
                             <a:srgbClr val="142A63"/>
                           </a:solidFill>
@@ -7215,12 +8002,6 @@
                         </a:rPr>
                         <a:t>최현준</a:t>
                       </a:r>
-                      <a:endParaRPr sz="1350" b="1" dirty="0">
-                        <a:solidFill>
-                          <a:srgbClr val="142A63"/>
-                        </a:solidFill>
-                        <a:latin typeface="맑은 고딕"/>
-                      </a:endParaRPr>
                     </a:p>
                   </a:txBody>
                   <a:tcPr marL="109728" marR="109728" marT="91440" marB="91440">
@@ -7269,7 +8050,7 @@
                     <a:lstStyle/>
                     <a:p>
                       <a:r>
-                        <a:rPr lang="ko-KR" altLang="en-US" sz="1350" b="1" dirty="0">
+                        <a:rPr sz="1350" b="1">
                           <a:solidFill>
                             <a:srgbClr val="142A63"/>
                           </a:solidFill>
@@ -7277,12 +8058,6 @@
                         </a:rPr>
                         <a:t>이준원</a:t>
                       </a:r>
-                      <a:endParaRPr sz="1350" b="1" dirty="0">
-                        <a:solidFill>
-                          <a:srgbClr val="142A63"/>
-                        </a:solidFill>
-                        <a:latin typeface="맑은 고딕"/>
-                      </a:endParaRPr>
                     </a:p>
                   </a:txBody>
                   <a:tcPr marL="109728" marR="109728" marT="91440" marB="91440">
@@ -7302,202 +8077,13 @@
                         </a:lnSpc>
                       </a:pPr>
                       <a:r>
-                        <a:rPr sz="1350" dirty="0" err="1">
-                          <a:solidFill>
-                            <a:srgbClr val="16213A"/>
-                          </a:solidFill>
-                          <a:latin typeface="맑은 고딕"/>
-                        </a:rPr>
-                        <a:t>Checker를</a:t>
-                      </a:r>
-                      <a:r>
-                        <a:rPr sz="1350" dirty="0">
-                          <a:solidFill>
-                            <a:srgbClr val="16213A"/>
-                          </a:solidFill>
-                          <a:latin typeface="맑은 고딕"/>
-                        </a:rPr>
-                        <a:t> </a:t>
-                      </a:r>
-                      <a:r>
-                        <a:rPr sz="1350" dirty="0" err="1">
-                          <a:solidFill>
-                            <a:srgbClr val="16213A"/>
-                          </a:solidFill>
-                          <a:latin typeface="맑은 고딕"/>
-                        </a:rPr>
-                        <a:t>제일</a:t>
-                      </a:r>
-                      <a:r>
-                        <a:rPr sz="1350" dirty="0">
-                          <a:solidFill>
-                            <a:srgbClr val="16213A"/>
-                          </a:solidFill>
-                          <a:latin typeface="맑은 고딕"/>
-                        </a:rPr>
-                        <a:t> </a:t>
-                      </a:r>
-                      <a:r>
-                        <a:rPr sz="1350" dirty="0" err="1">
-                          <a:solidFill>
-                            <a:srgbClr val="16213A"/>
-                          </a:solidFill>
-                          <a:latin typeface="맑은 고딕"/>
-                        </a:rPr>
-                        <a:t>먼저</a:t>
-                      </a:r>
-                      <a:r>
-                        <a:rPr sz="1350" dirty="0">
-                          <a:solidFill>
-                            <a:srgbClr val="16213A"/>
-                          </a:solidFill>
-                          <a:latin typeface="맑은 고딕"/>
-                        </a:rPr>
-                        <a:t> </a:t>
-                      </a:r>
-                      <a:r>
-                        <a:rPr sz="1350" dirty="0" err="1">
-                          <a:solidFill>
-                            <a:srgbClr val="16213A"/>
-                          </a:solidFill>
-                          <a:latin typeface="맑은 고딕"/>
-                        </a:rPr>
-                        <a:t>설계해두니</a:t>
-                      </a:r>
-                      <a:r>
-                        <a:rPr sz="1350" dirty="0">
-                          <a:solidFill>
-                            <a:srgbClr val="16213A"/>
-                          </a:solidFill>
-                          <a:latin typeface="맑은 고딕"/>
-                        </a:rPr>
-                        <a:t>, </a:t>
-                      </a:r>
-                      <a:r>
-                        <a:rPr sz="1350" dirty="0" err="1">
-                          <a:solidFill>
-                            <a:srgbClr val="16213A"/>
-                          </a:solidFill>
-                          <a:latin typeface="맑은 고딕"/>
-                        </a:rPr>
-                        <a:t>뒤에</a:t>
-                      </a:r>
-                      <a:r>
-                        <a:rPr sz="1350" dirty="0">
-                          <a:solidFill>
-                            <a:srgbClr val="16213A"/>
-                          </a:solidFill>
-                          <a:latin typeface="맑은 고딕"/>
-                        </a:rPr>
-                        <a:t> </a:t>
-                      </a:r>
-                      <a:r>
-                        <a:rPr sz="1350" dirty="0" err="1">
-                          <a:solidFill>
-                            <a:srgbClr val="16213A"/>
-                          </a:solidFill>
-                          <a:latin typeface="맑은 고딕"/>
-                        </a:rPr>
-                        <a:t>오는</a:t>
-                      </a:r>
-                      <a:r>
-                        <a:rPr sz="1350" dirty="0">
-                          <a:solidFill>
-                            <a:srgbClr val="16213A"/>
-                          </a:solidFill>
-                          <a:latin typeface="맑은 고딕"/>
-                        </a:rPr>
-                        <a:t> </a:t>
-                      </a:r>
-                      <a:r>
-                        <a:rPr sz="1350" dirty="0" err="1">
-                          <a:solidFill>
-                            <a:srgbClr val="16213A"/>
-                          </a:solidFill>
-                          <a:latin typeface="맑은 고딕"/>
-                        </a:rPr>
-                        <a:t>기능들이</a:t>
-                      </a:r>
-                      <a:r>
-                        <a:rPr sz="1350" dirty="0">
-                          <a:solidFill>
-                            <a:srgbClr val="16213A"/>
-                          </a:solidFill>
-                          <a:latin typeface="맑은 고딕"/>
-                        </a:rPr>
-                        <a:t> 그 </a:t>
-                      </a:r>
-                      <a:r>
-                        <a:rPr sz="1350" dirty="0" err="1">
-                          <a:solidFill>
-                            <a:srgbClr val="16213A"/>
-                          </a:solidFill>
-                          <a:latin typeface="맑은 고딕"/>
-                        </a:rPr>
-                        <a:t>위에</a:t>
-                      </a:r>
-                      <a:r>
-                        <a:rPr sz="1350" dirty="0">
-                          <a:solidFill>
-                            <a:srgbClr val="16213A"/>
-                          </a:solidFill>
-                          <a:latin typeface="맑은 고딕"/>
-                        </a:rPr>
-                        <a:t> </a:t>
-                      </a:r>
-                      <a:r>
-                        <a:rPr sz="1350" dirty="0" err="1">
-                          <a:solidFill>
-                            <a:srgbClr val="16213A"/>
-                          </a:solidFill>
-                          <a:latin typeface="맑은 고딕"/>
-                        </a:rPr>
-                        <a:t>안전하게</a:t>
-                      </a:r>
-                      <a:r>
-                        <a:rPr sz="1350" dirty="0">
-                          <a:solidFill>
-                            <a:srgbClr val="16213A"/>
-                          </a:solidFill>
-                          <a:latin typeface="맑은 고딕"/>
-                        </a:rPr>
-                        <a:t> </a:t>
-                      </a:r>
-                      <a:r>
-                        <a:rPr sz="1350" dirty="0" err="1">
-                          <a:solidFill>
-                            <a:srgbClr val="16213A"/>
-                          </a:solidFill>
-                          <a:latin typeface="맑은 고딕"/>
-                        </a:rPr>
-                        <a:t>쌓일</a:t>
-                      </a:r>
-                      <a:r>
-                        <a:rPr sz="1350" dirty="0">
-                          <a:solidFill>
-                            <a:srgbClr val="16213A"/>
-                          </a:solidFill>
-                          <a:latin typeface="맑은 고딕"/>
-                        </a:rPr>
-                        <a:t> 수 </a:t>
-                      </a:r>
-                      <a:r>
-                        <a:rPr sz="1350" dirty="0" err="1">
-                          <a:solidFill>
-                            <a:srgbClr val="16213A"/>
-                          </a:solidFill>
-                          <a:latin typeface="맑은 고딕"/>
-                        </a:rPr>
-                        <a:t>있었다</a:t>
-                      </a:r>
-                      <a:r>
-                        <a:rPr sz="1350" dirty="0">
-                          <a:solidFill>
-                            <a:srgbClr val="16213A"/>
-                          </a:solidFill>
-                          <a:latin typeface="맑은 고딕"/>
-                        </a:rPr>
-                        <a:t>.</a:t>
+                        <a:rPr sz="1350">
+                          <a:solidFill>
+                            <a:srgbClr val="16213A"/>
+                          </a:solidFill>
+                          <a:latin typeface="맑은 고딕"/>
+                        </a:rPr>
+                        <a:t>1일차에 Checker를 먼저 설계해두니, 뒤에 오는 기능들이 그 위에 안전하게 쌓일 수 있었다.</a:t>
                       </a:r>
                     </a:p>
                   </a:txBody>
@@ -7517,6 +8103,45 @@
           </a:graphicData>
         </a:graphic>
       </p:graphicFrame>
+      <p:sp>
+        <p:nvSpPr>
+          <p:cNvPr id="11" name="TextBox 10"/>
+          <p:cNvSpPr txBox="1"/>
+          <p:nvPr/>
+        </p:nvSpPr>
+        <p:spPr>
+          <a:xfrm>
+            <a:off x="502920" y="5806440"/>
+            <a:ext cx="11183112" cy="365760"/>
+          </a:xfrm>
+          <a:prstGeom prst="rect">
+            <a:avLst/>
+          </a:prstGeom>
+          <a:noFill/>
+        </p:spPr>
+        <p:txBody>
+          <a:bodyPr wrap="square" lIns="0" tIns="0" rIns="0" bIns="0" anchor="t">
+            <a:spAutoFit/>
+          </a:bodyPr>
+          <a:lstStyle/>
+          <a:p>
+            <a:pPr algn="l">
+              <a:lnSpc>
+                <a:spcPct val="115000"/>
+              </a:lnSpc>
+            </a:pPr>
+            <a:r>
+              <a:rPr sz="1100" b="0">
+                <a:solidFill>
+                  <a:srgbClr val="5B6B8C"/>
+                </a:solidFill>
+                <a:latin typeface="맑은 고딕"/>
+              </a:rPr>
+              <a:t>* 소감은 초안입니다 — 발표 전 각자의 생각으로 자유롭게 수정하세요.</a:t>
+            </a:r>
+          </a:p>
+        </p:txBody>
+      </p:sp>
     </p:spTree>
   </p:cSld>
   <p:clrMapOvr>
@@ -7873,7 +8498,7 @@
                 </a:solidFill>
                 <a:latin typeface="Consolas"/>
               </a:rPr>
-              <a:t>2 / 11</a:t>
+              <a:t>2 / 14</a:t>
             </a:r>
           </a:p>
         </p:txBody>
@@ -7887,7 +8512,7 @@
           <p:nvPr>
             <p:extLst>
               <p:ext uri="{D42A27DB-BD31-4B8C-83A1-F6EECF244321}">
-                <p14:modId xmlns:p14="http://schemas.microsoft.com/office/powerpoint/2010/main" val="2063800734"/>
+                <p14:modId xmlns:p14="http://schemas.microsoft.com/office/powerpoint/2010/main" val="121209781"/>
               </p:ext>
             </p:extLst>
           </p:nvPr>
@@ -7918,7 +8543,7 @@
                   </a:extLst>
                 </a:gridCol>
               </a:tblGrid>
-              <a:tr h="746760">
+              <a:tr h="640080">
                 <a:tc>
                   <a:txBody>
                     <a:bodyPr/>
@@ -7969,14 +8594,14 @@
                   </a:ext>
                 </a:extLst>
               </a:tr>
-              <a:tr h="746760">
+              <a:tr h="640080">
                 <a:tc>
                   <a:txBody>
                     <a:bodyPr/>
                     <a:lstStyle/>
                     <a:p>
                       <a:r>
-                        <a:rPr sz="1400" b="1">
+                        <a:rPr sz="1350" b="1">
                           <a:solidFill>
                             <a:srgbClr val="142A63"/>
                           </a:solidFill>
@@ -8003,29 +8628,14 @@
                         </a:lnSpc>
                       </a:pPr>
                       <a:r>
-                        <a:rPr lang="ko-KR" altLang="en-US" sz="1400" dirty="0">
-                          <a:solidFill>
-                            <a:srgbClr val="16213A"/>
-                          </a:solidFill>
-                          <a:latin typeface="맑은 고딕"/>
-                        </a:rPr>
-                        <a:t>조원 소개 및 </a:t>
-                      </a:r>
-                      <a:r>
-                        <a:rPr sz="1400" dirty="0" err="1">
-                          <a:solidFill>
-                            <a:srgbClr val="16213A"/>
-                          </a:solidFill>
-                          <a:latin typeface="맑은 고딕"/>
-                        </a:rPr>
-                        <a:t>역할</a:t>
-                      </a:r>
-                      <a:endParaRPr sz="1400" dirty="0">
-                        <a:solidFill>
-                          <a:srgbClr val="16213A"/>
-                        </a:solidFill>
-                        <a:latin typeface="맑은 고딕"/>
-                      </a:endParaRPr>
+                        <a:rPr sz="1350">
+                          <a:solidFill>
+                            <a:srgbClr val="16213A"/>
+                          </a:solidFill>
+                          <a:latin typeface="맑은 고딕"/>
+                        </a:rPr>
+                        <a:t>Bug Hunters 5인, 1일차 최초 구현 → 3~4일차 확장까지 이어진 담당 영역 정리</a:t>
+                      </a:r>
                     </a:p>
                   </a:txBody>
                   <a:tcPr marL="109728" marR="109728" marT="91440" marB="91440">
@@ -8040,21 +8650,54 @@
                   </a:ext>
                 </a:extLst>
               </a:tr>
-              <a:tr h="746760">
+              <a:tr h="640080">
                 <a:tc>
                   <a:txBody>
                     <a:bodyPr/>
                     <a:lstStyle/>
                     <a:p>
                       <a:r>
-                        <a:rPr sz="1400" b="1">
+                        <a:rPr sz="1350" b="1" dirty="0">
                           <a:solidFill>
                             <a:srgbClr val="142A63"/>
                           </a:solidFill>
                           <a:latin typeface="맑은 고딕"/>
                         </a:rPr>
-                        <a:t>02 · 기능 구현 소개</a:t>
-                      </a:r>
+                        <a:t>02 · </a:t>
+                      </a:r>
+                      <a:r>
+                        <a:rPr sz="1350" b="1" dirty="0" err="1">
+                          <a:solidFill>
+                            <a:srgbClr val="142A63"/>
+                          </a:solidFill>
+                          <a:latin typeface="맑은 고딕"/>
+                        </a:rPr>
+                        <a:t>구조</a:t>
+                      </a:r>
+                      <a:r>
+                        <a:rPr sz="1350" b="1" dirty="0">
+                          <a:solidFill>
+                            <a:srgbClr val="142A63"/>
+                          </a:solidFill>
+                          <a:latin typeface="맑은 고딕"/>
+                        </a:rPr>
+                        <a:t> </a:t>
+                      </a:r>
+                      <a:r>
+                        <a:rPr sz="1350" b="1" dirty="0" err="1">
+                          <a:solidFill>
+                            <a:srgbClr val="142A63"/>
+                          </a:solidFill>
+                          <a:latin typeface="맑은 고딕"/>
+                        </a:rPr>
+                        <a:t>설계</a:t>
+                      </a:r>
+                      <a:endParaRPr sz="1350" b="1" dirty="0">
+                        <a:solidFill>
+                          <a:srgbClr val="142A63"/>
+                        </a:solidFill>
+                        <a:latin typeface="맑은 고딕"/>
+                      </a:endParaRPr>
                     </a:p>
                   </a:txBody>
                   <a:tcPr marL="109728" marR="109728" marT="91440" marB="91440">
@@ -8074,13 +8717,13 @@
                         </a:lnSpc>
                       </a:pPr>
                       <a:r>
-                        <a:rPr sz="1400">
-                          <a:solidFill>
-                            <a:srgbClr val="16213A"/>
-                          </a:solidFill>
-                          <a:latin typeface="맑은 고딕"/>
-                        </a:rPr>
-                        <a:t>Assembler·Checker·Executor 파이프라인 구조 + Chapter별 구현 기능 정리</a:t>
+                        <a:rPr sz="1350">
+                          <a:solidFill>
+                            <a:srgbClr val="16213A"/>
+                          </a:solidFill>
+                          <a:latin typeface="맑은 고딕"/>
+                        </a:rPr>
+                        <a:t>Assembler · Checker · Executor 3단 파이프라인을 처음 세운 과정</a:t>
                       </a:r>
                     </a:p>
                   </a:txBody>
@@ -8096,20 +8739,20 @@
                   </a:ext>
                 </a:extLst>
               </a:tr>
-              <a:tr h="746760">
+              <a:tr h="640080">
                 <a:tc>
                   <a:txBody>
                     <a:bodyPr/>
                     <a:lstStyle/>
                     <a:p>
                       <a:r>
-                        <a:rPr sz="1400" b="1">
+                        <a:rPr sz="1350" b="1">
                           <a:solidFill>
                             <a:srgbClr val="142A63"/>
                           </a:solidFill>
                           <a:latin typeface="맑은 고딕"/>
                         </a:rPr>
-                        <a:t>03 · Best Practice 4선</a:t>
+                        <a:t>03 · 기능 구현 소개</a:t>
                       </a:r>
                     </a:p>
                   </a:txBody>
@@ -8130,13 +8773,13 @@
                         </a:lnSpc>
                       </a:pPr>
                       <a:r>
-                        <a:rPr sz="1400">
-                          <a:solidFill>
-                            <a:srgbClr val="16213A"/>
-                          </a:solidFill>
-                          <a:latin typeface="맑은 고딕"/>
-                        </a:rPr>
-                        <a:t>실제 GitHub 리뷰 이력(PR #91/#65/#69/#64) 기준 — 알려진 한계 문서화, 실행 검증, 재현 가능한 코멘트, 설계 이유 기록</a:t>
+                        <a:rPr sz="1350">
+                          <a:solidFill>
+                            <a:srgbClr val="16213A"/>
+                          </a:solidFill>
+                          <a:latin typeface="맑은 고딕"/>
+                        </a:rPr>
+                        <a:t>완성된 파이프라인 구조 + 3~4일차 Chapter별 확장 기능 정리</a:t>
                       </a:r>
                     </a:p>
                   </a:txBody>
@@ -8152,20 +8795,20 @@
                   </a:ext>
                 </a:extLst>
               </a:tr>
-              <a:tr h="746760">
+              <a:tr h="640080">
                 <a:tc>
                   <a:txBody>
                     <a:bodyPr/>
                     <a:lstStyle/>
                     <a:p>
                       <a:r>
-                        <a:rPr sz="1400" b="1">
+                        <a:rPr sz="1350" b="1">
                           <a:solidFill>
                             <a:srgbClr val="142A63"/>
                           </a:solidFill>
                           <a:latin typeface="맑은 고딕"/>
                         </a:rPr>
-                        <a:t>04 · 프로젝트 시연</a:t>
+                        <a:t>04 · Best Practice 6선</a:t>
                       </a:r>
                     </a:p>
                   </a:txBody>
@@ -8186,13 +8829,13 @@
                         </a:lnSpc>
                       </a:pPr>
                       <a:r>
-                        <a:rPr sz="1400">
-                          <a:solidFill>
-                            <a:srgbClr val="16213A"/>
-                          </a:solidFill>
-                          <a:latin typeface="맑은 고딕"/>
-                        </a:rPr>
-                        <a:t>파일 · REPL · 디버그 모드 순서로 기능이 실제로 맞물려 동작하는 모습을 시연</a:t>
+                        <a:rPr sz="1350">
+                          <a:solidFill>
+                            <a:srgbClr val="16213A"/>
+                          </a:solidFill>
+                          <a:latin typeface="맑은 고딕"/>
+                        </a:rPr>
+                        <a:t>실제 GitHub 리뷰 이력(PR #91/#65/#69/#64)과 코드 구조 패턴 기준</a:t>
                       </a:r>
                     </a:p>
                   </a:txBody>
@@ -8208,20 +8851,20 @@
                   </a:ext>
                 </a:extLst>
               </a:tr>
-              <a:tr h="746760">
+              <a:tr h="640080">
                 <a:tc>
                   <a:txBody>
                     <a:bodyPr/>
                     <a:lstStyle/>
                     <a:p>
                       <a:r>
-                        <a:rPr sz="1400" b="1">
+                        <a:rPr sz="1350" b="1">
                           <a:solidFill>
                             <a:srgbClr val="142A63"/>
                           </a:solidFill>
                           <a:latin typeface="맑은 고딕"/>
                         </a:rPr>
-                        <a:t>05 · 소감</a:t>
+                        <a:t>05 · 프로젝트 시연</a:t>
                       </a:r>
                     </a:p>
                   </a:txBody>
@@ -8242,7 +8885,63 @@
                         </a:lnSpc>
                       </a:pPr>
                       <a:r>
-                        <a:rPr sz="1400" dirty="0" err="1">
+                        <a:rPr sz="1350">
+                          <a:solidFill>
+                            <a:srgbClr val="16213A"/>
+                          </a:solidFill>
+                          <a:latin typeface="맑은 고딕"/>
+                        </a:rPr>
+                        <a:t>파일 · REPL · 디버그 모드 순서로 기능이 실제로 맞물려 동작하는 모습을 시연</a:t>
+                      </a:r>
+                    </a:p>
+                  </a:txBody>
+                  <a:tcPr marL="109728" marR="109728" marT="91440" marB="91440">
+                    <a:solidFill>
+                      <a:srgbClr val="FFFFFF"/>
+                    </a:solidFill>
+                  </a:tcPr>
+                </a:tc>
+                <a:extLst>
+                  <a:ext uri="{0D108BD9-81ED-4DB2-BD59-A6C34878D82A}">
+                    <a16:rowId xmlns:a16="http://schemas.microsoft.com/office/drawing/2014/main" val="10005"/>
+                  </a:ext>
+                </a:extLst>
+              </a:tr>
+              <a:tr h="640080">
+                <a:tc>
+                  <a:txBody>
+                    <a:bodyPr/>
+                    <a:lstStyle/>
+                    <a:p>
+                      <a:r>
+                        <a:rPr sz="1350" b="1">
+                          <a:solidFill>
+                            <a:srgbClr val="142A63"/>
+                          </a:solidFill>
+                          <a:latin typeface="맑은 고딕"/>
+                        </a:rPr>
+                        <a:t>06 · 소감</a:t>
+                      </a:r>
+                    </a:p>
+                  </a:txBody>
+                  <a:tcPr marL="109728" marR="109728" marT="91440" marB="91440">
+                    <a:solidFill>
+                      <a:srgbClr val="FFFFFF"/>
+                    </a:solidFill>
+                  </a:tcPr>
+                </a:tc>
+                <a:tc>
+                  <a:txBody>
+                    <a:bodyPr/>
+                    <a:lstStyle/>
+                    <a:p>
+                      <a:pPr>
+                        <a:lnSpc>
+                          <a:spcPct val="115000"/>
+                        </a:lnSpc>
+                      </a:pPr>
+                      <a:r>
+                        <a:rPr sz="1350" dirty="0" err="1">
                           <a:solidFill>
                             <a:srgbClr val="16213A"/>
                           </a:solidFill>
@@ -8251,7 +8950,7 @@
                         <a:t>조원별</a:t>
                       </a:r>
                       <a:r>
-                        <a:rPr sz="1400" dirty="0">
+                        <a:rPr sz="1350" dirty="0">
                           <a:solidFill>
                             <a:srgbClr val="16213A"/>
                           </a:solidFill>
@@ -8260,7 +8959,7 @@
                         <a:t> 한 줄 </a:t>
                       </a:r>
                       <a:r>
-                        <a:rPr sz="1400" dirty="0" err="1">
+                        <a:rPr sz="1350" dirty="0" err="1">
                           <a:solidFill>
                             <a:srgbClr val="16213A"/>
                           </a:solidFill>
@@ -8268,7 +8967,7 @@
                         </a:rPr>
                         <a:t>회고</a:t>
                       </a:r>
-                      <a:endParaRPr sz="1400" dirty="0">
+                      <a:endParaRPr sz="1350" dirty="0">
                         <a:solidFill>
                           <a:srgbClr val="16213A"/>
                         </a:solidFill>
@@ -8284,7 +8983,7 @@
                 </a:tc>
                 <a:extLst>
                   <a:ext uri="{0D108BD9-81ED-4DB2-BD59-A6C34878D82A}">
-                    <a16:rowId xmlns:a16="http://schemas.microsoft.com/office/drawing/2014/main" val="10005"/>
+                    <a16:rowId xmlns:a16="http://schemas.microsoft.com/office/drawing/2014/main" val="10006"/>
                   </a:ext>
                 </a:extLst>
               </a:tr>
@@ -8648,7 +9347,7 @@
                 </a:solidFill>
                 <a:latin typeface="Consolas"/>
               </a:rPr>
-              <a:t>3 / 11</a:t>
+              <a:t>3 / 14</a:t>
             </a:r>
           </a:p>
         </p:txBody>
@@ -8761,14 +9460,14 @@
           <p:nvPr>
             <p:extLst>
               <p:ext uri="{D42A27DB-BD31-4B8C-83A1-F6EECF244321}">
-                <p14:modId xmlns:p14="http://schemas.microsoft.com/office/powerpoint/2010/main" val="11638094"/>
+                <p14:modId xmlns:p14="http://schemas.microsoft.com/office/powerpoint/2010/main" val="1808581566"/>
               </p:ext>
             </p:extLst>
           </p:nvPr>
         </p:nvGraphicFramePr>
         <p:xfrm>
-          <a:off x="502920" y="2286000"/>
-          <a:ext cx="11183111" cy="3566160"/>
+          <a:off x="502920" y="2148840"/>
+          <a:ext cx="11183111" cy="3749039"/>
         </p:xfrm>
         <a:graphic>
           <a:graphicData uri="http://schemas.openxmlformats.org/drawingml/2006/table">
@@ -8777,14 +9476,14 @@
                 <a:tableStyleId>{5C22544A-7EE6-4342-B048-85BDC9FD1C3A}</a:tableStyleId>
               </a:tblPr>
               <a:tblGrid>
-                <a:gridCol w="1789297">
+                <a:gridCol w="1453804">
                   <a:extLst>
                     <a:ext uri="{9D8B030D-6E8A-4147-A177-3AD203B41FA5}">
                       <a16:colId xmlns:a16="http://schemas.microsoft.com/office/drawing/2014/main" val="20000"/>
                     </a:ext>
                   </a:extLst>
                 </a:gridCol>
-                <a:gridCol w="9393814">
+                <a:gridCol w="9729307">
                   <a:extLst>
                     <a:ext uri="{9D8B030D-6E8A-4147-A177-3AD203B41FA5}">
                       <a16:colId xmlns:a16="http://schemas.microsoft.com/office/drawing/2014/main" val="20001"/>
@@ -8792,7 +9491,7 @@
                   </a:extLst>
                 </a:gridCol>
               </a:tblGrid>
-              <a:tr h="594360">
+              <a:tr h="624839">
                 <a:tc>
                   <a:txBody>
                     <a:bodyPr/>
@@ -8821,14 +9520,20 @@
                     <a:lstStyle/>
                     <a:p>
                       <a:r>
-                        <a:rPr sz="1100" b="1">
+                        <a:rPr lang="ko-KR" altLang="en-US" sz="1100" b="1" dirty="0">
                           <a:solidFill>
                             <a:srgbClr val="5B6B8C"/>
                           </a:solidFill>
                           <a:latin typeface="맑은 고딕"/>
                         </a:rPr>
-                        <a:t>담당 역할 (커밋 이력 기준)</a:t>
-                      </a:r>
+                        <a:t>역할</a:t>
+                      </a:r>
+                      <a:endParaRPr sz="1100" b="1" dirty="0">
+                        <a:solidFill>
+                          <a:srgbClr val="5B6B8C"/>
+                        </a:solidFill>
+                        <a:latin typeface="맑은 고딕"/>
+                      </a:endParaRPr>
                     </a:p>
                   </a:txBody>
                   <a:tcPr marL="109728" marR="109728" marT="54864" marB="54864" anchor="b">
@@ -8843,14 +9548,14 @@
                   </a:ext>
                 </a:extLst>
               </a:tr>
-              <a:tr h="594360">
+              <a:tr h="624839">
                 <a:tc>
                   <a:txBody>
                     <a:bodyPr/>
                     <a:lstStyle/>
                     <a:p>
                       <a:r>
-                        <a:rPr lang="ko-KR" altLang="en-US" sz="1350" b="1" dirty="0" err="1">
+                        <a:rPr sz="1300" b="1">
                           <a:solidFill>
                             <a:srgbClr val="142A63"/>
                           </a:solidFill>
@@ -8858,12 +9563,6 @@
                         </a:rPr>
                         <a:t>김병남</a:t>
                       </a:r>
-                      <a:endParaRPr sz="1350" b="1" dirty="0">
-                        <a:solidFill>
-                          <a:srgbClr val="142A63"/>
-                        </a:solidFill>
-                        <a:latin typeface="맑은 고딕"/>
-                      </a:endParaRPr>
                     </a:p>
                   </a:txBody>
                   <a:tcPr marL="109728" marR="109728" marT="91440" marB="91440">
@@ -8883,14 +9582,218 @@
                         </a:lnSpc>
                       </a:pPr>
                       <a:r>
-                        <a:rPr sz="1350">
-                          <a:solidFill>
-                            <a:srgbClr val="16213A"/>
-                          </a:solidFill>
-                          <a:latin typeface="맑은 고딕"/>
-                        </a:rPr>
-                        <a:t>파이프라인 통합 · CLI/REPL 진입점 · import(Ch.6) 기능 · 전체 통합 테스트(fixture) 총괄</a:t>
-                      </a:r>
+                        <a:rPr sz="1300" dirty="0" err="1">
+                          <a:solidFill>
+                            <a:srgbClr val="16213A"/>
+                          </a:solidFill>
+                          <a:latin typeface="맑은 고딕"/>
+                        </a:rPr>
+                        <a:t>프로젝트</a:t>
+                      </a:r>
+                      <a:r>
+                        <a:rPr sz="1300" dirty="0">
+                          <a:solidFill>
+                            <a:srgbClr val="16213A"/>
+                          </a:solidFill>
+                          <a:latin typeface="맑은 고딕"/>
+                        </a:rPr>
+                        <a:t> </a:t>
+                      </a:r>
+                      <a:r>
+                        <a:rPr sz="1300" dirty="0" err="1">
+                          <a:solidFill>
+                            <a:srgbClr val="16213A"/>
+                          </a:solidFill>
+                          <a:latin typeface="맑은 고딕"/>
+                        </a:rPr>
+                        <a:t>초기</a:t>
+                      </a:r>
+                      <a:r>
+                        <a:rPr sz="1300" dirty="0">
+                          <a:solidFill>
+                            <a:srgbClr val="16213A"/>
+                          </a:solidFill>
+                          <a:latin typeface="맑은 고딕"/>
+                        </a:rPr>
+                        <a:t> </a:t>
+                      </a:r>
+                      <a:r>
+                        <a:rPr sz="1300" dirty="0" err="1">
+                          <a:solidFill>
+                            <a:srgbClr val="16213A"/>
+                          </a:solidFill>
+                          <a:latin typeface="맑은 고딕"/>
+                        </a:rPr>
+                        <a:t>설정</a:t>
+                      </a:r>
+                      <a:r>
+                        <a:rPr sz="1300" dirty="0">
+                          <a:solidFill>
+                            <a:srgbClr val="16213A"/>
+                          </a:solidFill>
+                          <a:latin typeface="맑은 고딕"/>
+                        </a:rPr>
+                        <a:t> · CI/</a:t>
+                      </a:r>
+                      <a:r>
+                        <a:rPr sz="1300" dirty="0" err="1">
+                          <a:solidFill>
+                            <a:srgbClr val="16213A"/>
+                          </a:solidFill>
+                          <a:latin typeface="맑은 고딕"/>
+                        </a:rPr>
+                        <a:t>커버리지</a:t>
+                      </a:r>
+                      <a:r>
+                        <a:rPr sz="1300" dirty="0">
+                          <a:solidFill>
+                            <a:srgbClr val="16213A"/>
+                          </a:solidFill>
+                          <a:latin typeface="맑은 고딕"/>
+                        </a:rPr>
+                        <a:t> </a:t>
+                      </a:r>
+                      <a:r>
+                        <a:rPr sz="1300" dirty="0" err="1">
+                          <a:solidFill>
+                            <a:srgbClr val="16213A"/>
+                          </a:solidFill>
+                          <a:latin typeface="맑은 고딕"/>
+                        </a:rPr>
+                        <a:t>파이프라인</a:t>
+                      </a:r>
+                      <a:r>
+                        <a:rPr sz="1300" dirty="0">
+                          <a:solidFill>
+                            <a:srgbClr val="16213A"/>
+                          </a:solidFill>
+                          <a:latin typeface="맑은 고딕"/>
+                        </a:rPr>
+                        <a:t> · </a:t>
+                      </a:r>
+                      <a:r>
+                        <a:rPr sz="1300" dirty="0" err="1">
+                          <a:solidFill>
+                            <a:srgbClr val="16213A"/>
+                          </a:solidFill>
+                          <a:latin typeface="맑은 고딕"/>
+                        </a:rPr>
+                        <a:t>브랜치</a:t>
+                      </a:r>
+                      <a:r>
+                        <a:rPr sz="1300" dirty="0">
+                          <a:solidFill>
+                            <a:srgbClr val="16213A"/>
+                          </a:solidFill>
+                          <a:latin typeface="맑은 고딕"/>
+                        </a:rPr>
+                        <a:t> </a:t>
+                      </a:r>
+                      <a:r>
+                        <a:rPr sz="1300" dirty="0" err="1">
+                          <a:solidFill>
+                            <a:srgbClr val="16213A"/>
+                          </a:solidFill>
+                          <a:latin typeface="맑은 고딕"/>
+                        </a:rPr>
+                        <a:t>컨벤션</a:t>
+                      </a:r>
+                      <a:r>
+                        <a:rPr sz="1300" dirty="0">
+                          <a:solidFill>
+                            <a:srgbClr val="16213A"/>
+                          </a:solidFill>
+                          <a:latin typeface="맑은 고딕"/>
+                        </a:rPr>
+                        <a:t>  →  CLI/REPL </a:t>
+                      </a:r>
+                      <a:r>
+                        <a:rPr sz="1300" dirty="0" err="1">
+                          <a:solidFill>
+                            <a:srgbClr val="16213A"/>
+                          </a:solidFill>
+                          <a:latin typeface="맑은 고딕"/>
+                        </a:rPr>
+                        <a:t>통합</a:t>
+                      </a:r>
+                      <a:r>
+                        <a:rPr sz="1300" dirty="0">
+                          <a:solidFill>
+                            <a:srgbClr val="16213A"/>
+                          </a:solidFill>
+                          <a:latin typeface="맑은 고딕"/>
+                        </a:rPr>
+                        <a:t> · import(Ch.6) · </a:t>
+                      </a:r>
+                      <a:r>
+                        <a:rPr sz="1300" dirty="0" err="1">
+                          <a:solidFill>
+                            <a:srgbClr val="16213A"/>
+                          </a:solidFill>
+                          <a:latin typeface="맑은 고딕"/>
+                        </a:rPr>
+                        <a:t>전체</a:t>
+                      </a:r>
+                      <a:r>
+                        <a:rPr sz="1300" dirty="0">
+                          <a:solidFill>
+                            <a:srgbClr val="16213A"/>
+                          </a:solidFill>
+                          <a:latin typeface="맑은 고딕"/>
+                        </a:rPr>
+                        <a:t> </a:t>
+                      </a:r>
+                      <a:r>
+                        <a:rPr sz="1300" dirty="0" err="1">
+                          <a:solidFill>
+                            <a:srgbClr val="16213A"/>
+                          </a:solidFill>
+                          <a:latin typeface="맑은 고딕"/>
+                        </a:rPr>
+                        <a:t>통합</a:t>
+                      </a:r>
+                      <a:r>
+                        <a:rPr sz="1300" dirty="0">
+                          <a:solidFill>
+                            <a:srgbClr val="16213A"/>
+                          </a:solidFill>
+                          <a:latin typeface="맑은 고딕"/>
+                        </a:rPr>
+                        <a:t> </a:t>
+                      </a:r>
+                      <a:r>
+                        <a:rPr sz="1300" dirty="0" err="1">
+                          <a:solidFill>
+                            <a:srgbClr val="16213A"/>
+                          </a:solidFill>
+                          <a:latin typeface="맑은 고딕"/>
+                        </a:rPr>
+                        <a:t>테스트</a:t>
+                      </a:r>
+                      <a:r>
+                        <a:rPr sz="1300" dirty="0">
+                          <a:solidFill>
+                            <a:srgbClr val="16213A"/>
+                          </a:solidFill>
+                          <a:latin typeface="맑은 고딕"/>
+                        </a:rPr>
+                        <a:t> </a:t>
+                      </a:r>
+                      <a:r>
+                        <a:rPr sz="1300" dirty="0" err="1">
+                          <a:solidFill>
+                            <a:srgbClr val="16213A"/>
+                          </a:solidFill>
+                          <a:latin typeface="맑은 고딕"/>
+                        </a:rPr>
+                        <a:t>총괄</a:t>
+                      </a:r>
+                      <a:endParaRPr sz="1300" dirty="0">
+                        <a:solidFill>
+                          <a:srgbClr val="16213A"/>
+                        </a:solidFill>
+                        <a:latin typeface="맑은 고딕"/>
+                      </a:endParaRPr>
                     </a:p>
                   </a:txBody>
                   <a:tcPr marL="109728" marR="109728" marT="91440" marB="91440">
@@ -8905,14 +9808,14 @@
                   </a:ext>
                 </a:extLst>
               </a:tr>
-              <a:tr h="594360">
+              <a:tr h="624839">
                 <a:tc>
                   <a:txBody>
                     <a:bodyPr/>
                     <a:lstStyle/>
                     <a:p>
                       <a:r>
-                        <a:rPr lang="ko-KR" altLang="en-US" sz="1350" b="1" dirty="0" err="1">
+                        <a:rPr sz="1300" b="1">
                           <a:solidFill>
                             <a:srgbClr val="142A63"/>
                           </a:solidFill>
@@ -8920,12 +9823,6 @@
                         </a:rPr>
                         <a:t>조승주</a:t>
                       </a:r>
-                      <a:endParaRPr sz="1350" b="1" dirty="0">
-                        <a:solidFill>
-                          <a:srgbClr val="142A63"/>
-                        </a:solidFill>
-                        <a:latin typeface="맑은 고딕"/>
-                      </a:endParaRPr>
                     </a:p>
                   </a:txBody>
                   <a:tcPr marL="109728" marR="109728" marT="91440" marB="91440">
@@ -8945,13 +9842,13 @@
                         </a:lnSpc>
                       </a:pPr>
                       <a:r>
-                        <a:rPr sz="1350">
-                          <a:solidFill>
-                            <a:srgbClr val="16213A"/>
-                          </a:solidFill>
-                          <a:latin typeface="맑은 고딕"/>
-                        </a:rPr>
-                        <a:t>토크나이저 &amp; 한글 키워드 매핑 · 디버그 모드(Ch.7 공장 제어 쉘) 구현</a:t>
+                        <a:rPr sz="1300">
+                          <a:solidFill>
+                            <a:srgbClr val="16213A"/>
+                          </a:solidFill>
+                          <a:latin typeface="맑은 고딕"/>
+                        </a:rPr>
+                        <a:t>Tokenizer/Token 구현 · Statement Parser 초안  →  디버그 모드(Ch.7 공장 제어 쉘) 구현</a:t>
                       </a:r>
                     </a:p>
                   </a:txBody>
@@ -8967,14 +9864,14 @@
                   </a:ext>
                 </a:extLst>
               </a:tr>
-              <a:tr h="594360">
+              <a:tr h="624839">
                 <a:tc>
                   <a:txBody>
                     <a:bodyPr/>
                     <a:lstStyle/>
                     <a:p>
                       <a:r>
-                        <a:rPr lang="ko-KR" altLang="en-US" sz="1350" b="1" dirty="0" err="1">
+                        <a:rPr sz="1300" b="1">
                           <a:solidFill>
                             <a:srgbClr val="142A63"/>
                           </a:solidFill>
@@ -8982,12 +9879,6 @@
                         </a:rPr>
                         <a:t>이하섭</a:t>
                       </a:r>
-                      <a:endParaRPr sz="1350" b="1" dirty="0">
-                        <a:solidFill>
-                          <a:srgbClr val="142A63"/>
-                        </a:solidFill>
-                        <a:latin typeface="맑은 고딕"/>
-                      </a:endParaRPr>
                     </a:p>
                   </a:txBody>
                   <a:tcPr marL="109728" marR="109728" marT="91440" marB="91440">
@@ -9007,13 +9898,13 @@
                         </a:lnSpc>
                       </a:pPr>
                       <a:r>
-                        <a:rPr sz="1350">
-                          <a:solidFill>
-                            <a:srgbClr val="16213A"/>
-                          </a:solidFill>
-                          <a:latin typeface="맑은 고딕"/>
-                        </a:rPr>
-                        <a:t>클래스(Ch.3) 기능 전체 구현(선언·필드·메서드·상속·instanceof) · Executor Unit 리팩토링</a:t>
+                        <a:rPr sz="1300">
+                          <a:solidFill>
+                            <a:srgbClr val="16213A"/>
+                          </a:solidFill>
+                          <a:latin typeface="맑은 고딕"/>
+                        </a:rPr>
+                        <a:t>테스트케이스 작성 · Executor Unit 최초 구현  →  클래스(Ch.3) 기능 전체 구현 · Executor 리팩토링</a:t>
                       </a:r>
                     </a:p>
                   </a:txBody>
@@ -9029,14 +9920,14 @@
                   </a:ext>
                 </a:extLst>
               </a:tr>
-              <a:tr h="594360">
+              <a:tr h="624839">
                 <a:tc>
                   <a:txBody>
                     <a:bodyPr/>
                     <a:lstStyle/>
                     <a:p>
                       <a:r>
-                        <a:rPr lang="ko-KR" altLang="en-US" sz="1350" b="1" dirty="0">
+                        <a:rPr sz="1300" b="1">
                           <a:solidFill>
                             <a:srgbClr val="142A63"/>
                           </a:solidFill>
@@ -9044,12 +9935,6 @@
                         </a:rPr>
                         <a:t>최현준</a:t>
                       </a:r>
-                      <a:endParaRPr sz="1350" b="1" dirty="0">
-                        <a:solidFill>
-                          <a:srgbClr val="142A63"/>
-                        </a:solidFill>
-                        <a:latin typeface="맑은 고딕"/>
-                      </a:endParaRPr>
                     </a:p>
                   </a:txBody>
                   <a:tcPr marL="109728" marR="109728" marT="91440" marB="91440">
@@ -9069,13 +9954,13 @@
                         </a:lnSpc>
                       </a:pPr>
                       <a:r>
-                        <a:rPr sz="1350">
-                          <a:solidFill>
-                            <a:srgbClr val="16213A"/>
-                          </a:solidFill>
-                          <a:latin typeface="맑은 고딕"/>
-                        </a:rPr>
-                        <a:t>정적 배열(Ch.4) 구현 · 실행 전 최적화(Ch.5, Resolver/Optimizer) · 문법·타입힌트 리팩토링</a:t>
+                        <a:rPr sz="1300">
+                          <a:solidFill>
+                            <a:srgbClr val="16213A"/>
+                          </a:solidFill>
+                          <a:latin typeface="맑은 고딕"/>
+                        </a:rPr>
+                        <a:t>Assembler Unit · Expression Parser 구현  →  정적 배열(Ch.4) · 실행 전 최적화(Ch.5) · 문법 리팩토링</a:t>
                       </a:r>
                     </a:p>
                   </a:txBody>
@@ -9091,14 +9976,14 @@
                   </a:ext>
                 </a:extLst>
               </a:tr>
-              <a:tr h="594360">
+              <a:tr h="624844">
                 <a:tc>
                   <a:txBody>
                     <a:bodyPr/>
                     <a:lstStyle/>
                     <a:p>
                       <a:r>
-                        <a:rPr lang="ko-KR" altLang="en-US" sz="1350" b="1" dirty="0">
+                        <a:rPr sz="1300" b="1">
                           <a:solidFill>
                             <a:srgbClr val="142A63"/>
                           </a:solidFill>
@@ -9106,12 +9991,6 @@
                         </a:rPr>
                         <a:t>이준원</a:t>
                       </a:r>
-                      <a:endParaRPr sz="1350" b="1" dirty="0">
-                        <a:solidFill>
-                          <a:srgbClr val="142A63"/>
-                        </a:solidFill>
-                        <a:latin typeface="맑은 고딕"/>
-                      </a:endParaRPr>
                     </a:p>
                   </a:txBody>
                   <a:tcPr marL="109728" marR="109728" marT="91440" marB="91440">
@@ -9131,16 +10010,124 @@
                         </a:lnSpc>
                       </a:pPr>
                       <a:r>
-                        <a:rPr sz="1350" dirty="0">
-                          <a:solidFill>
-                            <a:srgbClr val="16213A"/>
-                          </a:solidFill>
-                          <a:latin typeface="맑은 고딕"/>
-                        </a:rPr>
-                        <a:t>Checker Unit </a:t>
-                      </a:r>
-                      <a:r>
-                        <a:rPr sz="1350" dirty="0" err="1">
+                        <a:rPr sz="1300" dirty="0">
+                          <a:solidFill>
+                            <a:srgbClr val="16213A"/>
+                          </a:solidFill>
+                          <a:latin typeface="맑은 고딕"/>
+                        </a:rPr>
+                        <a:t>AST </a:t>
+                      </a:r>
+                      <a:r>
+                        <a:rPr sz="1300" dirty="0" err="1">
+                          <a:solidFill>
+                            <a:srgbClr val="16213A"/>
+                          </a:solidFill>
+                          <a:latin typeface="맑은 고딕"/>
+                        </a:rPr>
+                        <a:t>노드</a:t>
+                      </a:r>
+                      <a:r>
+                        <a:rPr sz="1300" dirty="0">
+                          <a:solidFill>
+                            <a:srgbClr val="16213A"/>
+                          </a:solidFill>
+                          <a:latin typeface="맑은 고딕"/>
+                        </a:rPr>
+                        <a:t> </a:t>
+                      </a:r>
+                      <a:r>
+                        <a:rPr sz="1300" dirty="0" err="1">
+                          <a:solidFill>
+                            <a:srgbClr val="16213A"/>
+                          </a:solidFill>
+                          <a:latin typeface="맑은 고딕"/>
+                        </a:rPr>
+                        <a:t>인터페이스</a:t>
+                      </a:r>
+                      <a:r>
+                        <a:rPr sz="1300" dirty="0">
+                          <a:solidFill>
+                            <a:srgbClr val="16213A"/>
+                          </a:solidFill>
+                          <a:latin typeface="맑은 고딕"/>
+                        </a:rPr>
+                        <a:t> · Checker Unit </a:t>
+                      </a:r>
+                      <a:r>
+                        <a:rPr sz="1300" dirty="0" err="1">
+                          <a:solidFill>
+                            <a:srgbClr val="16213A"/>
+                          </a:solidFill>
+                          <a:latin typeface="맑은 고딕"/>
+                        </a:rPr>
+                        <a:t>최초</a:t>
+                      </a:r>
+                      <a:r>
+                        <a:rPr sz="1300" dirty="0">
+                          <a:solidFill>
+                            <a:srgbClr val="16213A"/>
+                          </a:solidFill>
+                          <a:latin typeface="맑은 고딕"/>
+                        </a:rPr>
+                        <a:t> </a:t>
+                      </a:r>
+                      <a:r>
+                        <a:rPr sz="1300" dirty="0" err="1">
+                          <a:solidFill>
+                            <a:srgbClr val="16213A"/>
+                          </a:solidFill>
+                          <a:latin typeface="맑은 고딕"/>
+                        </a:rPr>
+                        <a:t>구현</a:t>
+                      </a:r>
+                      <a:r>
+                        <a:rPr sz="1300" dirty="0">
+                          <a:solidFill>
+                            <a:srgbClr val="16213A"/>
+                          </a:solidFill>
+                          <a:latin typeface="맑은 고딕"/>
+                        </a:rPr>
+                        <a:t>  →  </a:t>
+                      </a:r>
+                      <a:r>
+                        <a:rPr sz="1300" dirty="0" err="1">
+                          <a:solidFill>
+                            <a:srgbClr val="16213A"/>
+                          </a:solidFill>
+                          <a:latin typeface="맑은 고딕"/>
+                        </a:rPr>
+                        <a:t>함수</a:t>
+                      </a:r>
+                      <a:r>
+                        <a:rPr sz="1300" dirty="0">
+                          <a:solidFill>
+                            <a:srgbClr val="16213A"/>
+                          </a:solidFill>
+                          <a:latin typeface="맑은 고딕"/>
+                        </a:rPr>
+                        <a:t>(Ch.2) </a:t>
+                      </a:r>
+                      <a:r>
+                        <a:rPr sz="1300" dirty="0" err="1">
+                          <a:solidFill>
+                            <a:srgbClr val="16213A"/>
+                          </a:solidFill>
+                          <a:latin typeface="맑은 고딕"/>
+                        </a:rPr>
+                        <a:t>기능</a:t>
+                      </a:r>
+                      <a:r>
+                        <a:rPr sz="1300" dirty="0">
+                          <a:solidFill>
+                            <a:srgbClr val="16213A"/>
+                          </a:solidFill>
+                          <a:latin typeface="맑은 고딕"/>
+                        </a:rPr>
+                        <a:t> </a:t>
+                      </a:r>
+                      <a:r>
+                        <a:rPr sz="1300" dirty="0" err="1">
                           <a:solidFill>
                             <a:srgbClr val="16213A"/>
                           </a:solidFill>
@@ -9149,7 +10136,7 @@
                         <a:t>초기</a:t>
                       </a:r>
                       <a:r>
-                        <a:rPr sz="1350" dirty="0">
+                        <a:rPr sz="1300" dirty="0">
                           <a:solidFill>
                             <a:srgbClr val="16213A"/>
                           </a:solidFill>
@@ -9158,34 +10145,34 @@
                         <a:t> </a:t>
                       </a:r>
                       <a:r>
-                        <a:rPr sz="1350" dirty="0" err="1">
-                          <a:solidFill>
-                            <a:srgbClr val="16213A"/>
-                          </a:solidFill>
-                          <a:latin typeface="맑은 고딕"/>
-                        </a:rPr>
-                        <a:t>설계</a:t>
-                      </a:r>
-                      <a:r>
-                        <a:rPr sz="1350" dirty="0">
-                          <a:solidFill>
-                            <a:srgbClr val="16213A"/>
-                          </a:solidFill>
-                          <a:latin typeface="맑은 고딕"/>
-                        </a:rPr>
-                        <a:t>(</a:t>
-                      </a:r>
-                      <a:r>
-                        <a:rPr sz="1350" dirty="0" err="1">
-                          <a:solidFill>
-                            <a:srgbClr val="16213A"/>
-                          </a:solidFill>
-                          <a:latin typeface="맑은 고딕"/>
-                        </a:rPr>
-                        <a:t>변수</a:t>
-                      </a:r>
-                      <a:r>
-                        <a:rPr sz="1350" dirty="0">
+                        <a:rPr sz="1300" dirty="0" err="1">
+                          <a:solidFill>
+                            <a:srgbClr val="16213A"/>
+                          </a:solidFill>
+                          <a:latin typeface="맑은 고딕"/>
+                        </a:rPr>
+                        <a:t>구현</a:t>
+                      </a:r>
+                      <a:r>
+                        <a:rPr sz="1300" dirty="0">
+                          <a:solidFill>
+                            <a:srgbClr val="16213A"/>
+                          </a:solidFill>
+                          <a:latin typeface="맑은 고딕"/>
+                        </a:rPr>
+                        <a:t> · </a:t>
+                      </a:r>
+                      <a:r>
+                        <a:rPr sz="1300" dirty="0" err="1">
+                          <a:solidFill>
+                            <a:srgbClr val="16213A"/>
+                          </a:solidFill>
+                          <a:latin typeface="맑은 고딕"/>
+                        </a:rPr>
+                        <a:t>에러</a:t>
+                      </a:r>
+                      <a:r>
+                        <a:rPr sz="1300" dirty="0">
                           <a:solidFill>
                             <a:srgbClr val="16213A"/>
                           </a:solidFill>
@@ -9194,16 +10181,16 @@
                         <a:t> </a:t>
                       </a:r>
                       <a:r>
-                        <a:rPr sz="1350" dirty="0" err="1">
-                          <a:solidFill>
-                            <a:srgbClr val="16213A"/>
-                          </a:solidFill>
-                          <a:latin typeface="맑은 고딕"/>
-                        </a:rPr>
-                        <a:t>스코프·에러</a:t>
-                      </a:r>
-                      <a:r>
-                        <a:rPr sz="1350" dirty="0">
+                        <a:rPr sz="1300" dirty="0" err="1">
+                          <a:solidFill>
+                            <a:srgbClr val="16213A"/>
+                          </a:solidFill>
+                          <a:latin typeface="맑은 고딕"/>
+                        </a:rPr>
+                        <a:t>모듈</a:t>
+                      </a:r>
+                      <a:r>
+                        <a:rPr sz="1300" dirty="0">
                           <a:solidFill>
                             <a:srgbClr val="16213A"/>
                           </a:solidFill>
@@ -9212,61 +10199,7 @@
                         <a:t> </a:t>
                       </a:r>
                       <a:r>
-                        <a:rPr sz="1350" dirty="0" err="1">
-                          <a:solidFill>
-                            <a:srgbClr val="16213A"/>
-                          </a:solidFill>
-                          <a:latin typeface="맑은 고딕"/>
-                        </a:rPr>
-                        <a:t>검출</a:t>
-                      </a:r>
-                      <a:r>
-                        <a:rPr sz="1350" dirty="0">
-                          <a:solidFill>
-                            <a:srgbClr val="16213A"/>
-                          </a:solidFill>
-                          <a:latin typeface="맑은 고딕"/>
-                        </a:rPr>
-                        <a:t>) · </a:t>
-                      </a:r>
-                      <a:r>
-                        <a:rPr sz="1350" dirty="0" err="1">
-                          <a:solidFill>
-                            <a:srgbClr val="16213A"/>
-                          </a:solidFill>
-                          <a:latin typeface="맑은 고딕"/>
-                        </a:rPr>
-                        <a:t>에러</a:t>
-                      </a:r>
-                      <a:r>
-                        <a:rPr sz="1350" dirty="0">
-                          <a:solidFill>
-                            <a:srgbClr val="16213A"/>
-                          </a:solidFill>
-                          <a:latin typeface="맑은 고딕"/>
-                        </a:rPr>
-                        <a:t> </a:t>
-                      </a:r>
-                      <a:r>
-                        <a:rPr sz="1350" dirty="0" err="1">
-                          <a:solidFill>
-                            <a:srgbClr val="16213A"/>
-                          </a:solidFill>
-                          <a:latin typeface="맑은 고딕"/>
-                        </a:rPr>
-                        <a:t>모듈</a:t>
-                      </a:r>
-                      <a:r>
-                        <a:rPr sz="1350" dirty="0">
-                          <a:solidFill>
-                            <a:srgbClr val="16213A"/>
-                          </a:solidFill>
-                          <a:latin typeface="맑은 고딕"/>
-                        </a:rPr>
-                        <a:t> </a:t>
-                      </a:r>
-                      <a:r>
-                        <a:rPr sz="1350" dirty="0" err="1">
+                        <a:rPr sz="1300" dirty="0" err="1">
                           <a:solidFill>
                             <a:srgbClr val="16213A"/>
                           </a:solidFill>
@@ -9274,79 +10207,7 @@
                         </a:rPr>
                         <a:t>통합</a:t>
                       </a:r>
-                      <a:r>
-                        <a:rPr sz="1350" dirty="0">
-                          <a:solidFill>
-                            <a:srgbClr val="16213A"/>
-                          </a:solidFill>
-                          <a:latin typeface="맑은 고딕"/>
-                        </a:rPr>
-                        <a:t> · </a:t>
-                      </a:r>
-                      <a:r>
-                        <a:rPr sz="1350" dirty="0" err="1">
-                          <a:solidFill>
-                            <a:srgbClr val="16213A"/>
-                          </a:solidFill>
-                          <a:latin typeface="맑은 고딕"/>
-                        </a:rPr>
-                        <a:t>함수</a:t>
-                      </a:r>
-                      <a:r>
-                        <a:rPr sz="1350" dirty="0">
-                          <a:solidFill>
-                            <a:srgbClr val="16213A"/>
-                          </a:solidFill>
-                          <a:latin typeface="맑은 고딕"/>
-                        </a:rPr>
-                        <a:t>(Ch.2) </a:t>
-                      </a:r>
-                      <a:r>
-                        <a:rPr sz="1350" dirty="0" err="1">
-                          <a:solidFill>
-                            <a:srgbClr val="16213A"/>
-                          </a:solidFill>
-                          <a:latin typeface="맑은 고딕"/>
-                        </a:rPr>
-                        <a:t>기능</a:t>
-                      </a:r>
-                      <a:r>
-                        <a:rPr sz="1350" dirty="0">
-                          <a:solidFill>
-                            <a:srgbClr val="16213A"/>
-                          </a:solidFill>
-                          <a:latin typeface="맑은 고딕"/>
-                        </a:rPr>
-                        <a:t> </a:t>
-                      </a:r>
-                      <a:r>
-                        <a:rPr sz="1350" dirty="0" err="1">
-                          <a:solidFill>
-                            <a:srgbClr val="16213A"/>
-                          </a:solidFill>
-                          <a:latin typeface="맑은 고딕"/>
-                        </a:rPr>
-                        <a:t>초기</a:t>
-                      </a:r>
-                      <a:r>
-                        <a:rPr sz="1350" dirty="0">
-                          <a:solidFill>
-                            <a:srgbClr val="16213A"/>
-                          </a:solidFill>
-                          <a:latin typeface="맑은 고딕"/>
-                        </a:rPr>
-                        <a:t> </a:t>
-                      </a:r>
-                      <a:r>
-                        <a:rPr sz="1350" dirty="0" err="1">
-                          <a:solidFill>
-                            <a:srgbClr val="16213A"/>
-                          </a:solidFill>
-                          <a:latin typeface="맑은 고딕"/>
-                        </a:rPr>
-                        <a:t>구현</a:t>
-                      </a:r>
-                      <a:endParaRPr sz="1350" dirty="0">
+                      <a:endParaRPr sz="1300" dirty="0">
                         <a:solidFill>
                           <a:srgbClr val="16213A"/>
                         </a:solidFill>
@@ -9548,8 +10409,8 @@
         </p:nvSpPr>
         <p:spPr>
           <a:xfrm>
-            <a:off x="1234440" y="256032"/>
-            <a:ext cx="7863840" cy="548640"/>
+            <a:off x="1234440" y="353604"/>
+            <a:ext cx="7863840" cy="353495"/>
           </a:xfrm>
           <a:prstGeom prst="rect">
             <a:avLst/>
@@ -9568,14 +10429,20 @@
               </a:lnSpc>
             </a:pPr>
             <a:r>
-              <a:rPr sz="2200" b="1">
+              <a:rPr lang="ko-KR" altLang="en-US" sz="2200" b="1" dirty="0">
                 <a:solidFill>
                   <a:srgbClr val="FFFFFF"/>
                 </a:solidFill>
                 <a:latin typeface="맑은 고딕"/>
               </a:rPr>
-              <a:t>인터프리터 파이프라인 구조</a:t>
-            </a:r>
+              <a:t>구조 설계</a:t>
+            </a:r>
+            <a:endParaRPr sz="2200" b="1" dirty="0">
+              <a:solidFill>
+                <a:srgbClr val="FFFFFF"/>
+              </a:solidFill>
+              <a:latin typeface="맑은 고딕"/>
+            </a:endParaRPr>
           </a:p>
         </p:txBody>
       </p:sp>
@@ -9613,7 +10480,7 @@
                 </a:solidFill>
                 <a:latin typeface="맑은 고딕"/>
               </a:rPr>
-              <a:t>Architecture</a:t>
+              <a:t>Day 1 · Foundation</a:t>
             </a:r>
           </a:p>
         </p:txBody>
@@ -9726,7 +10593,7 @@
                 </a:solidFill>
                 <a:latin typeface="Consolas"/>
               </a:rPr>
-              <a:t>4 / 11</a:t>
+              <a:t>4 / 14</a:t>
             </a:r>
           </a:p>
         </p:txBody>
@@ -9784,6 +10651,1559 @@
         </p:nvSpPr>
         <p:spPr>
           <a:xfrm>
+            <a:off x="713232" y="1558604"/>
+            <a:ext cx="10789920" cy="302647"/>
+          </a:xfrm>
+          <a:prstGeom prst="rect">
+            <a:avLst/>
+          </a:prstGeom>
+          <a:noFill/>
+        </p:spPr>
+        <p:txBody>
+          <a:bodyPr wrap="square" lIns="0" tIns="0" rIns="0" bIns="0" anchor="ctr">
+            <a:spAutoFit/>
+          </a:bodyPr>
+          <a:lstStyle/>
+          <a:p>
+            <a:pPr algn="l">
+              <a:lnSpc>
+                <a:spcPct val="130000"/>
+              </a:lnSpc>
+            </a:pPr>
+            <a:r>
+              <a:rPr sz="1700" b="1" dirty="0">
+                <a:solidFill>
+                  <a:srgbClr val="16213A"/>
+                </a:solidFill>
+                <a:latin typeface="맑은 고딕"/>
+              </a:rPr>
+              <a:t>Assembler · Checker · Executor</a:t>
+            </a:r>
+            <a:r>
+              <a:rPr lang="en-US" sz="1700" b="1" dirty="0">
+                <a:solidFill>
+                  <a:srgbClr val="16213A"/>
+                </a:solidFill>
+                <a:latin typeface="맑은 고딕"/>
+              </a:rPr>
+              <a:t> Unit </a:t>
+            </a:r>
+            <a:r>
+              <a:rPr lang="ko-KR" altLang="en-US" sz="1700" b="1" dirty="0">
+                <a:solidFill>
+                  <a:srgbClr val="16213A"/>
+                </a:solidFill>
+                <a:latin typeface="맑은 고딕"/>
+              </a:rPr>
+              <a:t>구조 설계</a:t>
+            </a:r>
+            <a:endParaRPr sz="1700" b="1" dirty="0">
+              <a:solidFill>
+                <a:srgbClr val="16213A"/>
+              </a:solidFill>
+              <a:latin typeface="맑은 고딕"/>
+            </a:endParaRPr>
+          </a:p>
+        </p:txBody>
+      </p:sp>
+      <p:graphicFrame>
+        <p:nvGraphicFramePr>
+          <p:cNvPr id="12" name="Table 11"/>
+          <p:cNvGraphicFramePr>
+            <a:graphicFrameLocks noGrp="1"/>
+          </p:cNvGraphicFramePr>
+          <p:nvPr>
+            <p:extLst>
+              <p:ext uri="{D42A27DB-BD31-4B8C-83A1-F6EECF244321}">
+                <p14:modId xmlns:p14="http://schemas.microsoft.com/office/powerpoint/2010/main" val="372181246"/>
+              </p:ext>
+            </p:extLst>
+          </p:nvPr>
+        </p:nvGraphicFramePr>
+        <p:xfrm>
+          <a:off x="502920" y="2286000"/>
+          <a:ext cx="11183111" cy="3566160"/>
+        </p:xfrm>
+        <a:graphic>
+          <a:graphicData uri="http://schemas.openxmlformats.org/drawingml/2006/table">
+            <a:tbl>
+              <a:tblPr>
+                <a:tableStyleId>{5C22544A-7EE6-4342-B048-85BDC9FD1C3A}</a:tableStyleId>
+              </a:tblPr>
+              <a:tblGrid>
+                <a:gridCol w="2236622">
+                  <a:extLst>
+                    <a:ext uri="{9D8B030D-6E8A-4147-A177-3AD203B41FA5}">
+                      <a16:colId xmlns:a16="http://schemas.microsoft.com/office/drawing/2014/main" val="20000"/>
+                    </a:ext>
+                  </a:extLst>
+                </a:gridCol>
+                <a:gridCol w="8946489">
+                  <a:extLst>
+                    <a:ext uri="{9D8B030D-6E8A-4147-A177-3AD203B41FA5}">
+                      <a16:colId xmlns:a16="http://schemas.microsoft.com/office/drawing/2014/main" val="20001"/>
+                    </a:ext>
+                  </a:extLst>
+                </a:gridCol>
+              </a:tblGrid>
+              <a:tr h="713232">
+                <a:tc>
+                  <a:txBody>
+                    <a:bodyPr/>
+                    <a:lstStyle/>
+                    <a:p>
+                      <a:r>
+                        <a:rPr sz="1100" b="1">
+                          <a:solidFill>
+                            <a:srgbClr val="5B6B8C"/>
+                          </a:solidFill>
+                          <a:latin typeface="맑은 고딕"/>
+                        </a:rPr>
+                        <a:t>Unit</a:t>
+                      </a:r>
+                    </a:p>
+                  </a:txBody>
+                  <a:tcPr marL="109728" marR="109728" marT="54864" marB="54864" anchor="b">
+                    <a:solidFill>
+                      <a:srgbClr val="FFFFFF"/>
+                    </a:solidFill>
+                  </a:tcPr>
+                </a:tc>
+                <a:tc>
+                  <a:txBody>
+                    <a:bodyPr/>
+                    <a:lstStyle/>
+                    <a:p>
+                      <a:r>
+                        <a:rPr sz="1100" b="1">
+                          <a:solidFill>
+                            <a:srgbClr val="5B6B8C"/>
+                          </a:solidFill>
+                          <a:latin typeface="맑은 고딕"/>
+                        </a:rPr>
+                        <a:t>1일차 최초 구현 내용</a:t>
+                      </a:r>
+                    </a:p>
+                  </a:txBody>
+                  <a:tcPr marL="109728" marR="109728" marT="54864" marB="54864" anchor="b">
+                    <a:solidFill>
+                      <a:srgbClr val="FFFFFF"/>
+                    </a:solidFill>
+                  </a:tcPr>
+                </a:tc>
+                <a:extLst>
+                  <a:ext uri="{0D108BD9-81ED-4DB2-BD59-A6C34878D82A}">
+                    <a16:rowId xmlns:a16="http://schemas.microsoft.com/office/drawing/2014/main" val="10000"/>
+                  </a:ext>
+                </a:extLst>
+              </a:tr>
+              <a:tr h="713232">
+                <a:tc>
+                  <a:txBody>
+                    <a:bodyPr/>
+                    <a:lstStyle/>
+                    <a:p>
+                      <a:r>
+                        <a:rPr sz="1300" b="1">
+                          <a:solidFill>
+                            <a:srgbClr val="142A63"/>
+                          </a:solidFill>
+                          <a:latin typeface="맑은 고딕"/>
+                        </a:rPr>
+                        <a:t>Assembler Unit</a:t>
+                      </a:r>
+                    </a:p>
+                  </a:txBody>
+                  <a:tcPr marL="109728" marR="109728" marT="91440" marB="91440">
+                    <a:solidFill>
+                      <a:srgbClr val="FFFFFF"/>
+                    </a:solidFill>
+                  </a:tcPr>
+                </a:tc>
+                <a:tc>
+                  <a:txBody>
+                    <a:bodyPr/>
+                    <a:lstStyle/>
+                    <a:p>
+                      <a:pPr>
+                        <a:lnSpc>
+                          <a:spcPct val="115000"/>
+                        </a:lnSpc>
+                      </a:pPr>
+                      <a:r>
+                        <a:rPr sz="1300" dirty="0" err="1">
+                          <a:solidFill>
+                            <a:srgbClr val="16213A"/>
+                          </a:solidFill>
+                          <a:latin typeface="맑은 고딕"/>
+                        </a:rPr>
+                        <a:t>Tokenizer로</a:t>
+                      </a:r>
+                      <a:r>
+                        <a:rPr sz="1300" dirty="0">
+                          <a:solidFill>
+                            <a:srgbClr val="16213A"/>
+                          </a:solidFill>
+                          <a:latin typeface="맑은 고딕"/>
+                        </a:rPr>
+                        <a:t> </a:t>
+                      </a:r>
+                      <a:r>
+                        <a:rPr sz="1300" dirty="0" err="1">
+                          <a:solidFill>
+                            <a:srgbClr val="16213A"/>
+                          </a:solidFill>
+                          <a:latin typeface="맑은 고딕"/>
+                        </a:rPr>
+                        <a:t>소스를</a:t>
+                      </a:r>
+                      <a:r>
+                        <a:rPr sz="1300" dirty="0">
+                          <a:solidFill>
+                            <a:srgbClr val="16213A"/>
+                          </a:solidFill>
+                          <a:latin typeface="맑은 고딕"/>
+                        </a:rPr>
+                        <a:t> </a:t>
+                      </a:r>
+                      <a:r>
+                        <a:rPr sz="1300" dirty="0" err="1">
+                          <a:solidFill>
+                            <a:srgbClr val="16213A"/>
+                          </a:solidFill>
+                          <a:latin typeface="맑은 고딕"/>
+                        </a:rPr>
+                        <a:t>토큰화하고</a:t>
+                      </a:r>
+                      <a:r>
+                        <a:rPr sz="1300" dirty="0">
+                          <a:solidFill>
+                            <a:srgbClr val="16213A"/>
+                          </a:solidFill>
+                          <a:latin typeface="맑은 고딕"/>
+                        </a:rPr>
+                        <a:t>, Expression/Statement </a:t>
+                      </a:r>
+                      <a:r>
+                        <a:rPr sz="1300" dirty="0" err="1">
+                          <a:solidFill>
+                            <a:srgbClr val="16213A"/>
+                          </a:solidFill>
+                          <a:latin typeface="맑은 고딕"/>
+                        </a:rPr>
+                        <a:t>Parser로</a:t>
+                      </a:r>
+                      <a:r>
+                        <a:rPr sz="1300" dirty="0">
+                          <a:solidFill>
+                            <a:srgbClr val="16213A"/>
+                          </a:solidFill>
+                          <a:latin typeface="맑은 고딕"/>
+                        </a:rPr>
+                        <a:t> </a:t>
+                      </a:r>
+                      <a:r>
+                        <a:rPr sz="1300" dirty="0" err="1">
+                          <a:solidFill>
+                            <a:srgbClr val="16213A"/>
+                          </a:solidFill>
+                          <a:latin typeface="맑은 고딕"/>
+                        </a:rPr>
+                        <a:t>AST를</a:t>
+                      </a:r>
+                      <a:r>
+                        <a:rPr sz="1300" dirty="0">
+                          <a:solidFill>
+                            <a:srgbClr val="16213A"/>
+                          </a:solidFill>
+                          <a:latin typeface="맑은 고딕"/>
+                        </a:rPr>
+                        <a:t> </a:t>
+                      </a:r>
+                      <a:r>
+                        <a:rPr sz="1300" dirty="0" err="1">
+                          <a:solidFill>
+                            <a:srgbClr val="16213A"/>
+                          </a:solidFill>
+                          <a:latin typeface="맑은 고딕"/>
+                        </a:rPr>
+                        <a:t>구성한다</a:t>
+                      </a:r>
+                      <a:r>
+                        <a:rPr sz="1300" dirty="0">
+                          <a:solidFill>
+                            <a:srgbClr val="16213A"/>
+                          </a:solidFill>
+                          <a:latin typeface="맑은 고딕"/>
+                        </a:rPr>
+                        <a:t>.</a:t>
+                      </a:r>
+                    </a:p>
+                  </a:txBody>
+                  <a:tcPr marL="109728" marR="109728" marT="91440" marB="91440">
+                    <a:solidFill>
+                      <a:srgbClr val="FFFFFF"/>
+                    </a:solidFill>
+                  </a:tcPr>
+                </a:tc>
+                <a:extLst>
+                  <a:ext uri="{0D108BD9-81ED-4DB2-BD59-A6C34878D82A}">
+                    <a16:rowId xmlns:a16="http://schemas.microsoft.com/office/drawing/2014/main" val="10001"/>
+                  </a:ext>
+                </a:extLst>
+              </a:tr>
+              <a:tr h="713232">
+                <a:tc>
+                  <a:txBody>
+                    <a:bodyPr/>
+                    <a:lstStyle/>
+                    <a:p>
+                      <a:r>
+                        <a:rPr sz="1300" b="1">
+                          <a:solidFill>
+                            <a:srgbClr val="142A63"/>
+                          </a:solidFill>
+                          <a:latin typeface="맑은 고딕"/>
+                        </a:rPr>
+                        <a:t>Checker Unit</a:t>
+                      </a:r>
+                    </a:p>
+                  </a:txBody>
+                  <a:tcPr marL="109728" marR="109728" marT="91440" marB="91440">
+                    <a:solidFill>
+                      <a:srgbClr val="FFFFFF"/>
+                    </a:solidFill>
+                  </a:tcPr>
+                </a:tc>
+                <a:tc>
+                  <a:txBody>
+                    <a:bodyPr/>
+                    <a:lstStyle/>
+                    <a:p>
+                      <a:pPr>
+                        <a:lnSpc>
+                          <a:spcPct val="115000"/>
+                        </a:lnSpc>
+                      </a:pPr>
+                      <a:r>
+                        <a:rPr sz="1300" dirty="0">
+                          <a:solidFill>
+                            <a:srgbClr val="16213A"/>
+                          </a:solidFill>
+                          <a:latin typeface="맑은 고딕"/>
+                        </a:rPr>
+                        <a:t>AST </a:t>
+                      </a:r>
+                      <a:r>
+                        <a:rPr sz="1300" dirty="0" err="1">
+                          <a:solidFill>
+                            <a:srgbClr val="16213A"/>
+                          </a:solidFill>
+                          <a:latin typeface="맑은 고딕"/>
+                        </a:rPr>
+                        <a:t>노드</a:t>
+                      </a:r>
+                      <a:r>
+                        <a:rPr sz="1300" dirty="0">
+                          <a:solidFill>
+                            <a:srgbClr val="16213A"/>
+                          </a:solidFill>
+                          <a:latin typeface="맑은 고딕"/>
+                        </a:rPr>
+                        <a:t> </a:t>
+                      </a:r>
+                      <a:r>
+                        <a:rPr sz="1300" dirty="0" err="1">
+                          <a:solidFill>
+                            <a:srgbClr val="16213A"/>
+                          </a:solidFill>
+                          <a:latin typeface="맑은 고딕"/>
+                        </a:rPr>
+                        <a:t>인터페이스를</a:t>
+                      </a:r>
+                      <a:r>
+                        <a:rPr sz="1300" dirty="0">
+                          <a:solidFill>
+                            <a:srgbClr val="16213A"/>
+                          </a:solidFill>
+                          <a:latin typeface="맑은 고딕"/>
+                        </a:rPr>
+                        <a:t> </a:t>
+                      </a:r>
+                      <a:r>
+                        <a:rPr sz="1300" dirty="0" err="1">
+                          <a:solidFill>
+                            <a:srgbClr val="16213A"/>
+                          </a:solidFill>
+                          <a:latin typeface="맑은 고딕"/>
+                        </a:rPr>
+                        <a:t>정의하고</a:t>
+                      </a:r>
+                      <a:r>
+                        <a:rPr sz="1300" dirty="0">
+                          <a:solidFill>
+                            <a:srgbClr val="16213A"/>
+                          </a:solidFill>
+                          <a:latin typeface="맑은 고딕"/>
+                        </a:rPr>
+                        <a:t>, accept/visit_* </a:t>
+                      </a:r>
+                      <a:r>
+                        <a:rPr sz="1300" dirty="0" err="1">
+                          <a:solidFill>
+                            <a:srgbClr val="16213A"/>
+                          </a:solidFill>
+                          <a:latin typeface="맑은 고딕"/>
+                        </a:rPr>
+                        <a:t>방식으로</a:t>
+                      </a:r>
+                      <a:r>
+                        <a:rPr sz="1300" dirty="0">
+                          <a:solidFill>
+                            <a:srgbClr val="16213A"/>
+                          </a:solidFill>
+                          <a:latin typeface="맑은 고딕"/>
+                        </a:rPr>
+                        <a:t> </a:t>
+                      </a:r>
+                      <a:r>
+                        <a:rPr sz="1300" dirty="0" err="1">
+                          <a:solidFill>
+                            <a:srgbClr val="16213A"/>
+                          </a:solidFill>
+                          <a:latin typeface="맑은 고딕"/>
+                        </a:rPr>
+                        <a:t>변수</a:t>
+                      </a:r>
+                      <a:r>
+                        <a:rPr sz="1300" dirty="0">
+                          <a:solidFill>
+                            <a:srgbClr val="16213A"/>
+                          </a:solidFill>
+                          <a:latin typeface="맑은 고딕"/>
+                        </a:rPr>
+                        <a:t> </a:t>
+                      </a:r>
+                      <a:r>
+                        <a:rPr sz="1300" dirty="0" err="1">
+                          <a:solidFill>
+                            <a:srgbClr val="16213A"/>
+                          </a:solidFill>
+                          <a:latin typeface="맑은 고딕"/>
+                        </a:rPr>
+                        <a:t>중복</a:t>
+                      </a:r>
+                      <a:r>
+                        <a:rPr sz="1300" dirty="0">
+                          <a:solidFill>
+                            <a:srgbClr val="16213A"/>
+                          </a:solidFill>
+                          <a:latin typeface="맑은 고딕"/>
+                        </a:rPr>
+                        <a:t> </a:t>
+                      </a:r>
+                      <a:r>
+                        <a:rPr sz="1300" dirty="0" err="1">
+                          <a:solidFill>
+                            <a:srgbClr val="16213A"/>
+                          </a:solidFill>
+                          <a:latin typeface="맑은 고딕"/>
+                        </a:rPr>
+                        <a:t>선언·선언</a:t>
+                      </a:r>
+                      <a:r>
+                        <a:rPr sz="1300" dirty="0">
+                          <a:solidFill>
+                            <a:srgbClr val="16213A"/>
+                          </a:solidFill>
+                          <a:latin typeface="맑은 고딕"/>
+                        </a:rPr>
+                        <a:t> 전 </a:t>
+                      </a:r>
+                      <a:r>
+                        <a:rPr sz="1300" dirty="0" err="1">
+                          <a:solidFill>
+                            <a:srgbClr val="16213A"/>
+                          </a:solidFill>
+                          <a:latin typeface="맑은 고딕"/>
+                        </a:rPr>
+                        <a:t>사용</a:t>
+                      </a:r>
+                      <a:r>
+                        <a:rPr sz="1300" dirty="0">
+                          <a:solidFill>
+                            <a:srgbClr val="16213A"/>
+                          </a:solidFill>
+                          <a:latin typeface="맑은 고딕"/>
+                        </a:rPr>
+                        <a:t> </a:t>
+                      </a:r>
+                      <a:r>
+                        <a:rPr sz="1300" dirty="0" err="1">
+                          <a:solidFill>
+                            <a:srgbClr val="16213A"/>
+                          </a:solidFill>
+                          <a:latin typeface="맑은 고딕"/>
+                        </a:rPr>
+                        <a:t>같은</a:t>
+                      </a:r>
+                      <a:r>
+                        <a:rPr sz="1300" dirty="0">
+                          <a:solidFill>
+                            <a:srgbClr val="16213A"/>
+                          </a:solidFill>
+                          <a:latin typeface="맑은 고딕"/>
+                        </a:rPr>
+                        <a:t> </a:t>
+                      </a:r>
+                      <a:r>
+                        <a:rPr sz="1300" dirty="0" err="1">
+                          <a:solidFill>
+                            <a:srgbClr val="16213A"/>
+                          </a:solidFill>
+                          <a:latin typeface="맑은 고딕"/>
+                        </a:rPr>
+                        <a:t>정적</a:t>
+                      </a:r>
+                      <a:r>
+                        <a:rPr sz="1300" dirty="0">
+                          <a:solidFill>
+                            <a:srgbClr val="16213A"/>
+                          </a:solidFill>
+                          <a:latin typeface="맑은 고딕"/>
+                        </a:rPr>
+                        <a:t> </a:t>
+                      </a:r>
+                      <a:r>
+                        <a:rPr sz="1300" dirty="0" err="1">
+                          <a:solidFill>
+                            <a:srgbClr val="16213A"/>
+                          </a:solidFill>
+                          <a:latin typeface="맑은 고딕"/>
+                        </a:rPr>
+                        <a:t>오류를</a:t>
+                      </a:r>
+                      <a:r>
+                        <a:rPr sz="1300" dirty="0">
+                          <a:solidFill>
+                            <a:srgbClr val="16213A"/>
+                          </a:solidFill>
+                          <a:latin typeface="맑은 고딕"/>
+                        </a:rPr>
+                        <a:t> </a:t>
+                      </a:r>
+                      <a:r>
+                        <a:rPr sz="1300" dirty="0" err="1">
+                          <a:solidFill>
+                            <a:srgbClr val="16213A"/>
+                          </a:solidFill>
+                          <a:latin typeface="맑은 고딕"/>
+                        </a:rPr>
+                        <a:t>미리</a:t>
+                      </a:r>
+                      <a:r>
+                        <a:rPr sz="1300" dirty="0">
+                          <a:solidFill>
+                            <a:srgbClr val="16213A"/>
+                          </a:solidFill>
+                          <a:latin typeface="맑은 고딕"/>
+                        </a:rPr>
+                        <a:t> </a:t>
+                      </a:r>
+                      <a:r>
+                        <a:rPr sz="1300" dirty="0" err="1">
+                          <a:solidFill>
+                            <a:srgbClr val="16213A"/>
+                          </a:solidFill>
+                          <a:latin typeface="맑은 고딕"/>
+                        </a:rPr>
+                        <a:t>잡는다</a:t>
+                      </a:r>
+                      <a:r>
+                        <a:rPr sz="1300" dirty="0">
+                          <a:solidFill>
+                            <a:srgbClr val="16213A"/>
+                          </a:solidFill>
+                          <a:latin typeface="맑은 고딕"/>
+                        </a:rPr>
+                        <a:t>.</a:t>
+                      </a:r>
+                    </a:p>
+                  </a:txBody>
+                  <a:tcPr marL="109728" marR="109728" marT="91440" marB="91440">
+                    <a:solidFill>
+                      <a:srgbClr val="FFFFFF"/>
+                    </a:solidFill>
+                  </a:tcPr>
+                </a:tc>
+                <a:extLst>
+                  <a:ext uri="{0D108BD9-81ED-4DB2-BD59-A6C34878D82A}">
+                    <a16:rowId xmlns:a16="http://schemas.microsoft.com/office/drawing/2014/main" val="10002"/>
+                  </a:ext>
+                </a:extLst>
+              </a:tr>
+              <a:tr h="713232">
+                <a:tc>
+                  <a:txBody>
+                    <a:bodyPr/>
+                    <a:lstStyle/>
+                    <a:p>
+                      <a:r>
+                        <a:rPr sz="1300" b="1">
+                          <a:solidFill>
+                            <a:srgbClr val="142A63"/>
+                          </a:solidFill>
+                          <a:latin typeface="맑은 고딕"/>
+                        </a:rPr>
+                        <a:t>Executor Unit</a:t>
+                      </a:r>
+                    </a:p>
+                  </a:txBody>
+                  <a:tcPr marL="109728" marR="109728" marT="91440" marB="91440">
+                    <a:solidFill>
+                      <a:srgbClr val="FFFFFF"/>
+                    </a:solidFill>
+                  </a:tcPr>
+                </a:tc>
+                <a:tc>
+                  <a:txBody>
+                    <a:bodyPr/>
+                    <a:lstStyle/>
+                    <a:p>
+                      <a:pPr>
+                        <a:lnSpc>
+                          <a:spcPct val="115000"/>
+                        </a:lnSpc>
+                      </a:pPr>
+                      <a:r>
+                        <a:rPr sz="1300" dirty="0" err="1">
+                          <a:solidFill>
+                            <a:srgbClr val="16213A"/>
+                          </a:solidFill>
+                          <a:latin typeface="맑은 고딕"/>
+                        </a:rPr>
+                        <a:t>Checker를</a:t>
+                      </a:r>
+                      <a:r>
+                        <a:rPr sz="1300" dirty="0">
+                          <a:solidFill>
+                            <a:srgbClr val="16213A"/>
+                          </a:solidFill>
+                          <a:latin typeface="맑은 고딕"/>
+                        </a:rPr>
+                        <a:t> </a:t>
+                      </a:r>
+                      <a:r>
+                        <a:rPr sz="1300" dirty="0" err="1">
+                          <a:solidFill>
+                            <a:srgbClr val="16213A"/>
+                          </a:solidFill>
+                          <a:latin typeface="맑은 고딕"/>
+                        </a:rPr>
+                        <a:t>통과한</a:t>
+                      </a:r>
+                      <a:r>
+                        <a:rPr sz="1300" dirty="0">
+                          <a:solidFill>
+                            <a:srgbClr val="16213A"/>
+                          </a:solidFill>
+                          <a:latin typeface="맑은 고딕"/>
+                        </a:rPr>
+                        <a:t> </a:t>
+                      </a:r>
+                      <a:r>
+                        <a:rPr sz="1300" dirty="0" err="1">
+                          <a:solidFill>
+                            <a:srgbClr val="16213A"/>
+                          </a:solidFill>
+                          <a:latin typeface="맑은 고딕"/>
+                        </a:rPr>
+                        <a:t>AST를</a:t>
+                      </a:r>
+                      <a:r>
+                        <a:rPr sz="1300" dirty="0">
+                          <a:solidFill>
+                            <a:srgbClr val="16213A"/>
+                          </a:solidFill>
+                          <a:latin typeface="맑은 고딕"/>
+                        </a:rPr>
+                        <a:t> </a:t>
+                      </a:r>
+                      <a:r>
+                        <a:rPr sz="1300" dirty="0" err="1">
+                          <a:solidFill>
+                            <a:srgbClr val="16213A"/>
+                          </a:solidFill>
+                          <a:latin typeface="맑은 고딕"/>
+                        </a:rPr>
+                        <a:t>순회하며</a:t>
+                      </a:r>
+                      <a:r>
+                        <a:rPr sz="1300" dirty="0">
+                          <a:solidFill>
+                            <a:srgbClr val="16213A"/>
+                          </a:solidFill>
+                          <a:latin typeface="맑은 고딕"/>
+                        </a:rPr>
+                        <a:t> </a:t>
+                      </a:r>
+                      <a:r>
+                        <a:rPr sz="1300" dirty="0" err="1">
+                          <a:solidFill>
+                            <a:srgbClr val="16213A"/>
+                          </a:solidFill>
+                          <a:latin typeface="맑은 고딕"/>
+                        </a:rPr>
+                        <a:t>실제로</a:t>
+                      </a:r>
+                      <a:r>
+                        <a:rPr sz="1300" dirty="0">
+                          <a:solidFill>
+                            <a:srgbClr val="16213A"/>
+                          </a:solidFill>
+                          <a:latin typeface="맑은 고딕"/>
+                        </a:rPr>
+                        <a:t> </a:t>
+                      </a:r>
+                      <a:r>
+                        <a:rPr sz="1300" dirty="0" err="1">
+                          <a:solidFill>
+                            <a:srgbClr val="16213A"/>
+                          </a:solidFill>
+                          <a:latin typeface="맑은 고딕"/>
+                        </a:rPr>
+                        <a:t>실행한다</a:t>
+                      </a:r>
+                      <a:r>
+                        <a:rPr sz="1300" dirty="0">
+                          <a:solidFill>
+                            <a:srgbClr val="16213A"/>
+                          </a:solidFill>
+                          <a:latin typeface="맑은 고딕"/>
+                        </a:rPr>
+                        <a:t> — 이 3단 </a:t>
+                      </a:r>
+                      <a:r>
+                        <a:rPr sz="1300" dirty="0" err="1">
+                          <a:solidFill>
+                            <a:srgbClr val="16213A"/>
+                          </a:solidFill>
+                          <a:latin typeface="맑은 고딕"/>
+                        </a:rPr>
+                        <a:t>구조가</a:t>
+                      </a:r>
+                      <a:r>
+                        <a:rPr sz="1300" dirty="0">
+                          <a:solidFill>
+                            <a:srgbClr val="16213A"/>
+                          </a:solidFill>
+                          <a:latin typeface="맑은 고딕"/>
+                        </a:rPr>
+                        <a:t> </a:t>
+                      </a:r>
+                      <a:r>
+                        <a:rPr sz="1300" dirty="0" err="1">
+                          <a:solidFill>
+                            <a:srgbClr val="16213A"/>
+                          </a:solidFill>
+                          <a:latin typeface="맑은 고딕"/>
+                        </a:rPr>
+                        <a:t>이후</a:t>
+                      </a:r>
+                      <a:r>
+                        <a:rPr sz="1300" dirty="0">
+                          <a:solidFill>
+                            <a:srgbClr val="16213A"/>
+                          </a:solidFill>
+                          <a:latin typeface="맑은 고딕"/>
+                        </a:rPr>
+                        <a:t> </a:t>
+                      </a:r>
+                      <a:r>
+                        <a:rPr sz="1300" dirty="0" err="1">
+                          <a:solidFill>
+                            <a:srgbClr val="16213A"/>
+                          </a:solidFill>
+                          <a:latin typeface="맑은 고딕"/>
+                        </a:rPr>
+                        <a:t>함수·클래스·최적화</a:t>
+                      </a:r>
+                      <a:r>
+                        <a:rPr sz="1300" dirty="0">
+                          <a:solidFill>
+                            <a:srgbClr val="16213A"/>
+                          </a:solidFill>
+                          <a:latin typeface="맑은 고딕"/>
+                        </a:rPr>
+                        <a:t> 등 </a:t>
+                      </a:r>
+                      <a:r>
+                        <a:rPr sz="1300" dirty="0" err="1">
+                          <a:solidFill>
+                            <a:srgbClr val="16213A"/>
+                          </a:solidFill>
+                          <a:latin typeface="맑은 고딕"/>
+                        </a:rPr>
+                        <a:t>모든</a:t>
+                      </a:r>
+                      <a:r>
+                        <a:rPr sz="1300" dirty="0">
+                          <a:solidFill>
+                            <a:srgbClr val="16213A"/>
+                          </a:solidFill>
+                          <a:latin typeface="맑은 고딕"/>
+                        </a:rPr>
+                        <a:t> </a:t>
+                      </a:r>
+                      <a:r>
+                        <a:rPr sz="1300" dirty="0" err="1">
+                          <a:solidFill>
+                            <a:srgbClr val="16213A"/>
+                          </a:solidFill>
+                          <a:latin typeface="맑은 고딕"/>
+                        </a:rPr>
+                        <a:t>확장의</a:t>
+                      </a:r>
+                      <a:r>
+                        <a:rPr sz="1300" dirty="0">
+                          <a:solidFill>
+                            <a:srgbClr val="16213A"/>
+                          </a:solidFill>
+                          <a:latin typeface="맑은 고딕"/>
+                        </a:rPr>
+                        <a:t> </a:t>
+                      </a:r>
+                      <a:r>
+                        <a:rPr sz="1300" dirty="0" err="1">
+                          <a:solidFill>
+                            <a:srgbClr val="16213A"/>
+                          </a:solidFill>
+                          <a:latin typeface="맑은 고딕"/>
+                        </a:rPr>
+                        <a:t>토대가</a:t>
+                      </a:r>
+                      <a:r>
+                        <a:rPr sz="1300" dirty="0">
+                          <a:solidFill>
+                            <a:srgbClr val="16213A"/>
+                          </a:solidFill>
+                          <a:latin typeface="맑은 고딕"/>
+                        </a:rPr>
+                        <a:t> </a:t>
+                      </a:r>
+                      <a:r>
+                        <a:rPr sz="1300" dirty="0" err="1">
+                          <a:solidFill>
+                            <a:srgbClr val="16213A"/>
+                          </a:solidFill>
+                          <a:latin typeface="맑은 고딕"/>
+                        </a:rPr>
+                        <a:t>됐다</a:t>
+                      </a:r>
+                      <a:r>
+                        <a:rPr sz="1300" dirty="0">
+                          <a:solidFill>
+                            <a:srgbClr val="16213A"/>
+                          </a:solidFill>
+                          <a:latin typeface="맑은 고딕"/>
+                        </a:rPr>
+                        <a:t>.</a:t>
+                      </a:r>
+                    </a:p>
+                  </a:txBody>
+                  <a:tcPr marL="109728" marR="109728" marT="91440" marB="91440">
+                    <a:solidFill>
+                      <a:srgbClr val="FFFFFF"/>
+                    </a:solidFill>
+                  </a:tcPr>
+                </a:tc>
+                <a:extLst>
+                  <a:ext uri="{0D108BD9-81ED-4DB2-BD59-A6C34878D82A}">
+                    <a16:rowId xmlns:a16="http://schemas.microsoft.com/office/drawing/2014/main" val="10003"/>
+                  </a:ext>
+                </a:extLst>
+              </a:tr>
+              <a:tr h="713232">
+                <a:tc>
+                  <a:txBody>
+                    <a:bodyPr/>
+                    <a:lstStyle/>
+                    <a:p>
+                      <a:r>
+                        <a:rPr sz="1300" b="1">
+                          <a:solidFill>
+                            <a:srgbClr val="142A63"/>
+                          </a:solidFill>
+                          <a:latin typeface="맑은 고딕"/>
+                        </a:rPr>
+                        <a:t>팀 인프라</a:t>
+                      </a:r>
+                    </a:p>
+                  </a:txBody>
+                  <a:tcPr marL="109728" marR="109728" marT="91440" marB="91440">
+                    <a:solidFill>
+                      <a:srgbClr val="FFFFFF"/>
+                    </a:solidFill>
+                  </a:tcPr>
+                </a:tc>
+                <a:tc>
+                  <a:txBody>
+                    <a:bodyPr/>
+                    <a:lstStyle/>
+                    <a:p>
+                      <a:pPr>
+                        <a:lnSpc>
+                          <a:spcPct val="115000"/>
+                        </a:lnSpc>
+                      </a:pPr>
+                      <a:r>
+                        <a:rPr sz="1300" dirty="0" err="1">
+                          <a:solidFill>
+                            <a:srgbClr val="16213A"/>
+                          </a:solidFill>
+                          <a:latin typeface="맑은 고딕"/>
+                        </a:rPr>
+                        <a:t>프로젝트</a:t>
+                      </a:r>
+                      <a:r>
+                        <a:rPr sz="1300" dirty="0">
+                          <a:solidFill>
+                            <a:srgbClr val="16213A"/>
+                          </a:solidFill>
+                          <a:latin typeface="맑은 고딕"/>
+                        </a:rPr>
+                        <a:t> </a:t>
+                      </a:r>
+                      <a:r>
+                        <a:rPr sz="1300" dirty="0" err="1">
+                          <a:solidFill>
+                            <a:srgbClr val="16213A"/>
+                          </a:solidFill>
+                          <a:latin typeface="맑은 고딕"/>
+                        </a:rPr>
+                        <a:t>초기</a:t>
+                      </a:r>
+                      <a:r>
+                        <a:rPr sz="1300" dirty="0">
+                          <a:solidFill>
+                            <a:srgbClr val="16213A"/>
+                          </a:solidFill>
+                          <a:latin typeface="맑은 고딕"/>
+                        </a:rPr>
+                        <a:t> </a:t>
+                      </a:r>
+                      <a:r>
+                        <a:rPr sz="1300" dirty="0" err="1">
+                          <a:solidFill>
+                            <a:srgbClr val="16213A"/>
+                          </a:solidFill>
+                          <a:latin typeface="맑은 고딕"/>
+                        </a:rPr>
+                        <a:t>설정</a:t>
+                      </a:r>
+                      <a:r>
+                        <a:rPr sz="1300" dirty="0">
+                          <a:solidFill>
+                            <a:srgbClr val="16213A"/>
+                          </a:solidFill>
+                          <a:latin typeface="맑은 고딕"/>
+                        </a:rPr>
+                        <a:t> · CI/</a:t>
+                      </a:r>
+                      <a:r>
+                        <a:rPr sz="1300" dirty="0" err="1">
+                          <a:solidFill>
+                            <a:srgbClr val="16213A"/>
+                          </a:solidFill>
+                          <a:latin typeface="맑은 고딕"/>
+                        </a:rPr>
+                        <a:t>커버리지</a:t>
+                      </a:r>
+                      <a:r>
+                        <a:rPr sz="1300" dirty="0">
+                          <a:solidFill>
+                            <a:srgbClr val="16213A"/>
+                          </a:solidFill>
+                          <a:latin typeface="맑은 고딕"/>
+                        </a:rPr>
+                        <a:t> </a:t>
+                      </a:r>
+                      <a:r>
+                        <a:rPr sz="1300" dirty="0" err="1">
+                          <a:solidFill>
+                            <a:srgbClr val="16213A"/>
+                          </a:solidFill>
+                          <a:latin typeface="맑은 고딕"/>
+                        </a:rPr>
+                        <a:t>파이프라인</a:t>
+                      </a:r>
+                      <a:r>
+                        <a:rPr sz="1300" dirty="0">
+                          <a:solidFill>
+                            <a:srgbClr val="16213A"/>
+                          </a:solidFill>
+                          <a:latin typeface="맑은 고딕"/>
+                        </a:rPr>
+                        <a:t> · </a:t>
+                      </a:r>
+                      <a:r>
+                        <a:rPr sz="1300" dirty="0" err="1">
+                          <a:solidFill>
+                            <a:srgbClr val="16213A"/>
+                          </a:solidFill>
+                          <a:latin typeface="맑은 고딕"/>
+                        </a:rPr>
+                        <a:t>PR·브랜치</a:t>
+                      </a:r>
+                      <a:r>
+                        <a:rPr sz="1300" dirty="0">
+                          <a:solidFill>
+                            <a:srgbClr val="16213A"/>
+                          </a:solidFill>
+                          <a:latin typeface="맑은 고딕"/>
+                        </a:rPr>
+                        <a:t> </a:t>
+                      </a:r>
+                      <a:r>
+                        <a:rPr sz="1300" dirty="0" err="1">
+                          <a:solidFill>
+                            <a:srgbClr val="16213A"/>
+                          </a:solidFill>
+                          <a:latin typeface="맑은 고딕"/>
+                        </a:rPr>
+                        <a:t>컨벤션이</a:t>
+                      </a:r>
+                      <a:r>
+                        <a:rPr sz="1300" dirty="0">
+                          <a:solidFill>
+                            <a:srgbClr val="16213A"/>
+                          </a:solidFill>
+                          <a:latin typeface="맑은 고딕"/>
+                        </a:rPr>
+                        <a:t> </a:t>
+                      </a:r>
+                      <a:r>
+                        <a:rPr sz="1300" dirty="0" err="1">
+                          <a:solidFill>
+                            <a:srgbClr val="16213A"/>
+                          </a:solidFill>
+                          <a:latin typeface="맑은 고딕"/>
+                        </a:rPr>
+                        <a:t>이후</a:t>
+                      </a:r>
+                      <a:r>
+                        <a:rPr sz="1300" dirty="0">
+                          <a:solidFill>
+                            <a:srgbClr val="16213A"/>
+                          </a:solidFill>
+                          <a:latin typeface="맑은 고딕"/>
+                        </a:rPr>
+                        <a:t> </a:t>
+                      </a:r>
+                      <a:r>
+                        <a:rPr sz="1300" dirty="0" err="1">
+                          <a:solidFill>
+                            <a:srgbClr val="16213A"/>
+                          </a:solidFill>
+                          <a:latin typeface="맑은 고딕"/>
+                        </a:rPr>
+                        <a:t>협업</a:t>
+                      </a:r>
+                      <a:r>
+                        <a:rPr sz="1300" dirty="0">
+                          <a:solidFill>
+                            <a:srgbClr val="16213A"/>
+                          </a:solidFill>
+                          <a:latin typeface="맑은 고딕"/>
+                        </a:rPr>
+                        <a:t> </a:t>
+                      </a:r>
+                      <a:r>
+                        <a:rPr sz="1300" dirty="0" err="1">
+                          <a:solidFill>
+                            <a:srgbClr val="16213A"/>
+                          </a:solidFill>
+                          <a:latin typeface="맑은 고딕"/>
+                        </a:rPr>
+                        <a:t>방식의</a:t>
+                      </a:r>
+                      <a:r>
+                        <a:rPr sz="1300" dirty="0">
+                          <a:solidFill>
+                            <a:srgbClr val="16213A"/>
+                          </a:solidFill>
+                          <a:latin typeface="맑은 고딕"/>
+                        </a:rPr>
+                        <a:t> </a:t>
+                      </a:r>
+                      <a:r>
+                        <a:rPr sz="1300" dirty="0" err="1">
+                          <a:solidFill>
+                            <a:srgbClr val="16213A"/>
+                          </a:solidFill>
+                          <a:latin typeface="맑은 고딕"/>
+                        </a:rPr>
+                        <a:t>기반을</a:t>
+                      </a:r>
+                      <a:r>
+                        <a:rPr sz="1300" dirty="0">
+                          <a:solidFill>
+                            <a:srgbClr val="16213A"/>
+                          </a:solidFill>
+                          <a:latin typeface="맑은 고딕"/>
+                        </a:rPr>
+                        <a:t> </a:t>
+                      </a:r>
+                      <a:r>
+                        <a:rPr sz="1300" dirty="0" err="1">
+                          <a:solidFill>
+                            <a:srgbClr val="16213A"/>
+                          </a:solidFill>
+                          <a:latin typeface="맑은 고딕"/>
+                        </a:rPr>
+                        <a:t>마련했다</a:t>
+                      </a:r>
+                      <a:r>
+                        <a:rPr sz="1300" dirty="0">
+                          <a:solidFill>
+                            <a:srgbClr val="16213A"/>
+                          </a:solidFill>
+                          <a:latin typeface="맑은 고딕"/>
+                        </a:rPr>
+                        <a:t>.</a:t>
+                      </a:r>
+                    </a:p>
+                  </a:txBody>
+                  <a:tcPr marL="109728" marR="109728" marT="91440" marB="91440">
+                    <a:solidFill>
+                      <a:srgbClr val="FFFFFF"/>
+                    </a:solidFill>
+                  </a:tcPr>
+                </a:tc>
+                <a:extLst>
+                  <a:ext uri="{0D108BD9-81ED-4DB2-BD59-A6C34878D82A}">
+                    <a16:rowId xmlns:a16="http://schemas.microsoft.com/office/drawing/2014/main" val="10004"/>
+                  </a:ext>
+                </a:extLst>
+              </a:tr>
+            </a:tbl>
+          </a:graphicData>
+        </a:graphic>
+      </p:graphicFrame>
+    </p:spTree>
+  </p:cSld>
+  <p:clrMapOvr>
+    <a:masterClrMapping/>
+  </p:clrMapOvr>
+</p:sld>
+</file>
+
+<file path=ppt/slides/slide5.xml><?xml version="1.0" encoding="utf-8"?>
+<p:sld xmlns:a="http://schemas.openxmlformats.org/drawingml/2006/main" xmlns:r="http://schemas.openxmlformats.org/officeDocument/2006/relationships" xmlns:p="http://schemas.openxmlformats.org/presentationml/2006/main">
+  <p:cSld>
+    <p:spTree>
+      <p:nvGrpSpPr>
+        <p:cNvPr id="1" name=""/>
+        <p:cNvGrpSpPr/>
+        <p:nvPr/>
+      </p:nvGrpSpPr>
+      <p:grpSpPr>
+        <a:xfrm>
+          <a:off x="0" y="0"/>
+          <a:ext cx="0" cy="0"/>
+          <a:chOff x="0" y="0"/>
+          <a:chExt cx="0" cy="0"/>
+        </a:xfrm>
+      </p:grpSpPr>
+      <p:sp>
+        <p:nvSpPr>
+          <p:cNvPr id="2" name="Rectangle 1"/>
+          <p:cNvSpPr/>
+          <p:nvPr/>
+        </p:nvSpPr>
+        <p:spPr>
+          <a:xfrm>
+            <a:off x="0" y="0"/>
+            <a:ext cx="12191695" cy="6858000"/>
+          </a:xfrm>
+          <a:prstGeom prst="rect">
+            <a:avLst/>
+          </a:prstGeom>
+          <a:solidFill>
+            <a:srgbClr val="FFFFFF"/>
+          </a:solidFill>
+          <a:ln>
+            <a:noFill/>
+          </a:ln>
+          <a:effectLst/>
+        </p:spPr>
+        <p:style>
+          <a:lnRef idx="1">
+            <a:schemeClr val="accent1"/>
+          </a:lnRef>
+          <a:fillRef idx="3">
+            <a:schemeClr val="accent1"/>
+          </a:fillRef>
+          <a:effectRef idx="2">
+            <a:schemeClr val="accent1"/>
+          </a:effectRef>
+          <a:fontRef idx="minor">
+            <a:schemeClr val="lt1"/>
+          </a:fontRef>
+        </p:style>
+        <p:txBody>
+          <a:bodyPr rtlCol="0" anchor="ctr"/>
+          <a:lstStyle/>
+          <a:p>
+            <a:pPr algn="ctr"/>
+            <a:endParaRPr/>
+          </a:p>
+        </p:txBody>
+      </p:sp>
+      <p:sp>
+        <p:nvSpPr>
+          <p:cNvPr id="3" name="Rectangle 2"/>
+          <p:cNvSpPr/>
+          <p:nvPr/>
+        </p:nvSpPr>
+        <p:spPr>
+          <a:xfrm>
+            <a:off x="0" y="0"/>
+            <a:ext cx="12191695" cy="1051560"/>
+          </a:xfrm>
+          <a:prstGeom prst="rect">
+            <a:avLst/>
+          </a:prstGeom>
+          <a:solidFill>
+            <a:srgbClr val="1F3C88"/>
+          </a:solidFill>
+          <a:ln>
+            <a:noFill/>
+          </a:ln>
+          <a:effectLst/>
+        </p:spPr>
+        <p:style>
+          <a:lnRef idx="1">
+            <a:schemeClr val="accent1"/>
+          </a:lnRef>
+          <a:fillRef idx="3">
+            <a:schemeClr val="accent1"/>
+          </a:fillRef>
+          <a:effectRef idx="2">
+            <a:schemeClr val="accent1"/>
+          </a:effectRef>
+          <a:fontRef idx="minor">
+            <a:schemeClr val="lt1"/>
+          </a:fontRef>
+        </p:style>
+        <p:txBody>
+          <a:bodyPr rtlCol="0" anchor="ctr"/>
+          <a:lstStyle/>
+          <a:p>
+            <a:pPr algn="ctr"/>
+            <a:endParaRPr/>
+          </a:p>
+        </p:txBody>
+      </p:sp>
+      <p:sp>
+        <p:nvSpPr>
+          <p:cNvPr id="4" name="Rounded Rectangle 3"/>
+          <p:cNvSpPr/>
+          <p:nvPr/>
+        </p:nvSpPr>
+        <p:spPr>
+          <a:xfrm>
+            <a:off x="502920" y="329184"/>
+            <a:ext cx="566928" cy="384048"/>
+          </a:xfrm>
+          <a:prstGeom prst="roundRect">
+            <a:avLst>
+              <a:gd name="adj" fmla="val 30000"/>
+            </a:avLst>
+          </a:prstGeom>
+          <a:solidFill>
+            <a:srgbClr val="142A63"/>
+          </a:solidFill>
+          <a:ln>
+            <a:noFill/>
+          </a:ln>
+          <a:effectLst/>
+        </p:spPr>
+        <p:style>
+          <a:lnRef idx="1">
+            <a:schemeClr val="accent1"/>
+          </a:lnRef>
+          <a:fillRef idx="3">
+            <a:schemeClr val="accent1"/>
+          </a:fillRef>
+          <a:effectRef idx="2">
+            <a:schemeClr val="accent1"/>
+          </a:effectRef>
+          <a:fontRef idx="minor">
+            <a:schemeClr val="lt1"/>
+          </a:fontRef>
+        </p:style>
+        <p:txBody>
+          <a:bodyPr rtlCol="0" anchor="ctr"/>
+          <a:lstStyle/>
+          <a:p>
+            <a:pPr algn="ctr"/>
+            <a:r>
+              <a:rPr sz="1300" b="1">
+                <a:solidFill>
+                  <a:srgbClr val="FFFFFF"/>
+                </a:solidFill>
+                <a:latin typeface="Consolas"/>
+              </a:rPr>
+              <a:t>03</a:t>
+            </a:r>
+          </a:p>
+        </p:txBody>
+      </p:sp>
+      <p:sp>
+        <p:nvSpPr>
+          <p:cNvPr id="5" name="TextBox 4"/>
+          <p:cNvSpPr txBox="1"/>
+          <p:nvPr/>
+        </p:nvSpPr>
+        <p:spPr>
+          <a:xfrm>
+            <a:off x="1234440" y="256032"/>
+            <a:ext cx="7863840" cy="548640"/>
+          </a:xfrm>
+          <a:prstGeom prst="rect">
+            <a:avLst/>
+          </a:prstGeom>
+          <a:noFill/>
+        </p:spPr>
+        <p:txBody>
+          <a:bodyPr wrap="square" lIns="0" tIns="0" rIns="0" bIns="0" anchor="ctr">
+            <a:spAutoFit/>
+          </a:bodyPr>
+          <a:lstStyle/>
+          <a:p>
+            <a:pPr algn="l">
+              <a:lnSpc>
+                <a:spcPct val="115000"/>
+              </a:lnSpc>
+            </a:pPr>
+            <a:r>
+              <a:rPr sz="2200" b="1">
+                <a:solidFill>
+                  <a:srgbClr val="FFFFFF"/>
+                </a:solidFill>
+                <a:latin typeface="맑은 고딕"/>
+              </a:rPr>
+              <a:t>인터프리터 파이프라인 구조 (완성형)</a:t>
+            </a:r>
+          </a:p>
+        </p:txBody>
+      </p:sp>
+      <p:sp>
+        <p:nvSpPr>
+          <p:cNvPr id="6" name="TextBox 5"/>
+          <p:cNvSpPr txBox="1"/>
+          <p:nvPr/>
+        </p:nvSpPr>
+        <p:spPr>
+          <a:xfrm>
+            <a:off x="8595360" y="256032"/>
+            <a:ext cx="3108960" cy="548640"/>
+          </a:xfrm>
+          <a:prstGeom prst="rect">
+            <a:avLst/>
+          </a:prstGeom>
+          <a:noFill/>
+        </p:spPr>
+        <p:txBody>
+          <a:bodyPr wrap="square" lIns="0" tIns="0" rIns="0" bIns="0" anchor="ctr">
+            <a:spAutoFit/>
+          </a:bodyPr>
+          <a:lstStyle/>
+          <a:p>
+            <a:pPr algn="r">
+              <a:lnSpc>
+                <a:spcPct val="115000"/>
+              </a:lnSpc>
+            </a:pPr>
+            <a:r>
+              <a:rPr sz="1200" b="1">
+                <a:solidFill>
+                  <a:srgbClr val="D8E1F7"/>
+                </a:solidFill>
+                <a:latin typeface="맑은 고딕"/>
+              </a:rPr>
+              <a:t>Architecture</a:t>
+            </a:r>
+          </a:p>
+        </p:txBody>
+      </p:sp>
+      <p:cxnSp>
+        <p:nvCxnSpPr>
+          <p:cNvPr id="7" name="Connector 6"/>
+          <p:cNvCxnSpPr/>
+          <p:nvPr/>
+        </p:nvCxnSpPr>
+        <p:spPr>
+          <a:xfrm>
+            <a:off x="502920" y="6355080"/>
+            <a:ext cx="11183112" cy="0"/>
+          </a:xfrm>
+          <a:prstGeom prst="line">
+            <a:avLst/>
+          </a:prstGeom>
+          <a:ln w="12700">
+            <a:solidFill>
+              <a:srgbClr val="CFD9EE"/>
+            </a:solidFill>
+          </a:ln>
+        </p:spPr>
+        <p:style>
+          <a:lnRef idx="2">
+            <a:schemeClr val="accent1"/>
+          </a:lnRef>
+          <a:fillRef idx="0">
+            <a:schemeClr val="accent1"/>
+          </a:fillRef>
+          <a:effectRef idx="1">
+            <a:schemeClr val="accent1"/>
+          </a:effectRef>
+          <a:fontRef idx="minor">
+            <a:schemeClr val="tx1"/>
+          </a:fontRef>
+        </p:style>
+      </p:cxnSp>
+      <p:sp>
+        <p:nvSpPr>
+          <p:cNvPr id="8" name="TextBox 7"/>
+          <p:cNvSpPr txBox="1"/>
+          <p:nvPr/>
+        </p:nvSpPr>
+        <p:spPr>
+          <a:xfrm>
+            <a:off x="502920" y="6446520"/>
+            <a:ext cx="5486400" cy="320040"/>
+          </a:xfrm>
+          <a:prstGeom prst="rect">
+            <a:avLst/>
+          </a:prstGeom>
+          <a:noFill/>
+        </p:spPr>
+        <p:txBody>
+          <a:bodyPr wrap="square" lIns="0" tIns="0" rIns="0" bIns="0" anchor="ctr">
+            <a:spAutoFit/>
+          </a:bodyPr>
+          <a:lstStyle/>
+          <a:p>
+            <a:pPr algn="l">
+              <a:lnSpc>
+                <a:spcPct val="115000"/>
+              </a:lnSpc>
+            </a:pPr>
+            <a:r>
+              <a:rPr sz="1050" b="0">
+                <a:solidFill>
+                  <a:srgbClr val="5B6B8C"/>
+                </a:solidFill>
+                <a:latin typeface="Consolas"/>
+              </a:rPr>
+              <a:t>CodeFab Interpreter · 5일차 발표</a:t>
+            </a:r>
+          </a:p>
+        </p:txBody>
+      </p:sp>
+      <p:sp>
+        <p:nvSpPr>
+          <p:cNvPr id="9" name="TextBox 8"/>
+          <p:cNvSpPr txBox="1"/>
+          <p:nvPr/>
+        </p:nvSpPr>
+        <p:spPr>
+          <a:xfrm>
+            <a:off x="10424160" y="6446520"/>
+            <a:ext cx="1261872" cy="320040"/>
+          </a:xfrm>
+          <a:prstGeom prst="rect">
+            <a:avLst/>
+          </a:prstGeom>
+          <a:noFill/>
+        </p:spPr>
+        <p:txBody>
+          <a:bodyPr wrap="square" lIns="0" tIns="0" rIns="0" bIns="0" anchor="ctr">
+            <a:spAutoFit/>
+          </a:bodyPr>
+          <a:lstStyle/>
+          <a:p>
+            <a:pPr algn="r">
+              <a:lnSpc>
+                <a:spcPct val="115000"/>
+              </a:lnSpc>
+            </a:pPr>
+            <a:r>
+              <a:rPr sz="1050" b="0">
+                <a:solidFill>
+                  <a:srgbClr val="5B6B8C"/>
+                </a:solidFill>
+                <a:latin typeface="Consolas"/>
+              </a:rPr>
+              <a:t>5 / 14</a:t>
+            </a:r>
+          </a:p>
+        </p:txBody>
+      </p:sp>
+      <p:sp>
+        <p:nvSpPr>
+          <p:cNvPr id="10" name="Rectangle 9"/>
+          <p:cNvSpPr/>
+          <p:nvPr/>
+        </p:nvSpPr>
+        <p:spPr>
+          <a:xfrm>
+            <a:off x="502920" y="1371600"/>
+            <a:ext cx="45720" cy="685800"/>
+          </a:xfrm>
+          <a:prstGeom prst="rect">
+            <a:avLst/>
+          </a:prstGeom>
+          <a:solidFill>
+            <a:srgbClr val="1F3C88"/>
+          </a:solidFill>
+          <a:ln>
+            <a:noFill/>
+          </a:ln>
+          <a:effectLst/>
+        </p:spPr>
+        <p:style>
+          <a:lnRef idx="1">
+            <a:schemeClr val="accent1"/>
+          </a:lnRef>
+          <a:fillRef idx="3">
+            <a:schemeClr val="accent1"/>
+          </a:fillRef>
+          <a:effectRef idx="2">
+            <a:schemeClr val="accent1"/>
+          </a:effectRef>
+          <a:fontRef idx="minor">
+            <a:schemeClr val="lt1"/>
+          </a:fontRef>
+        </p:style>
+        <p:txBody>
+          <a:bodyPr rtlCol="0" anchor="ctr"/>
+          <a:lstStyle/>
+          <a:p>
+            <a:pPr algn="ctr"/>
+            <a:endParaRPr/>
+          </a:p>
+        </p:txBody>
+      </p:sp>
+      <p:sp>
+        <p:nvSpPr>
+          <p:cNvPr id="11" name="TextBox 10"/>
+          <p:cNvSpPr txBox="1"/>
+          <p:nvPr/>
+        </p:nvSpPr>
+        <p:spPr>
+          <a:xfrm>
             <a:off x="713232" y="1298448"/>
             <a:ext cx="10789920" cy="822960"/>
           </a:xfrm>
@@ -9810,7 +12230,7 @@
                 </a:solidFill>
                 <a:latin typeface="맑은 고딕"/>
               </a:rPr>
-              <a:t>소스 코드 한 줄이 결과가 되기까지, Tokenizer → Assembler → Checker → Executor 4단을 통과합니다.</a:t>
+              <a:t>1일차의 3단 구조가 3~4일차를 거치며, 소스 코드 한 줄이 결과가 되기까지 이렇게 4단을 통과하게 됐습니다.</a:t>
             </a:r>
           </a:p>
         </p:txBody>
@@ -10379,7 +12799,13 @@
           <p:cNvGraphicFramePr>
             <a:graphicFrameLocks noGrp="1"/>
           </p:cNvGraphicFramePr>
-          <p:nvPr/>
+          <p:nvPr>
+            <p:extLst>
+              <p:ext uri="{D42A27DB-BD31-4B8C-83A1-F6EECF244321}">
+                <p14:modId xmlns:p14="http://schemas.microsoft.com/office/powerpoint/2010/main" val="3471351818"/>
+              </p:ext>
+            </p:extLst>
+          </p:nvPr>
         </p:nvGraphicFramePr>
         <p:xfrm>
           <a:off x="502920" y="3703320"/>
@@ -10465,13 +12891,13 @@
                     <a:lstStyle/>
                     <a:p>
                       <a:r>
-                        <a:rPr sz="1300" b="1">
+                        <a:rPr sz="1300" b="1" dirty="0">
                           <a:solidFill>
                             <a:srgbClr val="142A63"/>
                           </a:solidFill>
                           <a:latin typeface="맑은 고딕"/>
                         </a:rPr>
-                        <a:t>Checker → (선택) Resolver/Optimizer</a:t>
+                        <a:t>Checker → Resolver/Optimizer</a:t>
                       </a:r>
                     </a:p>
                   </a:txBody>
@@ -10548,14 +12974,191 @@
                         </a:lnSpc>
                       </a:pPr>
                       <a:r>
-                        <a:rPr sz="1300">
-                          <a:solidFill>
-                            <a:srgbClr val="16213A"/>
-                          </a:solidFill>
-                          <a:latin typeface="맑은 고딕"/>
-                        </a:rPr>
-                        <a:t>Ch.6 import 문을 만나면 대상 파일을 재귀적으로 어셈블·검증 후 현재 스코프에 값으로 바인딩</a:t>
-                      </a:r>
+                        <a:rPr sz="1300" dirty="0">
+                          <a:solidFill>
+                            <a:srgbClr val="16213A"/>
+                          </a:solidFill>
+                          <a:latin typeface="맑은 고딕"/>
+                        </a:rPr>
+                        <a:t>Ch.6 import </a:t>
+                      </a:r>
+                      <a:r>
+                        <a:rPr sz="1300" dirty="0" err="1">
+                          <a:solidFill>
+                            <a:srgbClr val="16213A"/>
+                          </a:solidFill>
+                          <a:latin typeface="맑은 고딕"/>
+                        </a:rPr>
+                        <a:t>문을</a:t>
+                      </a:r>
+                      <a:r>
+                        <a:rPr sz="1300" dirty="0">
+                          <a:solidFill>
+                            <a:srgbClr val="16213A"/>
+                          </a:solidFill>
+                          <a:latin typeface="맑은 고딕"/>
+                        </a:rPr>
+                        <a:t> </a:t>
+                      </a:r>
+                      <a:r>
+                        <a:rPr sz="1300" dirty="0" err="1">
+                          <a:solidFill>
+                            <a:srgbClr val="16213A"/>
+                          </a:solidFill>
+                          <a:latin typeface="맑은 고딕"/>
+                        </a:rPr>
+                        <a:t>만나면</a:t>
+                      </a:r>
+                      <a:r>
+                        <a:rPr sz="1300" dirty="0">
+                          <a:solidFill>
+                            <a:srgbClr val="16213A"/>
+                          </a:solidFill>
+                          <a:latin typeface="맑은 고딕"/>
+                        </a:rPr>
+                        <a:t> </a:t>
+                      </a:r>
+                      <a:r>
+                        <a:rPr sz="1300" dirty="0" err="1">
+                          <a:solidFill>
+                            <a:srgbClr val="16213A"/>
+                          </a:solidFill>
+                          <a:latin typeface="맑은 고딕"/>
+                        </a:rPr>
+                        <a:t>대상</a:t>
+                      </a:r>
+                      <a:r>
+                        <a:rPr sz="1300" dirty="0">
+                          <a:solidFill>
+                            <a:srgbClr val="16213A"/>
+                          </a:solidFill>
+                          <a:latin typeface="맑은 고딕"/>
+                        </a:rPr>
+                        <a:t> </a:t>
+                      </a:r>
+                      <a:r>
+                        <a:rPr sz="1300" dirty="0" err="1">
+                          <a:solidFill>
+                            <a:srgbClr val="16213A"/>
+                          </a:solidFill>
+                          <a:latin typeface="맑은 고딕"/>
+                        </a:rPr>
+                        <a:t>파일을</a:t>
+                      </a:r>
+                      <a:r>
+                        <a:rPr sz="1300" dirty="0">
+                          <a:solidFill>
+                            <a:srgbClr val="16213A"/>
+                          </a:solidFill>
+                          <a:latin typeface="맑은 고딕"/>
+                        </a:rPr>
+                        <a:t> </a:t>
+                      </a:r>
+                      <a:r>
+                        <a:rPr sz="1300" dirty="0" err="1">
+                          <a:solidFill>
+                            <a:srgbClr val="16213A"/>
+                          </a:solidFill>
+                          <a:latin typeface="맑은 고딕"/>
+                        </a:rPr>
+                        <a:t>재귀적으로</a:t>
+                      </a:r>
+                      <a:r>
+                        <a:rPr sz="1300" dirty="0">
+                          <a:solidFill>
+                            <a:srgbClr val="16213A"/>
+                          </a:solidFill>
+                          <a:latin typeface="맑은 고딕"/>
+                        </a:rPr>
+                        <a:t> </a:t>
+                      </a:r>
+                      <a:r>
+                        <a:rPr sz="1300" dirty="0" err="1">
+                          <a:solidFill>
+                            <a:srgbClr val="16213A"/>
+                          </a:solidFill>
+                          <a:latin typeface="맑은 고딕"/>
+                        </a:rPr>
+                        <a:t>어셈블·검증</a:t>
+                      </a:r>
+                      <a:r>
+                        <a:rPr sz="1300" dirty="0">
+                          <a:solidFill>
+                            <a:srgbClr val="16213A"/>
+                          </a:solidFill>
+                          <a:latin typeface="맑은 고딕"/>
+                        </a:rPr>
+                        <a:t> 후 </a:t>
+                      </a:r>
+                      <a:r>
+                        <a:rPr sz="1300" dirty="0" err="1">
+                          <a:solidFill>
+                            <a:srgbClr val="16213A"/>
+                          </a:solidFill>
+                          <a:latin typeface="맑은 고딕"/>
+                        </a:rPr>
+                        <a:t>현재</a:t>
+                      </a:r>
+                      <a:r>
+                        <a:rPr sz="1300" dirty="0">
+                          <a:solidFill>
+                            <a:srgbClr val="16213A"/>
+                          </a:solidFill>
+                          <a:latin typeface="맑은 고딕"/>
+                        </a:rPr>
+                        <a:t> </a:t>
+                      </a:r>
+                      <a:r>
+                        <a:rPr sz="1300" dirty="0" err="1">
+                          <a:solidFill>
+                            <a:srgbClr val="16213A"/>
+                          </a:solidFill>
+                          <a:latin typeface="맑은 고딕"/>
+                        </a:rPr>
+                        <a:t>스코프에</a:t>
+                      </a:r>
+                      <a:r>
+                        <a:rPr sz="1300" dirty="0">
+                          <a:solidFill>
+                            <a:srgbClr val="16213A"/>
+                          </a:solidFill>
+                          <a:latin typeface="맑은 고딕"/>
+                        </a:rPr>
+                        <a:t> </a:t>
+                      </a:r>
+                      <a:r>
+                        <a:rPr sz="1300" dirty="0" err="1">
+                          <a:solidFill>
+                            <a:srgbClr val="16213A"/>
+                          </a:solidFill>
+                          <a:latin typeface="맑은 고딕"/>
+                        </a:rPr>
+                        <a:t>값으로</a:t>
+                      </a:r>
+                      <a:r>
+                        <a:rPr sz="1300" dirty="0">
+                          <a:solidFill>
+                            <a:srgbClr val="16213A"/>
+                          </a:solidFill>
+                          <a:latin typeface="맑은 고딕"/>
+                        </a:rPr>
+                        <a:t> </a:t>
+                      </a:r>
+                      <a:r>
+                        <a:rPr sz="1300" dirty="0" err="1">
+                          <a:solidFill>
+                            <a:srgbClr val="16213A"/>
+                          </a:solidFill>
+                          <a:latin typeface="맑은 고딕"/>
+                        </a:rPr>
+                        <a:t>바인딩</a:t>
+                      </a:r>
+                      <a:endParaRPr sz="1300" dirty="0">
+                        <a:solidFill>
+                          <a:srgbClr val="16213A"/>
+                        </a:solidFill>
+                        <a:latin typeface="맑은 고딕"/>
+                      </a:endParaRPr>
                     </a:p>
                   </a:txBody>
                   <a:tcPr marL="109728" marR="109728" marT="91440" marB="91440">
@@ -10582,7 +13185,7 @@
 </p:sld>
 </file>
 
-<file path=ppt/slides/slide5.xml><?xml version="1.0" encoding="utf-8"?>
+<file path=ppt/slides/slide6.xml><?xml version="1.0" encoding="utf-8"?>
 <p:sld xmlns:a="http://schemas.openxmlformats.org/drawingml/2006/main" xmlns:r="http://schemas.openxmlformats.org/officeDocument/2006/relationships" xmlns:p="http://schemas.openxmlformats.org/presentationml/2006/main">
   <p:cSld>
     <p:spTree>
@@ -10739,7 +13342,7 @@
                 </a:solidFill>
                 <a:latin typeface="Consolas"/>
               </a:rPr>
-              <a:t>02</a:t>
+              <a:t>03</a:t>
             </a:r>
           </a:p>
         </p:txBody>
@@ -10778,7 +13381,7 @@
                 </a:solidFill>
                 <a:latin typeface="맑은 고딕"/>
               </a:rPr>
-              <a:t>Chapter별 기능 구현 요약</a:t>
+              <a:t>Chapter별 기능 구현 요약 (3~4일차 확장)</a:t>
             </a:r>
           </a:p>
         </p:txBody>
@@ -10930,7 +13533,7 @@
                 </a:solidFill>
                 <a:latin typeface="Consolas"/>
               </a:rPr>
-              <a:t>5 / 11</a:t>
+              <a:t>6 / 14</a:t>
             </a:r>
           </a:p>
         </p:txBody>
@@ -10941,7 +13544,13 @@
           <p:cNvGraphicFramePr>
             <a:graphicFrameLocks noGrp="1"/>
           </p:cNvGraphicFramePr>
-          <p:nvPr/>
+          <p:nvPr>
+            <p:extLst>
+              <p:ext uri="{D42A27DB-BD31-4B8C-83A1-F6EECF244321}">
+                <p14:modId xmlns:p14="http://schemas.microsoft.com/office/powerpoint/2010/main" val="636262083"/>
+              </p:ext>
+            </p:extLst>
+          </p:nvPr>
         </p:nvGraphicFramePr>
         <p:xfrm>
           <a:off x="502920" y="1417320"/>
@@ -11027,14 +13636,29 @@
                     <a:lstStyle/>
                     <a:p>
                       <a:r>
-                        <a:rPr sz="1300" b="1">
+                        <a:rPr sz="1300" b="1" dirty="0">
                           <a:solidFill>
                             <a:srgbClr val="142A63"/>
                           </a:solidFill>
                           <a:latin typeface="맑은 고딕"/>
                         </a:rPr>
-                        <a:t>Ch.1 기초</a:t>
-                      </a:r>
+                        <a:t>Ch.1 </a:t>
+                      </a:r>
+                      <a:r>
+                        <a:rPr sz="1300" b="1" dirty="0" err="1">
+                          <a:solidFill>
+                            <a:srgbClr val="142A63"/>
+                          </a:solidFill>
+                          <a:latin typeface="맑은 고딕"/>
+                        </a:rPr>
+                        <a:t>기초</a:t>
+                      </a:r>
+                      <a:endParaRPr sz="1300" b="1" dirty="0">
+                        <a:solidFill>
+                          <a:srgbClr val="142A63"/>
+                        </a:solidFill>
+                        <a:latin typeface="맑은 고딕"/>
+                      </a:endParaRPr>
                     </a:p>
                   </a:txBody>
                   <a:tcPr marL="109728" marR="109728" marT="91440" marB="91440">
@@ -11390,13 +14014,94 @@
                         </a:lnSpc>
                       </a:pPr>
                       <a:r>
-                        <a:rPr sz="1300">
-                          <a:solidFill>
-                            <a:srgbClr val="16213A"/>
-                          </a:solidFill>
-                          <a:latin typeface="맑은 고딕"/>
-                        </a:rPr>
-                        <a:t>프롬프트(REPL) · 파일 · 디버그(step/breakpoint/watch) 3가지 실행 모드 (cli.py, app/repl.py, app/debug.py)</a:t>
+                        <a:rPr sz="1300" dirty="0" err="1">
+                          <a:solidFill>
+                            <a:srgbClr val="16213A"/>
+                          </a:solidFill>
+                          <a:latin typeface="맑은 고딕"/>
+                        </a:rPr>
+                        <a:t>프롬프트</a:t>
+                      </a:r>
+                      <a:r>
+                        <a:rPr sz="1300" dirty="0">
+                          <a:solidFill>
+                            <a:srgbClr val="16213A"/>
+                          </a:solidFill>
+                          <a:latin typeface="맑은 고딕"/>
+                        </a:rPr>
+                        <a:t>(REPL) · </a:t>
+                      </a:r>
+                      <a:r>
+                        <a:rPr sz="1300" dirty="0" err="1">
+                          <a:solidFill>
+                            <a:srgbClr val="16213A"/>
+                          </a:solidFill>
+                          <a:latin typeface="맑은 고딕"/>
+                        </a:rPr>
+                        <a:t>파일</a:t>
+                      </a:r>
+                      <a:r>
+                        <a:rPr sz="1300" dirty="0">
+                          <a:solidFill>
+                            <a:srgbClr val="16213A"/>
+                          </a:solidFill>
+                          <a:latin typeface="맑은 고딕"/>
+                        </a:rPr>
+                        <a:t> · </a:t>
+                      </a:r>
+                      <a:r>
+                        <a:rPr sz="1300" dirty="0" err="1">
+                          <a:solidFill>
+                            <a:srgbClr val="16213A"/>
+                          </a:solidFill>
+                          <a:latin typeface="맑은 고딕"/>
+                        </a:rPr>
+                        <a:t>디버그</a:t>
+                      </a:r>
+                      <a:r>
+                        <a:rPr sz="1300" dirty="0">
+                          <a:solidFill>
+                            <a:srgbClr val="16213A"/>
+                          </a:solidFill>
+                          <a:latin typeface="맑은 고딕"/>
+                        </a:rPr>
+                        <a:t>(step/breakpoint/watch) 3가지 </a:t>
+                      </a:r>
+                      <a:r>
+                        <a:rPr sz="1300" dirty="0" err="1">
+                          <a:solidFill>
+                            <a:srgbClr val="16213A"/>
+                          </a:solidFill>
+                          <a:latin typeface="맑은 고딕"/>
+                        </a:rPr>
+                        <a:t>실행</a:t>
+                      </a:r>
+                      <a:r>
+                        <a:rPr sz="1300" dirty="0">
+                          <a:solidFill>
+                            <a:srgbClr val="16213A"/>
+                          </a:solidFill>
+                          <a:latin typeface="맑은 고딕"/>
+                        </a:rPr>
+                        <a:t> </a:t>
+                      </a:r>
+                      <a:r>
+                        <a:rPr sz="1300" dirty="0" err="1">
+                          <a:solidFill>
+                            <a:srgbClr val="16213A"/>
+                          </a:solidFill>
+                          <a:latin typeface="맑은 고딕"/>
+                        </a:rPr>
+                        <a:t>모드</a:t>
+                      </a:r>
+                      <a:r>
+                        <a:rPr sz="1300" dirty="0">
+                          <a:solidFill>
+                            <a:srgbClr val="16213A"/>
+                          </a:solidFill>
+                          <a:latin typeface="맑은 고딕"/>
+                        </a:rPr>
+                        <a:t> (cli.py, app/repl.py, app/debug.py)</a:t>
                       </a:r>
                     </a:p>
                   </a:txBody>
@@ -11424,7 +14129,7 @@
 </p:sld>
 </file>
 
-<file path=ppt/slides/slide6.xml><?xml version="1.0" encoding="utf-8"?>
+<file path=ppt/slides/slide7.xml><?xml version="1.0" encoding="utf-8"?>
 <p:sld xmlns:a="http://schemas.openxmlformats.org/drawingml/2006/main" xmlns:r="http://schemas.openxmlformats.org/officeDocument/2006/relationships" xmlns:p="http://schemas.openxmlformats.org/presentationml/2006/main">
   <p:cSld>
     <p:spTree>
@@ -11633,8 +14338,8 @@
         </p:nvSpPr>
         <p:spPr>
           <a:xfrm>
-            <a:off x="8595360" y="433947"/>
-            <a:ext cx="3108960" cy="192810"/>
+            <a:off x="8595360" y="256032"/>
+            <a:ext cx="3108960" cy="548640"/>
           </a:xfrm>
           <a:prstGeom prst="rect">
             <a:avLst/>
@@ -11653,47 +14358,14 @@
               </a:lnSpc>
             </a:pPr>
             <a:r>
-              <a:rPr sz="1200" b="1" dirty="0">
+              <a:rPr sz="1200" b="1">
                 <a:solidFill>
                   <a:srgbClr val="D8E1F7"/>
                 </a:solidFill>
                 <a:latin typeface="맑은 고딕"/>
               </a:rPr>
-              <a:t>BP 1/</a:t>
-            </a:r>
-            <a:r>
-              <a:rPr lang="en-US" sz="1200" b="1" dirty="0">
-                <a:solidFill>
-                  <a:srgbClr val="D8E1F7"/>
-                </a:solidFill>
-                <a:latin typeface="맑은 고딕"/>
-              </a:rPr>
-              <a:t>6</a:t>
-            </a:r>
-            <a:r>
-              <a:rPr sz="1200" b="1" dirty="0">
-                <a:solidFill>
-                  <a:srgbClr val="D8E1F7"/>
-                </a:solidFill>
-                <a:latin typeface="맑은 고딕"/>
-              </a:rPr>
-              <a:t> · TDD </a:t>
-            </a:r>
-            <a:r>
-              <a:rPr sz="1200" b="1" dirty="0" err="1">
-                <a:solidFill>
-                  <a:srgbClr val="D8E1F7"/>
-                </a:solidFill>
-                <a:latin typeface="맑은 고딕"/>
-              </a:rPr>
-              <a:t>전략</a:t>
-            </a:r>
-            <a:endParaRPr sz="1200" b="1" dirty="0">
-              <a:solidFill>
-                <a:srgbClr val="D8E1F7"/>
-              </a:solidFill>
-              <a:latin typeface="맑은 고딕"/>
-            </a:endParaRPr>
+              <a:t>BP 1/6 · TDD 전략</a:t>
+            </a:r>
           </a:p>
         </p:txBody>
       </p:sp>
@@ -11805,7 +14477,7 @@
                 </a:solidFill>
                 <a:latin typeface="Consolas"/>
               </a:rPr>
-              <a:t>6 / 11</a:t>
+              <a:t>7 / 14</a:t>
             </a:r>
           </a:p>
         </p:txBody>
@@ -12305,967 +14977,6 @@
                           <a:latin typeface="맑은 고딕"/>
                         </a:rPr>
                         <a:t>이후 Issue #93(print 다중값 미지원)처럼 실제 이슈로도 등록되어 별도로 추적된다.</a:t>
-                      </a:r>
-                    </a:p>
-                  </a:txBody>
-                  <a:tcPr marL="109728" marR="109728" marT="91440" marB="91440">
-                    <a:solidFill>
-                      <a:srgbClr val="FFFFFF"/>
-                    </a:solidFill>
-                  </a:tcPr>
-                </a:tc>
-                <a:extLst>
-                  <a:ext uri="{0D108BD9-81ED-4DB2-BD59-A6C34878D82A}">
-                    <a16:rowId xmlns:a16="http://schemas.microsoft.com/office/drawing/2014/main" val="10003"/>
-                  </a:ext>
-                </a:extLst>
-              </a:tr>
-            </a:tbl>
-          </a:graphicData>
-        </a:graphic>
-      </p:graphicFrame>
-    </p:spTree>
-  </p:cSld>
-  <p:clrMapOvr>
-    <a:masterClrMapping/>
-  </p:clrMapOvr>
-</p:sld>
-</file>
-
-<file path=ppt/slides/slide7.xml><?xml version="1.0" encoding="utf-8"?>
-<p:sld xmlns:a="http://schemas.openxmlformats.org/drawingml/2006/main" xmlns:r="http://schemas.openxmlformats.org/officeDocument/2006/relationships" xmlns:p="http://schemas.openxmlformats.org/presentationml/2006/main">
-  <p:cSld>
-    <p:spTree>
-      <p:nvGrpSpPr>
-        <p:cNvPr id="1" name=""/>
-        <p:cNvGrpSpPr/>
-        <p:nvPr/>
-      </p:nvGrpSpPr>
-      <p:grpSpPr>
-        <a:xfrm>
-          <a:off x="0" y="0"/>
-          <a:ext cx="0" cy="0"/>
-          <a:chOff x="0" y="0"/>
-          <a:chExt cx="0" cy="0"/>
-        </a:xfrm>
-      </p:grpSpPr>
-      <p:sp>
-        <p:nvSpPr>
-          <p:cNvPr id="2" name="Rectangle 1"/>
-          <p:cNvSpPr/>
-          <p:nvPr/>
-        </p:nvSpPr>
-        <p:spPr>
-          <a:xfrm>
-            <a:off x="0" y="0"/>
-            <a:ext cx="12191695" cy="6858000"/>
-          </a:xfrm>
-          <a:prstGeom prst="rect">
-            <a:avLst/>
-          </a:prstGeom>
-          <a:solidFill>
-            <a:srgbClr val="FFFFFF"/>
-          </a:solidFill>
-          <a:ln>
-            <a:noFill/>
-          </a:ln>
-          <a:effectLst/>
-        </p:spPr>
-        <p:style>
-          <a:lnRef idx="1">
-            <a:schemeClr val="accent1"/>
-          </a:lnRef>
-          <a:fillRef idx="3">
-            <a:schemeClr val="accent1"/>
-          </a:fillRef>
-          <a:effectRef idx="2">
-            <a:schemeClr val="accent1"/>
-          </a:effectRef>
-          <a:fontRef idx="minor">
-            <a:schemeClr val="lt1"/>
-          </a:fontRef>
-        </p:style>
-        <p:txBody>
-          <a:bodyPr rtlCol="0" anchor="ctr"/>
-          <a:lstStyle/>
-          <a:p>
-            <a:pPr algn="ctr"/>
-            <a:endParaRPr/>
-          </a:p>
-        </p:txBody>
-      </p:sp>
-      <p:sp>
-        <p:nvSpPr>
-          <p:cNvPr id="3" name="Rectangle 2"/>
-          <p:cNvSpPr/>
-          <p:nvPr/>
-        </p:nvSpPr>
-        <p:spPr>
-          <a:xfrm>
-            <a:off x="0" y="0"/>
-            <a:ext cx="12191695" cy="1051560"/>
-          </a:xfrm>
-          <a:prstGeom prst="rect">
-            <a:avLst/>
-          </a:prstGeom>
-          <a:solidFill>
-            <a:srgbClr val="1F3C88"/>
-          </a:solidFill>
-          <a:ln>
-            <a:noFill/>
-          </a:ln>
-          <a:effectLst/>
-        </p:spPr>
-        <p:style>
-          <a:lnRef idx="1">
-            <a:schemeClr val="accent1"/>
-          </a:lnRef>
-          <a:fillRef idx="3">
-            <a:schemeClr val="accent1"/>
-          </a:fillRef>
-          <a:effectRef idx="2">
-            <a:schemeClr val="accent1"/>
-          </a:effectRef>
-          <a:fontRef idx="minor">
-            <a:schemeClr val="lt1"/>
-          </a:fontRef>
-        </p:style>
-        <p:txBody>
-          <a:bodyPr rtlCol="0" anchor="ctr"/>
-          <a:lstStyle/>
-          <a:p>
-            <a:pPr algn="ctr"/>
-            <a:endParaRPr/>
-          </a:p>
-        </p:txBody>
-      </p:sp>
-      <p:sp>
-        <p:nvSpPr>
-          <p:cNvPr id="4" name="Rounded Rectangle 3"/>
-          <p:cNvSpPr/>
-          <p:nvPr/>
-        </p:nvSpPr>
-        <p:spPr>
-          <a:xfrm>
-            <a:off x="502920" y="329184"/>
-            <a:ext cx="566928" cy="384048"/>
-          </a:xfrm>
-          <a:prstGeom prst="roundRect">
-            <a:avLst>
-              <a:gd name="adj" fmla="val 30000"/>
-            </a:avLst>
-          </a:prstGeom>
-          <a:solidFill>
-            <a:srgbClr val="142A63"/>
-          </a:solidFill>
-          <a:ln>
-            <a:noFill/>
-          </a:ln>
-          <a:effectLst/>
-        </p:spPr>
-        <p:style>
-          <a:lnRef idx="1">
-            <a:schemeClr val="accent1"/>
-          </a:lnRef>
-          <a:fillRef idx="3">
-            <a:schemeClr val="accent1"/>
-          </a:fillRef>
-          <a:effectRef idx="2">
-            <a:schemeClr val="accent1"/>
-          </a:effectRef>
-          <a:fontRef idx="minor">
-            <a:schemeClr val="lt1"/>
-          </a:fontRef>
-        </p:style>
-        <p:txBody>
-          <a:bodyPr rtlCol="0" anchor="ctr"/>
-          <a:lstStyle/>
-          <a:p>
-            <a:pPr algn="ctr"/>
-            <a:r>
-              <a:rPr sz="1300" b="1">
-                <a:solidFill>
-                  <a:srgbClr val="FFFFFF"/>
-                </a:solidFill>
-                <a:latin typeface="Consolas"/>
-              </a:rPr>
-              <a:t>BP2</a:t>
-            </a:r>
-          </a:p>
-        </p:txBody>
-      </p:sp>
-      <p:sp>
-        <p:nvSpPr>
-          <p:cNvPr id="5" name="TextBox 4"/>
-          <p:cNvSpPr txBox="1"/>
-          <p:nvPr/>
-        </p:nvSpPr>
-        <p:spPr>
-          <a:xfrm>
-            <a:off x="1234440" y="256032"/>
-            <a:ext cx="7863840" cy="548640"/>
-          </a:xfrm>
-          <a:prstGeom prst="rect">
-            <a:avLst/>
-          </a:prstGeom>
-          <a:noFill/>
-        </p:spPr>
-        <p:txBody>
-          <a:bodyPr wrap="square" lIns="0" tIns="0" rIns="0" bIns="0" anchor="ctr">
-            <a:spAutoFit/>
-          </a:bodyPr>
-          <a:lstStyle/>
-          <a:p>
-            <a:pPr algn="l">
-              <a:lnSpc>
-                <a:spcPct val="115000"/>
-              </a:lnSpc>
-            </a:pPr>
-            <a:r>
-              <a:rPr sz="2200" b="1">
-                <a:solidFill>
-                  <a:srgbClr val="FFFFFF"/>
-                </a:solidFill>
-                <a:latin typeface="맑은 고딕"/>
-              </a:rPr>
-              <a:t>리뷰는 “읽기”가 아니라 “실행”으로 끝낸다</a:t>
-            </a:r>
-          </a:p>
-        </p:txBody>
-      </p:sp>
-      <p:sp>
-        <p:nvSpPr>
-          <p:cNvPr id="6" name="TextBox 5"/>
-          <p:cNvSpPr txBox="1"/>
-          <p:nvPr/>
-        </p:nvSpPr>
-        <p:spPr>
-          <a:xfrm>
-            <a:off x="8595360" y="433947"/>
-            <a:ext cx="3108960" cy="192810"/>
-          </a:xfrm>
-          <a:prstGeom prst="rect">
-            <a:avLst/>
-          </a:prstGeom>
-          <a:noFill/>
-        </p:spPr>
-        <p:txBody>
-          <a:bodyPr wrap="square" lIns="0" tIns="0" rIns="0" bIns="0" anchor="ctr">
-            <a:spAutoFit/>
-          </a:bodyPr>
-          <a:lstStyle/>
-          <a:p>
-            <a:pPr algn="r">
-              <a:lnSpc>
-                <a:spcPct val="115000"/>
-              </a:lnSpc>
-            </a:pPr>
-            <a:r>
-              <a:rPr sz="1200" b="1" dirty="0">
-                <a:solidFill>
-                  <a:srgbClr val="D8E1F7"/>
-                </a:solidFill>
-                <a:latin typeface="맑은 고딕"/>
-              </a:rPr>
-              <a:t>BP 2/</a:t>
-            </a:r>
-            <a:r>
-              <a:rPr lang="en-US" sz="1200" b="1" dirty="0">
-                <a:solidFill>
-                  <a:srgbClr val="D8E1F7"/>
-                </a:solidFill>
-                <a:latin typeface="맑은 고딕"/>
-              </a:rPr>
-              <a:t>6</a:t>
-            </a:r>
-            <a:r>
-              <a:rPr sz="1200" b="1" dirty="0">
-                <a:solidFill>
-                  <a:srgbClr val="D8E1F7"/>
-                </a:solidFill>
-                <a:latin typeface="맑은 고딕"/>
-              </a:rPr>
-              <a:t> · </a:t>
-            </a:r>
-            <a:r>
-              <a:rPr sz="1200" b="1" dirty="0" err="1">
-                <a:solidFill>
-                  <a:srgbClr val="D8E1F7"/>
-                </a:solidFill>
-                <a:latin typeface="맑은 고딕"/>
-              </a:rPr>
-              <a:t>리뷰</a:t>
-            </a:r>
-            <a:r>
-              <a:rPr sz="1200" b="1" dirty="0">
-                <a:solidFill>
-                  <a:srgbClr val="D8E1F7"/>
-                </a:solidFill>
-                <a:latin typeface="맑은 고딕"/>
-              </a:rPr>
-              <a:t> </a:t>
-            </a:r>
-            <a:r>
-              <a:rPr sz="1200" b="1" dirty="0" err="1">
-                <a:solidFill>
-                  <a:srgbClr val="D8E1F7"/>
-                </a:solidFill>
-                <a:latin typeface="맑은 고딕"/>
-              </a:rPr>
-              <a:t>문화</a:t>
-            </a:r>
-            <a:endParaRPr sz="1200" b="1" dirty="0">
-              <a:solidFill>
-                <a:srgbClr val="D8E1F7"/>
-              </a:solidFill>
-              <a:latin typeface="맑은 고딕"/>
-            </a:endParaRPr>
-          </a:p>
-        </p:txBody>
-      </p:sp>
-      <p:cxnSp>
-        <p:nvCxnSpPr>
-          <p:cNvPr id="7" name="Connector 6"/>
-          <p:cNvCxnSpPr/>
-          <p:nvPr/>
-        </p:nvCxnSpPr>
-        <p:spPr>
-          <a:xfrm>
-            <a:off x="502920" y="6355080"/>
-            <a:ext cx="11183112" cy="0"/>
-          </a:xfrm>
-          <a:prstGeom prst="line">
-            <a:avLst/>
-          </a:prstGeom>
-          <a:ln w="12700">
-            <a:solidFill>
-              <a:srgbClr val="CFD9EE"/>
-            </a:solidFill>
-          </a:ln>
-        </p:spPr>
-        <p:style>
-          <a:lnRef idx="2">
-            <a:schemeClr val="accent1"/>
-          </a:lnRef>
-          <a:fillRef idx="0">
-            <a:schemeClr val="accent1"/>
-          </a:fillRef>
-          <a:effectRef idx="1">
-            <a:schemeClr val="accent1"/>
-          </a:effectRef>
-          <a:fontRef idx="minor">
-            <a:schemeClr val="tx1"/>
-          </a:fontRef>
-        </p:style>
-      </p:cxnSp>
-      <p:sp>
-        <p:nvSpPr>
-          <p:cNvPr id="8" name="TextBox 7"/>
-          <p:cNvSpPr txBox="1"/>
-          <p:nvPr/>
-        </p:nvSpPr>
-        <p:spPr>
-          <a:xfrm>
-            <a:off x="502920" y="6446520"/>
-            <a:ext cx="5486400" cy="320040"/>
-          </a:xfrm>
-          <a:prstGeom prst="rect">
-            <a:avLst/>
-          </a:prstGeom>
-          <a:noFill/>
-        </p:spPr>
-        <p:txBody>
-          <a:bodyPr wrap="square" lIns="0" tIns="0" rIns="0" bIns="0" anchor="ctr">
-            <a:spAutoFit/>
-          </a:bodyPr>
-          <a:lstStyle/>
-          <a:p>
-            <a:pPr algn="l">
-              <a:lnSpc>
-                <a:spcPct val="115000"/>
-              </a:lnSpc>
-            </a:pPr>
-            <a:r>
-              <a:rPr sz="1050" b="0">
-                <a:solidFill>
-                  <a:srgbClr val="5B6B8C"/>
-                </a:solidFill>
-                <a:latin typeface="Consolas"/>
-              </a:rPr>
-              <a:t>CodeFab Interpreter · 5일차 발표</a:t>
-            </a:r>
-          </a:p>
-        </p:txBody>
-      </p:sp>
-      <p:sp>
-        <p:nvSpPr>
-          <p:cNvPr id="9" name="TextBox 8"/>
-          <p:cNvSpPr txBox="1"/>
-          <p:nvPr/>
-        </p:nvSpPr>
-        <p:spPr>
-          <a:xfrm>
-            <a:off x="10424160" y="6446520"/>
-            <a:ext cx="1261872" cy="320040"/>
-          </a:xfrm>
-          <a:prstGeom prst="rect">
-            <a:avLst/>
-          </a:prstGeom>
-          <a:noFill/>
-        </p:spPr>
-        <p:txBody>
-          <a:bodyPr wrap="square" lIns="0" tIns="0" rIns="0" bIns="0" anchor="ctr">
-            <a:spAutoFit/>
-          </a:bodyPr>
-          <a:lstStyle/>
-          <a:p>
-            <a:pPr algn="r">
-              <a:lnSpc>
-                <a:spcPct val="115000"/>
-              </a:lnSpc>
-            </a:pPr>
-            <a:r>
-              <a:rPr sz="1050" b="0">
-                <a:solidFill>
-                  <a:srgbClr val="5B6B8C"/>
-                </a:solidFill>
-                <a:latin typeface="Consolas"/>
-              </a:rPr>
-              <a:t>7 / 11</a:t>
-            </a:r>
-          </a:p>
-        </p:txBody>
-      </p:sp>
-      <p:sp>
-        <p:nvSpPr>
-          <p:cNvPr id="10" name="Rectangle 9"/>
-          <p:cNvSpPr/>
-          <p:nvPr/>
-        </p:nvSpPr>
-        <p:spPr>
-          <a:xfrm>
-            <a:off x="502920" y="1371600"/>
-            <a:ext cx="45720" cy="685800"/>
-          </a:xfrm>
-          <a:prstGeom prst="rect">
-            <a:avLst/>
-          </a:prstGeom>
-          <a:solidFill>
-            <a:srgbClr val="1F3C88"/>
-          </a:solidFill>
-          <a:ln>
-            <a:noFill/>
-          </a:ln>
-          <a:effectLst/>
-        </p:spPr>
-        <p:style>
-          <a:lnRef idx="1">
-            <a:schemeClr val="accent1"/>
-          </a:lnRef>
-          <a:fillRef idx="3">
-            <a:schemeClr val="accent1"/>
-          </a:fillRef>
-          <a:effectRef idx="2">
-            <a:schemeClr val="accent1"/>
-          </a:effectRef>
-          <a:fontRef idx="minor">
-            <a:schemeClr val="lt1"/>
-          </a:fontRef>
-        </p:style>
-        <p:txBody>
-          <a:bodyPr rtlCol="0" anchor="ctr"/>
-          <a:lstStyle/>
-          <a:p>
-            <a:pPr algn="ctr"/>
-            <a:endParaRPr/>
-          </a:p>
-        </p:txBody>
-      </p:sp>
-      <p:sp>
-        <p:nvSpPr>
-          <p:cNvPr id="11" name="TextBox 10"/>
-          <p:cNvSpPr txBox="1"/>
-          <p:nvPr/>
-        </p:nvSpPr>
-        <p:spPr>
-          <a:xfrm>
-            <a:off x="713232" y="1298448"/>
-            <a:ext cx="10789920" cy="822960"/>
-          </a:xfrm>
-          <a:prstGeom prst="rect">
-            <a:avLst/>
-          </a:prstGeom>
-          <a:noFill/>
-        </p:spPr>
-        <p:txBody>
-          <a:bodyPr wrap="square" lIns="0" tIns="0" rIns="0" bIns="0" anchor="ctr">
-            <a:spAutoFit/>
-          </a:bodyPr>
-          <a:lstStyle/>
-          <a:p>
-            <a:pPr algn="l">
-              <a:lnSpc>
-                <a:spcPct val="130000"/>
-              </a:lnSpc>
-            </a:pPr>
-            <a:r>
-              <a:rPr sz="1700" b="1">
-                <a:solidFill>
-                  <a:srgbClr val="16213A"/>
-                </a:solidFill>
-                <a:latin typeface="맑은 고딕"/>
-              </a:rPr>
-              <a:t>PR #65: 파서 결과만 보지 않고 실제로 인터프리터를 돌려봐야 파이프라인 전체가 동작하는지 알 수 있다.</a:t>
-            </a:r>
-          </a:p>
-        </p:txBody>
-      </p:sp>
-      <p:sp>
-        <p:nvSpPr>
-          <p:cNvPr id="12" name="Rounded Rectangle 11"/>
-          <p:cNvSpPr/>
-          <p:nvPr/>
-        </p:nvSpPr>
-        <p:spPr>
-          <a:xfrm>
-            <a:off x="502920" y="2240280"/>
-            <a:ext cx="5486400" cy="3611880"/>
-          </a:xfrm>
-          <a:prstGeom prst="roundRect">
-            <a:avLst>
-              <a:gd name="adj" fmla="val 4500"/>
-            </a:avLst>
-          </a:prstGeom>
-          <a:solidFill>
-            <a:srgbClr val="0F1C3F"/>
-          </a:solidFill>
-          <a:ln>
-            <a:noFill/>
-          </a:ln>
-          <a:effectLst/>
-        </p:spPr>
-        <p:style>
-          <a:lnRef idx="1">
-            <a:schemeClr val="accent1"/>
-          </a:lnRef>
-          <a:fillRef idx="3">
-            <a:schemeClr val="accent1"/>
-          </a:fillRef>
-          <a:effectRef idx="2">
-            <a:schemeClr val="accent1"/>
-          </a:effectRef>
-          <a:fontRef idx="minor">
-            <a:schemeClr val="lt1"/>
-          </a:fontRef>
-        </p:style>
-        <p:txBody>
-          <a:bodyPr wrap="square" lIns="256032" tIns="182880" rIns="256032" bIns="182880" rtlCol="0" anchor="ctr"/>
-          <a:lstStyle/>
-          <a:p>
-            <a:pPr algn="ctr">
-              <a:lnSpc>
-                <a:spcPct val="105000"/>
-              </a:lnSpc>
-            </a:pPr>
-            <a:r>
-              <a:rPr sz="1050" b="1">
-                <a:solidFill>
-                  <a:srgbClr val="7FA8FF"/>
-                </a:solidFill>
-                <a:latin typeface="맑은 고딕"/>
-              </a:rPr>
-              <a:t>PR #65 · 가져오기(import) 통합 누락(wiring gap) 발견</a:t>
-            </a:r>
-          </a:p>
-          <a:p>
-            <a:pPr>
-              <a:lnSpc>
-                <a:spcPct val="128000"/>
-              </a:lnSpc>
-              <a:spcBef>
-                <a:spcPts val="100"/>
-              </a:spcBef>
-            </a:pPr>
-            <a:r>
-              <a:rPr sz="1250">
-                <a:solidFill>
-                  <a:srgbClr val="7FA8FF"/>
-                </a:solidFill>
-                <a:latin typeface="Consolas"/>
-              </a:rPr>
-              <a:t>리뷰어(kimbyungnam):</a:t>
-            </a:r>
-          </a:p>
-          <a:p>
-            <a:pPr>
-              <a:lnSpc>
-                <a:spcPct val="128000"/>
-              </a:lnSpc>
-              <a:spcBef>
-                <a:spcPts val="100"/>
-              </a:spcBef>
-            </a:pPr>
-            <a:r>
-              <a:rPr sz="1250">
-                <a:solidFill>
-                  <a:srgbClr val="DBE6FF"/>
-                </a:solidFill>
-                <a:latin typeface="Consolas"/>
-              </a:rPr>
-              <a:t>Interpreter().interpret(</a:t>
-            </a:r>
-          </a:p>
-          <a:p>
-            <a:pPr>
-              <a:lnSpc>
-                <a:spcPct val="128000"/>
-              </a:lnSpc>
-              <a:spcBef>
-                <a:spcPts val="100"/>
-              </a:spcBef>
-            </a:pPr>
-            <a:r>
-              <a:rPr sz="1250">
-                <a:solidFill>
-                  <a:srgbClr val="DBE6FF"/>
-                </a:solidFill>
-                <a:latin typeface="Consolas"/>
-              </a:rPr>
-              <a:t>    '가져오기 "sum.txt" 별칭 sum;')</a:t>
-            </a:r>
-          </a:p>
-          <a:p>
-            <a:pPr>
-              <a:lnSpc>
-                <a:spcPct val="128000"/>
-              </a:lnSpc>
-              <a:spcBef>
-                <a:spcPts val="100"/>
-              </a:spcBef>
-            </a:pPr>
-            <a:r>
-              <a:rPr sz="1250">
-                <a:solidFill>
-                  <a:srgbClr val="DBE6FF"/>
-                </a:solidFill>
-                <a:latin typeface="Consolas"/>
-              </a:rPr>
-              <a:t>→ Checker에 visit_import_stmt가 없어 런타임 에러</a:t>
-            </a:r>
-          </a:p>
-          <a:p>
-            <a:pPr>
-              <a:lnSpc>
-                <a:spcPct val="128000"/>
-              </a:lnSpc>
-              <a:spcBef>
-                <a:spcPts val="100"/>
-              </a:spcBef>
-            </a:pPr>
-            <a:endParaRPr sz="1250">
-              <a:solidFill>
-                <a:srgbClr val="DBE6FF"/>
-              </a:solidFill>
-              <a:latin typeface="Consolas"/>
-            </a:endParaRPr>
-          </a:p>
-          <a:p>
-            <a:pPr>
-              <a:lnSpc>
-                <a:spcPct val="128000"/>
-              </a:lnSpc>
-              <a:spcBef>
-                <a:spcPts val="100"/>
-              </a:spcBef>
-            </a:pPr>
-            <a:r>
-              <a:rPr sz="1250">
-                <a:solidFill>
-                  <a:srgbClr val="7FA8FF"/>
-                </a:solidFill>
-                <a:latin typeface="Consolas"/>
-              </a:rPr>
-              <a:t>작성자:</a:t>
-            </a:r>
-          </a:p>
-          <a:p>
-            <a:pPr>
-              <a:lnSpc>
-                <a:spcPct val="128000"/>
-              </a:lnSpc>
-              <a:spcBef>
-                <a:spcPts val="100"/>
-              </a:spcBef>
-            </a:pPr>
-            <a:r>
-              <a:rPr sz="1250">
-                <a:solidFill>
-                  <a:srgbClr val="DBE6FF"/>
-                </a:solidFill>
-                <a:latin typeface="Consolas"/>
-              </a:rPr>
-              <a:t>이번 PR은 파싱까지만, Checker/Executor는</a:t>
-            </a:r>
-          </a:p>
-          <a:p>
-            <a:pPr>
-              <a:lnSpc>
-                <a:spcPct val="128000"/>
-              </a:lnSpc>
-              <a:spcBef>
-                <a:spcPts val="100"/>
-              </a:spcBef>
-            </a:pPr>
-            <a:r>
-              <a:rPr sz="1250">
-                <a:solidFill>
-                  <a:srgbClr val="DBE6FF"/>
-                </a:solidFill>
-                <a:latin typeface="Consolas"/>
-              </a:rPr>
-              <a:t>다음 PR에서 순차 연결하겠습니다.</a:t>
-            </a:r>
-          </a:p>
-        </p:txBody>
-      </p:sp>
-      <p:graphicFrame>
-        <p:nvGraphicFramePr>
-          <p:cNvPr id="13" name="Table 12"/>
-          <p:cNvGraphicFramePr>
-            <a:graphicFrameLocks noGrp="1"/>
-          </p:cNvGraphicFramePr>
-          <p:nvPr/>
-        </p:nvGraphicFramePr>
-        <p:xfrm>
-          <a:off x="6263640" y="2240280"/>
-          <a:ext cx="5440679" cy="3611880"/>
-        </p:xfrm>
-        <a:graphic>
-          <a:graphicData uri="http://schemas.openxmlformats.org/drawingml/2006/table">
-            <a:tbl>
-              <a:tblPr>
-                <a:tableStyleId>{5C22544A-7EE6-4342-B048-85BDC9FD1C3A}</a:tableStyleId>
-              </a:tblPr>
-              <a:tblGrid>
-                <a:gridCol w="1523390">
-                  <a:extLst>
-                    <a:ext uri="{9D8B030D-6E8A-4147-A177-3AD203B41FA5}">
-                      <a16:colId xmlns:a16="http://schemas.microsoft.com/office/drawing/2014/main" val="20000"/>
-                    </a:ext>
-                  </a:extLst>
-                </a:gridCol>
-                <a:gridCol w="3917289">
-                  <a:extLst>
-                    <a:ext uri="{9D8B030D-6E8A-4147-A177-3AD203B41FA5}">
-                      <a16:colId xmlns:a16="http://schemas.microsoft.com/office/drawing/2014/main" val="20001"/>
-                    </a:ext>
-                  </a:extLst>
-                </a:gridCol>
-              </a:tblGrid>
-              <a:tr h="902970">
-                <a:tc>
-                  <a:txBody>
-                    <a:bodyPr/>
-                    <a:lstStyle/>
-                    <a:p>
-                      <a:r>
-                        <a:rPr sz="1100" b="1">
-                          <a:solidFill>
-                            <a:srgbClr val="5B6B8C"/>
-                          </a:solidFill>
-                          <a:latin typeface="맑은 고딕"/>
-                        </a:rPr>
-                        <a:t>확인 관점</a:t>
-                      </a:r>
-                    </a:p>
-                  </a:txBody>
-                  <a:tcPr marL="109728" marR="109728" marT="54864" marB="54864" anchor="b">
-                    <a:solidFill>
-                      <a:srgbClr val="FFFFFF"/>
-                    </a:solidFill>
-                  </a:tcPr>
-                </a:tc>
-                <a:tc>
-                  <a:txBody>
-                    <a:bodyPr/>
-                    <a:lstStyle/>
-                    <a:p>
-                      <a:r>
-                        <a:rPr sz="1100" b="1">
-                          <a:solidFill>
-                            <a:srgbClr val="5B6B8C"/>
-                          </a:solidFill>
-                          <a:latin typeface="맑은 고딕"/>
-                        </a:rPr>
-                        <a:t>의미</a:t>
-                      </a:r>
-                    </a:p>
-                  </a:txBody>
-                  <a:tcPr marL="109728" marR="109728" marT="54864" marB="54864" anchor="b">
-                    <a:solidFill>
-                      <a:srgbClr val="FFFFFF"/>
-                    </a:solidFill>
-                  </a:tcPr>
-                </a:tc>
-                <a:extLst>
-                  <a:ext uri="{0D108BD9-81ED-4DB2-BD59-A6C34878D82A}">
-                    <a16:rowId xmlns:a16="http://schemas.microsoft.com/office/drawing/2014/main" val="10000"/>
-                  </a:ext>
-                </a:extLst>
-              </a:tr>
-              <a:tr h="902970">
-                <a:tc>
-                  <a:txBody>
-                    <a:bodyPr/>
-                    <a:lstStyle/>
-                    <a:p>
-                      <a:r>
-                        <a:rPr sz="1300" b="1">
-                          <a:solidFill>
-                            <a:srgbClr val="142A63"/>
-                          </a:solidFill>
-                          <a:latin typeface="맑은 고딕"/>
-                        </a:rPr>
-                        <a:t>실행 기반 검증</a:t>
-                      </a:r>
-                    </a:p>
-                  </a:txBody>
-                  <a:tcPr marL="109728" marR="109728" marT="91440" marB="91440">
-                    <a:solidFill>
-                      <a:srgbClr val="FFFFFF"/>
-                    </a:solidFill>
-                  </a:tcPr>
-                </a:tc>
-                <a:tc>
-                  <a:txBody>
-                    <a:bodyPr/>
-                    <a:lstStyle/>
-                    <a:p>
-                      <a:pPr>
-                        <a:lnSpc>
-                          <a:spcPct val="115000"/>
-                        </a:lnSpc>
-                      </a:pPr>
-                      <a:r>
-                        <a:rPr sz="1300">
-                          <a:solidFill>
-                            <a:srgbClr val="16213A"/>
-                          </a:solidFill>
-                          <a:latin typeface="맑은 고딕"/>
-                        </a:rPr>
-                        <a:t>테스트가 파서 결과만 검증하면, 파이프라인 전체가 동작한다는 보장이 안 된다.</a:t>
-                      </a:r>
-                    </a:p>
-                  </a:txBody>
-                  <a:tcPr marL="109728" marR="109728" marT="91440" marB="91440">
-                    <a:solidFill>
-                      <a:srgbClr val="FFFFFF"/>
-                    </a:solidFill>
-                  </a:tcPr>
-                </a:tc>
-                <a:extLst>
-                  <a:ext uri="{0D108BD9-81ED-4DB2-BD59-A6C34878D82A}">
-                    <a16:rowId xmlns:a16="http://schemas.microsoft.com/office/drawing/2014/main" val="10001"/>
-                  </a:ext>
-                </a:extLst>
-              </a:tr>
-              <a:tr h="902970">
-                <a:tc>
-                  <a:txBody>
-                    <a:bodyPr/>
-                    <a:lstStyle/>
-                    <a:p>
-                      <a:r>
-                        <a:rPr sz="1300" b="1">
-                          <a:solidFill>
-                            <a:srgbClr val="142A63"/>
-                          </a:solidFill>
-                          <a:latin typeface="맑은 고딕"/>
-                        </a:rPr>
-                        <a:t>스코프 명확화</a:t>
-                      </a:r>
-                    </a:p>
-                  </a:txBody>
-                  <a:tcPr marL="109728" marR="109728" marT="91440" marB="91440">
-                    <a:solidFill>
-                      <a:srgbClr val="FFFFFF"/>
-                    </a:solidFill>
-                  </a:tcPr>
-                </a:tc>
-                <a:tc>
-                  <a:txBody>
-                    <a:bodyPr/>
-                    <a:lstStyle/>
-                    <a:p>
-                      <a:pPr>
-                        <a:lnSpc>
-                          <a:spcPct val="115000"/>
-                        </a:lnSpc>
-                      </a:pPr>
-                      <a:r>
-                        <a:rPr sz="1300">
-                          <a:solidFill>
-                            <a:srgbClr val="16213A"/>
-                          </a:solidFill>
-                          <a:latin typeface="맑은 고딕"/>
-                        </a:rPr>
-                        <a:t>리뷰에서 발견된 갭엔 “이번 PR 범위 아님”을 명확히 답하고 다음 PR로 넘긴다.</a:t>
-                      </a:r>
-                    </a:p>
-                  </a:txBody>
-                  <a:tcPr marL="109728" marR="109728" marT="91440" marB="91440">
-                    <a:solidFill>
-                      <a:srgbClr val="FFFFFF"/>
-                    </a:solidFill>
-                  </a:tcPr>
-                </a:tc>
-                <a:extLst>
-                  <a:ext uri="{0D108BD9-81ED-4DB2-BD59-A6C34878D82A}">
-                    <a16:rowId xmlns:a16="http://schemas.microsoft.com/office/drawing/2014/main" val="10002"/>
-                  </a:ext>
-                </a:extLst>
-              </a:tr>
-              <a:tr h="902970">
-                <a:tc>
-                  <a:txBody>
-                    <a:bodyPr/>
-                    <a:lstStyle/>
-                    <a:p>
-                      <a:r>
-                        <a:rPr sz="1300" b="1">
-                          <a:solidFill>
-                            <a:srgbClr val="142A63"/>
-                          </a:solidFill>
-                          <a:latin typeface="맑은 고딕"/>
-                        </a:rPr>
-                        <a:t>반복되는 패턴</a:t>
-                      </a:r>
-                    </a:p>
-                  </a:txBody>
-                  <a:tcPr marL="109728" marR="109728" marT="91440" marB="91440">
-                    <a:solidFill>
-                      <a:srgbClr val="FFFFFF"/>
-                    </a:solidFill>
-                  </a:tcPr>
-                </a:tc>
-                <a:tc>
-                  <a:txBody>
-                    <a:bodyPr/>
-                    <a:lstStyle/>
-                    <a:p>
-                      <a:pPr>
-                        <a:lnSpc>
-                          <a:spcPct val="115000"/>
-                        </a:lnSpc>
-                      </a:pPr>
-                      <a:r>
-                        <a:rPr sz="1300">
-                          <a:solidFill>
-                            <a:srgbClr val="16213A"/>
-                          </a:solidFill>
-                          <a:latin typeface="맑은 고딕"/>
-                        </a:rPr>
-                        <a:t>CLAUDE.md의 “함수는 기본 파이프라인에 배선되지 않았다” 경고와 동일한 패턴.</a:t>
                       </a:r>
                     </a:p>
                   </a:txBody>
@@ -13450,7 +15161,7 @@
                 </a:solidFill>
                 <a:latin typeface="Consolas"/>
               </a:rPr>
-              <a:t>BP3</a:t>
+              <a:t>BP2</a:t>
             </a:r>
           </a:p>
         </p:txBody>
@@ -13489,7 +15200,7 @@
                 </a:solidFill>
                 <a:latin typeface="맑은 고딕"/>
               </a:rPr>
-              <a:t>무엇이 왜 틀렸는지, 재현 예시로 짚는다</a:t>
+              <a:t>리뷰는 “읽기”가 아니라 “실행”으로 끝낸다</a:t>
             </a:r>
           </a:p>
         </p:txBody>
@@ -13502,8 +15213,8 @@
         </p:nvSpPr>
         <p:spPr>
           <a:xfrm>
-            <a:off x="8595360" y="433947"/>
-            <a:ext cx="3108960" cy="192810"/>
+            <a:off x="8595360" y="256032"/>
+            <a:ext cx="3108960" cy="548640"/>
           </a:xfrm>
           <a:prstGeom prst="rect">
             <a:avLst/>
@@ -13522,65 +15233,14 @@
               </a:lnSpc>
             </a:pPr>
             <a:r>
-              <a:rPr sz="1200" b="1" dirty="0">
+              <a:rPr sz="1200" b="1">
                 <a:solidFill>
                   <a:srgbClr val="D8E1F7"/>
                 </a:solidFill>
                 <a:latin typeface="맑은 고딕"/>
               </a:rPr>
-              <a:t>BP 3/</a:t>
-            </a:r>
-            <a:r>
-              <a:rPr lang="en-US" sz="1200" b="1" dirty="0">
-                <a:solidFill>
-                  <a:srgbClr val="D8E1F7"/>
-                </a:solidFill>
-                <a:latin typeface="맑은 고딕"/>
-              </a:rPr>
-              <a:t>6</a:t>
-            </a:r>
-            <a:r>
-              <a:rPr sz="1200" b="1" dirty="0">
-                <a:solidFill>
-                  <a:srgbClr val="D8E1F7"/>
-                </a:solidFill>
-                <a:latin typeface="맑은 고딕"/>
-              </a:rPr>
-              <a:t> · </a:t>
-            </a:r>
-            <a:r>
-              <a:rPr sz="1200" b="1" dirty="0" err="1">
-                <a:solidFill>
-                  <a:srgbClr val="D8E1F7"/>
-                </a:solidFill>
-                <a:latin typeface="맑은 고딕"/>
-              </a:rPr>
-              <a:t>리뷰</a:t>
-            </a:r>
-            <a:r>
-              <a:rPr sz="1200" b="1" dirty="0">
-                <a:solidFill>
-                  <a:srgbClr val="D8E1F7"/>
-                </a:solidFill>
-                <a:latin typeface="맑은 고딕"/>
-              </a:rPr>
-              <a:t> </a:t>
-            </a:r>
-            <a:r>
-              <a:rPr sz="1200" b="1" dirty="0" err="1">
-                <a:solidFill>
-                  <a:srgbClr val="D8E1F7"/>
-                </a:solidFill>
-                <a:latin typeface="맑은 고딕"/>
-              </a:rPr>
-              <a:t>코멘트</a:t>
-            </a:r>
-            <a:endParaRPr sz="1200" b="1" dirty="0">
-              <a:solidFill>
-                <a:srgbClr val="D8E1F7"/>
-              </a:solidFill>
-              <a:latin typeface="맑은 고딕"/>
-            </a:endParaRPr>
+              <a:t>BP 2/6 · 리뷰 문화</a:t>
+            </a:r>
           </a:p>
         </p:txBody>
       </p:sp>
@@ -13692,7 +15352,7 @@
                 </a:solidFill>
                 <a:latin typeface="Consolas"/>
               </a:rPr>
-              <a:t>8 / 11</a:t>
+              <a:t>8 / 14</a:t>
             </a:r>
           </a:p>
         </p:txBody>
@@ -13776,7 +15436,7 @@
                 </a:solidFill>
                 <a:latin typeface="맑은 고딕"/>
               </a:rPr>
-              <a:t>PR #69: “무엇이 왜 틀렸는지 + 재현 예시”가 있는 코멘트는 왕복 없이 한 번에 수정으로 이어진다.</a:t>
+              <a:t>PR #65: 파서 결과만 보지 않고 실제로 인터프리터를 돌려봐야 파이프라인 전체가 동작하는지 알 수 있다.</a:t>
             </a:r>
           </a:p>
         </p:txBody>
@@ -13835,7 +15495,7 @@
                 </a:solidFill>
                 <a:latin typeface="맑은 고딕"/>
               </a:rPr>
-              <a:t>PR #69 · 배열 인덱스 표현식 버그</a:t>
+              <a:t>PR #65 · 가져오기(import) 통합 누락(wiring gap) 발견</a:t>
             </a:r>
           </a:p>
           <a:p>
@@ -13854,7 +15514,7 @@
                 </a:solidFill>
                 <a:latin typeface="Consolas"/>
               </a:rPr>
-              <a:t>리뷰어(hasuplee):</a:t>
+              <a:t>리뷰어(kimbyungnam):</a:t>
             </a:r>
           </a:p>
           <a:p>
@@ -13873,7 +15533,7 @@
                 </a:solidFill>
                 <a:latin typeface="Consolas"/>
               </a:rPr>
-              <a:t>line_of_expr가 arr[0] = 10; 같은 배열</a:t>
+              <a:t>Interpreter().interpret(</a:t>
             </a:r>
           </a:p>
           <a:p>
@@ -13892,7 +15552,7 @@
                 </a:solidFill>
                 <a:latin typeface="Consolas"/>
               </a:rPr>
-              <a:t>인덱스 라인에서 실패합니다.</a:t>
+              <a:t>    '가져오기 "sum.txt" 별칭 sum;')</a:t>
             </a:r>
           </a:p>
           <a:p>
@@ -13911,7 +15571,7 @@
                 </a:solidFill>
                 <a:latin typeface="Consolas"/>
               </a:rPr>
-              <a:t>→ 재현 코드 스니펫 포함</a:t>
+              <a:t>→ Checker에 visit_import_stmt가 없어 런타임 에러</a:t>
             </a:r>
           </a:p>
           <a:p>
@@ -13965,7 +15625,26 @@
                 </a:solidFill>
                 <a:latin typeface="Consolas"/>
               </a:rPr>
-              <a:t>즉시 반영 → 왕복 없이 APPROVED</a:t>
+              <a:t>이번 PR은 파싱까지만, Checker/Executor는</a:t>
+            </a:r>
+          </a:p>
+          <a:p>
+            <a:pPr>
+              <a:lnSpc>
+                <a:spcPct val="128000"/>
+              </a:lnSpc>
+              <a:spcBef>
+                <a:spcPts val="100"/>
+              </a:spcBef>
+            </a:pPr>
+            <a:r>
+              <a:rPr sz="1250">
+                <a:solidFill>
+                  <a:srgbClr val="DBE6FF"/>
+                </a:solidFill>
+                <a:latin typeface="Consolas"/>
+              </a:rPr>
+              <a:t>다음 PR에서 순차 연결하겠습니다.</a:t>
             </a:r>
           </a:p>
         </p:txBody>
@@ -14017,7 +15696,7 @@
                           </a:solidFill>
                           <a:latin typeface="맑은 고딕"/>
                         </a:rPr>
-                        <a:t>요소</a:t>
+                        <a:t>확인 관점</a:t>
                       </a:r>
                     </a:p>
                   </a:txBody>
@@ -14039,7 +15718,7 @@
                           </a:solidFill>
                           <a:latin typeface="맑은 고딕"/>
                         </a:rPr>
-                        <a:t>왜 효과적인가</a:t>
+                        <a:t>의미</a:t>
                       </a:r>
                     </a:p>
                   </a:txBody>
@@ -14068,7 +15747,7 @@
                           </a:solidFill>
                           <a:latin typeface="맑은 고딕"/>
                         </a:rPr>
-                        <a:t>무엇이 틀렸는지</a:t>
+                        <a:t>실행 기반 검증</a:t>
                       </a:r>
                     </a:p>
                   </a:txBody>
@@ -14095,7 +15774,7 @@
                           </a:solidFill>
                           <a:latin typeface="맑은 고딕"/>
                         </a:rPr>
-                        <a:t>추상적 지적(“버그가 있어요”)이 아니라 정확한 실패 지점을 짚는다.</a:t>
+                        <a:t>테스트가 파서 결과만 검증하면, 파이프라인 전체가 동작한다는 보장이 안 된다.</a:t>
                       </a:r>
                     </a:p>
                   </a:txBody>
@@ -14124,7 +15803,7 @@
                           </a:solidFill>
                           <a:latin typeface="맑은 고딕"/>
                         </a:rPr>
-                        <a:t>재현 예시 포함</a:t>
+                        <a:t>스코프 명확화</a:t>
                       </a:r>
                     </a:p>
                   </a:txBody>
@@ -14151,7 +15830,7 @@
                           </a:solidFill>
                           <a:latin typeface="맑은 고딕"/>
                         </a:rPr>
-                        <a:t>작성자가 직접 재현할 필요 없이 바로 원인을 확인할 수 있다.</a:t>
+                        <a:t>리뷰에서 발견된 갭엔 “이번 PR 범위 아님”을 명확히 답하고 다음 PR로 넘긴다.</a:t>
                       </a:r>
                     </a:p>
                   </a:txBody>
@@ -14180,7 +15859,7 @@
                           </a:solidFill>
                           <a:latin typeface="맑은 고딕"/>
                         </a:rPr>
-                        <a:t>왕복 최소화</a:t>
+                        <a:t>반복되는 패턴</a:t>
                       </a:r>
                     </a:p>
                   </a:txBody>
@@ -14207,7 +15886,7 @@
                           </a:solidFill>
                           <a:latin typeface="맑은 고딕"/>
                         </a:rPr>
-                        <a:t>한 번의 코멘트 → 한 번의 수정 → 승인으로 리뷰 사이클이 끝난다.</a:t>
+                        <a:t>CLAUDE.md의 “함수는 기본 파이프라인에 배선되지 않았다” 경고와 동일한 패턴.</a:t>
                       </a:r>
                     </a:p>
                   </a:txBody>
@@ -14392,7 +16071,7 @@
                 </a:solidFill>
                 <a:latin typeface="Consolas"/>
               </a:rPr>
-              <a:t>BP4</a:t>
+              <a:t>BP3</a:t>
             </a:r>
           </a:p>
         </p:txBody>
@@ -14431,7 +16110,7 @@
                 </a:solidFill>
                 <a:latin typeface="맑은 고딕"/>
               </a:rPr>
-              <a:t>설계 결정에는 “왜”를 코멘트로 남긴다</a:t>
+              <a:t>무엇이 왜 틀렸는지, 재현 예시로 짚는다</a:t>
             </a:r>
           </a:p>
         </p:txBody>
@@ -14444,8 +16123,8 @@
         </p:nvSpPr>
         <p:spPr>
           <a:xfrm>
-            <a:off x="8595360" y="433947"/>
-            <a:ext cx="3108960" cy="192810"/>
+            <a:off x="8595360" y="256032"/>
+            <a:ext cx="3108960" cy="548640"/>
           </a:xfrm>
           <a:prstGeom prst="rect">
             <a:avLst/>
@@ -14464,65 +16143,14 @@
               </a:lnSpc>
             </a:pPr>
             <a:r>
-              <a:rPr sz="1200" b="1" dirty="0">
+              <a:rPr sz="1200" b="1">
                 <a:solidFill>
                   <a:srgbClr val="D8E1F7"/>
                 </a:solidFill>
                 <a:latin typeface="맑은 고딕"/>
               </a:rPr>
-              <a:t>BP 4/</a:t>
-            </a:r>
-            <a:r>
-              <a:rPr lang="en-US" sz="1200" b="1" dirty="0">
-                <a:solidFill>
-                  <a:srgbClr val="D8E1F7"/>
-                </a:solidFill>
-                <a:latin typeface="맑은 고딕"/>
-              </a:rPr>
-              <a:t>6</a:t>
-            </a:r>
-            <a:r>
-              <a:rPr sz="1200" b="1" dirty="0">
-                <a:solidFill>
-                  <a:srgbClr val="D8E1F7"/>
-                </a:solidFill>
-                <a:latin typeface="맑은 고딕"/>
-              </a:rPr>
-              <a:t> · </a:t>
-            </a:r>
-            <a:r>
-              <a:rPr sz="1200" b="1" dirty="0" err="1">
-                <a:solidFill>
-                  <a:srgbClr val="D8E1F7"/>
-                </a:solidFill>
-                <a:latin typeface="맑은 고딕"/>
-              </a:rPr>
-              <a:t>설계</a:t>
-            </a:r>
-            <a:r>
-              <a:rPr sz="1200" b="1" dirty="0">
-                <a:solidFill>
-                  <a:srgbClr val="D8E1F7"/>
-                </a:solidFill>
-                <a:latin typeface="맑은 고딕"/>
-              </a:rPr>
-              <a:t> </a:t>
-            </a:r>
-            <a:r>
-              <a:rPr sz="1200" b="1" dirty="0" err="1">
-                <a:solidFill>
-                  <a:srgbClr val="D8E1F7"/>
-                </a:solidFill>
-                <a:latin typeface="맑은 고딕"/>
-              </a:rPr>
-              <a:t>문서화</a:t>
-            </a:r>
-            <a:endParaRPr sz="1200" b="1" dirty="0">
-              <a:solidFill>
-                <a:srgbClr val="D8E1F7"/>
-              </a:solidFill>
-              <a:latin typeface="맑은 고딕"/>
-            </a:endParaRPr>
+              <a:t>BP 3/6 · 리뷰 코멘트</a:t>
+            </a:r>
           </a:p>
         </p:txBody>
       </p:sp>
@@ -14634,7 +16262,7 @@
                 </a:solidFill>
                 <a:latin typeface="Consolas"/>
               </a:rPr>
-              <a:t>9 / 11</a:t>
+              <a:t>9 / 14</a:t>
             </a:r>
           </a:p>
         </p:txBody>
@@ -14718,7 +16346,7 @@
                 </a:solidFill>
                 <a:latin typeface="맑은 고딕"/>
               </a:rPr>
-              <a:t>PR #64: 대안을 검토했지만 채택하지 않은 이유까지 남기면, 같은 질문이 반복되지 않는다.</a:t>
+              <a:t>PR #69: “무엇이 왜 틀렸는지 + 재현 예시”가 있는 코멘트는 왕복 없이 한 번에 수정으로 이어진다.</a:t>
             </a:r>
           </a:p>
         </p:txBody>
@@ -14777,7 +16405,7 @@
                 </a:solidFill>
                 <a:latin typeface="맑은 고딕"/>
               </a:rPr>
-              <a:t>PR #64 · CLI 진입점 통합</a:t>
+              <a:t>PR #69 · 배열 인덱스 표현식 버그</a:t>
             </a:r>
           </a:p>
           <a:p>
@@ -14796,7 +16424,7 @@
                 </a:solidFill>
                 <a:latin typeface="Consolas"/>
               </a:rPr>
-              <a:t>리뷰어:</a:t>
+              <a:t>리뷰어(hasuplee):</a:t>
             </a:r>
           </a:p>
           <a:p>
@@ -14815,7 +16443,7 @@
                 </a:solidFill>
                 <a:latin typeface="Consolas"/>
               </a:rPr>
-              <a:t>codefab &lt;경로&gt;처럼 인자 유무로 파일 모드를</a:t>
+              <a:t>line_of_expr가 arr[0] = 10; 같은 배열</a:t>
             </a:r>
           </a:p>
           <a:p>
@@ -14834,7 +16462,26 @@
                 </a:solidFill>
                 <a:latin typeface="Consolas"/>
               </a:rPr>
-              <a:t>판단하면 어떨까요?</a:t>
+              <a:t>인덱스 라인에서 실패합니다.</a:t>
+            </a:r>
+          </a:p>
+          <a:p>
+            <a:pPr>
+              <a:lnSpc>
+                <a:spcPct val="128000"/>
+              </a:lnSpc>
+              <a:spcBef>
+                <a:spcPts val="100"/>
+              </a:spcBef>
+            </a:pPr>
+            <a:r>
+              <a:rPr sz="1250">
+                <a:solidFill>
+                  <a:srgbClr val="DBE6FF"/>
+                </a:solidFill>
+                <a:latin typeface="Consolas"/>
+              </a:rPr>
+              <a:t>→ 재현 코드 스니펫 포함</a:t>
             </a:r>
           </a:p>
           <a:p>
@@ -14888,45 +16535,7 @@
                 </a:solidFill>
                 <a:latin typeface="Consolas"/>
               </a:rPr>
-              <a:t>이후 debug &lt;경로&gt;가 추가되면 'debug'라는</a:t>
-            </a:r>
-          </a:p>
-          <a:p>
-            <a:pPr>
-              <a:lnSpc>
-                <a:spcPct val="128000"/>
-              </a:lnSpc>
-              <a:spcBef>
-                <a:spcPts val="100"/>
-              </a:spcBef>
-            </a:pPr>
-            <a:r>
-              <a:rPr sz="1250">
-                <a:solidFill>
-                  <a:srgbClr val="DBE6FF"/>
-                </a:solidFill>
-                <a:latin typeface="Consolas"/>
-              </a:rPr>
-              <a:t>단어가 파일 경로로 오인될 수 있어, 서브커맨드로</a:t>
-            </a:r>
-          </a:p>
-          <a:p>
-            <a:pPr>
-              <a:lnSpc>
-                <a:spcPct val="128000"/>
-              </a:lnSpc>
-              <a:spcBef>
-                <a:spcPts val="100"/>
-              </a:spcBef>
-            </a:pPr>
-            <a:r>
-              <a:rPr sz="1250">
-                <a:solidFill>
-                  <a:srgbClr val="DBE6FF"/>
-                </a:solidFill>
-                <a:latin typeface="Consolas"/>
-              </a:rPr>
-              <a:t>모드를 명시하는 구조를 유지했습니다.</a:t>
+              <a:t>즉시 반영 → 왕복 없이 APPROVED</a:t>
             </a:r>
           </a:p>
         </p:txBody>
@@ -14978,7 +16587,7 @@
                           </a:solidFill>
                           <a:latin typeface="맑은 고딕"/>
                         </a:rPr>
-                        <a:t>효과</a:t>
+                        <a:t>요소</a:t>
                       </a:r>
                     </a:p>
                   </a:txBody>
@@ -15000,7 +16609,7 @@
                           </a:solidFill>
                           <a:latin typeface="맑은 고딕"/>
                         </a:rPr>
-                        <a:t>설명</a:t>
+                        <a:t>왜 효과적인가</a:t>
                       </a:r>
                     </a:p>
                   </a:txBody>
@@ -15029,7 +16638,7 @@
                           </a:solidFill>
                           <a:latin typeface="맑은 고딕"/>
                         </a:rPr>
-                        <a:t>미래 확장 근거</a:t>
+                        <a:t>무엇이 틀렸는지</a:t>
                       </a:r>
                     </a:p>
                   </a:txBody>
@@ -15056,7 +16665,7 @@
                           </a:solidFill>
                           <a:latin typeface="맑은 고딕"/>
                         </a:rPr>
-                        <a:t>실제로 이후 PR #69에서 debug 서브커맨드가 추가되며 이 결정이 맞았음이 증명됐다.</a:t>
+                        <a:t>추상적 지적(“버그가 있어요”)이 아니라 정확한 실패 지점을 짚는다.</a:t>
                       </a:r>
                     </a:p>
                   </a:txBody>
@@ -15085,7 +16694,7 @@
                           </a:solidFill>
                           <a:latin typeface="맑은 고딕"/>
                         </a:rPr>
-                        <a:t>반복 질문 방지</a:t>
+                        <a:t>재현 예시 포함</a:t>
                       </a:r>
                     </a:p>
                   </a:txBody>
@@ -15112,7 +16721,7 @@
                           </a:solidFill>
                           <a:latin typeface="맑은 고딕"/>
                         </a:rPr>
-                        <a:t>왜 이렇게 설계했는지 기록해두면 같은 질문이 나중에 또 나오지 않는다.</a:t>
+                        <a:t>작성자가 직접 재현할 필요 없이 바로 원인을 확인할 수 있다.</a:t>
                       </a:r>
                     </a:p>
                   </a:txBody>
@@ -15141,7 +16750,7 @@
                           </a:solidFill>
                           <a:latin typeface="맑은 고딕"/>
                         </a:rPr>
-                        <a:t>대안까지 기록</a:t>
+                        <a:t>왕복 최소화</a:t>
                       </a:r>
                     </a:p>
                   </a:txBody>
@@ -15168,7 +16777,7 @@
                           </a:solidFill>
                           <a:latin typeface="맑은 고딕"/>
                         </a:rPr>
-                        <a:t>채택한 안뿐 아니라 검토했던 대안(인자 기반 판단)도 남아 맥락이 보존된다.</a:t>
+                        <a:t>한 번의 코멘트 → 한 번의 수정 → 승인으로 리뷰 사이클이 끝난다.</a:t>
                       </a:r>
                     </a:p>
                   </a:txBody>
